--- a/presentations/hr-driven-identity-interview/HR_Driven_Identity_Exec_AnyAgency_Narrated.pptx
+++ b/presentations/hr-driven-identity-interview/HR_Driven_Identity_Exec_AnyAgency_Narrated.pptx
@@ -5,7 +5,7 @@
     <p:sldMasterId id="2147483648" r:id="rId1"/>
   </p:sldMasterIdLst>
   <p:notesMasterIdLst>
-    <p:notesMasterId r:id="rId9"/>
+    <p:notesMasterId r:id="rId11"/>
   </p:notesMasterIdLst>
   <p:sldIdLst>
     <p:sldId id="256" r:id="rId2"/>
@@ -15,6 +15,8 @@
     <p:sldId id="260" r:id="rId6"/>
     <p:sldId id="261" r:id="rId7"/>
     <p:sldId id="262" r:id="rId8"/>
+    <p:sldId id="263" r:id="rId9"/>
+    <p:sldId id="264" r:id="rId10"/>
   </p:sldIdLst>
   <p:sldSz cx="12192000" cy="6858000"/>
   <p:notesSz cx="6858000" cy="12192000"/>
@@ -113,7 +115,7 @@
   <p:extLst>
     <p:ext uri="{521415D9-36F7-43E2-AB2F-B90AF26B5E84}">
       <p14:sectionLst xmlns:p14="http://schemas.microsoft.com/office/powerpoint/2010/main">
-        <p14:section name="The decision" id="{021DD400-F583-A0B0-517F-9D7F254B2631}">
+        <p14:section name="The decision" id="{61DADBBE-95B2-A09F-2F4D-65EBD12449A6}">
           <p14:sldIdLst>
             <p14:sldId id="256"/>
             <p14:sldId id="257"/>
@@ -121,14 +123,16 @@
             <p14:sldId id="259"/>
           </p14:sldIdLst>
         </p14:section>
-        <p14:section name="Making it real" id="{A3B588EF-AB35-658C-10AB-27073F6E8E3C}">
+        <p14:section name="Making it real" id="{F92649BA-1E8D-F9C5-69DF-039C4AF00C85}">
           <p14:sldIdLst>
             <p14:sldId id="260"/>
             <p14:sldId id="261"/>
             <p14:sldId id="262"/>
+            <p14:sldId id="263"/>
+            <p14:sldId id="264"/>
           </p14:sldIdLst>
         </p14:section>
-        <p14:section name="Backup" id="{10DC73BE-8B36-9FAC-B5DB-2BB1B505AFE0}">
+        <p14:section name="Backup" id="{8D6E474E-3FF0-E0A2-3E44-9A92834CBC0A}">
           <p14:sldIdLst/>
         </p14:section>
       </p14:sectionLst>
@@ -165,7 +169,7 @@
     </p:spTree>
     <p:extLst>
       <p:ext uri="{BB962C8B-B14F-4D97-AF65-F5344CB8AC3E}">
-        <p14:creationId xmlns:p14="http://schemas.microsoft.com/office/powerpoint/2010/main" val="2592769355"/>
+        <p14:creationId xmlns:p14="http://schemas.microsoft.com/office/powerpoint/2010/main" val="3675574896"/>
       </p:ext>
     </p:extLst>
   </p:cSld>
@@ -311,7 +315,8 @@
           <a:p>
             <a:r>
               <a:rPr lang="en-US" dirty="0"/>
-              <a:t>[0:00–0:20]  Good morning, and thank you.
+              <a:t>[0:00–0:50]  Good morning, and thank you.
+Digital identity has two faces: the public who sign in to an agency's services, and the workforce who serve them. Both rest on the same data discipline: one person, one key the agency controls, and every fact owned by one authoritative source. I'll show that discipline through the workforce face, because Federal HR 2.0 puts it on every agency's calendar.
 I have one proposal, and I'll take it through four questions, the way I'd take it to leadership: why it matters, what we should do, who has to be involved, and how we'd carry it out and know it's working.
 Workbook: HR-Driven Identity, Chapter 00 — Overview and Applicability.</a:t>
             </a:r>
@@ -400,9 +405,9 @@
           <a:p>
             <a:r>
               <a:rPr lang="en-US" dirty="0"/>
-              <a:t>[0:20–2:30]  Why. In many agencies today, nothing connects HR to identity. Accounts, access and credentials are created and removed by ticket, and that costs us three ways.
-Access outlives the job: when someone leaves or changes roles, removal waits for a ticket, and a stale account is a security violation that can enable a breach of the public's records. Federal standards require revoking a separated person's credentials, and terminating a PIV card that can't be collected within eighteen hours. A ticket-driven process struggles to meet that. Records we can't trust: the phone book is wrong until someone files a ticket, and every change of manager means the organization, the manager and tool access are updated by hand. Approvals route through that same data. And cost and delay: every joiner, mover and leaver is help-desk work.
-But the bigger why is where the mission is heading. Take one idea agencies have discussed: a shared call center, one front door for two agencies' customers. The hard part of an idea like that isn't the phones — cloud contact centers make the front end easy. It's the back end. Who is this agent? Which agency's records may they see? And does their access end the day they leave, in both agencies? Today each agency answers those questions by hand, and differently. A standardized, HR-driven identity answers them by rule, the same way everywhere.
+              <a:t>[0:50–2:40]  Why. Based on current visibility, many agencies do not operate a comprehensive enterprise HR-driven identity lifecycle. In the processes I have observed, many workforce identity changes remain dependent on tickets or manual coordination, and that costs three ways.
+Access outlives the job: when someone leaves or changes roles, removal can wait for a ticket, and a stale account is a security violation that can enable a breach of the public's records. Federal standards require revoking a separated person's credentials, and a ticket-dependent process struggles to meet that. Records we can't trust: in the processes I have observed, the phone book is wrong until someone files a ticket, and every change of manager means the organization, the manager and tool access are updated by hand. Approvals route through that same data. And cost and delay: many joiners, movers and leavers become help-desk work.
+But the bigger why is where the mission is heading. Take an illustrative shared-service scenario: a cross-agency contact center, one front door for two agencies' customers. It's an example, not an approved program. The hard part of an idea like that isn't the phones: cloud contact centers make the front end easy. It's the back end. Who is this agent? Which agency's records may they see? And does their access end the day they leave, in both agencies? A standardized, HR-driven identity answers those questions by rule, the same way everywhere.
 And if we do nothing, HR moves to Core HCM, identity moves to Entra ID, and we rebuild the same manual process twice, on new platforms.
 Workbook: HR-Driven Identity, Chapter 01 — Why the agency needs HR-driven ICAM now.</a:t>
             </a:r>
@@ -491,12 +496,12 @@
           <a:p>
             <a:r>
               <a:rPr lang="en-US" dirty="0"/>
-              <a:t>[2:30–5:30]  What should we do? There are four realistic options, and I've weighed each against what leadership actually has to balance: the mission and the public we serve, security, cost and resilience. Compliance matters, but on its own it isn't a reason to invest.
-Option A is to keep ticket-driven identity. It needs no new investment, but the risk and the recurring manual work stay exactly where they are. That's the cost of doing nothing.
-Option B is to automate inside the directories, with scripts and exports. It's quick and cheap, but it automates a source that isn't authoritative, so it spreads bad data faster, and it has to be rebuilt when HR changes platforms.
-Option C is to wait for HR 2.0 and integrate afterward. That's defensible: it's less work this year. But the interconnection decisions are made during onboarding, about five months in. Waiting means retrofitting after go-live, and the Entra ID migration carries the tickets forward in the meantime.
-Option D is to start now: make HR the source of truth, expressed in OPM's standard personnel data, and design it into both the HR onboarding and the Entra ID migration. It costs design effort up front and needs shared governance, which is why it scores only partial on cost.
-The judgment call: if HR 2.0 slipped a long way, C becomes reasonable. But D's first step — data standards, ownership and the person key — is no-regret either way, and it can start today from the HR data the agency already has, with the source switched to Core HCM when it arrives.
+              <a:t>[2:40–4:30]  What should we do? I've weighed four realistic options against what leadership actually has to balance: the mission and the public we serve, security, cost and resilience. Compliance matters, but on its own it isn't a reason to invest.
+A, keep ticket-driven identity: no new investment, but the risk and the manual work stay where they are. That's the cost of doing nothing.
+B, automate inside the directories with scripts and exports: quick and cheap, but it automates a source that isn't authoritative, so it spreads bad data faster, and it's rebuilt when HR changes platforms.
+C, wait for HR 2.0 and integrate afterward: defensible, and less work this year. But program material describes interconnections occurring during the onboarding period, so waiting means retrofitting after go-live.
+D, start now: HR as the source of truth, in OPM's standard personnel data, designed into both the HR onboarding and the Entra ID migration. It costs design effort up front and needs shared governance, which is why it's only partial on cost.
+The judgment call: if HR 2.0 slipped a long way, C becomes reasonable. But D's first step — data standards, ownership and the person key — is no-regret either way, and it can start now from the HR data the agency already has, subject to data profiling, with the source switched to Core HCM when it arrives.
 Workbook: HR-Driven Identity, Chapter 00 — Why now; Why together; Chapter 02 — Why this is the opportunity, not the project.</a:t>
             </a:r>
           </a:p>
@@ -584,12 +589,12 @@
           <a:p>
             <a:r>
               <a:rPr lang="en-US" dirty="0"/>
-              <a:t>[5:30–8:00]  My recommendation is option D, phased, starting with the no-regret steps. Four reasons.
-Mission and the public: access to the public's records should end when a person's role ends, automatically, the same day; the people who serve the public should have the right access on day one; and shared services like the call center become possible, because every agency describes its people the same way.
+              <a:t>[4:30–6:40]  I propose option D, phased, starting with the no-regret steps. Four reasons.
+Mission and the public: access to the public's records should end when a person's role ends, automatically, the same day; the people who serve the public should have the right access on day one; and shared services like the illustrative contact center become possible, because every agency describes its people the same way.
 Cost: we build it once, while both platforms are being rebuilt anyway, and retire ticket work for routine joiners, movers and leavers.
-Security: modern access, Zero Trust, is decided by attributes: organization, position, status, supervisor. So the accuracy of HR data becomes the accuracy of access. The federal mandates point the same way, but they're the floor, not the reason. And it gives the inspector general's perennial question — how do you know every account belongs to a current person? — a standing answer.
-Resilience: by building on OPM's standard data rather than one vendor's fields, and on a person key the agency controls — often an existing enterprise ID, such as a Mainframe PIN — the design survives the next platform change.
-Two honest limits. HR 2.0 covers federal employees only, so contractors need their own source: Core HCM's contingent worker record, or PIV sponsorship. And we should build only what HR is authoritative for.
+Security: modern access decisions, Zero Trust, increasingly depend on authoritative identity, device and contextual attributes, and the identity attributes, organization, position, status and supervisor, come from HR. So the accuracy of HR data drives the accuracy of access. The federal mandates point the same way, but they're the floor, not the reason. And it gives the inspector general's perennial question — how do you know every account belongs to a current person? — a standing answer.
+Resilience: by building on OPM's standard data rather than one vendor's fields, and on a person key the agency controls, the design survives the next platform change. I propose an existing enterprise ID, such as a Mainframe PIN, as the candidate, subject to validating its uniqueness, persistence, non-reassignment, population coverage, privacy constraints and historical behavior.
+Two honest limits. HR 2.0 covers federal employees only, so a contractor authority decision is required: I propose evaluating suitability records, PIV sponsorship and Core HCM's contingent-worker records as candidate sources. And we should build only what HR is authoritative for.
 The upside: every agency is moving to the same HR platform on the same standards, so one identity standard can serve them all, and the services they share.
 Workbook: HR-Driven Identity, Chapter 01 — Why the agency needs HR-driven ICAM now; Chapter 03 — Attribute Authority; Chapter 05 — Contractors and vendors.</a:t>
             </a:r>
@@ -678,11 +683,11 @@
           <a:p>
             <a:r>
               <a:rPr lang="en-US" dirty="0"/>
-              <a:t>[8:00–10:00]  Who has to be involved. This is an organizational change as much as a technical one, so it matters who owns what.
+              <a:t>[6:40–8:20]  Who has to be involved. This is an organizational change as much as a technical one, so it matters who owns what.
 HR owns the personnel data and its quality, at the source. When the data is wrong, it gets fixed in HR, not patched in the directory. And the OPM HR 2.0 program owns the platform, the standards and the interconnection.
 The CIO's identity team uses that data to run Entra ID, Active Directory and access. Security sets the Zero Trust policy and owns the leaver path. And the help desk moves from routine tickets to handling the exceptions.
 Then the guards and partners. The privacy office is in from the start, because using HR data for identity is a disclosure that needs a routine use and minimization. Contractor sponsors and the PIV office are the source for people HR doesn't cover. And partner agencies need the same standard if we're going to share services.
-My role, as an enterprise data architect, is to own the standards, the crosswalk and the person key; to make sure every attribute has one accountable owner; and to carry the standard to the interagency committees and working groups where it gets adopted. The person model and its attributes also become a governed piece of the agency's data and metadata inventory, which auditors increasingly ask for.
+My role, as an enterprise data architect, is to own the data standards, the logical model and the person key: every attribute gets one name, one definition and one accountable owner. I'd chair the data working group for the effort, review the HR 2.0 integrator's design artifacts against those standards, and carry the standard to the interagency committees and working groups where it gets adopted. The person model and its attributes also become a governed piece of the agency's data and metadata inventory, which auditors increasingly ask for.
 Workbook: HR-Driven Identity, Chapter 03 — Attribute Authority; Appendix B — Security and Privacy Assessment.</a:t>
             </a:r>
           </a:p>
@@ -770,12 +775,10 @@
           <a:p>
             <a:r>
               <a:rPr lang="en-US" dirty="0"/>
-              <a:t>[10:00–13:00]  How we'd carry it out.
-Data — this is where data architecture earns its keep. One governed crosswalk maps OPM's standard data elements into a canonical person model, keyed on an enterprise ID the agency controls, so a person stays the same person across rehire, conversion and reorganization, and when HR changes platforms only the source key changes. Personnel actions then drive the identity events — joiner, mover, leaver — by code, not by ticket. Contractors come from their own source into the same model.
-Security. The leaver path blocks access first, within hours, and cleans up afterward. The integration runs with least privilege and no stored secrets. And anything that fails goes to a quarantine with an owner; nothing resolves itself silently.
-Operations. We start now, from the HR data the agency already has, and switch the source to Core HCM when it arrives. We run in shadow mode first, comparing what HR says with what the directories hold, and fixing the gaps. We cut over one population at a time. And we close the ticket path for a population only when the data proves HR is the sole source.
-The technology is the example, not the point. Here it's Oracle Core HCM feeding Microsoft's HR-driven provisioning into Entra ID and Active Directory, with access packages, lifecycle workflows and PIV downstream. If the vendors change, the design holds.
-Workbook: HR-Driven Identity, Chapter 04 — Logical architecture and Microsoft realization; Chapter 05 — The standard-attribute layer; Chapter 07 — The canonical leaver sequence; Chapter 10 — Execution Plan.</a:t>
+              <a:t>[8:20–10:00]  This is the data architecture underneath, and one principle carries it: the person is the durable entity. Accounts, affiliations, assignments, identifiers and credentials have different lifecycles but resolve to the same governed person.
+I propose keying that person on an enterprise person key the agency controls. In the proposed canonical model, conversion creates a new affiliation for the same person, so history survives. The right-hand side shows where each piece would live; the backup slides carry the detail.
+The standard behind it: one name, one definition and one owner per attribute, and the DBAs build from the logical model, not from a vendor's fields.
+Workbook: HR-Driven Identity, Chapter 03 — Attribute Authority; Chapter 05 — The Canonical Workforce Identity Model.</a:t>
             </a:r>
           </a:p>
         </p:txBody>
@@ -862,11 +865,12 @@
           <a:p>
             <a:r>
               <a:rPr lang="en-US" dirty="0"/>
-              <a:t>[13:00–15:00]  How we'll know it's working, and what I'd need.
-Five measures, each baselined in the first phase, and each one a business measure leadership can read: time from separation to blocked access, in hours, well inside the eighteen-hour federal standard for terminating a PIV card; accounts tied to a person, with orphaned accounts trending to zero; joiner and mover tickets going down, with access ready on day one; the manager and organization in the directory matching HR; and every exception with an owner and an age. As a byproduct, the same data is evidence for the controls auditors ask about.
-What I'd need from leadership is one decision: start HR-driven identity now, as a design requirement of the HR 2.0 onboarding and the Entra ID migration. And to act on it: a sponsor across HR, the CIO's identity team and privacy; identity named as a consumer in the HR 2.0 interconnection plan; data owners designated, and the enterprise person key confirmed; and a small team for the pre-onboarding data work.
-Thank you. I look forward to your questions.
-Workbook: HR-Driven Identity, Chapter 09 — Drift, Metrics and Evidence; Chapter 10 — Execution Plan.</a:t>
+              <a:t>[10:00–12:20]  Here is how I propose we carry it out.
+Data. One governed crosswalk maps OPM's standard data elements into that person model, so when HR changes platforms only the crosswalk's source side changes. Personnel actions then drive the identity events — joiner, mover, leaver — by code, using a proposed classification that the data owners validate first. Contractors come into the same model once the contractor authority decision is made.
+Security. The leaver path blocks access first, within hours, and cleans up afterward. The integration runs with least privilege and no stored secrets. And anything that fails goes to a quarantine with an owner; nothing resolves itself silently.
+Operations. We start now, from the HR data the agency already has, subject to data profiling, and switch the source to Core HCM when it arrives. We run in shadow mode first, comparing what HR says with what the directories hold, and fixing the gaps. We cut over one population at a time. And we close the ticket path for a population only when the data proves HR is the sole source.
+The technology is the example, not the point. Here it's Oracle Core HCM feeding Microsoft's HR-driven provisioning into Entra ID and Active Directory, with access packages, lifecycle workflows and PIV downstream. If the vendors change, the design holds.
+Workbook: HR-Driven Identity, Chapter 04 — Logical architecture and Microsoft realization; Chapter 05 — The standard-attribute layer; Chapter 07 — The canonical leaver sequence; Chapter 10 — Execution Plan.</a:t>
             </a:r>
           </a:p>
         </p:txBody>
@@ -889,6 +893,188 @@
             <a:fld id="{F7021451-1387-4CA6-816F-3879F97B5CBC}" type="slidenum">
               <a:rPr lang="en-US"/>
               <a:t>7</a:t>
+            </a:fld>
+            <a:endParaRPr lang="en-US"/>
+          </a:p>
+        </p:txBody>
+      </p:sp>
+    </p:spTree>
+    <p:extLst>
+      <p:ext uri="{BB962C8B-B14F-4D97-AF65-F5344CB8AC3E}">
+        <p14:creationId xmlns:p14="http://schemas.microsoft.com/office/powerpoint/2010/main" val="1024086991"/>
+      </p:ext>
+    </p:extLst>
+  </p:cSld>
+  <p:clrMapOvr>
+    <a:masterClrMapping/>
+  </p:clrMapOvr>
+</p:notes>
+</file>
+
+<file path=ppt/notesSlides/notesSlide8.xml><?xml version="1.0" encoding="utf-8"?>
+<p:notes xmlns:a="http://schemas.openxmlformats.org/drawingml/2006/main" xmlns:r="http://schemas.openxmlformats.org/officeDocument/2006/relationships" xmlns:p="http://schemas.openxmlformats.org/presentationml/2006/main">
+  <p:cSld>
+    <p:spTree>
+      <p:nvGrpSpPr>
+        <p:cNvPr id="1" name=""/>
+        <p:cNvGrpSpPr/>
+        <p:nvPr/>
+      </p:nvGrpSpPr>
+      <p:grpSpPr>
+        <a:xfrm>
+          <a:off x="0" y="0"/>
+          <a:ext cx="0" cy="0"/>
+          <a:chOff x="0" y="0"/>
+          <a:chExt cx="0" cy="0"/>
+        </a:xfrm>
+      </p:grpSpPr>
+      <p:sp>
+        <p:nvSpPr>
+          <p:cNvPr id="2" name="Slide Image Placeholder 1"/>
+          <p:cNvSpPr>
+            <a:spLocks noGrp="1" noRot="1" noChangeAspect="1"/>
+          </p:cNvSpPr>
+          <p:nvPr>
+            <p:ph type="sldImg"/>
+          </p:nvPr>
+        </p:nvSpPr>
+        <p:spPr/>
+      </p:sp>
+      <p:sp>
+        <p:nvSpPr>
+          <p:cNvPr id="3" name="Notes Placeholder 2"/>
+          <p:cNvSpPr>
+            <a:spLocks noGrp="1"/>
+          </p:cNvSpPr>
+          <p:nvPr>
+            <p:ph type="body" idx="1"/>
+          </p:nvPr>
+        </p:nvSpPr>
+        <p:spPr/>
+        <p:txBody>
+          <a:bodyPr/>
+          <a:lstStyle/>
+          <a:p>
+            <a:r>
+              <a:rPr lang="en-US" dirty="0"/>
+              <a:t>[12:20–14:40]  How we'll know it's working, and what I'd need.
+Six measures, each baselined in the first phase, and each one a business measure leadership can read: time from separation to blocked access, in hours, against an agency-approved threshold; credential and access revocation, reconciled to verified completion, where one credential-specific constraint is the federal requirement to terminate a PIV card that can't be collected within eighteen hours; accounts tied to a person, with orphaned accounts trending to zero; joiner and mover tickets going down, with access ready on day one; the manager and organization in the directory matching HR; and every exception with an owner and an age. As a byproduct, the same data is evidence for the controls auditors ask about.
+What I'd need from leadership is one decision: start HR-driven identity now, as a design requirement of the HR 2.0 onboarding and the Entra ID migration. And to act on it: a sponsor across HR, the CIO's identity team and privacy; identity named as a consumer in the HR 2.0 interconnection plan; data owners designated, and the enterprise person key confirmed; a small team for the pre-onboarding data work; and the planning assumptions validated, with authoritative owners designated, before implementation.
+Thank you. I look forward to your questions.
+Workbook: HR-Driven Identity, Chapter 09 — Drift, Metrics and Evidence; Chapter 10 — Execution Plan.</a:t>
+            </a:r>
+          </a:p>
+        </p:txBody>
+      </p:sp>
+      <p:sp>
+        <p:nvSpPr>
+          <p:cNvPr id="4" name="Slide Number Placeholder 3"/>
+          <p:cNvSpPr>
+            <a:spLocks noGrp="1"/>
+          </p:cNvSpPr>
+          <p:nvPr>
+            <p:ph type="sldNum" sz="quarter" idx="10"/>
+          </p:nvPr>
+        </p:nvSpPr>
+        <p:spPr/>
+        <p:txBody>
+          <a:bodyPr/>
+          <a:lstStyle/>
+          <a:p>
+            <a:fld id="{F7021451-1387-4CA6-816F-3879F97B5CBC}" type="slidenum">
+              <a:rPr lang="en-US"/>
+              <a:t>8</a:t>
+            </a:fld>
+            <a:endParaRPr lang="en-US"/>
+          </a:p>
+        </p:txBody>
+      </p:sp>
+    </p:spTree>
+    <p:extLst>
+      <p:ext uri="{BB962C8B-B14F-4D97-AF65-F5344CB8AC3E}">
+        <p14:creationId xmlns:p14="http://schemas.microsoft.com/office/powerpoint/2010/main" val="1024086991"/>
+      </p:ext>
+    </p:extLst>
+  </p:cSld>
+  <p:clrMapOvr>
+    <a:masterClrMapping/>
+  </p:clrMapOvr>
+</p:notes>
+</file>
+
+<file path=ppt/notesSlides/notesSlide9.xml><?xml version="1.0" encoding="utf-8"?>
+<p:notes xmlns:a="http://schemas.openxmlformats.org/drawingml/2006/main" xmlns:r="http://schemas.openxmlformats.org/officeDocument/2006/relationships" xmlns:p="http://schemas.openxmlformats.org/presentationml/2006/main">
+  <p:cSld>
+    <p:spTree>
+      <p:nvGrpSpPr>
+        <p:cNvPr id="1" name=""/>
+        <p:cNvGrpSpPr/>
+        <p:nvPr/>
+      </p:nvGrpSpPr>
+      <p:grpSpPr>
+        <a:xfrm>
+          <a:off x="0" y="0"/>
+          <a:ext cx="0" cy="0"/>
+          <a:chOff x="0" y="0"/>
+          <a:chExt cx="0" cy="0"/>
+        </a:xfrm>
+      </p:grpSpPr>
+      <p:sp>
+        <p:nvSpPr>
+          <p:cNvPr id="2" name="Slide Image Placeholder 1"/>
+          <p:cNvSpPr>
+            <a:spLocks noGrp="1" noRot="1" noChangeAspect="1"/>
+          </p:cNvSpPr>
+          <p:nvPr>
+            <p:ph type="sldImg"/>
+          </p:nvPr>
+        </p:nvSpPr>
+        <p:spPr/>
+      </p:sp>
+      <p:sp>
+        <p:nvSpPr>
+          <p:cNvPr id="3" name="Notes Placeholder 2"/>
+          <p:cNvSpPr>
+            <a:spLocks noGrp="1"/>
+          </p:cNvSpPr>
+          <p:nvPr>
+            <p:ph type="body" idx="1"/>
+          </p:nvPr>
+        </p:nvSpPr>
+        <p:spPr/>
+        <p:txBody>
+          <a:bodyPr/>
+          <a:lstStyle/>
+          <a:p>
+            <a:r>
+              <a:rPr lang="en-US" dirty="0"/>
+              <a:t>[Leave up during questions — about 20 seconds]
+HR-driven identity is one piece of a larger set of modernizations I've designed over the last several years: Entra ID migration, next-generation DNS and IP address management, field office WAN and data-center consolidation, the TIC 3.0 Cloud and Branch Office cases, the client-server to hybrid cloud path, SQL Server identity, the move from Group Policy to Intune and Azure Arc, and continuous compliance against SCuBA, BOD 25-01 and FedRAMP 20x.
+They share the same data discipline you just saw: a named authority for every fact, a governed model, and evidence produced by operation. I'm happy to go into any of them.
+Two companion decks go deeper on this one: the Contractor Identity Source deck, on who is authoritative for a contractor, and the original HR-Driven Identity deck, with the full model, lifecycle and plan.
+Workbook: HR-Driven Identity, the same site's Whitepapers, Next-Generation DDI, Client-Server to Hybrid Cloud and Operational Guides sections.</a:t>
+            </a:r>
+          </a:p>
+        </p:txBody>
+      </p:sp>
+      <p:sp>
+        <p:nvSpPr>
+          <p:cNvPr id="4" name="Slide Number Placeholder 3"/>
+          <p:cNvSpPr>
+            <a:spLocks noGrp="1"/>
+          </p:cNvSpPr>
+          <p:nvPr>
+            <p:ph type="sldNum" sz="quarter" idx="10"/>
+          </p:nvPr>
+        </p:nvSpPr>
+        <p:spPr/>
+        <p:txBody>
+          <a:bodyPr/>
+          <a:lstStyle/>
+          <a:p>
+            <a:fld id="{F7021451-1387-4CA6-816F-3879F97B5CBC}" type="slidenum">
+              <a:rPr lang="en-US"/>
+              <a:t>9</a:t>
             </a:fld>
             <a:endParaRPr lang="en-US"/>
           </a:p>
@@ -1794,7 +1980,7 @@
             <a:hlinkClick r:id="" action="ppaction://media"/>
             <a:extLst>
               <a:ext uri="{FF2B5EF4-FFF2-40B4-BE49-F238E27FC236}">
-                <a16:creationId xmlns:a16="http://schemas.microsoft.com/office/drawing/2014/main" id="{36F9F1DE-8ADD-979B-F982-DA12F91F6258}"/>
+                <a16:creationId xmlns:a16="http://schemas.microsoft.com/office/drawing/2014/main" id="{4C94E369-61A5-7E8D-146F-C6B146D637F7}"/>
               </a:ext>
             </a:extLst>
           </p:cNvPr>
@@ -1833,10 +2019,10 @@
   </p:clrMapOvr>
   <mc:AlternateContent xmlns:mc="http://schemas.openxmlformats.org/markup-compatibility/2006">
     <mc:Choice xmlns:p14="http://schemas.microsoft.com/office/powerpoint/2010/main" Requires="p14">
-      <p:transition spd="slow" p14:dur="2000" advTm="14320"/>
+      <p:transition spd="slow" p14:dur="2000" advTm="37820"/>
     </mc:Choice>
     <mc:Fallback>
-      <p:transition spd="slow" advTm="14320"/>
+      <p:transition spd="slow" advTm="37820"/>
     </mc:Fallback>
   </mc:AlternateContent>
   <p:timing>
@@ -1870,7 +2056,7 @@
                                   <p:childTnLst>
                                     <p:cmd type="call" cmd="playFrom(0.0)">
                                       <p:cBhvr>
-                                        <p:cTn id="6" dur="13320" fill="hold"/>
+                                        <p:cTn id="6" dur="36816" fill="hold"/>
                                         <p:tgtEl>
                                           <p:spTgt spid="6"/>
                                         </p:tgtEl>
@@ -2042,7 +2228,7 @@
         <p:spPr>
           <a:xfrm>
             <a:off x="548640" y="1280160"/>
-            <a:ext cx="5852160" cy="320040"/>
+            <a:ext cx="5943600" cy="320040"/>
           </a:xfrm>
           <a:prstGeom prst="rect">
             <a:avLst/>
@@ -2058,14 +2244,14 @@
               <a:buNone/>
             </a:pPr>
             <a:r>
-              <a:rPr lang="en-US" sz="1200" b="1" dirty="0">
+              <a:rPr lang="en-US" sz="1050" b="1" dirty="0">
                 <a:solidFill>
                   <a:srgbClr val="64748B"/>
                 </a:solidFill>
               </a:rPr>
-              <a:t>TODAY: NOTHING CONNECTS HR TO IDENTITY</a:t>
-            </a:r>
-            <a:endParaRPr lang="en-US" sz="1200" dirty="0"/>
+              <a:t>TODAY: THE ENTERPRISE LIFECYCLE REMAINS SUBSTANTIALLY MANUAL AND FRAGMENTED</a:t>
+            </a:r>
+            <a:endParaRPr lang="en-US" sz="1050" dirty="0"/>
           </a:p>
         </p:txBody>
       </p:sp>
@@ -2096,7 +2282,7 @@
       </p:sp>
       <p:pic>
         <p:nvPicPr>
-          <p:cNvPr id="7" name="Image 0" descr="C:\Users\whale\AppData\Local\Temp\claude\C--Users-whale-git-uiao-inbox\cbd5b766-acc0-4006-9202-a9bb6b23e97b\scratchpad\deck\icons\FaUserXmark.png"/>
+          <p:cNvPr id="7" name="Image 0" descr="C:\Users\whale\git\uiao\inbox\SSA-Interview\build\icons\FaUserXmark.png"/>
           <p:cNvPicPr>
             <a:picLocks noChangeAspect="1"/>
           </p:cNvPicPr>
@@ -2168,7 +2354,7 @@
                   <a:schemeClr val="tx2"/>
                 </a:solidFill>
               </a:rPr>
-              <a:t>Removal waits for a ticket, yet federal standards require revoking credentials at separation.</a:t>
+              <a:t>Many routine identity changes remain ticket-dependent, yet federal standards require revoking credentials at separation.</a:t>
             </a:r>
             <a:endParaRPr lang="en-US" sz="1400" dirty="0"/>
           </a:p>
@@ -2201,7 +2387,7 @@
       </p:sp>
       <p:pic>
         <p:nvPicPr>
-          <p:cNvPr id="10" name="Image 1" descr="C:\Users\whale\AppData\Local\Temp\claude\C--Users-whale-git-uiao-inbox\cbd5b766-acc0-4006-9202-a9bb6b23e97b\scratchpad\deck\icons\FaAddressBook.png"/>
+          <p:cNvPr id="10" name="Image 1" descr="C:\Users\whale\git\uiao\inbox\SSA-Interview\build\icons\FaAddressBook.png"/>
           <p:cNvPicPr>
             <a:picLocks noChangeAspect="1"/>
           </p:cNvPicPr>
@@ -2273,7 +2459,7 @@
                   <a:schemeClr val="tx2"/>
                 </a:solidFill>
               </a:rPr>
-              <a:t>Phone book, managers and approvals drift from HR.</a:t>
+              <a:t>In the processes observed, phone book, managers and approvals drift from HR.</a:t>
             </a:r>
             <a:endParaRPr lang="en-US" sz="1400" dirty="0"/>
           </a:p>
@@ -2306,7 +2492,7 @@
       </p:sp>
       <p:pic>
         <p:nvPicPr>
-          <p:cNvPr id="13" name="Image 2" descr="C:\Users\whale\AppData\Local\Temp\claude\C--Users-whale-git-uiao-inbox\cbd5b766-acc0-4006-9202-a9bb6b23e97b\scratchpad\deck\icons\FaUserClock.png"/>
+          <p:cNvPr id="13" name="Image 2" descr="C:\Users\whale\git\uiao\inbox\SSA-Interview\build\icons\FaUserClock.png"/>
           <p:cNvPicPr>
             <a:picLocks noChangeAspect="1"/>
           </p:cNvPicPr>
@@ -2378,7 +2564,7 @@
                   <a:schemeClr val="tx2"/>
                 </a:solidFill>
               </a:rPr>
-              <a:t>Every joiner, mover and leaver is help-desk work.</a:t>
+              <a:t>Many joiners, movers and leavers become help-desk work.</a:t>
             </a:r>
             <a:endParaRPr lang="en-US" sz="1400" dirty="0"/>
           </a:p>
@@ -2445,7 +2631,7 @@
       </p:sp>
       <p:pic>
         <p:nvPicPr>
-          <p:cNvPr id="17" name="Image 3" descr="C:\Users\whale\AppData\Local\Temp\claude\C--Users-whale-git-uiao-inbox\cbd5b766-acc0-4006-9202-a9bb6b23e97b\scratchpad\deck\icons\FaPeopleArrows.png"/>
+          <p:cNvPr id="17" name="Image 3" descr="C:\Users\whale\git\uiao\inbox\SSA-Interview\build\icons\FaPeopleArrows.png"/>
           <p:cNvPicPr>
             <a:picLocks noChangeAspect="1"/>
           </p:cNvPicPr>
@@ -2553,7 +2739,7 @@
                   <a:schemeClr val="tx2"/>
                 </a:solidFill>
               </a:rPr>
-              <a:t>Example: one call center serving two agencies’ customers. </a:t>
+              <a:t>Illustrative shared-service scenario: a cross-agency contact center. </a:t>
             </a:r>
             <a:endParaRPr lang="en-US" sz="1450" dirty="0"/>
           </a:p>
@@ -2727,7 +2913,7 @@
       </p:sp>
       <p:pic>
         <p:nvPicPr>
-          <p:cNvPr id="23" name="Image 4" descr="C:\Users\whale\AppData\Local\Temp\claude\C--Users-whale-git-uiao-inbox\cbd5b766-acc0-4006-9202-a9bb6b23e97b\scratchpad\deck\icons\FaTriangleExclamation.png"/>
+          <p:cNvPr id="23" name="Image 4" descr="C:\Users\whale\git\uiao\inbox\SSA-Interview\build\icons\FaTriangleExclamation.png"/>
           <p:cNvPicPr>
             <a:picLocks noChangeAspect="1"/>
           </p:cNvPicPr>
@@ -2844,7 +3030,7 @@
             <a:hlinkClick r:id="" action="ppaction://media"/>
             <a:extLst>
               <a:ext uri="{FF2B5EF4-FFF2-40B4-BE49-F238E27FC236}">
-                <a16:creationId xmlns:a16="http://schemas.microsoft.com/office/drawing/2014/main" id="{B750FE12-895C-A407-3417-B27EDD63BFC8}"/>
+                <a16:creationId xmlns:a16="http://schemas.microsoft.com/office/drawing/2014/main" id="{6C94A997-2A15-E779-B8E3-3D0F9C96036B}"/>
               </a:ext>
             </a:extLst>
           </p:cNvPr>
@@ -2883,10 +3069,10 @@
   </p:clrMapOvr>
   <mc:AlternateContent xmlns:mc="http://schemas.openxmlformats.org/markup-compatibility/2006">
     <mc:Choice xmlns:p14="http://schemas.microsoft.com/office/powerpoint/2010/main" Requires="p14">
-      <p:transition spd="slow" p14:dur="2000" advTm="95870"/>
+      <p:transition spd="slow" p14:dur="2000" advTm="100650"/>
     </mc:Choice>
     <mc:Fallback>
-      <p:transition spd="slow" advTm="95870"/>
+      <p:transition spd="slow" advTm="100650"/>
     </mc:Fallback>
   </mc:AlternateContent>
   <p:timing>
@@ -2920,7 +3106,7 @@
                                   <p:childTnLst>
                                     <p:cmd type="call" cmd="playFrom(0.0)">
                                       <p:cBhvr>
-                                        <p:cTn id="6" dur="94872" fill="hold"/>
+                                        <p:cTn id="6" dur="99648" fill="hold"/>
                                         <p:tgtEl>
                                           <p:spTgt spid="26"/>
                                         </p:tgtEl>
@@ -5373,7 +5559,7 @@
       </p:sp>
       <p:pic>
         <p:nvPicPr>
-          <p:cNvPr id="8" name="Image 0" descr="C:\Users\whale\AppData\Local\Temp\claude\C--Users-whale-git-uiao-inbox\cbd5b766-acc0-4006-9202-a9bb6b23e97b\scratchpad\deck\icons\FaScaleBalanced.png"/>
+          <p:cNvPr id="8" name="Image 0" descr="C:\Users\whale\git\uiao\inbox\SSA-Interview\build\icons\FaScaleBalanced.png"/>
           <p:cNvPicPr>
             <a:picLocks noChangeAspect="1"/>
           </p:cNvPicPr>
@@ -5490,7 +5676,7 @@
             <a:hlinkClick r:id="" action="ppaction://media"/>
             <a:extLst>
               <a:ext uri="{FF2B5EF4-FFF2-40B4-BE49-F238E27FC236}">
-                <a16:creationId xmlns:a16="http://schemas.microsoft.com/office/drawing/2014/main" id="{DD7D3264-7272-E814-12F8-B25BA48C028D}"/>
+                <a16:creationId xmlns:a16="http://schemas.microsoft.com/office/drawing/2014/main" id="{CADC356F-180C-4FCD-B1DD-AFF38AC77706}"/>
               </a:ext>
             </a:extLst>
           </p:cNvPr>
@@ -5529,10 +5715,10 @@
   </p:clrMapOvr>
   <mc:AlternateContent xmlns:mc="http://schemas.openxmlformats.org/markup-compatibility/2006">
     <mc:Choice xmlns:p14="http://schemas.microsoft.com/office/powerpoint/2010/main" Requires="p14">
-      <p:transition spd="slow" p14:dur="2000" advTm="97770"/>
+      <p:transition spd="slow" p14:dur="2000" advTm="88360"/>
     </mc:Choice>
     <mc:Fallback>
-      <p:transition spd="slow" advTm="97770"/>
+      <p:transition spd="slow" advTm="88360"/>
     </mc:Fallback>
   </mc:AlternateContent>
   <p:timing>
@@ -5566,7 +5752,7 @@
                                   <p:childTnLst>
                                     <p:cmd type="call" cmd="playFrom(0.0)">
                                       <p:cBhvr>
-                                        <p:cTn id="6" dur="96768" fill="hold"/>
+                                        <p:cTn id="6" dur="87360" fill="hold"/>
                                         <p:tgtEl>
                                           <p:spTgt spid="10"/>
                                         </p:tgtEl>
@@ -5790,7 +5976,7 @@
       </p:sp>
       <p:pic>
         <p:nvPicPr>
-          <p:cNvPr id="7" name="Image 0" descr="C:\Users\whale\AppData\Local\Temp\claude\C--Users-whale-git-uiao-inbox\cbd5b766-acc0-4006-9202-a9bb6b23e97b\scratchpad\deck\icons\FaUsersGear.png"/>
+          <p:cNvPr id="7" name="Image 0" descr="C:\Users\whale\git\uiao\inbox\SSA-Interview\build\icons\FaUsersGear.png"/>
           <p:cNvPicPr>
             <a:picLocks noChangeAspect="1"/>
           </p:cNvPicPr>
@@ -5932,7 +6118,7 @@
       </p:sp>
       <p:pic>
         <p:nvPicPr>
-          <p:cNvPr id="11" name="Image 1" descr="C:\Users\whale\AppData\Local\Temp\claude\C--Users-whale-git-uiao-inbox\cbd5b766-acc0-4006-9202-a9bb6b23e97b\scratchpad\deck\icons\FaChartLine.png"/>
+          <p:cNvPr id="11" name="Image 1" descr="C:\Users\whale\git\uiao\inbox\SSA-Interview\build\icons\FaChartLine.png"/>
           <p:cNvPicPr>
             <a:picLocks noChangeAspect="1"/>
           </p:cNvPicPr>
@@ -6074,7 +6260,7 @@
       </p:sp>
       <p:pic>
         <p:nvPicPr>
-          <p:cNvPr id="15" name="Image 2" descr="C:\Users\whale\AppData\Local\Temp\claude\C--Users-whale-git-uiao-inbox\cbd5b766-acc0-4006-9202-a9bb6b23e97b\scratchpad\deck\icons\FaShieldHalved.png"/>
+          <p:cNvPr id="15" name="Image 2" descr="C:\Users\whale\git\uiao\inbox\SSA-Interview\build\icons\FaShieldHalved.png"/>
           <p:cNvPicPr>
             <a:picLocks noChangeAspect="1"/>
           </p:cNvPicPr>
@@ -6149,7 +6335,7 @@
                   <a:schemeClr val="tx2"/>
                 </a:solidFill>
               </a:rPr>
-              <a:t>Modern access is decided by attributes, so accurate HR data becomes accurate access. Mandates are the floor, not the reason.</a:t>
+              <a:t>Access decisions increasingly depend on authoritative identity, device and context attributes. Mandates are the floor, not the reason.</a:t>
             </a:r>
             <a:endParaRPr lang="en-US" sz="1400" dirty="0"/>
           </a:p>
@@ -6216,7 +6402,7 @@
       </p:sp>
       <p:pic>
         <p:nvPicPr>
-          <p:cNvPr id="19" name="Image 3" descr="C:\Users\whale\AppData\Local\Temp\claude\C--Users-whale-git-uiao-inbox\cbd5b766-acc0-4006-9202-a9bb6b23e97b\scratchpad\deck\icons\FaArrowsRotate.png"/>
+          <p:cNvPr id="19" name="Image 3" descr="C:\Users\whale\git\uiao\inbox\SSA-Interview\build\icons\FaArrowsRotate.png"/>
           <p:cNvPicPr>
             <a:picLocks noChangeAspect="1"/>
           </p:cNvPicPr>
@@ -6369,7 +6555,7 @@
                   <a:schemeClr val="tx2"/>
                 </a:solidFill>
               </a:rPr>
-              <a:t>HR 2.0 covers federal employees only — contractors need their own source (Core HCM contingent worker, or PIV sponsorship). Build only what HR is authoritative for.</a:t>
+              <a:t>HR 2.0 covers federal employees only. Contractor authority decision required: evaluate suitability, sponsorship, and contingent-worker records. Build only what HR is authoritative for.</a:t>
             </a:r>
             <a:endParaRPr lang="en-US" sz="1400" dirty="0"/>
           </a:p>
@@ -6504,7 +6690,7 @@
             <a:hlinkClick r:id="" action="ppaction://media"/>
             <a:extLst>
               <a:ext uri="{FF2B5EF4-FFF2-40B4-BE49-F238E27FC236}">
-                <a16:creationId xmlns:a16="http://schemas.microsoft.com/office/drawing/2014/main" id="{0AEA68B2-D39A-40A4-CDF0-6FD5181858EF}"/>
+                <a16:creationId xmlns:a16="http://schemas.microsoft.com/office/drawing/2014/main" id="{7E567087-54C3-C842-BB13-76657E54098D}"/>
               </a:ext>
             </a:extLst>
           </p:cNvPr>
@@ -6543,10 +6729,10 @@
   </p:clrMapOvr>
   <mc:AlternateContent xmlns:mc="http://schemas.openxmlformats.org/markup-compatibility/2006">
     <mc:Choice xmlns:p14="http://schemas.microsoft.com/office/powerpoint/2010/main" Requires="p14">
-      <p:transition spd="slow" p14:dur="2000" advTm="98060"/>
+      <p:transition spd="slow" p14:dur="2000" advTm="119820"/>
     </mc:Choice>
     <mc:Fallback>
-      <p:transition spd="slow" advTm="98060"/>
+      <p:transition spd="slow" advTm="119820"/>
     </mc:Fallback>
   </mc:AlternateContent>
   <p:timing>
@@ -6580,7 +6766,7 @@
                                   <p:childTnLst>
                                     <p:cmd type="call" cmd="playFrom(0.0)">
                                       <p:cBhvr>
-                                        <p:cTn id="6" dur="97056" fill="hold"/>
+                                        <p:cTn id="6" dur="118824" fill="hold"/>
                                         <p:tgtEl>
                                           <p:spTgt spid="26"/>
                                         </p:tgtEl>
@@ -6804,7 +6990,7 @@
       </p:sp>
       <p:pic>
         <p:nvPicPr>
-          <p:cNvPr id="7" name="Image 0" descr="C:\Users\whale\AppData\Local\Temp\claude\C--Users-whale-git-uiao-inbox\cbd5b766-acc0-4006-9202-a9bb6b23e97b\scratchpad\deck\icons\FaBuildingColumns.png"/>
+          <p:cNvPr id="7" name="Image 0" descr="C:\Users\whale\git\uiao\inbox\SSA-Interview\build\icons\FaBuildingColumns.png"/>
           <p:cNvPicPr>
             <a:picLocks noChangeAspect="1"/>
           </p:cNvPicPr>
@@ -7016,7 +7202,7 @@
       </p:sp>
       <p:pic>
         <p:nvPicPr>
-          <p:cNvPr id="12" name="Image 1" descr="C:\Users\whale\AppData\Local\Temp\claude\C--Users-whale-git-uiao-inbox\cbd5b766-acc0-4006-9202-a9bb6b23e97b\scratchpad\deck\icons\FaUsersGear.png"/>
+          <p:cNvPr id="12" name="Image 1" descr="C:\Users\whale\git\uiao\inbox\SSA-Interview\build\icons\FaUsersGear.png"/>
           <p:cNvPicPr>
             <a:picLocks noChangeAspect="1"/>
           </p:cNvPicPr>
@@ -7262,7 +7448,7 @@
       </p:sp>
       <p:pic>
         <p:nvPicPr>
-          <p:cNvPr id="17" name="Image 2" descr="C:\Users\whale\AppData\Local\Temp\claude\C--Users-whale-git-uiao-inbox\cbd5b766-acc0-4006-9202-a9bb6b23e97b\scratchpad\deck\icons\FaShieldHalved.png"/>
+          <p:cNvPr id="17" name="Image 2" descr="C:\Users\whale\git\uiao\inbox\SSA-Interview\build\icons\FaShieldHalved.png"/>
           <p:cNvPicPr>
             <a:picLocks noChangeAspect="1"/>
           </p:cNvPicPr>
@@ -7508,7 +7694,7 @@
       </p:sp>
       <p:pic>
         <p:nvPicPr>
-          <p:cNvPr id="22" name="Image 3" descr="C:\Users\whale\AppData\Local\Temp\claude\C--Users-whale-git-uiao-inbox\cbd5b766-acc0-4006-9202-a9bb6b23e97b\scratchpad\deck\icons\FaSitemap.png"/>
+          <p:cNvPr id="22" name="Image 3" descr="C:\Users\whale\git\uiao\inbox\SSA-Interview\build\icons\FaSitemap.png"/>
           <p:cNvPicPr>
             <a:picLocks noChangeAspect="1"/>
           </p:cNvPicPr>
@@ -7555,7 +7741,7 @@
               <a:buNone/>
             </a:pPr>
             <a:r>
-              <a:rPr lang="en-US" sz="1600" b="1" dirty="0">
+              <a:rPr lang="en-US" sz="1500" b="1" dirty="0">
                 <a:solidFill>
                   <a:srgbClr val="1F2A44"/>
                 </a:solidFill>
@@ -7563,14 +7749,14 @@
               <a:t>My role as enterprise data architect: </a:t>
             </a:r>
             <a:r>
-              <a:rPr lang="en-US" sz="1600" dirty="0">
+              <a:rPr lang="en-US" sz="1500" dirty="0">
                 <a:solidFill>
                   <a:schemeClr val="tx2"/>
                 </a:solidFill>
               </a:rPr>
-              <a:t>own the standards, the crosswalk and the person key; give every attribute one accountable owner; and carry the standard to interagency committees and working groups.</a:t>
-            </a:r>
-            <a:endParaRPr lang="en-US" sz="1600" dirty="0"/>
+              <a:t>own the data standards (one name, definition and owner per attribute), the logical model and the person key; review the integrator’s designs against them; carry the standard to interagency working groups.</a:t>
+            </a:r>
+            <a:endParaRPr lang="en-US" sz="1500" dirty="0"/>
           </a:p>
         </p:txBody>
       </p:sp>
@@ -7625,7 +7811,7 @@
             <a:hlinkClick r:id="" action="ppaction://media"/>
             <a:extLst>
               <a:ext uri="{FF2B5EF4-FFF2-40B4-BE49-F238E27FC236}">
-                <a16:creationId xmlns:a16="http://schemas.microsoft.com/office/drawing/2014/main" id="{64ACD3BD-8173-1568-1A76-76868782C27B}"/>
+                <a16:creationId xmlns:a16="http://schemas.microsoft.com/office/drawing/2014/main" id="{150AE182-4067-056C-429C-8DD13248CBEF}"/>
               </a:ext>
             </a:extLst>
           </p:cNvPr>
@@ -7664,10 +7850,10 @@
   </p:clrMapOvr>
   <mc:AlternateContent xmlns:mc="http://schemas.openxmlformats.org/markup-compatibility/2006">
     <mc:Choice xmlns:p14="http://schemas.microsoft.com/office/powerpoint/2010/main" Requires="p14">
-      <p:transition spd="slow" p14:dur="2000" advTm="81280"/>
+      <p:transition spd="slow" p14:dur="2000" advTm="91100"/>
     </mc:Choice>
     <mc:Fallback>
-      <p:transition spd="slow" advTm="81280"/>
+      <p:transition spd="slow" advTm="91100"/>
     </mc:Fallback>
   </mc:AlternateContent>
   <p:timing>
@@ -7701,7 +7887,7 @@
                                   <p:childTnLst>
                                     <p:cmd type="call" cmd="playFrom(0.0)">
                                       <p:cBhvr>
-                                        <p:cTn id="6" dur="80280" fill="hold"/>
+                                        <p:cTn id="6" dur="90096" fill="hold"/>
                                         <p:tgtEl>
                                           <p:spTgt spid="24"/>
                                         </p:tgtEl>
@@ -7795,7 +7981,7 @@
                 <a:ea typeface="Cambria" pitchFamily="34" charset="-122"/>
                 <a:cs typeface="Cambria" pitchFamily="34" charset="-120"/>
               </a:rPr>
-              <a:t>How: data, security and operations</a:t>
+              <a:t>How: the data model, logical to physical</a:t>
             </a:r>
             <a:endParaRPr lang="en-US" sz="3000" dirty="0"/>
           </a:p>
@@ -7866,26 +8052,62 @@
       </p:sp>
       <p:sp>
         <p:nvSpPr>
-          <p:cNvPr id="5" name="How col 1"/>
+          <p:cNvPr id="5" name="Logical head"/>
+          <p:cNvSpPr txBox="1"/>
+          <p:nvPr/>
+        </p:nvSpPr>
+        <p:spPr>
+          <a:xfrm>
+            <a:off x="548640" y="1234440"/>
+            <a:ext cx="5852160" cy="274320"/>
+          </a:xfrm>
+          <a:prstGeom prst="rect">
+            <a:avLst/>
+          </a:prstGeom>
+          <a:noFill/>
+          <a:ln/>
+        </p:spPr>
+        <p:txBody>
+          <a:bodyPr wrap="square" lIns="0" tIns="0" rIns="0" bIns="0" rtlCol="0" anchor="t"/>
+          <a:lstStyle/>
+          <a:p>
+            <a:pPr marL="0" indent="0">
+              <a:buNone/>
+            </a:pPr>
+            <a:r>
+              <a:rPr lang="en-US" sz="1200" b="1" dirty="0">
+                <a:solidFill>
+                  <a:srgbClr val="64748B"/>
+                </a:solidFill>
+              </a:rPr>
+              <a:t>LOGICAL MODEL: TRACK THE PERSON, NOT THE ACCOUNT</a:t>
+            </a:r>
+            <a:endParaRPr lang="en-US" sz="1200" dirty="0"/>
+          </a:p>
+        </p:txBody>
+      </p:sp>
+      <p:sp>
+        <p:nvSpPr>
+          <p:cNvPr id="6" name="Entity Person"/>
           <p:cNvSpPr/>
           <p:nvPr/>
         </p:nvSpPr>
         <p:spPr>
           <a:xfrm>
-            <a:off x="548640" y="1280160"/>
-            <a:ext cx="3611880" cy="3429000"/>
+            <a:off x="548640" y="1600200"/>
+            <a:ext cx="2697480" cy="932688"/>
           </a:xfrm>
           <a:prstGeom prst="roundRect">
             <a:avLst>
-              <a:gd name="adj" fmla="val 2133"/>
+              <a:gd name="adj" fmla="val 7843"/>
             </a:avLst>
           </a:prstGeom>
           <a:solidFill>
-            <a:srgbClr val="DCEFEC"/>
+            <a:srgbClr val="E4EAF4"/>
           </a:solidFill>
           <a:ln w="12700">
             <a:solidFill>
-              <a:srgbClr val="DCEFEC"/>
+              <a:srgbClr val="1F2A44"/>
             </a:solidFill>
             <a:prstDash val="solid"/>
           </a:ln>
@@ -7900,208 +8122,82 @@
       </p:sp>
       <p:sp>
         <p:nvSpPr>
-          <p:cNvPr id="6" name="Icon FaDatabase"/>
+          <p:cNvPr id="7" name="Entity Person text"/>
+          <p:cNvSpPr txBox="1"/>
+          <p:nvPr/>
+        </p:nvSpPr>
+        <p:spPr>
+          <a:xfrm>
+            <a:off x="658368" y="1655064"/>
+            <a:ext cx="2478024" cy="822960"/>
+          </a:xfrm>
+          <a:prstGeom prst="rect">
+            <a:avLst/>
+          </a:prstGeom>
+          <a:noFill/>
+          <a:ln/>
+        </p:spPr>
+        <p:txBody>
+          <a:bodyPr wrap="square" lIns="0" tIns="0" rIns="0" bIns="0" rtlCol="0" anchor="t"/>
+          <a:lstStyle/>
+          <a:p>
+            <a:pPr marL="0" indent="0">
+              <a:spcAft>
+                <a:spcPts val="100"/>
+              </a:spcAft>
+              <a:buNone/>
+            </a:pPr>
+            <a:r>
+              <a:rPr lang="en-US" sz="1450" b="1" dirty="0">
+                <a:solidFill>
+                  <a:srgbClr val="1F2A44"/>
+                </a:solidFill>
+              </a:rPr>
+              <a:t>Person</a:t>
+            </a:r>
+            <a:endParaRPr lang="en-US" sz="1400" dirty="0"/>
+          </a:p>
+          <a:p>
+            <a:pPr marL="0" indent="0">
+              <a:spcAft>
+                <a:spcPts val="100"/>
+              </a:spcAft>
+              <a:buNone/>
+            </a:pPr>
+            <a:r>
+              <a:rPr lang="en-US" sz="1150" dirty="0">
+                <a:solidFill>
+                  <a:schemeClr val="tx2"/>
+                </a:solidFill>
+              </a:rPr>
+              <a:t>PK: enterprise person key, controlled by the agency.</a:t>
+            </a:r>
+            <a:endParaRPr lang="en-US" sz="1400" dirty="0"/>
+          </a:p>
+        </p:txBody>
+      </p:sp>
+      <p:sp>
+        <p:nvSpPr>
+          <p:cNvPr id="8" name="Entity Identifier"/>
           <p:cNvSpPr/>
           <p:nvPr/>
         </p:nvSpPr>
         <p:spPr>
           <a:xfrm>
-            <a:off x="749808" y="1444752"/>
-            <a:ext cx="566928" cy="566928"/>
-          </a:xfrm>
-          <a:prstGeom prst="ellipse">
-            <a:avLst/>
+            <a:off x="3611880" y="1600200"/>
+            <a:ext cx="2697480" cy="932688"/>
+          </a:xfrm>
+          <a:prstGeom prst="roundRect">
+            <a:avLst>
+              <a:gd name="adj" fmla="val 7843"/>
+            </a:avLst>
           </a:prstGeom>
           <a:solidFill>
-            <a:srgbClr val="0F766E"/>
+            <a:srgbClr val="FFFFFF"/>
           </a:solidFill>
           <a:ln w="12700">
             <a:solidFill>
-              <a:srgbClr val="0F766E"/>
-            </a:solidFill>
-            <a:prstDash val="solid"/>
-          </a:ln>
-        </p:spPr>
-      </p:sp>
-      <p:pic>
-        <p:nvPicPr>
-          <p:cNvPr id="7" name="Image 0" descr="C:\Users\whale\AppData\Local\Temp\claude\C--Users-whale-git-uiao-inbox\cbd5b766-acc0-4006-9202-a9bb6b23e97b\scratchpad\deck\icons\FaDatabase.png"/>
-          <p:cNvPicPr>
-            <a:picLocks noChangeAspect="1"/>
-          </p:cNvPicPr>
-          <p:nvPr/>
-        </p:nvPicPr>
-        <p:blipFill>
-          <a:blip r:embed="rId5"/>
-          <a:stretch>
-            <a:fillRect/>
-          </a:stretch>
-        </p:blipFill>
-        <p:spPr>
-          <a:xfrm>
-            <a:off x="885871" y="1580815"/>
-            <a:ext cx="294803" cy="294803"/>
-          </a:xfrm>
-          <a:prstGeom prst="rect">
-            <a:avLst/>
-          </a:prstGeom>
-        </p:spPr>
-      </p:pic>
-      <p:sp>
-        <p:nvSpPr>
-          <p:cNvPr id="8" name="How head 1"/>
-          <p:cNvSpPr txBox="1"/>
-          <p:nvPr/>
-        </p:nvSpPr>
-        <p:spPr>
-          <a:xfrm>
-            <a:off x="1463040" y="1444752"/>
-            <a:ext cx="2560320" cy="566928"/>
-          </a:xfrm>
-          <a:prstGeom prst="rect">
-            <a:avLst/>
-          </a:prstGeom>
-          <a:noFill/>
-          <a:ln/>
-        </p:spPr>
-        <p:txBody>
-          <a:bodyPr wrap="square" lIns="0" tIns="0" rIns="0" bIns="0" rtlCol="0" anchor="ctr"/>
-          <a:lstStyle/>
-          <a:p>
-            <a:pPr marL="0" indent="0">
-              <a:buNone/>
-            </a:pPr>
-            <a:r>
-              <a:rPr lang="en-US" sz="1900" b="1" dirty="0">
-                <a:solidFill>
-                  <a:srgbClr val="0F766E"/>
-                </a:solidFill>
-                <a:latin typeface="Cambria" pitchFamily="34" charset="0"/>
-                <a:ea typeface="Cambria" pitchFamily="34" charset="-122"/>
-                <a:cs typeface="Cambria" pitchFamily="34" charset="-120"/>
-              </a:rPr>
-              <a:t>Data</a:t>
-            </a:r>
-            <a:endParaRPr lang="en-US" sz="1900" dirty="0"/>
-          </a:p>
-        </p:txBody>
-      </p:sp>
-      <p:sp>
-        <p:nvSpPr>
-          <p:cNvPr id="9" name="How text 1"/>
-          <p:cNvSpPr txBox="1"/>
-          <p:nvPr/>
-        </p:nvSpPr>
-        <p:spPr>
-          <a:xfrm>
-            <a:off x="777240" y="2194560"/>
-            <a:ext cx="3200400" cy="2423160"/>
-          </a:xfrm>
-          <a:prstGeom prst="rect">
-            <a:avLst/>
-          </a:prstGeom>
-          <a:noFill/>
-          <a:ln/>
-        </p:spPr>
-        <p:txBody>
-          <a:bodyPr wrap="square" lIns="0" tIns="0" rIns="0" bIns="0" rtlCol="0" anchor="t"/>
-          <a:lstStyle/>
-          <a:p>
-            <a:pPr marL="342900" indent="-342900">
-              <a:spcAft>
-                <a:spcPts val="600"/>
-              </a:spcAft>
-              <a:buSzPct val="100000"/>
-              <a:buChar char="•"/>
-            </a:pPr>
-            <a:r>
-              <a:rPr lang="en-US" sz="1500" dirty="0">
-                <a:solidFill>
-                  <a:schemeClr val="tx2"/>
-                </a:solidFill>
-              </a:rPr>
-              <a:t>One governed crosswalk: OPM standard data to a person model</a:t>
-            </a:r>
-            <a:endParaRPr lang="en-US" sz="1400" dirty="0"/>
-          </a:p>
-          <a:p>
-            <a:pPr marL="342900" indent="-342900">
-              <a:spcAft>
-                <a:spcPts val="600"/>
-              </a:spcAft>
-              <a:buSzPct val="100000"/>
-              <a:buChar char="•"/>
-            </a:pPr>
-            <a:r>
-              <a:rPr lang="en-US" sz="1500" dirty="0">
-                <a:solidFill>
-                  <a:schemeClr val="tx2"/>
-                </a:solidFill>
-              </a:rPr>
-              <a:t>Keyed on an enterprise ID the agency controls</a:t>
-            </a:r>
-            <a:endParaRPr lang="en-US" sz="1400" dirty="0"/>
-          </a:p>
-          <a:p>
-            <a:pPr marL="342900" indent="-342900">
-              <a:spcAft>
-                <a:spcPts val="600"/>
-              </a:spcAft>
-              <a:buSzPct val="100000"/>
-              <a:buChar char="•"/>
-            </a:pPr>
-            <a:r>
-              <a:rPr lang="en-US" sz="1500" dirty="0">
-                <a:solidFill>
-                  <a:schemeClr val="tx2"/>
-                </a:solidFill>
-              </a:rPr>
-              <a:t>Personnel actions drive joiner, mover, leaver by code</a:t>
-            </a:r>
-            <a:endParaRPr lang="en-US" sz="1400" dirty="0"/>
-          </a:p>
-          <a:p>
-            <a:pPr marL="342900" indent="-342900">
-              <a:spcAft>
-                <a:spcPts val="600"/>
-              </a:spcAft>
-              <a:buSzPct val="100000"/>
-              <a:buChar char="•"/>
-            </a:pPr>
-            <a:r>
-              <a:rPr lang="en-US" sz="1500" dirty="0">
-                <a:solidFill>
-                  <a:schemeClr val="tx2"/>
-                </a:solidFill>
-              </a:rPr>
-              <a:t>Contractors from their own source, same model</a:t>
-            </a:r>
-            <a:endParaRPr lang="en-US" sz="1400" dirty="0"/>
-          </a:p>
-        </p:txBody>
-      </p:sp>
-      <p:sp>
-        <p:nvSpPr>
-          <p:cNvPr id="10" name="How col 2"/>
-          <p:cNvSpPr/>
-          <p:nvPr/>
-        </p:nvSpPr>
-        <p:spPr>
-          <a:xfrm>
-            <a:off x="4297680" y="1280160"/>
-            <a:ext cx="3611880" cy="3429000"/>
-          </a:xfrm>
-          <a:prstGeom prst="roundRect">
-            <a:avLst>
-              <a:gd name="adj" fmla="val 2133"/>
-            </a:avLst>
-          </a:prstGeom>
-          <a:solidFill>
-            <a:srgbClr val="FBE4E4"/>
-          </a:solidFill>
-          <a:ln w="12700">
-            <a:solidFill>
-              <a:srgbClr val="FBE4E4"/>
+              <a:srgbClr val="1F2A44"/>
             </a:solidFill>
             <a:prstDash val="solid"/>
           </a:ln>
@@ -8116,190 +8212,90 @@
       </p:sp>
       <p:sp>
         <p:nvSpPr>
-          <p:cNvPr id="11" name="Icon FaLock"/>
+          <p:cNvPr id="9" name="Entity Identifier text"/>
+          <p:cNvSpPr txBox="1"/>
+          <p:nvPr/>
+        </p:nvSpPr>
+        <p:spPr>
+          <a:xfrm>
+            <a:off x="3721608" y="1655064"/>
+            <a:ext cx="2478024" cy="822960"/>
+          </a:xfrm>
+          <a:prstGeom prst="rect">
+            <a:avLst/>
+          </a:prstGeom>
+          <a:noFill/>
+          <a:ln/>
+        </p:spPr>
+        <p:txBody>
+          <a:bodyPr wrap="square" lIns="0" tIns="0" rIns="0" bIns="0" rtlCol="0" anchor="t"/>
+          <a:lstStyle/>
+          <a:p>
+            <a:pPr marL="0" indent="0">
+              <a:spcAft>
+                <a:spcPts val="100"/>
+              </a:spcAft>
+              <a:buNone/>
+            </a:pPr>
+            <a:r>
+              <a:rPr lang="en-US" sz="1450" b="1" dirty="0">
+                <a:solidFill>
+                  <a:srgbClr val="1F2A44"/>
+                </a:solidFill>
+              </a:rPr>
+              <a:t>Identifier</a:t>
+            </a:r>
+            <a:r>
+              <a:rPr lang="en-US" sz="1100" dirty="0">
+                <a:solidFill>
+                  <a:srgbClr val="64748B"/>
+                </a:solidFill>
+              </a:rPr>
+              <a:t>  N per person</a:t>
+            </a:r>
+            <a:endParaRPr lang="en-US" sz="1400" dirty="0"/>
+          </a:p>
+          <a:p>
+            <a:pPr marL="0" indent="0">
+              <a:spcAft>
+                <a:spcPts val="100"/>
+              </a:spcAft>
+              <a:buNone/>
+            </a:pPr>
+            <a:r>
+              <a:rPr lang="en-US" sz="1150" dirty="0">
+                <a:solidFill>
+                  <a:schemeClr val="tx2"/>
+                </a:solidFill>
+              </a:rPr>
+              <a:t>HR person no., Entra and AD IDs, PIV. SSN: protected, never a join key.</a:t>
+            </a:r>
+            <a:endParaRPr lang="en-US" sz="1400" dirty="0"/>
+          </a:p>
+        </p:txBody>
+      </p:sp>
+      <p:sp>
+        <p:nvSpPr>
+          <p:cNvPr id="10" name="Entity Affiliation"/>
           <p:cNvSpPr/>
           <p:nvPr/>
         </p:nvSpPr>
         <p:spPr>
           <a:xfrm>
-            <a:off x="4498848" y="1444752"/>
-            <a:ext cx="566928" cy="566928"/>
-          </a:xfrm>
-          <a:prstGeom prst="ellipse">
-            <a:avLst/>
+            <a:off x="548640" y="2743200"/>
+            <a:ext cx="2697480" cy="932688"/>
+          </a:xfrm>
+          <a:prstGeom prst="roundRect">
+            <a:avLst>
+              <a:gd name="adj" fmla="val 7843"/>
+            </a:avLst>
           </a:prstGeom>
           <a:solidFill>
-            <a:srgbClr val="B91C1C"/>
+            <a:srgbClr val="DCEFEC"/>
           </a:solidFill>
           <a:ln w="12700">
             <a:solidFill>
-              <a:srgbClr val="B91C1C"/>
-            </a:solidFill>
-            <a:prstDash val="solid"/>
-          </a:ln>
-        </p:spPr>
-      </p:sp>
-      <p:pic>
-        <p:nvPicPr>
-          <p:cNvPr id="12" name="Image 1" descr="C:\Users\whale\AppData\Local\Temp\claude\C--Users-whale-git-uiao-inbox\cbd5b766-acc0-4006-9202-a9bb6b23e97b\scratchpad\deck\icons\FaLock.png"/>
-          <p:cNvPicPr>
-            <a:picLocks noChangeAspect="1"/>
-          </p:cNvPicPr>
-          <p:nvPr/>
-        </p:nvPicPr>
-        <p:blipFill>
-          <a:blip r:embed="rId6"/>
-          <a:stretch>
-            <a:fillRect/>
-          </a:stretch>
-        </p:blipFill>
-        <p:spPr>
-          <a:xfrm>
-            <a:off x="4634911" y="1580815"/>
-            <a:ext cx="294803" cy="294803"/>
-          </a:xfrm>
-          <a:prstGeom prst="rect">
-            <a:avLst/>
-          </a:prstGeom>
-        </p:spPr>
-      </p:pic>
-      <p:sp>
-        <p:nvSpPr>
-          <p:cNvPr id="13" name="How head 2"/>
-          <p:cNvSpPr txBox="1"/>
-          <p:nvPr/>
-        </p:nvSpPr>
-        <p:spPr>
-          <a:xfrm>
-            <a:off x="5212080" y="1444752"/>
-            <a:ext cx="2560320" cy="566928"/>
-          </a:xfrm>
-          <a:prstGeom prst="rect">
-            <a:avLst/>
-          </a:prstGeom>
-          <a:noFill/>
-          <a:ln/>
-        </p:spPr>
-        <p:txBody>
-          <a:bodyPr wrap="square" lIns="0" tIns="0" rIns="0" bIns="0" rtlCol="0" anchor="ctr"/>
-          <a:lstStyle/>
-          <a:p>
-            <a:pPr marL="0" indent="0">
-              <a:buNone/>
-            </a:pPr>
-            <a:r>
-              <a:rPr lang="en-US" sz="1900" b="1" dirty="0">
-                <a:solidFill>
-                  <a:srgbClr val="B91C1C"/>
-                </a:solidFill>
-                <a:latin typeface="Cambria" pitchFamily="34" charset="0"/>
-                <a:ea typeface="Cambria" pitchFamily="34" charset="-122"/>
-                <a:cs typeface="Cambria" pitchFamily="34" charset="-120"/>
-              </a:rPr>
-              <a:t>Security</a:t>
-            </a:r>
-            <a:endParaRPr lang="en-US" sz="1900" dirty="0"/>
-          </a:p>
-        </p:txBody>
-      </p:sp>
-      <p:sp>
-        <p:nvSpPr>
-          <p:cNvPr id="14" name="How text 2"/>
-          <p:cNvSpPr txBox="1"/>
-          <p:nvPr/>
-        </p:nvSpPr>
-        <p:spPr>
-          <a:xfrm>
-            <a:off x="4526280" y="2194560"/>
-            <a:ext cx="3200400" cy="2423160"/>
-          </a:xfrm>
-          <a:prstGeom prst="rect">
-            <a:avLst/>
-          </a:prstGeom>
-          <a:noFill/>
-          <a:ln/>
-        </p:spPr>
-        <p:txBody>
-          <a:bodyPr wrap="square" lIns="0" tIns="0" rIns="0" bIns="0" rtlCol="0" anchor="t"/>
-          <a:lstStyle/>
-          <a:p>
-            <a:pPr marL="342900" indent="-342900">
-              <a:spcAft>
-                <a:spcPts val="600"/>
-              </a:spcAft>
-              <a:buSzPct val="100000"/>
-              <a:buChar char="•"/>
-            </a:pPr>
-            <a:r>
-              <a:rPr lang="en-US" sz="1500" dirty="0">
-                <a:solidFill>
-                  <a:schemeClr val="tx2"/>
-                </a:solidFill>
-              </a:rPr>
-              <a:t>Leavers: block access first, within hours, then clean up</a:t>
-            </a:r>
-            <a:endParaRPr lang="en-US" sz="1400" dirty="0"/>
-          </a:p>
-          <a:p>
-            <a:pPr marL="342900" indent="-342900">
-              <a:spcAft>
-                <a:spcPts val="600"/>
-              </a:spcAft>
-              <a:buSzPct val="100000"/>
-              <a:buChar char="•"/>
-            </a:pPr>
-            <a:r>
-              <a:rPr lang="en-US" sz="1500" dirty="0">
-                <a:solidFill>
-                  <a:schemeClr val="tx2"/>
-                </a:solidFill>
-              </a:rPr>
-              <a:t>Least privilege; no stored secrets</a:t>
-            </a:r>
-            <a:endParaRPr lang="en-US" sz="1400" dirty="0"/>
-          </a:p>
-          <a:p>
-            <a:pPr marL="342900" indent="-342900">
-              <a:spcAft>
-                <a:spcPts val="600"/>
-              </a:spcAft>
-              <a:buSzPct val="100000"/>
-              <a:buChar char="•"/>
-            </a:pPr>
-            <a:r>
-              <a:rPr lang="en-US" sz="1500" dirty="0">
-                <a:solidFill>
-                  <a:schemeClr val="tx2"/>
-                </a:solidFill>
-              </a:rPr>
-              <a:t>Failures quarantined with an owner — nothing auto-resolves</a:t>
-            </a:r>
-            <a:endParaRPr lang="en-US" sz="1400" dirty="0"/>
-          </a:p>
-        </p:txBody>
-      </p:sp>
-      <p:sp>
-        <p:nvSpPr>
-          <p:cNvPr id="15" name="How col 3"/>
-          <p:cNvSpPr/>
-          <p:nvPr/>
-        </p:nvSpPr>
-        <p:spPr>
-          <a:xfrm>
-            <a:off x="8046720" y="1280160"/>
-            <a:ext cx="3611880" cy="3429000"/>
-          </a:xfrm>
-          <a:prstGeom prst="roundRect">
-            <a:avLst>
-              <a:gd name="adj" fmla="val 2133"/>
-            </a:avLst>
-          </a:prstGeom>
-          <a:solidFill>
-            <a:srgbClr val="FBEEDC"/>
-          </a:solidFill>
-          <a:ln w="12700">
-            <a:solidFill>
-              <a:srgbClr val="FBEEDC"/>
+              <a:srgbClr val="0F766E"/>
             </a:solidFill>
             <a:prstDash val="solid"/>
           </a:ln>
@@ -8314,102 +8310,14 @@
       </p:sp>
       <p:sp>
         <p:nvSpPr>
-          <p:cNvPr id="16" name="Icon FaRoute"/>
-          <p:cNvSpPr/>
-          <p:nvPr/>
-        </p:nvSpPr>
-        <p:spPr>
-          <a:xfrm>
-            <a:off x="8247888" y="1444752"/>
-            <a:ext cx="566928" cy="566928"/>
-          </a:xfrm>
-          <a:prstGeom prst="ellipse">
-            <a:avLst/>
-          </a:prstGeom>
-          <a:solidFill>
-            <a:srgbClr val="B45309"/>
-          </a:solidFill>
-          <a:ln w="12700">
-            <a:solidFill>
-              <a:srgbClr val="B45309"/>
-            </a:solidFill>
-            <a:prstDash val="solid"/>
-          </a:ln>
-        </p:spPr>
-      </p:sp>
-      <p:pic>
-        <p:nvPicPr>
-          <p:cNvPr id="17" name="Image 2" descr="C:\Users\whale\AppData\Local\Temp\claude\C--Users-whale-git-uiao-inbox\cbd5b766-acc0-4006-9202-a9bb6b23e97b\scratchpad\deck\icons\FaRoute.png"/>
-          <p:cNvPicPr>
-            <a:picLocks noChangeAspect="1"/>
-          </p:cNvPicPr>
-          <p:nvPr/>
-        </p:nvPicPr>
-        <p:blipFill>
-          <a:blip r:embed="rId7"/>
-          <a:stretch>
-            <a:fillRect/>
-          </a:stretch>
-        </p:blipFill>
-        <p:spPr>
-          <a:xfrm>
-            <a:off x="8383951" y="1580815"/>
-            <a:ext cx="294803" cy="294803"/>
-          </a:xfrm>
-          <a:prstGeom prst="rect">
-            <a:avLst/>
-          </a:prstGeom>
-        </p:spPr>
-      </p:pic>
-      <p:sp>
-        <p:nvSpPr>
-          <p:cNvPr id="18" name="How head 3"/>
+          <p:cNvPr id="11" name="Entity Affiliation text"/>
           <p:cNvSpPr txBox="1"/>
           <p:nvPr/>
         </p:nvSpPr>
         <p:spPr>
           <a:xfrm>
-            <a:off x="8961120" y="1444752"/>
-            <a:ext cx="2560320" cy="566928"/>
-          </a:xfrm>
-          <a:prstGeom prst="rect">
-            <a:avLst/>
-          </a:prstGeom>
-          <a:noFill/>
-          <a:ln/>
-        </p:spPr>
-        <p:txBody>
-          <a:bodyPr wrap="square" lIns="0" tIns="0" rIns="0" bIns="0" rtlCol="0" anchor="ctr"/>
-          <a:lstStyle/>
-          <a:p>
-            <a:pPr marL="0" indent="0">
-              <a:buNone/>
-            </a:pPr>
-            <a:r>
-              <a:rPr lang="en-US" sz="1900" b="1" dirty="0">
-                <a:solidFill>
-                  <a:srgbClr val="B45309"/>
-                </a:solidFill>
-                <a:latin typeface="Cambria" pitchFamily="34" charset="0"/>
-                <a:ea typeface="Cambria" pitchFamily="34" charset="-122"/>
-                <a:cs typeface="Cambria" pitchFamily="34" charset="-120"/>
-              </a:rPr>
-              <a:t>Operations</a:t>
-            </a:r>
-            <a:endParaRPr lang="en-US" sz="1900" dirty="0"/>
-          </a:p>
-        </p:txBody>
-      </p:sp>
-      <p:sp>
-        <p:nvSpPr>
-          <p:cNvPr id="19" name="How text 3"/>
-          <p:cNvSpPr txBox="1"/>
-          <p:nvPr/>
-        </p:nvSpPr>
-        <p:spPr>
-          <a:xfrm>
-            <a:off x="8275320" y="2194560"/>
-            <a:ext cx="3200400" cy="2423160"/>
+            <a:off x="658368" y="2798064"/>
+            <a:ext cx="2478024" cy="822960"/>
           </a:xfrm>
           <a:prstGeom prst="rect">
             <a:avLst/>
@@ -8421,129 +8329,63 @@
           <a:bodyPr wrap="square" lIns="0" tIns="0" rIns="0" bIns="0" rtlCol="0" anchor="t"/>
           <a:lstStyle/>
           <a:p>
-            <a:pPr marL="342900" indent="-342900">
+            <a:pPr marL="0" indent="0">
               <a:spcAft>
-                <a:spcPts val="600"/>
+                <a:spcPts val="100"/>
               </a:spcAft>
-              <a:buSzPct val="100000"/>
-              <a:buChar char="•"/>
-            </a:pPr>
-            <a:r>
-              <a:rPr lang="en-US" sz="1500" dirty="0">
-                <a:solidFill>
-                  <a:schemeClr val="tx2"/>
-                </a:solidFill>
-              </a:rPr>
-              <a:t>Start now from today's HR data; switch the source at Core HCM</a:t>
-            </a:r>
-            <a:endParaRPr lang="en-US" sz="1400" dirty="0"/>
-          </a:p>
-          <a:p>
-            <a:pPr marL="342900" indent="-342900">
-              <a:spcAft>
-                <a:spcPts val="600"/>
-              </a:spcAft>
-              <a:buSzPct val="100000"/>
-              <a:buChar char="•"/>
-            </a:pPr>
-            <a:r>
-              <a:rPr lang="en-US" sz="1500" dirty="0">
-                <a:solidFill>
-                  <a:schemeClr val="tx2"/>
-                </a:solidFill>
-              </a:rPr>
-              <a:t>Shadow mode first: compare HR with the directories</a:t>
-            </a:r>
-            <a:endParaRPr lang="en-US" sz="1400" dirty="0"/>
-          </a:p>
-          <a:p>
-            <a:pPr marL="342900" indent="-342900">
-              <a:spcAft>
-                <a:spcPts val="600"/>
-              </a:spcAft>
-              <a:buSzPct val="100000"/>
-              <a:buChar char="•"/>
-            </a:pPr>
-            <a:r>
-              <a:rPr lang="en-US" sz="1500" dirty="0">
-                <a:solidFill>
-                  <a:schemeClr val="tx2"/>
-                </a:solidFill>
-              </a:rPr>
-              <a:t>Cut over one population at a time</a:t>
-            </a:r>
-            <a:endParaRPr lang="en-US" sz="1400" dirty="0"/>
-          </a:p>
-          <a:p>
-            <a:pPr marL="342900" indent="-342900">
-              <a:spcAft>
-                <a:spcPts val="600"/>
-              </a:spcAft>
-              <a:buSzPct val="100000"/>
-              <a:buChar char="•"/>
-            </a:pPr>
-            <a:r>
-              <a:rPr lang="en-US" sz="1500" dirty="0">
-                <a:solidFill>
-                  <a:schemeClr val="tx2"/>
-                </a:solidFill>
-              </a:rPr>
-              <a:t>Close the ticket path only when the data proves it</a:t>
-            </a:r>
-            <a:endParaRPr lang="en-US" sz="1400" dirty="0"/>
-          </a:p>
-        </p:txBody>
-      </p:sp>
-      <p:sp>
-        <p:nvSpPr>
-          <p:cNvPr id="20" name="Stack label"/>
-          <p:cNvSpPr txBox="1"/>
-          <p:nvPr/>
-        </p:nvSpPr>
-        <p:spPr>
-          <a:xfrm>
-            <a:off x="548640" y="5120640"/>
-            <a:ext cx="1463040" cy="548640"/>
-          </a:xfrm>
-          <a:prstGeom prst="rect">
-            <a:avLst/>
-          </a:prstGeom>
-          <a:noFill/>
-          <a:ln/>
-        </p:spPr>
-        <p:txBody>
-          <a:bodyPr wrap="square" lIns="0" tIns="0" rIns="0" bIns="0" rtlCol="0" anchor="ctr"/>
-          <a:lstStyle/>
-          <a:p>
-            <a:pPr marL="0" indent="0">
               <a:buNone/>
             </a:pPr>
             <a:r>
-              <a:rPr lang="en-US" sz="1100" b="1" dirty="0">
+              <a:rPr lang="en-US" sz="1450" b="1" dirty="0">
+                <a:solidFill>
+                  <a:srgbClr val="0F766E"/>
+                </a:solidFill>
+              </a:rPr>
+              <a:t>Affiliation</a:t>
+            </a:r>
+            <a:r>
+              <a:rPr lang="en-US" sz="1100" dirty="0">
                 <a:solidFill>
                   <a:srgbClr val="64748B"/>
                 </a:solidFill>
               </a:rPr>
-              <a:t>EXAMPLE STACK</a:t>
-            </a:r>
-            <a:endParaRPr lang="en-US" sz="1100" dirty="0"/>
+              <a:t>  N per person</a:t>
+            </a:r>
+            <a:endParaRPr lang="en-US" sz="1400" dirty="0"/>
+          </a:p>
+          <a:p>
+            <a:pPr marL="0" indent="0">
+              <a:spcAft>
+                <a:spcPts val="100"/>
+              </a:spcAft>
+              <a:buNone/>
+            </a:pPr>
+            <a:r>
+              <a:rPr lang="en-US" sz="1150" dirty="0">
+                <a:solidFill>
+                  <a:schemeClr val="tx2"/>
+                </a:solidFill>
+              </a:rPr>
+              <a:t>Employee, contractor, intern. Own source; start and end dates.</a:t>
+            </a:r>
+            <a:endParaRPr lang="en-US" sz="1400" dirty="0"/>
           </a:p>
         </p:txBody>
       </p:sp>
       <p:sp>
         <p:nvSpPr>
-          <p:cNvPr id="21" name="Stack 1"/>
+          <p:cNvPr id="12" name="Entity Account"/>
           <p:cNvSpPr/>
           <p:nvPr/>
         </p:nvSpPr>
         <p:spPr>
           <a:xfrm>
-            <a:off x="2011680" y="5166360"/>
-            <a:ext cx="2148840" cy="502920"/>
+            <a:off x="3611880" y="2743200"/>
+            <a:ext cx="2697480" cy="932688"/>
           </a:xfrm>
           <a:prstGeom prst="roundRect">
             <a:avLst>
-              <a:gd name="adj" fmla="val 14545"/>
+              <a:gd name="adj" fmla="val 7843"/>
             </a:avLst>
           </a:prstGeom>
           <a:solidFill>
@@ -8551,7 +8393,7 @@
           </a:solidFill>
           <a:ln w="12700">
             <a:solidFill>
-              <a:srgbClr val="CBD5E1"/>
+              <a:srgbClr val="0F766E"/>
             </a:solidFill>
             <a:prstDash val="solid"/>
           </a:ln>
@@ -8566,14 +8408,14 @@
       </p:sp>
       <p:sp>
         <p:nvSpPr>
-          <p:cNvPr id="22" name="Stack 1 text"/>
+          <p:cNvPr id="13" name="Entity Account text"/>
           <p:cNvSpPr txBox="1"/>
           <p:nvPr/>
         </p:nvSpPr>
         <p:spPr>
           <a:xfrm>
-            <a:off x="2084832" y="5166360"/>
-            <a:ext cx="2002536" cy="502920"/>
+            <a:off x="3721608" y="2798064"/>
+            <a:ext cx="2478024" cy="822960"/>
           </a:xfrm>
           <a:prstGeom prst="rect">
             <a:avLst/>
@@ -8582,70 +8424,74 @@
           <a:ln/>
         </p:spPr>
         <p:txBody>
-          <a:bodyPr wrap="square" lIns="0" tIns="0" rIns="0" bIns="0" rtlCol="0" anchor="ctr"/>
+          <a:bodyPr wrap="square" lIns="0" tIns="0" rIns="0" bIns="0" rtlCol="0" anchor="t"/>
           <a:lstStyle/>
           <a:p>
-            <a:pPr marL="0" indent="0" algn="ctr">
+            <a:pPr marL="0" indent="0">
+              <a:spcAft>
+                <a:spcPts val="100"/>
+              </a:spcAft>
               <a:buNone/>
             </a:pPr>
             <a:r>
-              <a:rPr lang="en-US" sz="1200" dirty="0">
-                <a:solidFill>
-                  <a:srgbClr val="334155"/>
-                </a:solidFill>
-              </a:rPr>
-              <a:t>Oracle Core HCM</a:t>
-            </a:r>
-            <a:endParaRPr lang="en-US" sz="1200" dirty="0"/>
+              <a:rPr lang="en-US" sz="1450" b="1" dirty="0">
+                <a:solidFill>
+                  <a:srgbClr val="0F766E"/>
+                </a:solidFill>
+              </a:rPr>
+              <a:t>Account</a:t>
+            </a:r>
+            <a:r>
+              <a:rPr lang="en-US" sz="1100" dirty="0">
+                <a:solidFill>
+                  <a:srgbClr val="64748B"/>
+                </a:solidFill>
+              </a:rPr>
+              <a:t>  N per person</a:t>
+            </a:r>
+            <a:endParaRPr lang="en-US" sz="1400" dirty="0"/>
+          </a:p>
+          <a:p>
+            <a:pPr marL="0" indent="0">
+              <a:spcAft>
+                <a:spcPts val="100"/>
+              </a:spcAft>
+              <a:buNone/>
+            </a:pPr>
+            <a:r>
+              <a:rPr lang="en-US" sz="1150" dirty="0">
+                <a:solidFill>
+                  <a:schemeClr val="tx2"/>
+                </a:solidFill>
+              </a:rPr>
+              <a:t>Entra ID, Active Directory. Always tied to the person key.</a:t>
+            </a:r>
+            <a:endParaRPr lang="en-US" sz="1400" dirty="0"/>
           </a:p>
         </p:txBody>
       </p:sp>
       <p:sp>
         <p:nvSpPr>
-          <p:cNvPr id="23" name="Shape 18"/>
+          <p:cNvPr id="14" name="Entity Assignment"/>
           <p:cNvSpPr/>
           <p:nvPr/>
         </p:nvSpPr>
         <p:spPr>
           <a:xfrm>
-            <a:off x="4187952" y="5417820"/>
-            <a:ext cx="237744" cy="0"/>
-          </a:xfrm>
-          <a:prstGeom prst="line">
-            <a:avLst/>
-          </a:prstGeom>
-          <a:noFill/>
-          <a:ln w="22225">
-            <a:solidFill>
-              <a:srgbClr val="64748B"/>
-            </a:solidFill>
-            <a:prstDash val="solid"/>
-            <a:tailEnd type="triangle"/>
-          </a:ln>
-        </p:spPr>
-      </p:sp>
-      <p:sp>
-        <p:nvSpPr>
-          <p:cNvPr id="24" name="Stack 2"/>
-          <p:cNvSpPr/>
-          <p:nvPr/>
-        </p:nvSpPr>
-        <p:spPr>
-          <a:xfrm>
-            <a:off x="4453128" y="5166360"/>
-            <a:ext cx="2148840" cy="502920"/>
+            <a:off x="548640" y="3886200"/>
+            <a:ext cx="2697480" cy="932688"/>
           </a:xfrm>
           <a:prstGeom prst="roundRect">
             <a:avLst>
-              <a:gd name="adj" fmla="val 14545"/>
+              <a:gd name="adj" fmla="val 7843"/>
             </a:avLst>
           </a:prstGeom>
           <a:solidFill>
-            <a:srgbClr val="FFFFFF"/>
+            <a:srgbClr val="FBEEDC"/>
           </a:solidFill>
           <a:ln w="12700">
             <a:solidFill>
-              <a:srgbClr val="CBD5E1"/>
+              <a:srgbClr val="B45309"/>
             </a:solidFill>
             <a:prstDash val="solid"/>
           </a:ln>
@@ -8660,14 +8506,14 @@
       </p:sp>
       <p:sp>
         <p:nvSpPr>
-          <p:cNvPr id="25" name="Stack 2 text"/>
+          <p:cNvPr id="15" name="Entity Assignment text"/>
           <p:cNvSpPr txBox="1"/>
           <p:nvPr/>
         </p:nvSpPr>
         <p:spPr>
           <a:xfrm>
-            <a:off x="4526280" y="5166360"/>
-            <a:ext cx="2002536" cy="502920"/>
+            <a:off x="658368" y="3941064"/>
+            <a:ext cx="2478024" cy="822960"/>
           </a:xfrm>
           <a:prstGeom prst="rect">
             <a:avLst/>
@@ -8676,62 +8522,66 @@
           <a:ln/>
         </p:spPr>
         <p:txBody>
-          <a:bodyPr wrap="square" lIns="0" tIns="0" rIns="0" bIns="0" rtlCol="0" anchor="ctr"/>
+          <a:bodyPr wrap="square" lIns="0" tIns="0" rIns="0" bIns="0" rtlCol="0" anchor="t"/>
           <a:lstStyle/>
           <a:p>
-            <a:pPr marL="0" indent="0" algn="ctr">
+            <a:pPr marL="0" indent="0">
+              <a:spcAft>
+                <a:spcPts val="100"/>
+              </a:spcAft>
               <a:buNone/>
             </a:pPr>
             <a:r>
-              <a:rPr lang="en-US" sz="1200" dirty="0">
-                <a:solidFill>
-                  <a:srgbClr val="334155"/>
-                </a:solidFill>
-              </a:rPr>
-              <a:t>Entra ID HR-driven provisioning</a:t>
-            </a:r>
-            <a:endParaRPr lang="en-US" sz="1200" dirty="0"/>
+              <a:rPr lang="en-US" sz="1450" b="1" dirty="0">
+                <a:solidFill>
+                  <a:srgbClr val="B45309"/>
+                </a:solidFill>
+              </a:rPr>
+              <a:t>Assignment</a:t>
+            </a:r>
+            <a:r>
+              <a:rPr lang="en-US" sz="1100" dirty="0">
+                <a:solidFill>
+                  <a:srgbClr val="64748B"/>
+                </a:solidFill>
+              </a:rPr>
+              <a:t>  N per affiliation</a:t>
+            </a:r>
+            <a:endParaRPr lang="en-US" sz="1400" dirty="0"/>
+          </a:p>
+          <a:p>
+            <a:pPr marL="0" indent="0">
+              <a:spcAft>
+                <a:spcPts val="100"/>
+              </a:spcAft>
+              <a:buNone/>
+            </a:pPr>
+            <a:r>
+              <a:rPr lang="en-US" sz="1150" dirty="0">
+                <a:solidFill>
+                  <a:schemeClr val="tx2"/>
+                </a:solidFill>
+              </a:rPr>
+              <a:t>Position, status, supervisor (a Person). Effective-dated.</a:t>
+            </a:r>
+            <a:endParaRPr lang="en-US" sz="1400" dirty="0"/>
           </a:p>
         </p:txBody>
       </p:sp>
       <p:sp>
         <p:nvSpPr>
-          <p:cNvPr id="26" name="Shape 21"/>
+          <p:cNvPr id="16" name="Entity Org unit"/>
           <p:cNvSpPr/>
           <p:nvPr/>
         </p:nvSpPr>
         <p:spPr>
           <a:xfrm>
-            <a:off x="6629400" y="5417820"/>
-            <a:ext cx="237744" cy="0"/>
-          </a:xfrm>
-          <a:prstGeom prst="line">
-            <a:avLst/>
-          </a:prstGeom>
-          <a:noFill/>
-          <a:ln w="22225">
-            <a:solidFill>
-              <a:srgbClr val="64748B"/>
-            </a:solidFill>
-            <a:prstDash val="solid"/>
-            <a:tailEnd type="triangle"/>
-          </a:ln>
-        </p:spPr>
-      </p:sp>
-      <p:sp>
-        <p:nvSpPr>
-          <p:cNvPr id="27" name="Stack 3"/>
-          <p:cNvSpPr/>
-          <p:nvPr/>
-        </p:nvSpPr>
-        <p:spPr>
-          <a:xfrm>
-            <a:off x="6894576" y="5166360"/>
-            <a:ext cx="2148840" cy="502920"/>
+            <a:off x="3611880" y="3886200"/>
+            <a:ext cx="2697480" cy="932688"/>
           </a:xfrm>
           <a:prstGeom prst="roundRect">
             <a:avLst>
-              <a:gd name="adj" fmla="val 14545"/>
+              <a:gd name="adj" fmla="val 7843"/>
             </a:avLst>
           </a:prstGeom>
           <a:solidFill>
@@ -8739,7 +8589,7 @@
           </a:solidFill>
           <a:ln w="12700">
             <a:solidFill>
-              <a:srgbClr val="CBD5E1"/>
+              <a:srgbClr val="B45309"/>
             </a:solidFill>
             <a:prstDash val="solid"/>
           </a:ln>
@@ -8754,14 +8604,14 @@
       </p:sp>
       <p:sp>
         <p:nvSpPr>
-          <p:cNvPr id="28" name="Stack 3 text"/>
+          <p:cNvPr id="17" name="Entity Org unit text"/>
           <p:cNvSpPr txBox="1"/>
           <p:nvPr/>
         </p:nvSpPr>
         <p:spPr>
           <a:xfrm>
-            <a:off x="6967728" y="5166360"/>
-            <a:ext cx="2002536" cy="502920"/>
+            <a:off x="3721608" y="3941064"/>
+            <a:ext cx="2478024" cy="822960"/>
           </a:xfrm>
           <a:prstGeom prst="rect">
             <a:avLst/>
@@ -8770,62 +8620,1161 @@
           <a:ln/>
         </p:spPr>
         <p:txBody>
-          <a:bodyPr wrap="square" lIns="0" tIns="0" rIns="0" bIns="0" rtlCol="0" anchor="ctr"/>
+          <a:bodyPr wrap="square" lIns="0" tIns="0" rIns="0" bIns="0" rtlCol="0" anchor="t"/>
           <a:lstStyle/>
           <a:p>
-            <a:pPr marL="0" indent="0" algn="ctr">
+            <a:pPr marL="0" indent="0">
+              <a:spcAft>
+                <a:spcPts val="100"/>
+              </a:spcAft>
               <a:buNone/>
             </a:pPr>
             <a:r>
-              <a:rPr lang="en-US" sz="1200" dirty="0">
-                <a:solidFill>
-                  <a:srgbClr val="334155"/>
-                </a:solidFill>
-              </a:rPr>
-              <a:t>Entra ID and Active Directory</a:t>
-            </a:r>
-            <a:endParaRPr lang="en-US" sz="1200" dirty="0"/>
+              <a:rPr lang="en-US" sz="1450" b="1" dirty="0">
+                <a:solidFill>
+                  <a:srgbClr val="B45309"/>
+                </a:solidFill>
+              </a:rPr>
+              <a:t>Org unit</a:t>
+            </a:r>
+            <a:r>
+              <a:rPr lang="en-US" sz="1100" dirty="0">
+                <a:solidFill>
+                  <a:srgbClr val="64748B"/>
+                </a:solidFill>
+              </a:rPr>
+              <a:t>  hierarchy</a:t>
+            </a:r>
+            <a:endParaRPr lang="en-US" sz="1400" dirty="0"/>
+          </a:p>
+          <a:p>
+            <a:pPr marL="0" indent="0">
+              <a:spcAft>
+                <a:spcPts val="100"/>
+              </a:spcAft>
+              <a:buNone/>
+            </a:pPr>
+            <a:r>
+              <a:rPr lang="en-US" sz="1150" dirty="0">
+                <a:solidFill>
+                  <a:schemeClr val="tx2"/>
+                </a:solidFill>
+              </a:rPr>
+              <a:t>Parent org unit; agency organization codes.</a:t>
+            </a:r>
+            <a:endParaRPr lang="en-US" sz="1400" dirty="0"/>
           </a:p>
         </p:txBody>
       </p:sp>
       <p:sp>
         <p:nvSpPr>
-          <p:cNvPr id="29" name="Shape 24"/>
+          <p:cNvPr id="18" name="Shape 16"/>
           <p:cNvSpPr/>
           <p:nvPr/>
         </p:nvSpPr>
         <p:spPr>
           <a:xfrm>
-            <a:off x="9070848" y="5417820"/>
-            <a:ext cx="237744" cy="0"/>
+            <a:off x="3246120" y="2066544"/>
+            <a:ext cx="365760" cy="0"/>
           </a:xfrm>
           <a:prstGeom prst="line">
             <a:avLst/>
           </a:prstGeom>
           <a:noFill/>
-          <a:ln w="22225">
+          <a:ln w="19050">
             <a:solidFill>
               <a:srgbClr val="64748B"/>
             </a:solidFill>
             <a:prstDash val="solid"/>
-            <a:tailEnd type="triangle"/>
           </a:ln>
         </p:spPr>
       </p:sp>
       <p:sp>
         <p:nvSpPr>
-          <p:cNvPr id="30" name="Stack 4"/>
+          <p:cNvPr id="19" name="Shape 17"/>
           <p:cNvSpPr/>
           <p:nvPr/>
         </p:nvSpPr>
         <p:spPr>
           <a:xfrm>
-            <a:off x="9336024" y="5166360"/>
-            <a:ext cx="2148840" cy="502920"/>
+            <a:off x="1897380" y="2532888"/>
+            <a:ext cx="0" cy="210312"/>
+          </a:xfrm>
+          <a:prstGeom prst="line">
+            <a:avLst/>
+          </a:prstGeom>
+          <a:noFill/>
+          <a:ln w="19050">
+            <a:solidFill>
+              <a:srgbClr val="64748B"/>
+            </a:solidFill>
+            <a:prstDash val="solid"/>
+          </a:ln>
+        </p:spPr>
+      </p:sp>
+      <p:sp>
+        <p:nvSpPr>
+          <p:cNvPr id="20" name="Shape 18"/>
+          <p:cNvSpPr/>
+          <p:nvPr/>
+        </p:nvSpPr>
+        <p:spPr>
+          <a:xfrm>
+            <a:off x="3246120" y="2395728"/>
+            <a:ext cx="365760" cy="484632"/>
+          </a:xfrm>
+          <a:prstGeom prst="line">
+            <a:avLst/>
+          </a:prstGeom>
+          <a:noFill/>
+          <a:ln w="19050">
+            <a:solidFill>
+              <a:srgbClr val="64748B"/>
+            </a:solidFill>
+            <a:prstDash val="solid"/>
+          </a:ln>
+        </p:spPr>
+      </p:sp>
+      <p:sp>
+        <p:nvSpPr>
+          <p:cNvPr id="21" name="Shape 19"/>
+          <p:cNvSpPr/>
+          <p:nvPr/>
+        </p:nvSpPr>
+        <p:spPr>
+          <a:xfrm>
+            <a:off x="1897380" y="3675888"/>
+            <a:ext cx="0" cy="210312"/>
+          </a:xfrm>
+          <a:prstGeom prst="line">
+            <a:avLst/>
+          </a:prstGeom>
+          <a:noFill/>
+          <a:ln w="19050">
+            <a:solidFill>
+              <a:srgbClr val="64748B"/>
+            </a:solidFill>
+            <a:prstDash val="solid"/>
+          </a:ln>
+        </p:spPr>
+      </p:sp>
+      <p:sp>
+        <p:nvSpPr>
+          <p:cNvPr id="22" name="Shape 20"/>
+          <p:cNvSpPr/>
+          <p:nvPr/>
+        </p:nvSpPr>
+        <p:spPr>
+          <a:xfrm>
+            <a:off x="3246120" y="4352544"/>
+            <a:ext cx="365760" cy="0"/>
+          </a:xfrm>
+          <a:prstGeom prst="line">
+            <a:avLst/>
+          </a:prstGeom>
+          <a:noFill/>
+          <a:ln w="19050">
+            <a:solidFill>
+              <a:srgbClr val="64748B"/>
+            </a:solidFill>
+            <a:prstDash val="solid"/>
+          </a:ln>
+        </p:spPr>
+      </p:sp>
+      <p:sp>
+        <p:nvSpPr>
+          <p:cNvPr id="23" name="Model cases"/>
+          <p:cNvSpPr txBox="1"/>
+          <p:nvPr/>
+        </p:nvSpPr>
+        <p:spPr>
+          <a:xfrm>
+            <a:off x="548640" y="4892040"/>
+            <a:ext cx="5760720" cy="548640"/>
+          </a:xfrm>
+          <a:prstGeom prst="rect">
+            <a:avLst/>
+          </a:prstGeom>
+          <a:noFill/>
+          <a:ln/>
+        </p:spPr>
+        <p:txBody>
+          <a:bodyPr wrap="square" lIns="0" tIns="0" rIns="0" bIns="0" rtlCol="0" anchor="t"/>
+          <a:lstStyle/>
+          <a:p>
+            <a:pPr marL="0" indent="0">
+              <a:buNone/>
+            </a:pPr>
+            <a:r>
+              <a:rPr lang="en-US" sz="1250" b="1" dirty="0">
+                <a:solidFill>
+                  <a:srgbClr val="1F2A44"/>
+                </a:solidFill>
+              </a:rPr>
+              <a:t>Proposed canonical model: </a:t>
+            </a:r>
+            <a:r>
+              <a:rPr lang="en-US" sz="1250" dirty="0">
+                <a:solidFill>
+                  <a:schemeClr val="tx2"/>
+                </a:solidFill>
+              </a:rPr>
+              <a:t>a rehire or conversion creates a new affiliation for the same person; a reorganization adds assignment rows, and nothing is overwritten.</a:t>
+            </a:r>
+            <a:endParaRPr lang="en-US" sz="1250" dirty="0"/>
+          </a:p>
+        </p:txBody>
+      </p:sp>
+      <p:sp>
+        <p:nvSpPr>
+          <p:cNvPr id="24" name="Physical head"/>
+          <p:cNvSpPr txBox="1"/>
+          <p:nvPr/>
+        </p:nvSpPr>
+        <p:spPr>
+          <a:xfrm>
+            <a:off x="6537960" y="1234440"/>
+            <a:ext cx="5120640" cy="274320"/>
+          </a:xfrm>
+          <a:prstGeom prst="rect">
+            <a:avLst/>
+          </a:prstGeom>
+          <a:noFill/>
+          <a:ln/>
+        </p:spPr>
+        <p:txBody>
+          <a:bodyPr wrap="square" lIns="0" tIns="0" rIns="0" bIns="0" rtlCol="0" anchor="t"/>
+          <a:lstStyle/>
+          <a:p>
+            <a:pPr marL="0" indent="0">
+              <a:buNone/>
+            </a:pPr>
+            <a:r>
+              <a:rPr lang="en-US" sz="1200" b="1" dirty="0">
+                <a:solidFill>
+                  <a:srgbClr val="64748B"/>
+                </a:solidFill>
+              </a:rPr>
+              <a:t>PHYSICAL REALIZATION</a:t>
+            </a:r>
+            <a:endParaRPr lang="en-US" sz="1200" dirty="0"/>
+          </a:p>
+        </p:txBody>
+      </p:sp>
+      <p:graphicFrame>
+        <p:nvGraphicFramePr>
+          <p:cNvPr id="28" name="Table 0"/>
+          <p:cNvGraphicFramePr>
+            <a:graphicFrameLocks noGrp="1"/>
+          </p:cNvGraphicFramePr>
+          <p:nvPr>
+            <p:extLst>
+              <p:ext uri="{D42A27DB-BD31-4B8C-83A1-F6EECF244321}">
+                <p14:modId xmlns:p14="http://schemas.microsoft.com/office/powerpoint/2010/main" val="1579011935"/>
+              </p:ext>
+            </p:extLst>
+          </p:nvPr>
+        </p:nvGraphicFramePr>
+        <p:xfrm>
+          <a:off x="6537960" y="1572768"/>
+          <a:ext cx="9144000" cy="914400"/>
+        </p:xfrm>
+        <a:graphic>
+          <a:graphicData uri="http://schemas.openxmlformats.org/drawingml/2006/table">
+            <a:tbl>
+              <a:tblPr/>
+              <a:tblGrid>
+                <a:gridCol w="1463040">
+                  <a:extLst>
+                    <a:ext uri="{9D8B030D-6E8A-4147-A177-3AD203B41FA5}">
+                      <a16:colId xmlns:a16="http://schemas.microsoft.com/office/drawing/2014/main" val="20000"/>
+                    </a:ext>
+                  </a:extLst>
+                </a:gridCol>
+                <a:gridCol w="3657600">
+                  <a:extLst>
+                    <a:ext uri="{9D8B030D-6E8A-4147-A177-3AD203B41FA5}">
+                      <a16:colId xmlns:a16="http://schemas.microsoft.com/office/drawing/2014/main" val="20001"/>
+                    </a:ext>
+                  </a:extLst>
+                </a:gridCol>
+              </a:tblGrid>
+              <a:tr h="347472">
+                <a:tc>
+                  <a:txBody>
+                    <a:bodyPr/>
+                    <a:lstStyle/>
+                    <a:p>
+                      <a:pPr marL="0" indent="0">
+                        <a:buNone/>
+                      </a:pPr>
+                      <a:r>
+                        <a:rPr lang="en-US" sz="1150" b="1" dirty="0">
+                          <a:solidFill>
+                            <a:srgbClr val="FFFFFF"/>
+                          </a:solidFill>
+                          <a:latin typeface="Calibri" pitchFamily="34" charset="0"/>
+                          <a:ea typeface="Calibri" pitchFamily="34" charset="-122"/>
+                          <a:cs typeface="Calibri" pitchFamily="34" charset="-120"/>
+                        </a:rPr>
+                        <a:t>Logical</a:t>
+                      </a:r>
+                      <a:endParaRPr lang="en-US" sz="1150" dirty="0">
+                        <a:latin typeface="Calibri" charset="0"/>
+                        <a:ea typeface="Calibri" charset="0"/>
+                        <a:cs typeface="Calibri" charset="0"/>
+                      </a:endParaRPr>
+                    </a:p>
+                  </a:txBody>
+                  <a:tcPr anchor="ctr">
+                    <a:lnL w="9525" cap="flat" cmpd="sng" algn="ctr">
+                      <a:solidFill>
+                        <a:srgbClr val="CBD5E1"/>
+                      </a:solidFill>
+                      <a:prstDash val="solid"/>
+                      <a:round/>
+                      <a:headEnd type="none" w="med" len="med"/>
+                      <a:tailEnd type="none" w="med" len="med"/>
+                    </a:lnL>
+                    <a:lnR w="9525" cap="flat" cmpd="sng" algn="ctr">
+                      <a:solidFill>
+                        <a:srgbClr val="CBD5E1"/>
+                      </a:solidFill>
+                      <a:prstDash val="solid"/>
+                      <a:round/>
+                      <a:headEnd type="none" w="med" len="med"/>
+                      <a:tailEnd type="none" w="med" len="med"/>
+                    </a:lnR>
+                    <a:lnT w="9525" cap="flat" cmpd="sng" algn="ctr">
+                      <a:solidFill>
+                        <a:srgbClr val="CBD5E1"/>
+                      </a:solidFill>
+                      <a:prstDash val="solid"/>
+                      <a:round/>
+                      <a:headEnd type="none" w="med" len="med"/>
+                      <a:tailEnd type="none" w="med" len="med"/>
+                    </a:lnT>
+                    <a:lnB w="9525" cap="flat" cmpd="sng" algn="ctr">
+                      <a:solidFill>
+                        <a:srgbClr val="CBD5E1"/>
+                      </a:solidFill>
+                      <a:prstDash val="solid"/>
+                      <a:round/>
+                      <a:headEnd type="none" w="med" len="med"/>
+                      <a:tailEnd type="none" w="med" len="med"/>
+                    </a:lnB>
+                    <a:solidFill>
+                      <a:srgbClr val="1F2A44"/>
+                    </a:solidFill>
+                  </a:tcPr>
+                </a:tc>
+                <a:tc>
+                  <a:txBody>
+                    <a:bodyPr/>
+                    <a:lstStyle/>
+                    <a:p>
+                      <a:pPr marL="0" indent="0">
+                        <a:buNone/>
+                      </a:pPr>
+                      <a:r>
+                        <a:rPr lang="en-US" sz="1150" b="1" dirty="0">
+                          <a:solidFill>
+                            <a:srgbClr val="FFFFFF"/>
+                          </a:solidFill>
+                          <a:latin typeface="Calibri" pitchFamily="34" charset="0"/>
+                          <a:ea typeface="Calibri" pitchFamily="34" charset="-122"/>
+                          <a:cs typeface="Calibri" pitchFamily="34" charset="-120"/>
+                        </a:rPr>
+                        <a:t>Where it lives</a:t>
+                      </a:r>
+                      <a:endParaRPr lang="en-US" sz="1150" dirty="0">
+                        <a:latin typeface="Calibri" charset="0"/>
+                        <a:ea typeface="Calibri" charset="0"/>
+                        <a:cs typeface="Calibri" charset="0"/>
+                      </a:endParaRPr>
+                    </a:p>
+                  </a:txBody>
+                  <a:tcPr anchor="ctr">
+                    <a:lnL w="9525" cap="flat" cmpd="sng" algn="ctr">
+                      <a:solidFill>
+                        <a:srgbClr val="CBD5E1"/>
+                      </a:solidFill>
+                      <a:prstDash val="solid"/>
+                      <a:round/>
+                      <a:headEnd type="none" w="med" len="med"/>
+                      <a:tailEnd type="none" w="med" len="med"/>
+                    </a:lnL>
+                    <a:lnR w="9525" cap="flat" cmpd="sng" algn="ctr">
+                      <a:solidFill>
+                        <a:srgbClr val="CBD5E1"/>
+                      </a:solidFill>
+                      <a:prstDash val="solid"/>
+                      <a:round/>
+                      <a:headEnd type="none" w="med" len="med"/>
+                      <a:tailEnd type="none" w="med" len="med"/>
+                    </a:lnR>
+                    <a:lnT w="9525" cap="flat" cmpd="sng" algn="ctr">
+                      <a:solidFill>
+                        <a:srgbClr val="CBD5E1"/>
+                      </a:solidFill>
+                      <a:prstDash val="solid"/>
+                      <a:round/>
+                      <a:headEnd type="none" w="med" len="med"/>
+                      <a:tailEnd type="none" w="med" len="med"/>
+                    </a:lnT>
+                    <a:lnB w="9525" cap="flat" cmpd="sng" algn="ctr">
+                      <a:solidFill>
+                        <a:srgbClr val="CBD5E1"/>
+                      </a:solidFill>
+                      <a:prstDash val="solid"/>
+                      <a:round/>
+                      <a:headEnd type="none" w="med" len="med"/>
+                      <a:tailEnd type="none" w="med" len="med"/>
+                    </a:lnB>
+                    <a:solidFill>
+                      <a:srgbClr val="1F2A44"/>
+                    </a:solidFill>
+                  </a:tcPr>
+                </a:tc>
+                <a:extLst>
+                  <a:ext uri="{0D108BD9-81ED-4DB2-BD59-A6C34878D82A}">
+                    <a16:rowId xmlns:a16="http://schemas.microsoft.com/office/drawing/2014/main" val="10000"/>
+                  </a:ext>
+                </a:extLst>
+              </a:tr>
+              <a:tr h="566928">
+                <a:tc>
+                  <a:txBody>
+                    <a:bodyPr/>
+                    <a:lstStyle/>
+                    <a:p>
+                      <a:pPr marL="0" indent="0">
+                        <a:buNone/>
+                      </a:pPr>
+                      <a:r>
+                        <a:rPr lang="en-US" sz="1150" b="1" dirty="0">
+                          <a:solidFill>
+                            <a:srgbClr val="1F2A44"/>
+                          </a:solidFill>
+                          <a:latin typeface="Calibri" pitchFamily="34" charset="0"/>
+                          <a:ea typeface="Calibri" pitchFamily="34" charset="-122"/>
+                          <a:cs typeface="Calibri" pitchFamily="34" charset="-120"/>
+                        </a:rPr>
+                        <a:t>Person, Identifier</a:t>
+                      </a:r>
+                      <a:endParaRPr lang="en-US" sz="1150" dirty="0">
+                        <a:latin typeface="Calibri" charset="0"/>
+                        <a:ea typeface="Calibri" charset="0"/>
+                        <a:cs typeface="Calibri" charset="0"/>
+                      </a:endParaRPr>
+                    </a:p>
+                  </a:txBody>
+                  <a:tcPr anchor="ctr">
+                    <a:lnL w="9525" cap="flat" cmpd="sng" algn="ctr">
+                      <a:solidFill>
+                        <a:srgbClr val="CBD5E1"/>
+                      </a:solidFill>
+                      <a:prstDash val="solid"/>
+                      <a:round/>
+                      <a:headEnd type="none" w="med" len="med"/>
+                      <a:tailEnd type="none" w="med" len="med"/>
+                    </a:lnL>
+                    <a:lnR w="9525" cap="flat" cmpd="sng" algn="ctr">
+                      <a:solidFill>
+                        <a:srgbClr val="CBD5E1"/>
+                      </a:solidFill>
+                      <a:prstDash val="solid"/>
+                      <a:round/>
+                      <a:headEnd type="none" w="med" len="med"/>
+                      <a:tailEnd type="none" w="med" len="med"/>
+                    </a:lnR>
+                    <a:lnT w="9525" cap="flat" cmpd="sng" algn="ctr">
+                      <a:solidFill>
+                        <a:srgbClr val="CBD5E1"/>
+                      </a:solidFill>
+                      <a:prstDash val="solid"/>
+                      <a:round/>
+                      <a:headEnd type="none" w="med" len="med"/>
+                      <a:tailEnd type="none" w="med" len="med"/>
+                    </a:lnT>
+                    <a:lnB w="9525" cap="flat" cmpd="sng" algn="ctr">
+                      <a:solidFill>
+                        <a:srgbClr val="CBD5E1"/>
+                      </a:solidFill>
+                      <a:prstDash val="solid"/>
+                      <a:round/>
+                      <a:headEnd type="none" w="med" len="med"/>
+                      <a:tailEnd type="none" w="med" len="med"/>
+                    </a:lnB>
+                    <a:solidFill>
+                      <a:srgbClr val="FFFFFF"/>
+                    </a:solidFill>
+                  </a:tcPr>
+                </a:tc>
+                <a:tc>
+                  <a:txBody>
+                    <a:bodyPr/>
+                    <a:lstStyle/>
+                    <a:p>
+                      <a:pPr marL="0" indent="0">
+                        <a:buNone/>
+                      </a:pPr>
+                      <a:r>
+                        <a:rPr lang="en-US" sz="1150" dirty="0">
+                          <a:solidFill>
+                            <a:srgbClr val="334155"/>
+                          </a:solidFill>
+                          <a:latin typeface="Calibri" pitchFamily="34" charset="0"/>
+                          <a:ea typeface="Calibri" pitchFamily="34" charset="-122"/>
+                          <a:cs typeface="Calibri" pitchFamily="34" charset="-120"/>
+                        </a:rPr>
+                        <a:t>Agency-controlled person-key registry. The SSN stays in HR; it is not sent to directories.</a:t>
+                      </a:r>
+                      <a:endParaRPr lang="en-US" sz="1150" dirty="0">
+                        <a:latin typeface="Calibri" charset="0"/>
+                        <a:ea typeface="Calibri" charset="0"/>
+                        <a:cs typeface="Calibri" charset="0"/>
+                      </a:endParaRPr>
+                    </a:p>
+                  </a:txBody>
+                  <a:tcPr anchor="ctr">
+                    <a:lnL w="9525" cap="flat" cmpd="sng" algn="ctr">
+                      <a:solidFill>
+                        <a:srgbClr val="CBD5E1"/>
+                      </a:solidFill>
+                      <a:prstDash val="solid"/>
+                      <a:round/>
+                      <a:headEnd type="none" w="med" len="med"/>
+                      <a:tailEnd type="none" w="med" len="med"/>
+                    </a:lnL>
+                    <a:lnR w="9525" cap="flat" cmpd="sng" algn="ctr">
+                      <a:solidFill>
+                        <a:srgbClr val="CBD5E1"/>
+                      </a:solidFill>
+                      <a:prstDash val="solid"/>
+                      <a:round/>
+                      <a:headEnd type="none" w="med" len="med"/>
+                      <a:tailEnd type="none" w="med" len="med"/>
+                    </a:lnR>
+                    <a:lnT w="9525" cap="flat" cmpd="sng" algn="ctr">
+                      <a:solidFill>
+                        <a:srgbClr val="CBD5E1"/>
+                      </a:solidFill>
+                      <a:prstDash val="solid"/>
+                      <a:round/>
+                      <a:headEnd type="none" w="med" len="med"/>
+                      <a:tailEnd type="none" w="med" len="med"/>
+                    </a:lnT>
+                    <a:lnB w="9525" cap="flat" cmpd="sng" algn="ctr">
+                      <a:solidFill>
+                        <a:srgbClr val="CBD5E1"/>
+                      </a:solidFill>
+                      <a:prstDash val="solid"/>
+                      <a:round/>
+                      <a:headEnd type="none" w="med" len="med"/>
+                      <a:tailEnd type="none" w="med" len="med"/>
+                    </a:lnB>
+                    <a:solidFill>
+                      <a:srgbClr val="FFFFFF"/>
+                    </a:solidFill>
+                  </a:tcPr>
+                </a:tc>
+                <a:extLst>
+                  <a:ext uri="{0D108BD9-81ED-4DB2-BD59-A6C34878D82A}">
+                    <a16:rowId xmlns:a16="http://schemas.microsoft.com/office/drawing/2014/main" val="10001"/>
+                  </a:ext>
+                </a:extLst>
+              </a:tr>
+              <a:tr h="768096">
+                <a:tc>
+                  <a:txBody>
+                    <a:bodyPr/>
+                    <a:lstStyle/>
+                    <a:p>
+                      <a:pPr marL="0" indent="0">
+                        <a:buNone/>
+                      </a:pPr>
+                      <a:r>
+                        <a:rPr lang="en-US" sz="1150" b="1" dirty="0">
+                          <a:solidFill>
+                            <a:srgbClr val="1F2A44"/>
+                          </a:solidFill>
+                          <a:latin typeface="Calibri" pitchFamily="34" charset="0"/>
+                          <a:ea typeface="Calibri" pitchFamily="34" charset="-122"/>
+                          <a:cs typeface="Calibri" pitchFamily="34" charset="-120"/>
+                        </a:rPr>
+                        <a:t>Affiliation, Assignment</a:t>
+                      </a:r>
+                      <a:endParaRPr lang="en-US" sz="1150" dirty="0">
+                        <a:latin typeface="Calibri" charset="0"/>
+                        <a:ea typeface="Calibri" charset="0"/>
+                        <a:cs typeface="Calibri" charset="0"/>
+                      </a:endParaRPr>
+                    </a:p>
+                  </a:txBody>
+                  <a:tcPr anchor="ctr">
+                    <a:lnL w="9525" cap="flat" cmpd="sng" algn="ctr">
+                      <a:solidFill>
+                        <a:srgbClr val="CBD5E1"/>
+                      </a:solidFill>
+                      <a:prstDash val="solid"/>
+                      <a:round/>
+                      <a:headEnd type="none" w="med" len="med"/>
+                      <a:tailEnd type="none" w="med" len="med"/>
+                    </a:lnL>
+                    <a:lnR w="9525" cap="flat" cmpd="sng" algn="ctr">
+                      <a:solidFill>
+                        <a:srgbClr val="CBD5E1"/>
+                      </a:solidFill>
+                      <a:prstDash val="solid"/>
+                      <a:round/>
+                      <a:headEnd type="none" w="med" len="med"/>
+                      <a:tailEnd type="none" w="med" len="med"/>
+                    </a:lnR>
+                    <a:lnT w="9525" cap="flat" cmpd="sng" algn="ctr">
+                      <a:solidFill>
+                        <a:srgbClr val="CBD5E1"/>
+                      </a:solidFill>
+                      <a:prstDash val="solid"/>
+                      <a:round/>
+                      <a:headEnd type="none" w="med" len="med"/>
+                      <a:tailEnd type="none" w="med" len="med"/>
+                    </a:lnT>
+                    <a:lnB w="9525" cap="flat" cmpd="sng" algn="ctr">
+                      <a:solidFill>
+                        <a:srgbClr val="CBD5E1"/>
+                      </a:solidFill>
+                      <a:prstDash val="solid"/>
+                      <a:round/>
+                      <a:headEnd type="none" w="med" len="med"/>
+                      <a:tailEnd type="none" w="med" len="med"/>
+                    </a:lnB>
+                    <a:solidFill>
+                      <a:srgbClr val="FFFFFF"/>
+                    </a:solidFill>
+                  </a:tcPr>
+                </a:tc>
+                <a:tc>
+                  <a:txBody>
+                    <a:bodyPr/>
+                    <a:lstStyle/>
+                    <a:p>
+                      <a:pPr marL="0" indent="0">
+                        <a:buNone/>
+                      </a:pPr>
+                      <a:r>
+                        <a:rPr lang="en-US" sz="1150" dirty="0">
+                          <a:solidFill>
+                            <a:srgbClr val="334155"/>
+                          </a:solidFill>
+                          <a:latin typeface="Calibri" pitchFamily="34" charset="0"/>
+                          <a:ea typeface="Calibri" pitchFamily="34" charset="-122"/>
+                          <a:cs typeface="Calibri" pitchFamily="34" charset="-120"/>
+                        </a:rPr>
+                        <a:t>Interim: the current HR system, subject to data profiling and authority review. At go-live: Core HCM records.</a:t>
+                      </a:r>
+                      <a:endParaRPr lang="en-US" sz="1150" dirty="0">
+                        <a:latin typeface="Calibri" charset="0"/>
+                        <a:ea typeface="Calibri" charset="0"/>
+                        <a:cs typeface="Calibri" charset="0"/>
+                      </a:endParaRPr>
+                    </a:p>
+                  </a:txBody>
+                  <a:tcPr anchor="ctr">
+                    <a:lnL w="9525" cap="flat" cmpd="sng" algn="ctr">
+                      <a:solidFill>
+                        <a:srgbClr val="CBD5E1"/>
+                      </a:solidFill>
+                      <a:prstDash val="solid"/>
+                      <a:round/>
+                      <a:headEnd type="none" w="med" len="med"/>
+                      <a:tailEnd type="none" w="med" len="med"/>
+                    </a:lnL>
+                    <a:lnR w="9525" cap="flat" cmpd="sng" algn="ctr">
+                      <a:solidFill>
+                        <a:srgbClr val="CBD5E1"/>
+                      </a:solidFill>
+                      <a:prstDash val="solid"/>
+                      <a:round/>
+                      <a:headEnd type="none" w="med" len="med"/>
+                      <a:tailEnd type="none" w="med" len="med"/>
+                    </a:lnR>
+                    <a:lnT w="9525" cap="flat" cmpd="sng" algn="ctr">
+                      <a:solidFill>
+                        <a:srgbClr val="CBD5E1"/>
+                      </a:solidFill>
+                      <a:prstDash val="solid"/>
+                      <a:round/>
+                      <a:headEnd type="none" w="med" len="med"/>
+                      <a:tailEnd type="none" w="med" len="med"/>
+                    </a:lnT>
+                    <a:lnB w="9525" cap="flat" cmpd="sng" algn="ctr">
+                      <a:solidFill>
+                        <a:srgbClr val="CBD5E1"/>
+                      </a:solidFill>
+                      <a:prstDash val="solid"/>
+                      <a:round/>
+                      <a:headEnd type="none" w="med" len="med"/>
+                      <a:tailEnd type="none" w="med" len="med"/>
+                    </a:lnB>
+                    <a:solidFill>
+                      <a:srgbClr val="FFFFFF"/>
+                    </a:solidFill>
+                  </a:tcPr>
+                </a:tc>
+                <a:extLst>
+                  <a:ext uri="{0D108BD9-81ED-4DB2-BD59-A6C34878D82A}">
+                    <a16:rowId xmlns:a16="http://schemas.microsoft.com/office/drawing/2014/main" val="10002"/>
+                  </a:ext>
+                </a:extLst>
+              </a:tr>
+              <a:tr h="548640">
+                <a:tc>
+                  <a:txBody>
+                    <a:bodyPr/>
+                    <a:lstStyle/>
+                    <a:p>
+                      <a:pPr marL="0" indent="0">
+                        <a:buNone/>
+                      </a:pPr>
+                      <a:r>
+                        <a:rPr lang="en-US" sz="1150" b="1" dirty="0">
+                          <a:solidFill>
+                            <a:srgbClr val="1F2A44"/>
+                          </a:solidFill>
+                          <a:latin typeface="Calibri" pitchFamily="34" charset="0"/>
+                          <a:ea typeface="Calibri" pitchFamily="34" charset="-122"/>
+                          <a:cs typeface="Calibri" pitchFamily="34" charset="-120"/>
+                        </a:rPr>
+                        <a:t>In transit</a:t>
+                      </a:r>
+                      <a:endParaRPr lang="en-US" sz="1150" dirty="0">
+                        <a:latin typeface="Calibri" charset="0"/>
+                        <a:ea typeface="Calibri" charset="0"/>
+                        <a:cs typeface="Calibri" charset="0"/>
+                      </a:endParaRPr>
+                    </a:p>
+                  </a:txBody>
+                  <a:tcPr anchor="ctr">
+                    <a:lnL w="9525" cap="flat" cmpd="sng" algn="ctr">
+                      <a:solidFill>
+                        <a:srgbClr val="CBD5E1"/>
+                      </a:solidFill>
+                      <a:prstDash val="solid"/>
+                      <a:round/>
+                      <a:headEnd type="none" w="med" len="med"/>
+                      <a:tailEnd type="none" w="med" len="med"/>
+                    </a:lnL>
+                    <a:lnR w="9525" cap="flat" cmpd="sng" algn="ctr">
+                      <a:solidFill>
+                        <a:srgbClr val="CBD5E1"/>
+                      </a:solidFill>
+                      <a:prstDash val="solid"/>
+                      <a:round/>
+                      <a:headEnd type="none" w="med" len="med"/>
+                      <a:tailEnd type="none" w="med" len="med"/>
+                    </a:lnR>
+                    <a:lnT w="9525" cap="flat" cmpd="sng" algn="ctr">
+                      <a:solidFill>
+                        <a:srgbClr val="CBD5E1"/>
+                      </a:solidFill>
+                      <a:prstDash val="solid"/>
+                      <a:round/>
+                      <a:headEnd type="none" w="med" len="med"/>
+                      <a:tailEnd type="none" w="med" len="med"/>
+                    </a:lnT>
+                    <a:lnB w="9525" cap="flat" cmpd="sng" algn="ctr">
+                      <a:solidFill>
+                        <a:srgbClr val="CBD5E1"/>
+                      </a:solidFill>
+                      <a:prstDash val="solid"/>
+                      <a:round/>
+                      <a:headEnd type="none" w="med" len="med"/>
+                      <a:tailEnd type="none" w="med" len="med"/>
+                    </a:lnB>
+                    <a:solidFill>
+                      <a:srgbClr val="FFFFFF"/>
+                    </a:solidFill>
+                  </a:tcPr>
+                </a:tc>
+                <a:tc>
+                  <a:txBody>
+                    <a:bodyPr/>
+                    <a:lstStyle/>
+                    <a:p>
+                      <a:pPr marL="0" indent="0">
+                        <a:buNone/>
+                      </a:pPr>
+                      <a:r>
+                        <a:rPr lang="en-US" sz="1150" dirty="0">
+                          <a:solidFill>
+                            <a:srgbClr val="334155"/>
+                          </a:solidFill>
+                          <a:latin typeface="Calibri" pitchFamily="34" charset="0"/>
+                          <a:ea typeface="Calibri" pitchFamily="34" charset="-122"/>
+                          <a:cs typeface="Calibri" pitchFamily="34" charset="-120"/>
+                        </a:rPr>
+                        <a:t>SCIM 2.0 (core and enterprise user schemas) through Entra ID inbound provisioning.</a:t>
+                      </a:r>
+                      <a:endParaRPr lang="en-US" sz="1150" dirty="0">
+                        <a:latin typeface="Calibri" charset="0"/>
+                        <a:ea typeface="Calibri" charset="0"/>
+                        <a:cs typeface="Calibri" charset="0"/>
+                      </a:endParaRPr>
+                    </a:p>
+                  </a:txBody>
+                  <a:tcPr anchor="ctr">
+                    <a:lnL w="9525" cap="flat" cmpd="sng" algn="ctr">
+                      <a:solidFill>
+                        <a:srgbClr val="CBD5E1"/>
+                      </a:solidFill>
+                      <a:prstDash val="solid"/>
+                      <a:round/>
+                      <a:headEnd type="none" w="med" len="med"/>
+                      <a:tailEnd type="none" w="med" len="med"/>
+                    </a:lnL>
+                    <a:lnR w="9525" cap="flat" cmpd="sng" algn="ctr">
+                      <a:solidFill>
+                        <a:srgbClr val="CBD5E1"/>
+                      </a:solidFill>
+                      <a:prstDash val="solid"/>
+                      <a:round/>
+                      <a:headEnd type="none" w="med" len="med"/>
+                      <a:tailEnd type="none" w="med" len="med"/>
+                    </a:lnR>
+                    <a:lnT w="9525" cap="flat" cmpd="sng" algn="ctr">
+                      <a:solidFill>
+                        <a:srgbClr val="CBD5E1"/>
+                      </a:solidFill>
+                      <a:prstDash val="solid"/>
+                      <a:round/>
+                      <a:headEnd type="none" w="med" len="med"/>
+                      <a:tailEnd type="none" w="med" len="med"/>
+                    </a:lnT>
+                    <a:lnB w="9525" cap="flat" cmpd="sng" algn="ctr">
+                      <a:solidFill>
+                        <a:srgbClr val="CBD5E1"/>
+                      </a:solidFill>
+                      <a:prstDash val="solid"/>
+                      <a:round/>
+                      <a:headEnd type="none" w="med" len="med"/>
+                      <a:tailEnd type="none" w="med" len="med"/>
+                    </a:lnB>
+                    <a:solidFill>
+                      <a:srgbClr val="FFFFFF"/>
+                    </a:solidFill>
+                  </a:tcPr>
+                </a:tc>
+                <a:extLst>
+                  <a:ext uri="{0D108BD9-81ED-4DB2-BD59-A6C34878D82A}">
+                    <a16:rowId xmlns:a16="http://schemas.microsoft.com/office/drawing/2014/main" val="10003"/>
+                  </a:ext>
+                </a:extLst>
+              </a:tr>
+              <a:tr h="566928">
+                <a:tc>
+                  <a:txBody>
+                    <a:bodyPr/>
+                    <a:lstStyle/>
+                    <a:p>
+                      <a:pPr marL="0" indent="0">
+                        <a:buNone/>
+                      </a:pPr>
+                      <a:r>
+                        <a:rPr lang="en-US" sz="1150" b="1" dirty="0">
+                          <a:solidFill>
+                            <a:srgbClr val="1F2A44"/>
+                          </a:solidFill>
+                          <a:latin typeface="Calibri" pitchFamily="34" charset="0"/>
+                          <a:ea typeface="Calibri" pitchFamily="34" charset="-122"/>
+                          <a:cs typeface="Calibri" pitchFamily="34" charset="-120"/>
+                        </a:rPr>
+                        <a:t>Account</a:t>
+                      </a:r>
+                      <a:endParaRPr lang="en-US" sz="1150" dirty="0">
+                        <a:latin typeface="Calibri" charset="0"/>
+                        <a:ea typeface="Calibri" charset="0"/>
+                        <a:cs typeface="Calibri" charset="0"/>
+                      </a:endParaRPr>
+                    </a:p>
+                  </a:txBody>
+                  <a:tcPr anchor="ctr">
+                    <a:lnL w="9525" cap="flat" cmpd="sng" algn="ctr">
+                      <a:solidFill>
+                        <a:srgbClr val="CBD5E1"/>
+                      </a:solidFill>
+                      <a:prstDash val="solid"/>
+                      <a:round/>
+                      <a:headEnd type="none" w="med" len="med"/>
+                      <a:tailEnd type="none" w="med" len="med"/>
+                    </a:lnL>
+                    <a:lnR w="9525" cap="flat" cmpd="sng" algn="ctr">
+                      <a:solidFill>
+                        <a:srgbClr val="CBD5E1"/>
+                      </a:solidFill>
+                      <a:prstDash val="solid"/>
+                      <a:round/>
+                      <a:headEnd type="none" w="med" len="med"/>
+                      <a:tailEnd type="none" w="med" len="med"/>
+                    </a:lnR>
+                    <a:lnT w="9525" cap="flat" cmpd="sng" algn="ctr">
+                      <a:solidFill>
+                        <a:srgbClr val="CBD5E1"/>
+                      </a:solidFill>
+                      <a:prstDash val="solid"/>
+                      <a:round/>
+                      <a:headEnd type="none" w="med" len="med"/>
+                      <a:tailEnd type="none" w="med" len="med"/>
+                    </a:lnT>
+                    <a:lnB w="9525" cap="flat" cmpd="sng" algn="ctr">
+                      <a:solidFill>
+                        <a:srgbClr val="CBD5E1"/>
+                      </a:solidFill>
+                      <a:prstDash val="solid"/>
+                      <a:round/>
+                      <a:headEnd type="none" w="med" len="med"/>
+                      <a:tailEnd type="none" w="med" len="med"/>
+                    </a:lnB>
+                    <a:solidFill>
+                      <a:srgbClr val="FFFFFF"/>
+                    </a:solidFill>
+                  </a:tcPr>
+                </a:tc>
+                <a:tc>
+                  <a:txBody>
+                    <a:bodyPr/>
+                    <a:lstStyle/>
+                    <a:p>
+                      <a:pPr marL="0" indent="0">
+                        <a:buNone/>
+                      </a:pPr>
+                      <a:r>
+                        <a:rPr lang="en-US" sz="1150" dirty="0">
+                          <a:solidFill>
+                            <a:srgbClr val="334155"/>
+                          </a:solidFill>
+                          <a:latin typeface="Calibri" pitchFamily="34" charset="0"/>
+                          <a:ea typeface="Calibri" pitchFamily="34" charset="-122"/>
+                          <a:cs typeface="Calibri" pitchFamily="34" charset="-120"/>
+                        </a:rPr>
+                        <a:t>Entra ID: employeeId = person key; employee type, hire and leave dates, manager. AD: employeeID.</a:t>
+                      </a:r>
+                      <a:endParaRPr lang="en-US" sz="1150" dirty="0">
+                        <a:latin typeface="Calibri" charset="0"/>
+                        <a:ea typeface="Calibri" charset="0"/>
+                        <a:cs typeface="Calibri" charset="0"/>
+                      </a:endParaRPr>
+                    </a:p>
+                  </a:txBody>
+                  <a:tcPr anchor="ctr">
+                    <a:lnL w="9525" cap="flat" cmpd="sng" algn="ctr">
+                      <a:solidFill>
+                        <a:srgbClr val="CBD5E1"/>
+                      </a:solidFill>
+                      <a:prstDash val="solid"/>
+                      <a:round/>
+                      <a:headEnd type="none" w="med" len="med"/>
+                      <a:tailEnd type="none" w="med" len="med"/>
+                    </a:lnL>
+                    <a:lnR w="9525" cap="flat" cmpd="sng" algn="ctr">
+                      <a:solidFill>
+                        <a:srgbClr val="CBD5E1"/>
+                      </a:solidFill>
+                      <a:prstDash val="solid"/>
+                      <a:round/>
+                      <a:headEnd type="none" w="med" len="med"/>
+                      <a:tailEnd type="none" w="med" len="med"/>
+                    </a:lnR>
+                    <a:lnT w="9525" cap="flat" cmpd="sng" algn="ctr">
+                      <a:solidFill>
+                        <a:srgbClr val="CBD5E1"/>
+                      </a:solidFill>
+                      <a:prstDash val="solid"/>
+                      <a:round/>
+                      <a:headEnd type="none" w="med" len="med"/>
+                      <a:tailEnd type="none" w="med" len="med"/>
+                    </a:lnT>
+                    <a:lnB w="9525" cap="flat" cmpd="sng" algn="ctr">
+                      <a:solidFill>
+                        <a:srgbClr val="CBD5E1"/>
+                      </a:solidFill>
+                      <a:prstDash val="solid"/>
+                      <a:round/>
+                      <a:headEnd type="none" w="med" len="med"/>
+                      <a:tailEnd type="none" w="med" len="med"/>
+                    </a:lnB>
+                    <a:solidFill>
+                      <a:srgbClr val="FFFFFF"/>
+                    </a:solidFill>
+                  </a:tcPr>
+                </a:tc>
+                <a:extLst>
+                  <a:ext uri="{0D108BD9-81ED-4DB2-BD59-A6C34878D82A}">
+                    <a16:rowId xmlns:a16="http://schemas.microsoft.com/office/drawing/2014/main" val="10004"/>
+                  </a:ext>
+                </a:extLst>
+              </a:tr>
+              <a:tr h="548640">
+                <a:tc>
+                  <a:txBody>
+                    <a:bodyPr/>
+                    <a:lstStyle/>
+                    <a:p>
+                      <a:pPr marL="0" indent="0">
+                        <a:buNone/>
+                      </a:pPr>
+                      <a:r>
+                        <a:rPr lang="en-US" sz="1150" b="1" dirty="0">
+                          <a:solidFill>
+                            <a:srgbClr val="1F2A44"/>
+                          </a:solidFill>
+                          <a:latin typeface="Calibri" pitchFamily="34" charset="0"/>
+                          <a:ea typeface="Calibri" pitchFamily="34" charset="-122"/>
+                          <a:cs typeface="Calibri" pitchFamily="34" charset="-120"/>
+                        </a:rPr>
+                        <a:t>History</a:t>
+                      </a:r>
+                      <a:endParaRPr lang="en-US" sz="1150" dirty="0">
+                        <a:latin typeface="Calibri" charset="0"/>
+                        <a:ea typeface="Calibri" charset="0"/>
+                        <a:cs typeface="Calibri" charset="0"/>
+                      </a:endParaRPr>
+                    </a:p>
+                  </a:txBody>
+                  <a:tcPr anchor="ctr">
+                    <a:lnL w="9525" cap="flat" cmpd="sng" algn="ctr">
+                      <a:solidFill>
+                        <a:srgbClr val="CBD5E1"/>
+                      </a:solidFill>
+                      <a:prstDash val="solid"/>
+                      <a:round/>
+                      <a:headEnd type="none" w="med" len="med"/>
+                      <a:tailEnd type="none" w="med" len="med"/>
+                    </a:lnL>
+                    <a:lnR w="9525" cap="flat" cmpd="sng" algn="ctr">
+                      <a:solidFill>
+                        <a:srgbClr val="CBD5E1"/>
+                      </a:solidFill>
+                      <a:prstDash val="solid"/>
+                      <a:round/>
+                      <a:headEnd type="none" w="med" len="med"/>
+                      <a:tailEnd type="none" w="med" len="med"/>
+                    </a:lnR>
+                    <a:lnT w="9525" cap="flat" cmpd="sng" algn="ctr">
+                      <a:solidFill>
+                        <a:srgbClr val="CBD5E1"/>
+                      </a:solidFill>
+                      <a:prstDash val="solid"/>
+                      <a:round/>
+                      <a:headEnd type="none" w="med" len="med"/>
+                      <a:tailEnd type="none" w="med" len="med"/>
+                    </a:lnT>
+                    <a:lnB w="9525" cap="flat" cmpd="sng" algn="ctr">
+                      <a:solidFill>
+                        <a:srgbClr val="CBD5E1"/>
+                      </a:solidFill>
+                      <a:prstDash val="solid"/>
+                      <a:round/>
+                      <a:headEnd type="none" w="med" len="med"/>
+                      <a:tailEnd type="none" w="med" len="med"/>
+                    </a:lnB>
+                    <a:solidFill>
+                      <a:srgbClr val="FFFFFF"/>
+                    </a:solidFill>
+                  </a:tcPr>
+                </a:tc>
+                <a:tc>
+                  <a:txBody>
+                    <a:bodyPr/>
+                    <a:lstStyle/>
+                    <a:p>
+                      <a:pPr marL="0" indent="0">
+                        <a:buNone/>
+                      </a:pPr>
+                      <a:r>
+                        <a:rPr lang="en-US" sz="1150" dirty="0">
+                          <a:solidFill>
+                            <a:srgbClr val="334155"/>
+                          </a:solidFill>
+                          <a:latin typeface="Calibri" pitchFamily="34" charset="0"/>
+                          <a:ea typeface="Calibri" pitchFamily="34" charset="-122"/>
+                          <a:cs typeface="Calibri" pitchFamily="34" charset="-120"/>
+                        </a:rPr>
+                        <a:t>Effective-dated rows; retained under the applicable approved schedules and legal holds.</a:t>
+                      </a:r>
+                      <a:endParaRPr lang="en-US" sz="1150" dirty="0">
+                        <a:latin typeface="Calibri" charset="0"/>
+                        <a:ea typeface="Calibri" charset="0"/>
+                        <a:cs typeface="Calibri" charset="0"/>
+                      </a:endParaRPr>
+                    </a:p>
+                  </a:txBody>
+                  <a:tcPr anchor="ctr">
+                    <a:lnL w="9525" cap="flat" cmpd="sng" algn="ctr">
+                      <a:solidFill>
+                        <a:srgbClr val="CBD5E1"/>
+                      </a:solidFill>
+                      <a:prstDash val="solid"/>
+                      <a:round/>
+                      <a:headEnd type="none" w="med" len="med"/>
+                      <a:tailEnd type="none" w="med" len="med"/>
+                    </a:lnL>
+                    <a:lnR w="9525" cap="flat" cmpd="sng" algn="ctr">
+                      <a:solidFill>
+                        <a:srgbClr val="CBD5E1"/>
+                      </a:solidFill>
+                      <a:prstDash val="solid"/>
+                      <a:round/>
+                      <a:headEnd type="none" w="med" len="med"/>
+                      <a:tailEnd type="none" w="med" len="med"/>
+                    </a:lnR>
+                    <a:lnT w="9525" cap="flat" cmpd="sng" algn="ctr">
+                      <a:solidFill>
+                        <a:srgbClr val="CBD5E1"/>
+                      </a:solidFill>
+                      <a:prstDash val="solid"/>
+                      <a:round/>
+                      <a:headEnd type="none" w="med" len="med"/>
+                      <a:tailEnd type="none" w="med" len="med"/>
+                    </a:lnT>
+                    <a:lnB w="9525" cap="flat" cmpd="sng" algn="ctr">
+                      <a:solidFill>
+                        <a:srgbClr val="CBD5E1"/>
+                      </a:solidFill>
+                      <a:prstDash val="solid"/>
+                      <a:round/>
+                      <a:headEnd type="none" w="med" len="med"/>
+                      <a:tailEnd type="none" w="med" len="med"/>
+                    </a:lnB>
+                    <a:solidFill>
+                      <a:srgbClr val="FFFFFF"/>
+                    </a:solidFill>
+                  </a:tcPr>
+                </a:tc>
+                <a:extLst>
+                  <a:ext uri="{0D108BD9-81ED-4DB2-BD59-A6C34878D82A}">
+                    <a16:rowId xmlns:a16="http://schemas.microsoft.com/office/drawing/2014/main" val="10005"/>
+                  </a:ext>
+                </a:extLst>
+              </a:tr>
+            </a:tbl>
+          </a:graphicData>
+        </a:graphic>
+      </p:graphicFrame>
+      <p:sp>
+        <p:nvSpPr>
+          <p:cNvPr id="26" name="Standards"/>
+          <p:cNvSpPr/>
+          <p:nvPr/>
+        </p:nvSpPr>
+        <p:spPr>
+          <a:xfrm>
+            <a:off x="548640" y="5486400"/>
+            <a:ext cx="11109960" cy="640080"/>
           </a:xfrm>
           <a:prstGeom prst="roundRect">
             <a:avLst>
-              <a:gd name="adj" fmla="val 14545"/>
+              <a:gd name="adj" fmla="val 11429"/>
             </a:avLst>
           </a:prstGeom>
           <a:solidFill>
@@ -8833,7 +9782,7 @@
           </a:solidFill>
           <a:ln w="12700">
             <a:solidFill>
-              <a:srgbClr val="CBD5E1"/>
+              <a:srgbClr val="1F2A44"/>
             </a:solidFill>
             <a:prstDash val="solid"/>
           </a:ln>
@@ -8848,14 +9797,14 @@
       </p:sp>
       <p:sp>
         <p:nvSpPr>
-          <p:cNvPr id="31" name="Stack 4 text"/>
+          <p:cNvPr id="27" name="Standards text"/>
           <p:cNvSpPr txBox="1"/>
           <p:nvPr/>
         </p:nvSpPr>
         <p:spPr>
           <a:xfrm>
-            <a:off x="9409176" y="5166360"/>
-            <a:ext cx="2002536" cy="502920"/>
+            <a:off x="777240" y="5513832"/>
+            <a:ext cx="10698480" cy="585216"/>
           </a:xfrm>
           <a:prstGeom prst="rect">
             <a:avLst/>
@@ -8867,24 +9816,32 @@
           <a:bodyPr wrap="square" lIns="0" tIns="0" rIns="0" bIns="0" rtlCol="0" anchor="ctr"/>
           <a:lstStyle/>
           <a:p>
-            <a:pPr marL="0" indent="0" algn="ctr">
+            <a:pPr marL="0" indent="0">
               <a:buNone/>
             </a:pPr>
             <a:r>
-              <a:rPr lang="en-US" sz="1200" dirty="0">
-                <a:solidFill>
-                  <a:srgbClr val="334155"/>
-                </a:solidFill>
-              </a:rPr>
-              <a:t>Access packages, lifecycle workflows, PIV</a:t>
-            </a:r>
-            <a:endParaRPr lang="en-US" sz="1200" dirty="0"/>
+              <a:rPr lang="en-US" sz="1450" b="1" dirty="0">
+                <a:solidFill>
+                  <a:srgbClr val="1F2A44"/>
+                </a:solidFill>
+              </a:rPr>
+              <a:t>The standard behind it: </a:t>
+            </a:r>
+            <a:r>
+              <a:rPr lang="en-US" sz="1450" dirty="0">
+                <a:solidFill>
+                  <a:schemeClr val="tx2"/>
+                </a:solidFill>
+              </a:rPr>
+              <a:t>one name, one definition, one owner per attribute, in the data dictionary. DBAs build from the logical model, not from a vendor’s fields.</a:t>
+            </a:r>
+            <a:endParaRPr lang="en-US" sz="1450" dirty="0"/>
           </a:p>
         </p:txBody>
       </p:sp>
       <p:sp>
         <p:nvSpPr>
-          <p:cNvPr id="32" name="Slide Number Placeholder 0"/>
+          <p:cNvPr id="25" name="Slide Number Placeholder 0"/>
           <p:cNvSpPr>
             <a:spLocks noGrp="1"/>
           </p:cNvSpPr>
@@ -8929,11 +9886,11 @@
       </p:sp>
       <p:pic>
         <p:nvPicPr>
-          <p:cNvPr id="33" name="Narration">
+          <p:cNvPr id="29" name="Narration">
             <a:hlinkClick r:id="" action="ppaction://media"/>
             <a:extLst>
               <a:ext uri="{FF2B5EF4-FFF2-40B4-BE49-F238E27FC236}">
-                <a16:creationId xmlns:a16="http://schemas.microsoft.com/office/drawing/2014/main" id="{7523338C-B81D-EABE-ECDF-A6A313143574}"/>
+                <a16:creationId xmlns:a16="http://schemas.microsoft.com/office/drawing/2014/main" id="{2B21F7E6-2198-61CE-EDDC-E41FC6CBE800}"/>
               </a:ext>
             </a:extLst>
           </p:cNvPr>
@@ -8950,7 +9907,7 @@
           </p:nvPr>
         </p:nvPicPr>
         <p:blipFill>
-          <a:blip r:embed="rId8"/>
+          <a:blip r:embed="rId5"/>
           <a:stretch>
             <a:fillRect/>
           </a:stretch>
@@ -8972,10 +9929,10 @@
   </p:clrMapOvr>
   <mc:AlternateContent xmlns:mc="http://schemas.openxmlformats.org/markup-compatibility/2006">
     <mc:Choice xmlns:p14="http://schemas.microsoft.com/office/powerpoint/2010/main" Requires="p14">
-      <p:transition spd="slow" p14:dur="2000" advTm="90930"/>
+      <p:transition spd="slow" p14:dur="2000" advTm="42330"/>
     </mc:Choice>
     <mc:Fallback>
-      <p:transition spd="slow" advTm="90930"/>
+      <p:transition spd="slow" advTm="42330"/>
     </mc:Fallback>
   </mc:AlternateContent>
   <p:timing>
@@ -9009,9 +9966,9 @@
                                   <p:childTnLst>
                                     <p:cmd type="call" cmd="playFrom(0.0)">
                                       <p:cBhvr>
-                                        <p:cTn id="6" dur="89928" fill="hold"/>
+                                        <p:cTn id="6" dur="41328" fill="hold"/>
                                         <p:tgtEl>
-                                          <p:spTgt spid="33"/>
+                                          <p:spTgt spid="29"/>
                                         </p:tgtEl>
                                       </p:cBhvr>
                                     </p:cmd>
@@ -9103,7 +10060,7 @@
                 <a:ea typeface="Cambria" pitchFamily="34" charset="-122"/>
                 <a:cs typeface="Cambria" pitchFamily="34" charset="-120"/>
               </a:rPr>
-              <a:t>How we’ll know it works — and what I need</a:t>
+              <a:t>How: data, security and operations</a:t>
             </a:r>
             <a:endParaRPr lang="en-US" sz="3000" dirty="0"/>
           </a:p>
@@ -9174,62 +10131,26 @@
       </p:sp>
       <p:sp>
         <p:nvSpPr>
-          <p:cNvPr id="5" name="Measures head"/>
-          <p:cNvSpPr txBox="1"/>
+          <p:cNvPr id="5" name="How col 1"/>
+          <p:cNvSpPr/>
           <p:nvPr/>
         </p:nvSpPr>
         <p:spPr>
           <a:xfrm>
             <a:off x="548640" y="1280160"/>
-            <a:ext cx="6035040" cy="320040"/>
-          </a:xfrm>
-          <a:prstGeom prst="rect">
-            <a:avLst/>
-          </a:prstGeom>
-          <a:noFill/>
-          <a:ln/>
-        </p:spPr>
-        <p:txBody>
-          <a:bodyPr wrap="square" lIns="0" tIns="0" rIns="0" bIns="0" rtlCol="0" anchor="t"/>
-          <a:lstStyle/>
-          <a:p>
-            <a:pPr marL="0" indent="0">
-              <a:buNone/>
-            </a:pPr>
-            <a:r>
-              <a:rPr lang="en-US" sz="1200" b="1" dirty="0">
-                <a:solidFill>
-                  <a:srgbClr val="64748B"/>
-                </a:solidFill>
-              </a:rPr>
-              <a:t>MEASURES, BASELINED IN THE FIRST PHASE</a:t>
-            </a:r>
-            <a:endParaRPr lang="en-US" sz="1200" dirty="0"/>
-          </a:p>
-        </p:txBody>
-      </p:sp>
-      <p:sp>
-        <p:nvSpPr>
-          <p:cNvPr id="6" name="Measure 1"/>
-          <p:cNvSpPr/>
-          <p:nvPr/>
-        </p:nvSpPr>
-        <p:spPr>
-          <a:xfrm>
-            <a:off x="548640" y="1691640"/>
-            <a:ext cx="6035040" cy="694944"/>
+            <a:ext cx="3611880" cy="3429000"/>
           </a:xfrm>
           <a:prstGeom prst="roundRect">
             <a:avLst>
-              <a:gd name="adj" fmla="val 10526"/>
+              <a:gd name="adj" fmla="val 2133"/>
             </a:avLst>
           </a:prstGeom>
           <a:solidFill>
-            <a:srgbClr val="E9EEF4"/>
+            <a:srgbClr val="DCEFEC"/>
           </a:solidFill>
           <a:ln w="12700">
             <a:solidFill>
-              <a:srgbClr val="CBD5E1"/>
+              <a:srgbClr val="DCEFEC"/>
             </a:solidFill>
             <a:prstDash val="solid"/>
           </a:ln>
@@ -9244,14 +10165,230 @@
       </p:sp>
       <p:sp>
         <p:nvSpPr>
-          <p:cNvPr id="7" name="Icon FaUserXmark"/>
+          <p:cNvPr id="6" name="Icon FaDatabase"/>
           <p:cNvSpPr/>
           <p:nvPr/>
         </p:nvSpPr>
         <p:spPr>
           <a:xfrm>
-            <a:off x="685800" y="1792224"/>
-            <a:ext cx="493776" cy="493776"/>
+            <a:off x="749808" y="1444752"/>
+            <a:ext cx="566928" cy="566928"/>
+          </a:xfrm>
+          <a:prstGeom prst="ellipse">
+            <a:avLst/>
+          </a:prstGeom>
+          <a:solidFill>
+            <a:srgbClr val="0F766E"/>
+          </a:solidFill>
+          <a:ln w="12700">
+            <a:solidFill>
+              <a:srgbClr val="0F766E"/>
+            </a:solidFill>
+            <a:prstDash val="solid"/>
+          </a:ln>
+        </p:spPr>
+      </p:sp>
+      <p:pic>
+        <p:nvPicPr>
+          <p:cNvPr id="7" name="Image 0" descr="C:\Users\whale\git\uiao\inbox\SSA-Interview\build\icons\FaDatabase.png"/>
+          <p:cNvPicPr>
+            <a:picLocks noChangeAspect="1"/>
+          </p:cNvPicPr>
+          <p:nvPr/>
+        </p:nvPicPr>
+        <p:blipFill>
+          <a:blip r:embed="rId5"/>
+          <a:stretch>
+            <a:fillRect/>
+          </a:stretch>
+        </p:blipFill>
+        <p:spPr>
+          <a:xfrm>
+            <a:off x="885871" y="1580815"/>
+            <a:ext cx="294803" cy="294803"/>
+          </a:xfrm>
+          <a:prstGeom prst="rect">
+            <a:avLst/>
+          </a:prstGeom>
+        </p:spPr>
+      </p:pic>
+      <p:sp>
+        <p:nvSpPr>
+          <p:cNvPr id="8" name="How head 1"/>
+          <p:cNvSpPr txBox="1"/>
+          <p:nvPr/>
+        </p:nvSpPr>
+        <p:spPr>
+          <a:xfrm>
+            <a:off x="1463040" y="1444752"/>
+            <a:ext cx="2560320" cy="566928"/>
+          </a:xfrm>
+          <a:prstGeom prst="rect">
+            <a:avLst/>
+          </a:prstGeom>
+          <a:noFill/>
+          <a:ln/>
+        </p:spPr>
+        <p:txBody>
+          <a:bodyPr wrap="square" lIns="0" tIns="0" rIns="0" bIns="0" rtlCol="0" anchor="ctr"/>
+          <a:lstStyle/>
+          <a:p>
+            <a:pPr marL="0" indent="0">
+              <a:buNone/>
+            </a:pPr>
+            <a:r>
+              <a:rPr lang="en-US" sz="1900" b="1" dirty="0">
+                <a:solidFill>
+                  <a:srgbClr val="0F766E"/>
+                </a:solidFill>
+                <a:latin typeface="Cambria" pitchFamily="34" charset="0"/>
+                <a:ea typeface="Cambria" pitchFamily="34" charset="-122"/>
+                <a:cs typeface="Cambria" pitchFamily="34" charset="-120"/>
+              </a:rPr>
+              <a:t>Data</a:t>
+            </a:r>
+            <a:endParaRPr lang="en-US" sz="1900" dirty="0"/>
+          </a:p>
+        </p:txBody>
+      </p:sp>
+      <p:sp>
+        <p:nvSpPr>
+          <p:cNvPr id="9" name="How text 1"/>
+          <p:cNvSpPr txBox="1"/>
+          <p:nvPr/>
+        </p:nvSpPr>
+        <p:spPr>
+          <a:xfrm>
+            <a:off x="777240" y="2194560"/>
+            <a:ext cx="3200400" cy="2423160"/>
+          </a:xfrm>
+          <a:prstGeom prst="rect">
+            <a:avLst/>
+          </a:prstGeom>
+          <a:noFill/>
+          <a:ln/>
+        </p:spPr>
+        <p:txBody>
+          <a:bodyPr wrap="square" lIns="0" tIns="0" rIns="0" bIns="0" rtlCol="0" anchor="t"/>
+          <a:lstStyle/>
+          <a:p>
+            <a:pPr marL="342900" indent="-342900">
+              <a:spcAft>
+                <a:spcPts val="600"/>
+              </a:spcAft>
+              <a:buSzPct val="100000"/>
+              <a:buChar char="•"/>
+            </a:pPr>
+            <a:r>
+              <a:rPr lang="en-US" sz="1500" dirty="0">
+                <a:solidFill>
+                  <a:schemeClr val="tx2"/>
+                </a:solidFill>
+              </a:rPr>
+              <a:t>One governed crosswalk: OPM standard data to a person model</a:t>
+            </a:r>
+            <a:endParaRPr lang="en-US" sz="1400" dirty="0"/>
+          </a:p>
+          <a:p>
+            <a:pPr marL="342900" indent="-342900">
+              <a:spcAft>
+                <a:spcPts val="600"/>
+              </a:spcAft>
+              <a:buSzPct val="100000"/>
+              <a:buChar char="•"/>
+            </a:pPr>
+            <a:r>
+              <a:rPr lang="en-US" sz="1500" dirty="0">
+                <a:solidFill>
+                  <a:schemeClr val="tx2"/>
+                </a:solidFill>
+              </a:rPr>
+              <a:t>Keyed on an enterprise ID the agency controls</a:t>
+            </a:r>
+            <a:endParaRPr lang="en-US" sz="1400" dirty="0"/>
+          </a:p>
+          <a:p>
+            <a:pPr marL="342900" indent="-342900">
+              <a:spcAft>
+                <a:spcPts val="600"/>
+              </a:spcAft>
+              <a:buSzPct val="100000"/>
+              <a:buChar char="•"/>
+            </a:pPr>
+            <a:r>
+              <a:rPr lang="en-US" sz="1500" dirty="0">
+                <a:solidFill>
+                  <a:schemeClr val="tx2"/>
+                </a:solidFill>
+              </a:rPr>
+              <a:t>Personnel actions drive joiner, mover, leaver by code</a:t>
+            </a:r>
+            <a:endParaRPr lang="en-US" sz="1400" dirty="0"/>
+          </a:p>
+          <a:p>
+            <a:pPr marL="342900" indent="-342900">
+              <a:spcAft>
+                <a:spcPts val="600"/>
+              </a:spcAft>
+              <a:buSzPct val="100000"/>
+              <a:buChar char="•"/>
+            </a:pPr>
+            <a:r>
+              <a:rPr lang="en-US" sz="1500" dirty="0">
+                <a:solidFill>
+                  <a:schemeClr val="tx2"/>
+                </a:solidFill>
+              </a:rPr>
+              <a:t>Contractors: authority decision first, same model</a:t>
+            </a:r>
+            <a:endParaRPr lang="en-US" sz="1400" dirty="0"/>
+          </a:p>
+        </p:txBody>
+      </p:sp>
+      <p:sp>
+        <p:nvSpPr>
+          <p:cNvPr id="10" name="How col 2"/>
+          <p:cNvSpPr/>
+          <p:nvPr/>
+        </p:nvSpPr>
+        <p:spPr>
+          <a:xfrm>
+            <a:off x="4297680" y="1280160"/>
+            <a:ext cx="3611880" cy="3429000"/>
+          </a:xfrm>
+          <a:prstGeom prst="roundRect">
+            <a:avLst>
+              <a:gd name="adj" fmla="val 2133"/>
+            </a:avLst>
+          </a:prstGeom>
+          <a:solidFill>
+            <a:srgbClr val="FBE4E4"/>
+          </a:solidFill>
+          <a:ln w="12700">
+            <a:solidFill>
+              <a:srgbClr val="FBE4E4"/>
+            </a:solidFill>
+            <a:prstDash val="solid"/>
+          </a:ln>
+          <a:effectLst>
+            <a:outerShdw blurRad="76200" dist="25400" dir="5400000" algn="bl" rotWithShape="0">
+              <a:srgbClr val="64748B">
+                <a:alpha val="22000"/>
+              </a:srgbClr>
+            </a:outerShdw>
+          </a:effectLst>
+        </p:spPr>
+      </p:sp>
+      <p:sp>
+        <p:nvSpPr>
+          <p:cNvPr id="11" name="Icon FaLock"/>
+          <p:cNvSpPr/>
+          <p:nvPr/>
+        </p:nvSpPr>
+        <p:spPr>
+          <a:xfrm>
+            <a:off x="4498848" y="1444752"/>
+            <a:ext cx="566928" cy="566928"/>
           </a:xfrm>
           <a:prstGeom prst="ellipse">
             <a:avLst/>
@@ -9269,22 +10406,22 @@
       </p:sp>
       <p:pic>
         <p:nvPicPr>
-          <p:cNvPr id="8" name="Image 0" descr="C:\Users\whale\AppData\Local\Temp\claude\C--Users-whale-git-uiao-inbox\cbd5b766-acc0-4006-9202-a9bb6b23e97b\scratchpad\deck\icons\FaUserXmark.png"/>
+          <p:cNvPr id="12" name="Image 1" descr="C:\Users\whale\git\uiao\inbox\SSA-Interview\build\icons\FaLock.png"/>
           <p:cNvPicPr>
             <a:picLocks noChangeAspect="1"/>
           </p:cNvPicPr>
           <p:nvPr/>
         </p:nvPicPr>
         <p:blipFill>
-          <a:blip r:embed="rId5"/>
+          <a:blip r:embed="rId6"/>
           <a:stretch>
             <a:fillRect/>
           </a:stretch>
         </p:blipFill>
         <p:spPr>
           <a:xfrm>
-            <a:off x="804306" y="1910730"/>
-            <a:ext cx="256764" cy="256764"/>
+            <a:off x="4634911" y="1580815"/>
+            <a:ext cx="294803" cy="294803"/>
           </a:xfrm>
           <a:prstGeom prst="rect">
             <a:avLst/>
@@ -9293,14 +10430,14 @@
       </p:pic>
       <p:sp>
         <p:nvSpPr>
-          <p:cNvPr id="9" name="Measure 1 text"/>
+          <p:cNvPr id="13" name="How head 2"/>
           <p:cNvSpPr txBox="1"/>
           <p:nvPr/>
         </p:nvSpPr>
         <p:spPr>
           <a:xfrm>
-            <a:off x="1325880" y="1728216"/>
-            <a:ext cx="5120640" cy="640080"/>
+            <a:off x="5212080" y="1444752"/>
+            <a:ext cx="2560320" cy="566928"/>
           </a:xfrm>
           <a:prstGeom prst="rect">
             <a:avLst/>
@@ -9316,45 +10453,362 @@
               <a:buNone/>
             </a:pPr>
             <a:r>
-              <a:rPr lang="en-US" sz="1550" b="1" dirty="0">
+              <a:rPr lang="en-US" sz="1900" b="1" dirty="0">
                 <a:solidFill>
                   <a:srgbClr val="B91C1C"/>
                 </a:solidFill>
-              </a:rPr>
-              <a:t>Separation to blocked access</a:t>
+                <a:latin typeface="Cambria" pitchFamily="34" charset="0"/>
+                <a:ea typeface="Cambria" pitchFamily="34" charset="-122"/>
+                <a:cs typeface="Cambria" pitchFamily="34" charset="-120"/>
+              </a:rPr>
+              <a:t>Security</a:t>
+            </a:r>
+            <a:endParaRPr lang="en-US" sz="1900" dirty="0"/>
+          </a:p>
+        </p:txBody>
+      </p:sp>
+      <p:sp>
+        <p:nvSpPr>
+          <p:cNvPr id="14" name="How text 2"/>
+          <p:cNvSpPr txBox="1"/>
+          <p:nvPr/>
+        </p:nvSpPr>
+        <p:spPr>
+          <a:xfrm>
+            <a:off x="4526280" y="2194560"/>
+            <a:ext cx="3200400" cy="2423160"/>
+          </a:xfrm>
+          <a:prstGeom prst="rect">
+            <a:avLst/>
+          </a:prstGeom>
+          <a:noFill/>
+          <a:ln/>
+        </p:spPr>
+        <p:txBody>
+          <a:bodyPr wrap="square" lIns="0" tIns="0" rIns="0" bIns="0" rtlCol="0" anchor="t"/>
+          <a:lstStyle/>
+          <a:p>
+            <a:pPr marL="342900" indent="-342900">
+              <a:spcAft>
+                <a:spcPts val="600"/>
+              </a:spcAft>
+              <a:buSzPct val="100000"/>
+              <a:buChar char="•"/>
+            </a:pPr>
+            <a:r>
+              <a:rPr lang="en-US" sz="1500" dirty="0">
+                <a:solidFill>
+                  <a:schemeClr val="tx2"/>
+                </a:solidFill>
+              </a:rPr>
+              <a:t>Leavers: block access first, within hours, then clean up</a:t>
             </a:r>
             <a:endParaRPr lang="en-US" sz="1400" dirty="0"/>
           </a:p>
+          <a:p>
+            <a:pPr marL="342900" indent="-342900">
+              <a:spcAft>
+                <a:spcPts val="600"/>
+              </a:spcAft>
+              <a:buSzPct val="100000"/>
+              <a:buChar char="•"/>
+            </a:pPr>
+            <a:r>
+              <a:rPr lang="en-US" sz="1500" dirty="0">
+                <a:solidFill>
+                  <a:schemeClr val="tx2"/>
+                </a:solidFill>
+              </a:rPr>
+              <a:t>Least privilege; no stored secrets</a:t>
+            </a:r>
+            <a:endParaRPr lang="en-US" sz="1400" dirty="0"/>
+          </a:p>
+          <a:p>
+            <a:pPr marL="342900" indent="-342900">
+              <a:spcAft>
+                <a:spcPts val="600"/>
+              </a:spcAft>
+              <a:buSzPct val="100000"/>
+              <a:buChar char="•"/>
+            </a:pPr>
+            <a:r>
+              <a:rPr lang="en-US" sz="1500" dirty="0">
+                <a:solidFill>
+                  <a:schemeClr val="tx2"/>
+                </a:solidFill>
+              </a:rPr>
+              <a:t>Failures quarantined with an owner — nothing auto-resolves</a:t>
+            </a:r>
+            <a:endParaRPr lang="en-US" sz="1400" dirty="0"/>
+          </a:p>
+        </p:txBody>
+      </p:sp>
+      <p:sp>
+        <p:nvSpPr>
+          <p:cNvPr id="15" name="How col 3"/>
+          <p:cNvSpPr/>
+          <p:nvPr/>
+        </p:nvSpPr>
+        <p:spPr>
+          <a:xfrm>
+            <a:off x="8046720" y="1280160"/>
+            <a:ext cx="3611880" cy="3429000"/>
+          </a:xfrm>
+          <a:prstGeom prst="roundRect">
+            <a:avLst>
+              <a:gd name="adj" fmla="val 2133"/>
+            </a:avLst>
+          </a:prstGeom>
+          <a:solidFill>
+            <a:srgbClr val="FBEEDC"/>
+          </a:solidFill>
+          <a:ln w="12700">
+            <a:solidFill>
+              <a:srgbClr val="FBEEDC"/>
+            </a:solidFill>
+            <a:prstDash val="solid"/>
+          </a:ln>
+          <a:effectLst>
+            <a:outerShdw blurRad="76200" dist="25400" dir="5400000" algn="bl" rotWithShape="0">
+              <a:srgbClr val="64748B">
+                <a:alpha val="22000"/>
+              </a:srgbClr>
+            </a:outerShdw>
+          </a:effectLst>
+        </p:spPr>
+      </p:sp>
+      <p:sp>
+        <p:nvSpPr>
+          <p:cNvPr id="16" name="Icon FaRoute"/>
+          <p:cNvSpPr/>
+          <p:nvPr/>
+        </p:nvSpPr>
+        <p:spPr>
+          <a:xfrm>
+            <a:off x="8247888" y="1444752"/>
+            <a:ext cx="566928" cy="566928"/>
+          </a:xfrm>
+          <a:prstGeom prst="ellipse">
+            <a:avLst/>
+          </a:prstGeom>
+          <a:solidFill>
+            <a:srgbClr val="B45309"/>
+          </a:solidFill>
+          <a:ln w="12700">
+            <a:solidFill>
+              <a:srgbClr val="B45309"/>
+            </a:solidFill>
+            <a:prstDash val="solid"/>
+          </a:ln>
+        </p:spPr>
+      </p:sp>
+      <p:pic>
+        <p:nvPicPr>
+          <p:cNvPr id="17" name="Image 2" descr="C:\Users\whale\git\uiao\inbox\SSA-Interview\build\icons\FaRoute.png"/>
+          <p:cNvPicPr>
+            <a:picLocks noChangeAspect="1"/>
+          </p:cNvPicPr>
+          <p:nvPr/>
+        </p:nvPicPr>
+        <p:blipFill>
+          <a:blip r:embed="rId7"/>
+          <a:stretch>
+            <a:fillRect/>
+          </a:stretch>
+        </p:blipFill>
+        <p:spPr>
+          <a:xfrm>
+            <a:off x="8383951" y="1580815"/>
+            <a:ext cx="294803" cy="294803"/>
+          </a:xfrm>
+          <a:prstGeom prst="rect">
+            <a:avLst/>
+          </a:prstGeom>
+        </p:spPr>
+      </p:pic>
+      <p:sp>
+        <p:nvSpPr>
+          <p:cNvPr id="18" name="How head 3"/>
+          <p:cNvSpPr txBox="1"/>
+          <p:nvPr/>
+        </p:nvSpPr>
+        <p:spPr>
+          <a:xfrm>
+            <a:off x="8961120" y="1444752"/>
+            <a:ext cx="2560320" cy="566928"/>
+          </a:xfrm>
+          <a:prstGeom prst="rect">
+            <a:avLst/>
+          </a:prstGeom>
+          <a:noFill/>
+          <a:ln/>
+        </p:spPr>
+        <p:txBody>
+          <a:bodyPr wrap="square" lIns="0" tIns="0" rIns="0" bIns="0" rtlCol="0" anchor="ctr"/>
+          <a:lstStyle/>
           <a:p>
             <a:pPr marL="0" indent="0">
               <a:buNone/>
             </a:pPr>
             <a:r>
-              <a:rPr lang="en-US" sz="1350" dirty="0">
+              <a:rPr lang="en-US" sz="1900" b="1" dirty="0">
+                <a:solidFill>
+                  <a:srgbClr val="B45309"/>
+                </a:solidFill>
+                <a:latin typeface="Cambria" pitchFamily="34" charset="0"/>
+                <a:ea typeface="Cambria" pitchFamily="34" charset="-122"/>
+                <a:cs typeface="Cambria" pitchFamily="34" charset="-120"/>
+              </a:rPr>
+              <a:t>Operations</a:t>
+            </a:r>
+            <a:endParaRPr lang="en-US" sz="1900" dirty="0"/>
+          </a:p>
+        </p:txBody>
+      </p:sp>
+      <p:sp>
+        <p:nvSpPr>
+          <p:cNvPr id="19" name="How text 3"/>
+          <p:cNvSpPr txBox="1"/>
+          <p:nvPr/>
+        </p:nvSpPr>
+        <p:spPr>
+          <a:xfrm>
+            <a:off x="8275320" y="2194560"/>
+            <a:ext cx="3200400" cy="2423160"/>
+          </a:xfrm>
+          <a:prstGeom prst="rect">
+            <a:avLst/>
+          </a:prstGeom>
+          <a:noFill/>
+          <a:ln/>
+        </p:spPr>
+        <p:txBody>
+          <a:bodyPr wrap="square" lIns="0" tIns="0" rIns="0" bIns="0" rtlCol="0" anchor="t"/>
+          <a:lstStyle/>
+          <a:p>
+            <a:pPr marL="342900" indent="-342900">
+              <a:spcAft>
+                <a:spcPts val="600"/>
+              </a:spcAft>
+              <a:buSzPct val="100000"/>
+              <a:buChar char="•"/>
+            </a:pPr>
+            <a:r>
+              <a:rPr lang="en-US" sz="1500" dirty="0">
                 <a:solidFill>
                   <a:schemeClr val="tx2"/>
                 </a:solidFill>
               </a:rPr>
-              <a:t>Within hours — PIV termination standard is 18 hours</a:t>
+              <a:t>Start from today's HR data, after profiling; switch at Core HCM</a:t>
             </a:r>
             <a:endParaRPr lang="en-US" sz="1400" dirty="0"/>
           </a:p>
+          <a:p>
+            <a:pPr marL="342900" indent="-342900">
+              <a:spcAft>
+                <a:spcPts val="600"/>
+              </a:spcAft>
+              <a:buSzPct val="100000"/>
+              <a:buChar char="•"/>
+            </a:pPr>
+            <a:r>
+              <a:rPr lang="en-US" sz="1500" dirty="0">
+                <a:solidFill>
+                  <a:schemeClr val="tx2"/>
+                </a:solidFill>
+              </a:rPr>
+              <a:t>Shadow mode first: compare HR with the directories</a:t>
+            </a:r>
+            <a:endParaRPr lang="en-US" sz="1400" dirty="0"/>
+          </a:p>
+          <a:p>
+            <a:pPr marL="342900" indent="-342900">
+              <a:spcAft>
+                <a:spcPts val="600"/>
+              </a:spcAft>
+              <a:buSzPct val="100000"/>
+              <a:buChar char="•"/>
+            </a:pPr>
+            <a:r>
+              <a:rPr lang="en-US" sz="1500" dirty="0">
+                <a:solidFill>
+                  <a:schemeClr val="tx2"/>
+                </a:solidFill>
+              </a:rPr>
+              <a:t>Cut over one population at a time</a:t>
+            </a:r>
+            <a:endParaRPr lang="en-US" sz="1400" dirty="0"/>
+          </a:p>
+          <a:p>
+            <a:pPr marL="342900" indent="-342900">
+              <a:spcAft>
+                <a:spcPts val="600"/>
+              </a:spcAft>
+              <a:buSzPct val="100000"/>
+              <a:buChar char="•"/>
+            </a:pPr>
+            <a:r>
+              <a:rPr lang="en-US" sz="1500" dirty="0">
+                <a:solidFill>
+                  <a:schemeClr val="tx2"/>
+                </a:solidFill>
+              </a:rPr>
+              <a:t>Close the ticket path only when the data proves it</a:t>
+            </a:r>
+            <a:endParaRPr lang="en-US" sz="1400" dirty="0"/>
+          </a:p>
         </p:txBody>
       </p:sp>
       <p:sp>
         <p:nvSpPr>
-          <p:cNvPr id="10" name="Measure 2"/>
+          <p:cNvPr id="20" name="Stack label"/>
+          <p:cNvSpPr txBox="1"/>
+          <p:nvPr/>
+        </p:nvSpPr>
+        <p:spPr>
+          <a:xfrm>
+            <a:off x="548640" y="5120640"/>
+            <a:ext cx="1463040" cy="548640"/>
+          </a:xfrm>
+          <a:prstGeom prst="rect">
+            <a:avLst/>
+          </a:prstGeom>
+          <a:noFill/>
+          <a:ln/>
+        </p:spPr>
+        <p:txBody>
+          <a:bodyPr wrap="square" lIns="0" tIns="0" rIns="0" bIns="0" rtlCol="0" anchor="ctr"/>
+          <a:lstStyle/>
+          <a:p>
+            <a:pPr marL="0" indent="0">
+              <a:buNone/>
+            </a:pPr>
+            <a:r>
+              <a:rPr lang="en-US" sz="1100" b="1" dirty="0">
+                <a:solidFill>
+                  <a:srgbClr val="64748B"/>
+                </a:solidFill>
+              </a:rPr>
+              <a:t>EXAMPLE STACK</a:t>
+            </a:r>
+            <a:endParaRPr lang="en-US" sz="1100" dirty="0"/>
+          </a:p>
+        </p:txBody>
+      </p:sp>
+      <p:sp>
+        <p:nvSpPr>
+          <p:cNvPr id="21" name="Stack 1"/>
           <p:cNvSpPr/>
           <p:nvPr/>
         </p:nvSpPr>
         <p:spPr>
           <a:xfrm>
-            <a:off x="548640" y="2478024"/>
-            <a:ext cx="6035040" cy="694944"/>
+            <a:off x="2011680" y="5166360"/>
+            <a:ext cx="2148840" cy="502920"/>
           </a:xfrm>
           <a:prstGeom prst="roundRect">
             <a:avLst>
-              <a:gd name="adj" fmla="val 10526"/>
+              <a:gd name="adj" fmla="val 14545"/>
             </a:avLst>
           </a:prstGeom>
           <a:solidFill>
@@ -9377,63 +10831,14 @@
       </p:sp>
       <p:sp>
         <p:nvSpPr>
-          <p:cNvPr id="11" name="Icon FaFingerprint"/>
-          <p:cNvSpPr/>
-          <p:nvPr/>
-        </p:nvSpPr>
-        <p:spPr>
-          <a:xfrm>
-            <a:off x="685800" y="2578608"/>
-            <a:ext cx="493776" cy="493776"/>
-          </a:xfrm>
-          <a:prstGeom prst="ellipse">
-            <a:avLst/>
-          </a:prstGeom>
-          <a:solidFill>
-            <a:srgbClr val="1F2A44"/>
-          </a:solidFill>
-          <a:ln w="12700">
-            <a:solidFill>
-              <a:srgbClr val="1F2A44"/>
-            </a:solidFill>
-            <a:prstDash val="solid"/>
-          </a:ln>
-        </p:spPr>
-      </p:sp>
-      <p:pic>
-        <p:nvPicPr>
-          <p:cNvPr id="12" name="Image 1" descr="C:\Users\whale\AppData\Local\Temp\claude\C--Users-whale-git-uiao-inbox\cbd5b766-acc0-4006-9202-a9bb6b23e97b\scratchpad\deck\icons\FaFingerprint.png"/>
-          <p:cNvPicPr>
-            <a:picLocks noChangeAspect="1"/>
-          </p:cNvPicPr>
-          <p:nvPr/>
-        </p:nvPicPr>
-        <p:blipFill>
-          <a:blip r:embed="rId6"/>
-          <a:stretch>
-            <a:fillRect/>
-          </a:stretch>
-        </p:blipFill>
-        <p:spPr>
-          <a:xfrm>
-            <a:off x="804306" y="2697114"/>
-            <a:ext cx="256764" cy="256764"/>
-          </a:xfrm>
-          <a:prstGeom prst="rect">
-            <a:avLst/>
-          </a:prstGeom>
-        </p:spPr>
-      </p:pic>
-      <p:sp>
-        <p:nvSpPr>
-          <p:cNvPr id="13" name="Measure 2 text"/>
+          <p:cNvPr id="22" name="Stack 1 text"/>
           <p:cNvSpPr txBox="1"/>
           <p:nvPr/>
         </p:nvSpPr>
         <p:spPr>
           <a:xfrm>
-            <a:off x="1325880" y="2514600"/>
-            <a:ext cx="5120640" cy="640080"/>
+            <a:off x="2084832" y="5166360"/>
+            <a:ext cx="2002536" cy="502920"/>
           </a:xfrm>
           <a:prstGeom prst="rect">
             <a:avLst/>
@@ -9445,182 +10850,59 @@
           <a:bodyPr wrap="square" lIns="0" tIns="0" rIns="0" bIns="0" rtlCol="0" anchor="ctr"/>
           <a:lstStyle/>
           <a:p>
-            <a:pPr marL="0" indent="0">
+            <a:pPr marL="0" indent="0" algn="ctr">
               <a:buNone/>
             </a:pPr>
             <a:r>
-              <a:rPr lang="en-US" sz="1550" b="1" dirty="0">
-                <a:solidFill>
-                  <a:srgbClr val="1F2A44"/>
-                </a:solidFill>
-              </a:rPr>
-              <a:t>Accounts tied to a person</a:t>
-            </a:r>
-            <a:endParaRPr lang="en-US" sz="1400" dirty="0"/>
-          </a:p>
-          <a:p>
-            <a:pPr marL="0" indent="0">
-              <a:buNone/>
-            </a:pPr>
-            <a:r>
-              <a:rPr lang="en-US" sz="1350" dirty="0">
-                <a:solidFill>
-                  <a:schemeClr val="tx2"/>
-                </a:solidFill>
-              </a:rPr>
-              <a:t>Orphaned accounts trend to zero</a:t>
-            </a:r>
-            <a:endParaRPr lang="en-US" sz="1400" dirty="0"/>
+              <a:rPr lang="en-US" sz="1200" dirty="0">
+                <a:solidFill>
+                  <a:srgbClr val="334155"/>
+                </a:solidFill>
+              </a:rPr>
+              <a:t>Oracle Core HCM</a:t>
+            </a:r>
+            <a:endParaRPr lang="en-US" sz="1200" dirty="0"/>
           </a:p>
         </p:txBody>
       </p:sp>
       <p:sp>
         <p:nvSpPr>
-          <p:cNvPr id="14" name="Measure 3"/>
+          <p:cNvPr id="23" name="Shape 18"/>
           <p:cNvSpPr/>
           <p:nvPr/>
         </p:nvSpPr>
         <p:spPr>
           <a:xfrm>
-            <a:off x="548640" y="3264408"/>
-            <a:ext cx="6035040" cy="694944"/>
+            <a:off x="4187952" y="5417820"/>
+            <a:ext cx="237744" cy="0"/>
+          </a:xfrm>
+          <a:prstGeom prst="line">
+            <a:avLst/>
+          </a:prstGeom>
+          <a:noFill/>
+          <a:ln w="22225">
+            <a:solidFill>
+              <a:srgbClr val="64748B"/>
+            </a:solidFill>
+            <a:prstDash val="solid"/>
+            <a:tailEnd type="triangle"/>
+          </a:ln>
+        </p:spPr>
+      </p:sp>
+      <p:sp>
+        <p:nvSpPr>
+          <p:cNvPr id="24" name="Stack 2"/>
+          <p:cNvSpPr/>
+          <p:nvPr/>
+        </p:nvSpPr>
+        <p:spPr>
+          <a:xfrm>
+            <a:off x="4453128" y="5166360"/>
+            <a:ext cx="2148840" cy="502920"/>
           </a:xfrm>
           <a:prstGeom prst="roundRect">
             <a:avLst>
-              <a:gd name="adj" fmla="val 10526"/>
-            </a:avLst>
-          </a:prstGeom>
-          <a:solidFill>
-            <a:srgbClr val="E9EEF4"/>
-          </a:solidFill>
-          <a:ln w="12700">
-            <a:solidFill>
-              <a:srgbClr val="CBD5E1"/>
-            </a:solidFill>
-            <a:prstDash val="solid"/>
-          </a:ln>
-          <a:effectLst>
-            <a:outerShdw blurRad="76200" dist="25400" dir="5400000" algn="bl" rotWithShape="0">
-              <a:srgbClr val="64748B">
-                <a:alpha val="22000"/>
-              </a:srgbClr>
-            </a:outerShdw>
-          </a:effectLst>
-        </p:spPr>
-      </p:sp>
-      <p:sp>
-        <p:nvSpPr>
-          <p:cNvPr id="15" name="Icon FaUserClock"/>
-          <p:cNvSpPr/>
-          <p:nvPr/>
-        </p:nvSpPr>
-        <p:spPr>
-          <a:xfrm>
-            <a:off x="685800" y="3364992"/>
-            <a:ext cx="493776" cy="493776"/>
-          </a:xfrm>
-          <a:prstGeom prst="ellipse">
-            <a:avLst/>
-          </a:prstGeom>
-          <a:solidFill>
-            <a:srgbClr val="0F766E"/>
-          </a:solidFill>
-          <a:ln w="12700">
-            <a:solidFill>
-              <a:srgbClr val="0F766E"/>
-            </a:solidFill>
-            <a:prstDash val="solid"/>
-          </a:ln>
-        </p:spPr>
-      </p:sp>
-      <p:pic>
-        <p:nvPicPr>
-          <p:cNvPr id="16" name="Image 2" descr="C:\Users\whale\AppData\Local\Temp\claude\C--Users-whale-git-uiao-inbox\cbd5b766-acc0-4006-9202-a9bb6b23e97b\scratchpad\deck\icons\FaUserClock.png"/>
-          <p:cNvPicPr>
-            <a:picLocks noChangeAspect="1"/>
-          </p:cNvPicPr>
-          <p:nvPr/>
-        </p:nvPicPr>
-        <p:blipFill>
-          <a:blip r:embed="rId7"/>
-          <a:stretch>
-            <a:fillRect/>
-          </a:stretch>
-        </p:blipFill>
-        <p:spPr>
-          <a:xfrm>
-            <a:off x="804306" y="3483498"/>
-            <a:ext cx="256764" cy="256764"/>
-          </a:xfrm>
-          <a:prstGeom prst="rect">
-            <a:avLst/>
-          </a:prstGeom>
-        </p:spPr>
-      </p:pic>
-      <p:sp>
-        <p:nvSpPr>
-          <p:cNvPr id="17" name="Measure 3 text"/>
-          <p:cNvSpPr txBox="1"/>
-          <p:nvPr/>
-        </p:nvSpPr>
-        <p:spPr>
-          <a:xfrm>
-            <a:off x="1325880" y="3300984"/>
-            <a:ext cx="5120640" cy="640080"/>
-          </a:xfrm>
-          <a:prstGeom prst="rect">
-            <a:avLst/>
-          </a:prstGeom>
-          <a:noFill/>
-          <a:ln/>
-        </p:spPr>
-        <p:txBody>
-          <a:bodyPr wrap="square" lIns="0" tIns="0" rIns="0" bIns="0" rtlCol="0" anchor="ctr"/>
-          <a:lstStyle/>
-          <a:p>
-            <a:pPr marL="0" indent="0">
-              <a:buNone/>
-            </a:pPr>
-            <a:r>
-              <a:rPr lang="en-US" sz="1550" b="1" dirty="0">
-                <a:solidFill>
-                  <a:srgbClr val="0F766E"/>
-                </a:solidFill>
-              </a:rPr>
-              <a:t>Joiner and mover tickets</a:t>
-            </a:r>
-            <a:endParaRPr lang="en-US" sz="1400" dirty="0"/>
-          </a:p>
-          <a:p>
-            <a:pPr marL="0" indent="0">
-              <a:buNone/>
-            </a:pPr>
-            <a:r>
-              <a:rPr lang="en-US" sz="1350" dirty="0">
-                <a:solidFill>
-                  <a:schemeClr val="tx2"/>
-                </a:solidFill>
-              </a:rPr>
-              <a:t>Volume down; access on day one</a:t>
-            </a:r>
-            <a:endParaRPr lang="en-US" sz="1400" dirty="0"/>
-          </a:p>
-        </p:txBody>
-      </p:sp>
-      <p:sp>
-        <p:nvSpPr>
-          <p:cNvPr id="18" name="Measure 4"/>
-          <p:cNvSpPr/>
-          <p:nvPr/>
-        </p:nvSpPr>
-        <p:spPr>
-          <a:xfrm>
-            <a:off x="548640" y="4050792"/>
-            <a:ext cx="6035040" cy="694944"/>
-          </a:xfrm>
-          <a:prstGeom prst="roundRect">
-            <a:avLst>
-              <a:gd name="adj" fmla="val 10526"/>
+              <a:gd name="adj" fmla="val 14545"/>
             </a:avLst>
           </a:prstGeom>
           <a:solidFill>
@@ -9643,63 +10925,14 @@
       </p:sp>
       <p:sp>
         <p:nvSpPr>
-          <p:cNvPr id="19" name="Icon FaAddressBook"/>
-          <p:cNvSpPr/>
-          <p:nvPr/>
-        </p:nvSpPr>
-        <p:spPr>
-          <a:xfrm>
-            <a:off x="685800" y="4151376"/>
-            <a:ext cx="493776" cy="493776"/>
-          </a:xfrm>
-          <a:prstGeom prst="ellipse">
-            <a:avLst/>
-          </a:prstGeom>
-          <a:solidFill>
-            <a:srgbClr val="1F2A44"/>
-          </a:solidFill>
-          <a:ln w="12700">
-            <a:solidFill>
-              <a:srgbClr val="1F2A44"/>
-            </a:solidFill>
-            <a:prstDash val="solid"/>
-          </a:ln>
-        </p:spPr>
-      </p:sp>
-      <p:pic>
-        <p:nvPicPr>
-          <p:cNvPr id="20" name="Image 3" descr="C:\Users\whale\AppData\Local\Temp\claude\C--Users-whale-git-uiao-inbox\cbd5b766-acc0-4006-9202-a9bb6b23e97b\scratchpad\deck\icons\FaAddressBook.png"/>
-          <p:cNvPicPr>
-            <a:picLocks noChangeAspect="1"/>
-          </p:cNvPicPr>
-          <p:nvPr/>
-        </p:nvPicPr>
-        <p:blipFill>
-          <a:blip r:embed="rId8"/>
-          <a:stretch>
-            <a:fillRect/>
-          </a:stretch>
-        </p:blipFill>
-        <p:spPr>
-          <a:xfrm>
-            <a:off x="804306" y="4269882"/>
-            <a:ext cx="256764" cy="256764"/>
-          </a:xfrm>
-          <a:prstGeom prst="rect">
-            <a:avLst/>
-          </a:prstGeom>
-        </p:spPr>
-      </p:pic>
-      <p:sp>
-        <p:nvSpPr>
-          <p:cNvPr id="21" name="Measure 4 text"/>
+          <p:cNvPr id="25" name="Stack 2 text"/>
           <p:cNvSpPr txBox="1"/>
           <p:nvPr/>
         </p:nvSpPr>
         <p:spPr>
           <a:xfrm>
-            <a:off x="1325880" y="4087368"/>
-            <a:ext cx="5120640" cy="640080"/>
+            <a:off x="4526280" y="5166360"/>
+            <a:ext cx="2002536" cy="502920"/>
           </a:xfrm>
           <a:prstGeom prst="rect">
             <a:avLst/>
@@ -9711,53 +10944,63 @@
           <a:bodyPr wrap="square" lIns="0" tIns="0" rIns="0" bIns="0" rtlCol="0" anchor="ctr"/>
           <a:lstStyle/>
           <a:p>
-            <a:pPr marL="0" indent="0">
+            <a:pPr marL="0" indent="0" algn="ctr">
               <a:buNone/>
             </a:pPr>
             <a:r>
-              <a:rPr lang="en-US" sz="1550" b="1" dirty="0">
-                <a:solidFill>
-                  <a:srgbClr val="1F2A44"/>
-                </a:solidFill>
-              </a:rPr>
-              <a:t>Directory accuracy</a:t>
-            </a:r>
-            <a:endParaRPr lang="en-US" sz="1400" dirty="0"/>
-          </a:p>
-          <a:p>
-            <a:pPr marL="0" indent="0">
-              <a:buNone/>
-            </a:pPr>
-            <a:r>
-              <a:rPr lang="en-US" sz="1350" dirty="0">
-                <a:solidFill>
-                  <a:schemeClr val="tx2"/>
-                </a:solidFill>
-              </a:rPr>
-              <a:t>Manager and organization match HR</a:t>
-            </a:r>
-            <a:endParaRPr lang="en-US" sz="1400" dirty="0"/>
+              <a:rPr lang="en-US" sz="1200" dirty="0">
+                <a:solidFill>
+                  <a:srgbClr val="334155"/>
+                </a:solidFill>
+              </a:rPr>
+              <a:t>Entra ID HR-driven provisioning</a:t>
+            </a:r>
+            <a:endParaRPr lang="en-US" sz="1200" dirty="0"/>
           </a:p>
         </p:txBody>
       </p:sp>
       <p:sp>
         <p:nvSpPr>
-          <p:cNvPr id="22" name="Measure 5"/>
+          <p:cNvPr id="26" name="Shape 21"/>
           <p:cNvSpPr/>
           <p:nvPr/>
         </p:nvSpPr>
         <p:spPr>
           <a:xfrm>
-            <a:off x="548640" y="4837176"/>
-            <a:ext cx="6035040" cy="694944"/>
+            <a:off x="6629400" y="5417820"/>
+            <a:ext cx="237744" cy="0"/>
+          </a:xfrm>
+          <a:prstGeom prst="line">
+            <a:avLst/>
+          </a:prstGeom>
+          <a:noFill/>
+          <a:ln w="22225">
+            <a:solidFill>
+              <a:srgbClr val="64748B"/>
+            </a:solidFill>
+            <a:prstDash val="solid"/>
+            <a:tailEnd type="triangle"/>
+          </a:ln>
+        </p:spPr>
+      </p:sp>
+      <p:sp>
+        <p:nvSpPr>
+          <p:cNvPr id="27" name="Stack 3"/>
+          <p:cNvSpPr/>
+          <p:nvPr/>
+        </p:nvSpPr>
+        <p:spPr>
+          <a:xfrm>
+            <a:off x="6894576" y="5166360"/>
+            <a:ext cx="2148840" cy="502920"/>
           </a:xfrm>
           <a:prstGeom prst="roundRect">
             <a:avLst>
-              <a:gd name="adj" fmla="val 10526"/>
+              <a:gd name="adj" fmla="val 14545"/>
             </a:avLst>
           </a:prstGeom>
           <a:solidFill>
-            <a:srgbClr val="E9EEF4"/>
+            <a:srgbClr val="FFFFFF"/>
           </a:solidFill>
           <a:ln w="12700">
             <a:solidFill>
@@ -9776,125 +11019,86 @@
       </p:sp>
       <p:sp>
         <p:nvSpPr>
-          <p:cNvPr id="23" name="Icon FaTriangleExclamation"/>
+          <p:cNvPr id="28" name="Stack 3 text"/>
+          <p:cNvSpPr txBox="1"/>
+          <p:nvPr/>
+        </p:nvSpPr>
+        <p:spPr>
+          <a:xfrm>
+            <a:off x="6967728" y="5166360"/>
+            <a:ext cx="2002536" cy="502920"/>
+          </a:xfrm>
+          <a:prstGeom prst="rect">
+            <a:avLst/>
+          </a:prstGeom>
+          <a:noFill/>
+          <a:ln/>
+        </p:spPr>
+        <p:txBody>
+          <a:bodyPr wrap="square" lIns="0" tIns="0" rIns="0" bIns="0" rtlCol="0" anchor="ctr"/>
+          <a:lstStyle/>
+          <a:p>
+            <a:pPr marL="0" indent="0" algn="ctr">
+              <a:buNone/>
+            </a:pPr>
+            <a:r>
+              <a:rPr lang="en-US" sz="1200" dirty="0">
+                <a:solidFill>
+                  <a:srgbClr val="334155"/>
+                </a:solidFill>
+              </a:rPr>
+              <a:t>Entra ID and Active Directory</a:t>
+            </a:r>
+            <a:endParaRPr lang="en-US" sz="1200" dirty="0"/>
+          </a:p>
+        </p:txBody>
+      </p:sp>
+      <p:sp>
+        <p:nvSpPr>
+          <p:cNvPr id="29" name="Shape 24"/>
           <p:cNvSpPr/>
           <p:nvPr/>
         </p:nvSpPr>
         <p:spPr>
           <a:xfrm>
-            <a:off x="685800" y="4937760"/>
-            <a:ext cx="493776" cy="493776"/>
-          </a:xfrm>
-          <a:prstGeom prst="ellipse">
-            <a:avLst/>
+            <a:off x="9070848" y="5417820"/>
+            <a:ext cx="237744" cy="0"/>
+          </a:xfrm>
+          <a:prstGeom prst="line">
+            <a:avLst/>
+          </a:prstGeom>
+          <a:noFill/>
+          <a:ln w="22225">
+            <a:solidFill>
+              <a:srgbClr val="64748B"/>
+            </a:solidFill>
+            <a:prstDash val="solid"/>
+            <a:tailEnd type="triangle"/>
+          </a:ln>
+        </p:spPr>
+      </p:sp>
+      <p:sp>
+        <p:nvSpPr>
+          <p:cNvPr id="30" name="Stack 4"/>
+          <p:cNvSpPr/>
+          <p:nvPr/>
+        </p:nvSpPr>
+        <p:spPr>
+          <a:xfrm>
+            <a:off x="9336024" y="5166360"/>
+            <a:ext cx="2148840" cy="502920"/>
+          </a:xfrm>
+          <a:prstGeom prst="roundRect">
+            <a:avLst>
+              <a:gd name="adj" fmla="val 14545"/>
+            </a:avLst>
           </a:prstGeom>
           <a:solidFill>
-            <a:srgbClr val="B45309"/>
+            <a:srgbClr val="FFFFFF"/>
           </a:solidFill>
           <a:ln w="12700">
             <a:solidFill>
-              <a:srgbClr val="B45309"/>
-            </a:solidFill>
-            <a:prstDash val="solid"/>
-          </a:ln>
-        </p:spPr>
-      </p:sp>
-      <p:pic>
-        <p:nvPicPr>
-          <p:cNvPr id="24" name="Image 4" descr="C:\Users\whale\AppData\Local\Temp\claude\C--Users-whale-git-uiao-inbox\cbd5b766-acc0-4006-9202-a9bb6b23e97b\scratchpad\deck\icons\FaTriangleExclamation.png"/>
-          <p:cNvPicPr>
-            <a:picLocks noChangeAspect="1"/>
-          </p:cNvPicPr>
-          <p:nvPr/>
-        </p:nvPicPr>
-        <p:blipFill>
-          <a:blip r:embed="rId9"/>
-          <a:stretch>
-            <a:fillRect/>
-          </a:stretch>
-        </p:blipFill>
-        <p:spPr>
-          <a:xfrm>
-            <a:off x="804306" y="5056266"/>
-            <a:ext cx="256764" cy="256764"/>
-          </a:xfrm>
-          <a:prstGeom prst="rect">
-            <a:avLst/>
-          </a:prstGeom>
-        </p:spPr>
-      </p:pic>
-      <p:sp>
-        <p:nvSpPr>
-          <p:cNvPr id="25" name="Measure 5 text"/>
-          <p:cNvSpPr txBox="1"/>
-          <p:nvPr/>
-        </p:nvSpPr>
-        <p:spPr>
-          <a:xfrm>
-            <a:off x="1325880" y="4873752"/>
-            <a:ext cx="5120640" cy="640080"/>
-          </a:xfrm>
-          <a:prstGeom prst="rect">
-            <a:avLst/>
-          </a:prstGeom>
-          <a:noFill/>
-          <a:ln/>
-        </p:spPr>
-        <p:txBody>
-          <a:bodyPr wrap="square" lIns="0" tIns="0" rIns="0" bIns="0" rtlCol="0" anchor="ctr"/>
-          <a:lstStyle/>
-          <a:p>
-            <a:pPr marL="0" indent="0">
-              <a:buNone/>
-            </a:pPr>
-            <a:r>
-              <a:rPr lang="en-US" sz="1550" b="1" dirty="0">
-                <a:solidFill>
-                  <a:srgbClr val="B45309"/>
-                </a:solidFill>
-              </a:rPr>
-              <a:t>Exceptions</a:t>
-            </a:r>
-            <a:endParaRPr lang="en-US" sz="1400" dirty="0"/>
-          </a:p>
-          <a:p>
-            <a:pPr marL="0" indent="0">
-              <a:buNone/>
-            </a:pPr>
-            <a:r>
-              <a:rPr lang="en-US" sz="1350" dirty="0">
-                <a:solidFill>
-                  <a:schemeClr val="tx2"/>
-                </a:solidFill>
-              </a:rPr>
-              <a:t>Each has an owner and an age</a:t>
-            </a:r>
-            <a:endParaRPr lang="en-US" sz="1400" dirty="0"/>
-          </a:p>
-        </p:txBody>
-      </p:sp>
-      <p:sp>
-        <p:nvSpPr>
-          <p:cNvPr id="26" name="Ask box"/>
-          <p:cNvSpPr/>
-          <p:nvPr/>
-        </p:nvSpPr>
-        <p:spPr>
-          <a:xfrm>
-            <a:off x="6812280" y="1280160"/>
-            <a:ext cx="4846320" cy="4846320"/>
-          </a:xfrm>
-          <a:prstGeom prst="roundRect">
-            <a:avLst>
-              <a:gd name="adj" fmla="val 1509"/>
-            </a:avLst>
-          </a:prstGeom>
-          <a:solidFill>
-            <a:srgbClr val="FBEEDC"/>
-          </a:solidFill>
-          <a:ln w="12700">
-            <a:solidFill>
-              <a:srgbClr val="FBEEDC"/>
+              <a:srgbClr val="CBD5E1"/>
             </a:solidFill>
             <a:prstDash val="solid"/>
           </a:ln>
@@ -9909,63 +11113,14 @@
       </p:sp>
       <p:sp>
         <p:nvSpPr>
-          <p:cNvPr id="27" name="Icon FaLightbulb"/>
-          <p:cNvSpPr/>
-          <p:nvPr/>
-        </p:nvSpPr>
-        <p:spPr>
-          <a:xfrm>
-            <a:off x="7040880" y="1463040"/>
-            <a:ext cx="685800" cy="685800"/>
-          </a:xfrm>
-          <a:prstGeom prst="ellipse">
-            <a:avLst/>
-          </a:prstGeom>
-          <a:solidFill>
-            <a:srgbClr val="B45309"/>
-          </a:solidFill>
-          <a:ln w="12700">
-            <a:solidFill>
-              <a:srgbClr val="B45309"/>
-            </a:solidFill>
-            <a:prstDash val="solid"/>
-          </a:ln>
-        </p:spPr>
-      </p:sp>
-      <p:pic>
-        <p:nvPicPr>
-          <p:cNvPr id="28" name="Image 5" descr="C:\Users\whale\AppData\Local\Temp\claude\C--Users-whale-git-uiao-inbox\cbd5b766-acc0-4006-9202-a9bb6b23e97b\scratchpad\deck\icons\FaLightbulb.png"/>
-          <p:cNvPicPr>
-            <a:picLocks noChangeAspect="1"/>
-          </p:cNvPicPr>
-          <p:nvPr/>
-        </p:nvPicPr>
-        <p:blipFill>
-          <a:blip r:embed="rId10"/>
-          <a:stretch>
-            <a:fillRect/>
-          </a:stretch>
-        </p:blipFill>
-        <p:spPr>
-          <a:xfrm>
-            <a:off x="7205472" y="1627632"/>
-            <a:ext cx="356616" cy="356616"/>
-          </a:xfrm>
-          <a:prstGeom prst="rect">
-            <a:avLst/>
-          </a:prstGeom>
-        </p:spPr>
-      </p:pic>
-      <p:sp>
-        <p:nvSpPr>
-          <p:cNvPr id="29" name="Ask head"/>
+          <p:cNvPr id="31" name="Stack 4 text"/>
           <p:cNvSpPr txBox="1"/>
           <p:nvPr/>
         </p:nvSpPr>
         <p:spPr>
           <a:xfrm>
-            <a:off x="7863840" y="1463040"/>
-            <a:ext cx="3657600" cy="685800"/>
+            <a:off x="9409176" y="5166360"/>
+            <a:ext cx="2002536" cy="502920"/>
           </a:xfrm>
           <a:prstGeom prst="rect">
             <a:avLst/>
@@ -9977,146 +11132,24 @@
           <a:bodyPr wrap="square" lIns="0" tIns="0" rIns="0" bIns="0" rtlCol="0" anchor="ctr"/>
           <a:lstStyle/>
           <a:p>
-            <a:pPr marL="0" indent="0">
+            <a:pPr marL="0" indent="0" algn="ctr">
               <a:buNone/>
             </a:pPr>
             <a:r>
-              <a:rPr lang="en-US" sz="1900" b="1" dirty="0">
-                <a:solidFill>
-                  <a:srgbClr val="B45309"/>
-                </a:solidFill>
-                <a:latin typeface="Cambria" pitchFamily="34" charset="0"/>
-                <a:ea typeface="Cambria" pitchFamily="34" charset="-122"/>
-                <a:cs typeface="Cambria" pitchFamily="34" charset="-120"/>
-              </a:rPr>
-              <a:t>What I’d need from leadership</a:t>
-            </a:r>
-            <a:endParaRPr lang="en-US" sz="1900" dirty="0"/>
+              <a:rPr lang="en-US" sz="1200" dirty="0">
+                <a:solidFill>
+                  <a:srgbClr val="334155"/>
+                </a:solidFill>
+              </a:rPr>
+              <a:t>Access packages, lifecycle workflows, PIV</a:t>
+            </a:r>
+            <a:endParaRPr lang="en-US" sz="1200" dirty="0"/>
           </a:p>
         </p:txBody>
       </p:sp>
       <p:sp>
         <p:nvSpPr>
-          <p:cNvPr id="30" name="Ask text"/>
-          <p:cNvSpPr txBox="1"/>
-          <p:nvPr/>
-        </p:nvSpPr>
-        <p:spPr>
-          <a:xfrm>
-            <a:off x="7040880" y="2331720"/>
-            <a:ext cx="4434840" cy="3657600"/>
-          </a:xfrm>
-          <a:prstGeom prst="rect">
-            <a:avLst/>
-          </a:prstGeom>
-          <a:noFill/>
-          <a:ln/>
-        </p:spPr>
-        <p:txBody>
-          <a:bodyPr wrap="square" lIns="0" tIns="0" rIns="0" bIns="0" rtlCol="0" anchor="t"/>
-          <a:lstStyle/>
-          <a:p>
-            <a:pPr marL="0" indent="0">
-              <a:spcAft>
-                <a:spcPts val="600"/>
-              </a:spcAft>
-              <a:buNone/>
-            </a:pPr>
-            <a:r>
-              <a:rPr lang="en-US" sz="1500" b="1" dirty="0">
-                <a:solidFill>
-                  <a:srgbClr val="1F2A44"/>
-                </a:solidFill>
-              </a:rPr>
-              <a:t>One decision: </a:t>
-            </a:r>
-            <a:r>
-              <a:rPr lang="en-US" sz="1500" dirty="0">
-                <a:solidFill>
-                  <a:schemeClr val="tx2"/>
-                </a:solidFill>
-              </a:rPr>
-              <a:t>start HR-driven identity now, as a design requirement of the HR 2.0 onboarding and the Entra ID migration.</a:t>
-            </a:r>
-            <a:endParaRPr lang="en-US" sz="1500" dirty="0"/>
-          </a:p>
-          <a:p>
-            <a:pPr marL="342900" indent="-342900">
-              <a:spcAft>
-                <a:spcPts val="600"/>
-              </a:spcAft>
-              <a:buSzPct val="100000"/>
-              <a:buChar char="•"/>
-            </a:pPr>
-            <a:r>
-              <a:rPr lang="en-US" sz="1450" dirty="0">
-                <a:solidFill>
-                  <a:schemeClr val="tx2"/>
-                </a:solidFill>
-              </a:rPr>
-              <a:t>A sponsor across HR, the CIO’s identity team and privacy</a:t>
-            </a:r>
-            <a:endParaRPr lang="en-US" sz="1500" dirty="0"/>
-          </a:p>
-          <a:p>
-            <a:pPr marL="342900" indent="-342900">
-              <a:spcAft>
-                <a:spcPts val="600"/>
-              </a:spcAft>
-              <a:buSzPct val="100000"/>
-              <a:buChar char="•"/>
-            </a:pPr>
-            <a:r>
-              <a:rPr lang="en-US" sz="1450" dirty="0">
-                <a:solidFill>
-                  <a:schemeClr val="tx2"/>
-                </a:solidFill>
-              </a:rPr>
-              <a:t>Identity named as a consumer in the HR 2.0 interconnection plan</a:t>
-            </a:r>
-            <a:endParaRPr lang="en-US" sz="1500" dirty="0"/>
-          </a:p>
-          <a:p>
-            <a:pPr marL="342900" indent="-342900">
-              <a:spcAft>
-                <a:spcPts val="600"/>
-              </a:spcAft>
-              <a:buSzPct val="100000"/>
-              <a:buChar char="•"/>
-            </a:pPr>
-            <a:r>
-              <a:rPr lang="en-US" sz="1450" dirty="0">
-                <a:solidFill>
-                  <a:schemeClr val="tx2"/>
-                </a:solidFill>
-              </a:rPr>
-              <a:t>Data owners designated; the enterprise person key confirmed</a:t>
-            </a:r>
-            <a:endParaRPr lang="en-US" sz="1500" dirty="0"/>
-          </a:p>
-          <a:p>
-            <a:pPr marL="342900" indent="-342900">
-              <a:spcAft>
-                <a:spcPts val="600"/>
-              </a:spcAft>
-              <a:buSzPct val="100000"/>
-              <a:buChar char="•"/>
-            </a:pPr>
-            <a:r>
-              <a:rPr lang="en-US" sz="1450" dirty="0">
-                <a:solidFill>
-                  <a:schemeClr val="tx2"/>
-                </a:solidFill>
-              </a:rPr>
-              <a:t>A small team for the pre-onboarding data work</a:t>
-            </a:r>
-            <a:endParaRPr lang="en-US" sz="1500" dirty="0"/>
-          </a:p>
-        </p:txBody>
-      </p:sp>
-      <p:sp>
-        <p:nvSpPr>
-          <p:cNvPr id="31" name="Slide Number Placeholder 0"/>
+          <p:cNvPr id="32" name="Slide Number Placeholder 0"/>
           <p:cNvSpPr>
             <a:spLocks noGrp="1"/>
           </p:cNvSpPr>
@@ -10161,11 +11194,11 @@
       </p:sp>
       <p:pic>
         <p:nvPicPr>
-          <p:cNvPr id="32" name="Narration">
+          <p:cNvPr id="33" name="Narration">
             <a:hlinkClick r:id="" action="ppaction://media"/>
             <a:extLst>
               <a:ext uri="{FF2B5EF4-FFF2-40B4-BE49-F238E27FC236}">
-                <a16:creationId xmlns:a16="http://schemas.microsoft.com/office/drawing/2014/main" id="{6A8F8F9A-8546-40EA-6C7F-280055BACC5F}"/>
+                <a16:creationId xmlns:a16="http://schemas.microsoft.com/office/drawing/2014/main" id="{147E0256-1466-2CD8-684C-2952E2822917}"/>
               </a:ext>
             </a:extLst>
           </p:cNvPr>
@@ -10182,7 +11215,7 @@
           </p:nvPr>
         </p:nvPicPr>
         <p:blipFill>
-          <a:blip r:embed="rId11"/>
+          <a:blip r:embed="rId8"/>
           <a:stretch>
             <a:fillRect/>
           </a:stretch>
@@ -10204,10 +11237,10 @@
   </p:clrMapOvr>
   <mc:AlternateContent xmlns:mc="http://schemas.openxmlformats.org/markup-compatibility/2006">
     <mc:Choice xmlns:p14="http://schemas.microsoft.com/office/powerpoint/2010/main" Requires="p14">
-      <p:transition spd="slow" p14:dur="2000" advTm="68920"/>
+      <p:transition spd="slow" p14:dur="2000" advTm="87470"/>
     </mc:Choice>
     <mc:Fallback>
-      <p:transition spd="slow" advTm="68920"/>
+      <p:transition spd="slow" advTm="87470"/>
     </mc:Fallback>
   </mc:AlternateContent>
   <p:timing>
@@ -10241,9 +11274,2911 @@
                                   <p:childTnLst>
                                     <p:cmd type="call" cmd="playFrom(0.0)">
                                       <p:cBhvr>
-                                        <p:cTn id="6" dur="67920" fill="hold"/>
+                                        <p:cTn id="6" dur="86472" fill="hold"/>
                                         <p:tgtEl>
-                                          <p:spTgt spid="32"/>
+                                          <p:spTgt spid="33"/>
+                                        </p:tgtEl>
+                                      </p:cBhvr>
+                                    </p:cmd>
+                                  </p:childTnLst>
+                                </p:cTn>
+                              </p:par>
+                            </p:childTnLst>
+                          </p:cTn>
+                        </p:par>
+                      </p:childTnLst>
+                    </p:cTn>
+                  </p:par>
+                </p:childTnLst>
+              </p:cTn>
+              <p:prevCondLst>
+                <p:cond evt="onPrev" delay="0">
+                  <p:tgtEl>
+                    <p:sldTgt/>
+                  </p:tgtEl>
+                </p:cond>
+              </p:prevCondLst>
+              <p:nextCondLst>
+                <p:cond evt="onNext" delay="0">
+                  <p:tgtEl>
+                    <p:sldTgt/>
+                  </p:tgtEl>
+                </p:cond>
+              </p:nextCondLst>
+            </p:seq>
+          </p:childTnLst>
+        </p:cTn>
+      </p:par>
+    </p:tnLst>
+  </p:timing>
+</p:sld>
+</file>
+
+<file path=ppt/slides/slide8.xml><?xml version="1.0" encoding="utf-8"?>
+<p:sld xmlns:a="http://schemas.openxmlformats.org/drawingml/2006/main" xmlns:r="http://schemas.openxmlformats.org/officeDocument/2006/relationships" xmlns:p="http://schemas.openxmlformats.org/presentationml/2006/main">
+  <p:cSld name="Slide 8">
+    <p:spTree>
+      <p:nvGrpSpPr>
+        <p:cNvPr id="1" name=""/>
+        <p:cNvGrpSpPr/>
+        <p:nvPr/>
+      </p:nvGrpSpPr>
+      <p:grpSpPr>
+        <a:xfrm>
+          <a:off x="0" y="0"/>
+          <a:ext cx="0" cy="0"/>
+          <a:chOff x="0" y="0"/>
+          <a:chExt cx="0" cy="0"/>
+        </a:xfrm>
+      </p:grpSpPr>
+      <p:sp>
+        <p:nvSpPr>
+          <p:cNvPr id="2" name="Text 0"/>
+          <p:cNvSpPr>
+            <a:spLocks noGrp="1"/>
+          </p:cNvSpPr>
+          <p:nvPr>
+            <p:ph type="title" idx="100" hasCustomPrompt="1"/>
+          </p:nvPr>
+        </p:nvSpPr>
+        <p:spPr>
+          <a:xfrm>
+            <a:off x="548640" y="320040"/>
+            <a:ext cx="11064240" cy="868680"/>
+          </a:xfrm>
+          <a:prstGeom prst="rect">
+            <a:avLst/>
+          </a:prstGeom>
+          <a:noFill/>
+          <a:ln/>
+        </p:spPr>
+        <p:txBody>
+          <a:bodyPr wrap="square" lIns="0" tIns="0" rIns="0" bIns="0" rtlCol="0" anchor="ctr"/>
+          <a:lstStyle/>
+          <a:p>
+            <a:pPr marL="0" indent="0">
+              <a:buNone/>
+            </a:pPr>
+            <a:r>
+              <a:rPr lang="en-US" sz="3000" b="1" dirty="0">
+                <a:solidFill>
+                  <a:schemeClr val="tx1"/>
+                </a:solidFill>
+                <a:latin typeface="Cambria" pitchFamily="34" charset="0"/>
+                <a:ea typeface="Cambria" pitchFamily="34" charset="-122"/>
+                <a:cs typeface="Cambria" pitchFamily="34" charset="-120"/>
+              </a:rPr>
+              <a:t>How we’ll know it works — and what I need</a:t>
+            </a:r>
+            <a:endParaRPr lang="en-US" sz="3000" dirty="0"/>
+          </a:p>
+        </p:txBody>
+      </p:sp>
+      <p:sp>
+        <p:nvSpPr>
+          <p:cNvPr id="3" name="Tag How"/>
+          <p:cNvSpPr/>
+          <p:nvPr/>
+        </p:nvSpPr>
+        <p:spPr>
+          <a:xfrm>
+            <a:off x="548640" y="109728"/>
+            <a:ext cx="868680" cy="292608"/>
+          </a:xfrm>
+          <a:prstGeom prst="roundRect">
+            <a:avLst>
+              <a:gd name="adj" fmla="val 18750"/>
+            </a:avLst>
+          </a:prstGeom>
+          <a:solidFill>
+            <a:srgbClr val="B45309"/>
+          </a:solidFill>
+          <a:ln w="12700">
+            <a:solidFill>
+              <a:srgbClr val="B45309"/>
+            </a:solidFill>
+            <a:prstDash val="solid"/>
+          </a:ln>
+        </p:spPr>
+      </p:sp>
+      <p:sp>
+        <p:nvSpPr>
+          <p:cNvPr id="4" name="Tag How text"/>
+          <p:cNvSpPr txBox="1"/>
+          <p:nvPr/>
+        </p:nvSpPr>
+        <p:spPr>
+          <a:xfrm>
+            <a:off x="548640" y="109728"/>
+            <a:ext cx="868680" cy="292608"/>
+          </a:xfrm>
+          <a:prstGeom prst="rect">
+            <a:avLst/>
+          </a:prstGeom>
+          <a:noFill/>
+          <a:ln/>
+        </p:spPr>
+        <p:txBody>
+          <a:bodyPr wrap="square" lIns="0" tIns="0" rIns="0" bIns="0" rtlCol="0" anchor="ctr"/>
+          <a:lstStyle/>
+          <a:p>
+            <a:pPr marL="0" indent="0" algn="ctr">
+              <a:buNone/>
+            </a:pPr>
+            <a:r>
+              <a:rPr lang="en-US" sz="1100" b="1" kern="0" spc="100" dirty="0">
+                <a:solidFill>
+                  <a:srgbClr val="FFFFFF"/>
+                </a:solidFill>
+              </a:rPr>
+              <a:t>HOW</a:t>
+            </a:r>
+            <a:endParaRPr lang="en-US" sz="1100" dirty="0"/>
+          </a:p>
+        </p:txBody>
+      </p:sp>
+      <p:sp>
+        <p:nvSpPr>
+          <p:cNvPr id="5" name="Measures head"/>
+          <p:cNvSpPr txBox="1"/>
+          <p:nvPr/>
+        </p:nvSpPr>
+        <p:spPr>
+          <a:xfrm>
+            <a:off x="548640" y="1280160"/>
+            <a:ext cx="6035040" cy="320040"/>
+          </a:xfrm>
+          <a:prstGeom prst="rect">
+            <a:avLst/>
+          </a:prstGeom>
+          <a:noFill/>
+          <a:ln/>
+        </p:spPr>
+        <p:txBody>
+          <a:bodyPr wrap="square" lIns="0" tIns="0" rIns="0" bIns="0" rtlCol="0" anchor="t"/>
+          <a:lstStyle/>
+          <a:p>
+            <a:pPr marL="0" indent="0">
+              <a:buNone/>
+            </a:pPr>
+            <a:r>
+              <a:rPr lang="en-US" sz="1200" b="1" dirty="0">
+                <a:solidFill>
+                  <a:srgbClr val="64748B"/>
+                </a:solidFill>
+              </a:rPr>
+              <a:t>MEASURES, BASELINED IN THE FIRST PHASE</a:t>
+            </a:r>
+            <a:endParaRPr lang="en-US" sz="1200" dirty="0"/>
+          </a:p>
+        </p:txBody>
+      </p:sp>
+      <p:sp>
+        <p:nvSpPr>
+          <p:cNvPr id="6" name="Measure 1"/>
+          <p:cNvSpPr/>
+          <p:nvPr/>
+        </p:nvSpPr>
+        <p:spPr>
+          <a:xfrm>
+            <a:off x="548640" y="1645920"/>
+            <a:ext cx="6035040" cy="658368"/>
+          </a:xfrm>
+          <a:prstGeom prst="roundRect">
+            <a:avLst>
+              <a:gd name="adj" fmla="val 11111"/>
+            </a:avLst>
+          </a:prstGeom>
+          <a:solidFill>
+            <a:srgbClr val="E9EEF4"/>
+          </a:solidFill>
+          <a:ln w="12700">
+            <a:solidFill>
+              <a:srgbClr val="CBD5E1"/>
+            </a:solidFill>
+            <a:prstDash val="solid"/>
+          </a:ln>
+          <a:effectLst>
+            <a:outerShdw blurRad="76200" dist="25400" dir="5400000" algn="bl" rotWithShape="0">
+              <a:srgbClr val="64748B">
+                <a:alpha val="22000"/>
+              </a:srgbClr>
+            </a:outerShdw>
+          </a:effectLst>
+        </p:spPr>
+      </p:sp>
+      <p:sp>
+        <p:nvSpPr>
+          <p:cNvPr id="7" name="Icon FaUserXmark"/>
+          <p:cNvSpPr/>
+          <p:nvPr/>
+        </p:nvSpPr>
+        <p:spPr>
+          <a:xfrm>
+            <a:off x="685800" y="1737360"/>
+            <a:ext cx="475488" cy="475488"/>
+          </a:xfrm>
+          <a:prstGeom prst="ellipse">
+            <a:avLst/>
+          </a:prstGeom>
+          <a:solidFill>
+            <a:srgbClr val="B91C1C"/>
+          </a:solidFill>
+          <a:ln w="12700">
+            <a:solidFill>
+              <a:srgbClr val="B91C1C"/>
+            </a:solidFill>
+            <a:prstDash val="solid"/>
+          </a:ln>
+        </p:spPr>
+      </p:sp>
+      <p:pic>
+        <p:nvPicPr>
+          <p:cNvPr id="8" name="Image 0" descr="C:\Users\whale\git\uiao\inbox\SSA-Interview\build\icons\FaUserXmark.png"/>
+          <p:cNvPicPr>
+            <a:picLocks noChangeAspect="1"/>
+          </p:cNvPicPr>
+          <p:nvPr/>
+        </p:nvPicPr>
+        <p:blipFill>
+          <a:blip r:embed="rId5"/>
+          <a:stretch>
+            <a:fillRect/>
+          </a:stretch>
+        </p:blipFill>
+        <p:spPr>
+          <a:xfrm>
+            <a:off x="799917" y="1851477"/>
+            <a:ext cx="247254" cy="247254"/>
+          </a:xfrm>
+          <a:prstGeom prst="rect">
+            <a:avLst/>
+          </a:prstGeom>
+        </p:spPr>
+      </p:pic>
+      <p:sp>
+        <p:nvSpPr>
+          <p:cNvPr id="9" name="Measure 1 text"/>
+          <p:cNvSpPr txBox="1"/>
+          <p:nvPr/>
+        </p:nvSpPr>
+        <p:spPr>
+          <a:xfrm>
+            <a:off x="1325880" y="1673352"/>
+            <a:ext cx="5120640" cy="603504"/>
+          </a:xfrm>
+          <a:prstGeom prst="rect">
+            <a:avLst/>
+          </a:prstGeom>
+          <a:noFill/>
+          <a:ln/>
+        </p:spPr>
+        <p:txBody>
+          <a:bodyPr wrap="square" lIns="0" tIns="0" rIns="0" bIns="0" rtlCol="0" anchor="ctr"/>
+          <a:lstStyle/>
+          <a:p>
+            <a:pPr marL="0" indent="0">
+              <a:buNone/>
+            </a:pPr>
+            <a:r>
+              <a:rPr lang="en-US" sz="1550" b="1" dirty="0">
+                <a:solidFill>
+                  <a:srgbClr val="B91C1C"/>
+                </a:solidFill>
+              </a:rPr>
+              <a:t>Separation to blocked access</a:t>
+            </a:r>
+            <a:endParaRPr lang="en-US" sz="1400" dirty="0"/>
+          </a:p>
+          <a:p>
+            <a:pPr marL="0" indent="0">
+              <a:buNone/>
+            </a:pPr>
+            <a:r>
+              <a:rPr lang="en-US" sz="1350" dirty="0">
+                <a:solidFill>
+                  <a:schemeClr val="tx2"/>
+                </a:solidFill>
+              </a:rPr>
+              <a:t>Agency-approved threshold, measured in hours</a:t>
+            </a:r>
+            <a:endParaRPr lang="en-US" sz="1400" dirty="0"/>
+          </a:p>
+        </p:txBody>
+      </p:sp>
+      <p:sp>
+        <p:nvSpPr>
+          <p:cNvPr id="10" name="Measure 2"/>
+          <p:cNvSpPr/>
+          <p:nvPr/>
+        </p:nvSpPr>
+        <p:spPr>
+          <a:xfrm>
+            <a:off x="548640" y="2377440"/>
+            <a:ext cx="6035040" cy="658368"/>
+          </a:xfrm>
+          <a:prstGeom prst="roundRect">
+            <a:avLst>
+              <a:gd name="adj" fmla="val 11111"/>
+            </a:avLst>
+          </a:prstGeom>
+          <a:solidFill>
+            <a:srgbClr val="FFFFFF"/>
+          </a:solidFill>
+          <a:ln w="12700">
+            <a:solidFill>
+              <a:srgbClr val="CBD5E1"/>
+            </a:solidFill>
+            <a:prstDash val="solid"/>
+          </a:ln>
+          <a:effectLst>
+            <a:outerShdw blurRad="76200" dist="25400" dir="5400000" algn="bl" rotWithShape="0">
+              <a:srgbClr val="64748B">
+                <a:alpha val="22000"/>
+              </a:srgbClr>
+            </a:outerShdw>
+          </a:effectLst>
+        </p:spPr>
+      </p:sp>
+      <p:sp>
+        <p:nvSpPr>
+          <p:cNvPr id="11" name="Icon FaIdCard"/>
+          <p:cNvSpPr/>
+          <p:nvPr/>
+        </p:nvSpPr>
+        <p:spPr>
+          <a:xfrm>
+            <a:off x="685800" y="2468880"/>
+            <a:ext cx="475488" cy="475488"/>
+          </a:xfrm>
+          <a:prstGeom prst="ellipse">
+            <a:avLst/>
+          </a:prstGeom>
+          <a:solidFill>
+            <a:srgbClr val="B91C1C"/>
+          </a:solidFill>
+          <a:ln w="12700">
+            <a:solidFill>
+              <a:srgbClr val="B91C1C"/>
+            </a:solidFill>
+            <a:prstDash val="solid"/>
+          </a:ln>
+        </p:spPr>
+      </p:sp>
+      <p:pic>
+        <p:nvPicPr>
+          <p:cNvPr id="12" name="Image 1" descr="C:\Users\whale\git\uiao\inbox\SSA-Interview\build\icons\FaIdCard.png"/>
+          <p:cNvPicPr>
+            <a:picLocks noChangeAspect="1"/>
+          </p:cNvPicPr>
+          <p:nvPr/>
+        </p:nvPicPr>
+        <p:blipFill>
+          <a:blip r:embed="rId6"/>
+          <a:stretch>
+            <a:fillRect/>
+          </a:stretch>
+        </p:blipFill>
+        <p:spPr>
+          <a:xfrm>
+            <a:off x="799917" y="2582997"/>
+            <a:ext cx="247254" cy="247254"/>
+          </a:xfrm>
+          <a:prstGeom prst="rect">
+            <a:avLst/>
+          </a:prstGeom>
+        </p:spPr>
+      </p:pic>
+      <p:sp>
+        <p:nvSpPr>
+          <p:cNvPr id="13" name="Measure 2 text"/>
+          <p:cNvSpPr txBox="1"/>
+          <p:nvPr/>
+        </p:nvSpPr>
+        <p:spPr>
+          <a:xfrm>
+            <a:off x="1325880" y="2404872"/>
+            <a:ext cx="5120640" cy="603504"/>
+          </a:xfrm>
+          <a:prstGeom prst="rect">
+            <a:avLst/>
+          </a:prstGeom>
+          <a:noFill/>
+          <a:ln/>
+        </p:spPr>
+        <p:txBody>
+          <a:bodyPr wrap="square" lIns="0" tIns="0" rIns="0" bIns="0" rtlCol="0" anchor="ctr"/>
+          <a:lstStyle/>
+          <a:p>
+            <a:pPr marL="0" indent="0">
+              <a:buNone/>
+            </a:pPr>
+            <a:r>
+              <a:rPr lang="en-US" sz="1550" b="1" dirty="0">
+                <a:solidFill>
+                  <a:srgbClr val="B91C1C"/>
+                </a:solidFill>
+              </a:rPr>
+              <a:t>Credential and access revocation</a:t>
+            </a:r>
+            <a:endParaRPr lang="en-US" sz="1400" dirty="0"/>
+          </a:p>
+          <a:p>
+            <a:pPr marL="0" indent="0">
+              <a:buNone/>
+            </a:pPr>
+            <a:r>
+              <a:rPr lang="en-US" sz="1350" dirty="0">
+                <a:solidFill>
+                  <a:schemeClr val="tx2"/>
+                </a:solidFill>
+              </a:rPr>
+              <a:t>Reconciled to verified completion</a:t>
+            </a:r>
+            <a:endParaRPr lang="en-US" sz="1400" dirty="0"/>
+          </a:p>
+        </p:txBody>
+      </p:sp>
+      <p:sp>
+        <p:nvSpPr>
+          <p:cNvPr id="14" name="Measure 3"/>
+          <p:cNvSpPr/>
+          <p:nvPr/>
+        </p:nvSpPr>
+        <p:spPr>
+          <a:xfrm>
+            <a:off x="548640" y="3108960"/>
+            <a:ext cx="6035040" cy="658368"/>
+          </a:xfrm>
+          <a:prstGeom prst="roundRect">
+            <a:avLst>
+              <a:gd name="adj" fmla="val 11111"/>
+            </a:avLst>
+          </a:prstGeom>
+          <a:solidFill>
+            <a:srgbClr val="E9EEF4"/>
+          </a:solidFill>
+          <a:ln w="12700">
+            <a:solidFill>
+              <a:srgbClr val="CBD5E1"/>
+            </a:solidFill>
+            <a:prstDash val="solid"/>
+          </a:ln>
+          <a:effectLst>
+            <a:outerShdw blurRad="76200" dist="25400" dir="5400000" algn="bl" rotWithShape="0">
+              <a:srgbClr val="64748B">
+                <a:alpha val="22000"/>
+              </a:srgbClr>
+            </a:outerShdw>
+          </a:effectLst>
+        </p:spPr>
+      </p:sp>
+      <p:sp>
+        <p:nvSpPr>
+          <p:cNvPr id="15" name="Icon FaFingerprint"/>
+          <p:cNvSpPr/>
+          <p:nvPr/>
+        </p:nvSpPr>
+        <p:spPr>
+          <a:xfrm>
+            <a:off x="685800" y="3200400"/>
+            <a:ext cx="475488" cy="475488"/>
+          </a:xfrm>
+          <a:prstGeom prst="ellipse">
+            <a:avLst/>
+          </a:prstGeom>
+          <a:solidFill>
+            <a:srgbClr val="1F2A44"/>
+          </a:solidFill>
+          <a:ln w="12700">
+            <a:solidFill>
+              <a:srgbClr val="1F2A44"/>
+            </a:solidFill>
+            <a:prstDash val="solid"/>
+          </a:ln>
+        </p:spPr>
+      </p:sp>
+      <p:pic>
+        <p:nvPicPr>
+          <p:cNvPr id="16" name="Image 2" descr="C:\Users\whale\git\uiao\inbox\SSA-Interview\build\icons\FaFingerprint.png"/>
+          <p:cNvPicPr>
+            <a:picLocks noChangeAspect="1"/>
+          </p:cNvPicPr>
+          <p:nvPr/>
+        </p:nvPicPr>
+        <p:blipFill>
+          <a:blip r:embed="rId7"/>
+          <a:stretch>
+            <a:fillRect/>
+          </a:stretch>
+        </p:blipFill>
+        <p:spPr>
+          <a:xfrm>
+            <a:off x="799917" y="3314517"/>
+            <a:ext cx="247254" cy="247254"/>
+          </a:xfrm>
+          <a:prstGeom prst="rect">
+            <a:avLst/>
+          </a:prstGeom>
+        </p:spPr>
+      </p:pic>
+      <p:sp>
+        <p:nvSpPr>
+          <p:cNvPr id="17" name="Measure 3 text"/>
+          <p:cNvSpPr txBox="1"/>
+          <p:nvPr/>
+        </p:nvSpPr>
+        <p:spPr>
+          <a:xfrm>
+            <a:off x="1325880" y="3136392"/>
+            <a:ext cx="5120640" cy="603504"/>
+          </a:xfrm>
+          <a:prstGeom prst="rect">
+            <a:avLst/>
+          </a:prstGeom>
+          <a:noFill/>
+          <a:ln/>
+        </p:spPr>
+        <p:txBody>
+          <a:bodyPr wrap="square" lIns="0" tIns="0" rIns="0" bIns="0" rtlCol="0" anchor="ctr"/>
+          <a:lstStyle/>
+          <a:p>
+            <a:pPr marL="0" indent="0">
+              <a:buNone/>
+            </a:pPr>
+            <a:r>
+              <a:rPr lang="en-US" sz="1550" b="1" dirty="0">
+                <a:solidFill>
+                  <a:srgbClr val="1F2A44"/>
+                </a:solidFill>
+              </a:rPr>
+              <a:t>Accounts tied to a person</a:t>
+            </a:r>
+            <a:endParaRPr lang="en-US" sz="1400" dirty="0"/>
+          </a:p>
+          <a:p>
+            <a:pPr marL="0" indent="0">
+              <a:buNone/>
+            </a:pPr>
+            <a:r>
+              <a:rPr lang="en-US" sz="1350" dirty="0">
+                <a:solidFill>
+                  <a:schemeClr val="tx2"/>
+                </a:solidFill>
+              </a:rPr>
+              <a:t>Orphaned accounts trend to zero</a:t>
+            </a:r>
+            <a:endParaRPr lang="en-US" sz="1400" dirty="0"/>
+          </a:p>
+        </p:txBody>
+      </p:sp>
+      <p:sp>
+        <p:nvSpPr>
+          <p:cNvPr id="18" name="Measure 4"/>
+          <p:cNvSpPr/>
+          <p:nvPr/>
+        </p:nvSpPr>
+        <p:spPr>
+          <a:xfrm>
+            <a:off x="548640" y="3840480"/>
+            <a:ext cx="6035040" cy="658368"/>
+          </a:xfrm>
+          <a:prstGeom prst="roundRect">
+            <a:avLst>
+              <a:gd name="adj" fmla="val 11111"/>
+            </a:avLst>
+          </a:prstGeom>
+          <a:solidFill>
+            <a:srgbClr val="FFFFFF"/>
+          </a:solidFill>
+          <a:ln w="12700">
+            <a:solidFill>
+              <a:srgbClr val="CBD5E1"/>
+            </a:solidFill>
+            <a:prstDash val="solid"/>
+          </a:ln>
+          <a:effectLst>
+            <a:outerShdw blurRad="76200" dist="25400" dir="5400000" algn="bl" rotWithShape="0">
+              <a:srgbClr val="64748B">
+                <a:alpha val="22000"/>
+              </a:srgbClr>
+            </a:outerShdw>
+          </a:effectLst>
+        </p:spPr>
+      </p:sp>
+      <p:sp>
+        <p:nvSpPr>
+          <p:cNvPr id="19" name="Icon FaUserClock"/>
+          <p:cNvSpPr/>
+          <p:nvPr/>
+        </p:nvSpPr>
+        <p:spPr>
+          <a:xfrm>
+            <a:off x="685800" y="3931920"/>
+            <a:ext cx="475488" cy="475488"/>
+          </a:xfrm>
+          <a:prstGeom prst="ellipse">
+            <a:avLst/>
+          </a:prstGeom>
+          <a:solidFill>
+            <a:srgbClr val="0F766E"/>
+          </a:solidFill>
+          <a:ln w="12700">
+            <a:solidFill>
+              <a:srgbClr val="0F766E"/>
+            </a:solidFill>
+            <a:prstDash val="solid"/>
+          </a:ln>
+        </p:spPr>
+      </p:sp>
+      <p:pic>
+        <p:nvPicPr>
+          <p:cNvPr id="20" name="Image 3" descr="C:\Users\whale\git\uiao\inbox\SSA-Interview\build\icons\FaUserClock.png"/>
+          <p:cNvPicPr>
+            <a:picLocks noChangeAspect="1"/>
+          </p:cNvPicPr>
+          <p:nvPr/>
+        </p:nvPicPr>
+        <p:blipFill>
+          <a:blip r:embed="rId8"/>
+          <a:stretch>
+            <a:fillRect/>
+          </a:stretch>
+        </p:blipFill>
+        <p:spPr>
+          <a:xfrm>
+            <a:off x="799917" y="4046037"/>
+            <a:ext cx="247254" cy="247254"/>
+          </a:xfrm>
+          <a:prstGeom prst="rect">
+            <a:avLst/>
+          </a:prstGeom>
+        </p:spPr>
+      </p:pic>
+      <p:sp>
+        <p:nvSpPr>
+          <p:cNvPr id="21" name="Measure 4 text"/>
+          <p:cNvSpPr txBox="1"/>
+          <p:nvPr/>
+        </p:nvSpPr>
+        <p:spPr>
+          <a:xfrm>
+            <a:off x="1325880" y="3867912"/>
+            <a:ext cx="5120640" cy="603504"/>
+          </a:xfrm>
+          <a:prstGeom prst="rect">
+            <a:avLst/>
+          </a:prstGeom>
+          <a:noFill/>
+          <a:ln/>
+        </p:spPr>
+        <p:txBody>
+          <a:bodyPr wrap="square" lIns="0" tIns="0" rIns="0" bIns="0" rtlCol="0" anchor="ctr"/>
+          <a:lstStyle/>
+          <a:p>
+            <a:pPr marL="0" indent="0">
+              <a:buNone/>
+            </a:pPr>
+            <a:r>
+              <a:rPr lang="en-US" sz="1550" b="1" dirty="0">
+                <a:solidFill>
+                  <a:srgbClr val="0F766E"/>
+                </a:solidFill>
+              </a:rPr>
+              <a:t>Joiner and mover tickets</a:t>
+            </a:r>
+            <a:endParaRPr lang="en-US" sz="1400" dirty="0"/>
+          </a:p>
+          <a:p>
+            <a:pPr marL="0" indent="0">
+              <a:buNone/>
+            </a:pPr>
+            <a:r>
+              <a:rPr lang="en-US" sz="1350" dirty="0">
+                <a:solidFill>
+                  <a:schemeClr val="tx2"/>
+                </a:solidFill>
+              </a:rPr>
+              <a:t>Volume down; access on day one</a:t>
+            </a:r>
+            <a:endParaRPr lang="en-US" sz="1400" dirty="0"/>
+          </a:p>
+        </p:txBody>
+      </p:sp>
+      <p:sp>
+        <p:nvSpPr>
+          <p:cNvPr id="22" name="Measure 5"/>
+          <p:cNvSpPr/>
+          <p:nvPr/>
+        </p:nvSpPr>
+        <p:spPr>
+          <a:xfrm>
+            <a:off x="548640" y="4572000"/>
+            <a:ext cx="6035040" cy="658368"/>
+          </a:xfrm>
+          <a:prstGeom prst="roundRect">
+            <a:avLst>
+              <a:gd name="adj" fmla="val 11111"/>
+            </a:avLst>
+          </a:prstGeom>
+          <a:solidFill>
+            <a:srgbClr val="E9EEF4"/>
+          </a:solidFill>
+          <a:ln w="12700">
+            <a:solidFill>
+              <a:srgbClr val="CBD5E1"/>
+            </a:solidFill>
+            <a:prstDash val="solid"/>
+          </a:ln>
+          <a:effectLst>
+            <a:outerShdw blurRad="76200" dist="25400" dir="5400000" algn="bl" rotWithShape="0">
+              <a:srgbClr val="64748B">
+                <a:alpha val="22000"/>
+              </a:srgbClr>
+            </a:outerShdw>
+          </a:effectLst>
+        </p:spPr>
+      </p:sp>
+      <p:sp>
+        <p:nvSpPr>
+          <p:cNvPr id="23" name="Icon FaAddressBook"/>
+          <p:cNvSpPr/>
+          <p:nvPr/>
+        </p:nvSpPr>
+        <p:spPr>
+          <a:xfrm>
+            <a:off x="685800" y="4663440"/>
+            <a:ext cx="475488" cy="475488"/>
+          </a:xfrm>
+          <a:prstGeom prst="ellipse">
+            <a:avLst/>
+          </a:prstGeom>
+          <a:solidFill>
+            <a:srgbClr val="1F2A44"/>
+          </a:solidFill>
+          <a:ln w="12700">
+            <a:solidFill>
+              <a:srgbClr val="1F2A44"/>
+            </a:solidFill>
+            <a:prstDash val="solid"/>
+          </a:ln>
+        </p:spPr>
+      </p:sp>
+      <p:pic>
+        <p:nvPicPr>
+          <p:cNvPr id="24" name="Image 4" descr="C:\Users\whale\git\uiao\inbox\SSA-Interview\build\icons\FaAddressBook.png"/>
+          <p:cNvPicPr>
+            <a:picLocks noChangeAspect="1"/>
+          </p:cNvPicPr>
+          <p:nvPr/>
+        </p:nvPicPr>
+        <p:blipFill>
+          <a:blip r:embed="rId9"/>
+          <a:stretch>
+            <a:fillRect/>
+          </a:stretch>
+        </p:blipFill>
+        <p:spPr>
+          <a:xfrm>
+            <a:off x="799917" y="4777557"/>
+            <a:ext cx="247254" cy="247254"/>
+          </a:xfrm>
+          <a:prstGeom prst="rect">
+            <a:avLst/>
+          </a:prstGeom>
+        </p:spPr>
+      </p:pic>
+      <p:sp>
+        <p:nvSpPr>
+          <p:cNvPr id="25" name="Measure 5 text"/>
+          <p:cNvSpPr txBox="1"/>
+          <p:nvPr/>
+        </p:nvSpPr>
+        <p:spPr>
+          <a:xfrm>
+            <a:off x="1325880" y="4599432"/>
+            <a:ext cx="5120640" cy="603504"/>
+          </a:xfrm>
+          <a:prstGeom prst="rect">
+            <a:avLst/>
+          </a:prstGeom>
+          <a:noFill/>
+          <a:ln/>
+        </p:spPr>
+        <p:txBody>
+          <a:bodyPr wrap="square" lIns="0" tIns="0" rIns="0" bIns="0" rtlCol="0" anchor="ctr"/>
+          <a:lstStyle/>
+          <a:p>
+            <a:pPr marL="0" indent="0">
+              <a:buNone/>
+            </a:pPr>
+            <a:r>
+              <a:rPr lang="en-US" sz="1550" b="1" dirty="0">
+                <a:solidFill>
+                  <a:srgbClr val="1F2A44"/>
+                </a:solidFill>
+              </a:rPr>
+              <a:t>Directory accuracy</a:t>
+            </a:r>
+            <a:endParaRPr lang="en-US" sz="1400" dirty="0"/>
+          </a:p>
+          <a:p>
+            <a:pPr marL="0" indent="0">
+              <a:buNone/>
+            </a:pPr>
+            <a:r>
+              <a:rPr lang="en-US" sz="1350" dirty="0">
+                <a:solidFill>
+                  <a:schemeClr val="tx2"/>
+                </a:solidFill>
+              </a:rPr>
+              <a:t>Manager and organization match HR</a:t>
+            </a:r>
+            <a:endParaRPr lang="en-US" sz="1400" dirty="0"/>
+          </a:p>
+        </p:txBody>
+      </p:sp>
+      <p:sp>
+        <p:nvSpPr>
+          <p:cNvPr id="26" name="Measure 6"/>
+          <p:cNvSpPr/>
+          <p:nvPr/>
+        </p:nvSpPr>
+        <p:spPr>
+          <a:xfrm>
+            <a:off x="548640" y="5303520"/>
+            <a:ext cx="6035040" cy="658368"/>
+          </a:xfrm>
+          <a:prstGeom prst="roundRect">
+            <a:avLst>
+              <a:gd name="adj" fmla="val 11111"/>
+            </a:avLst>
+          </a:prstGeom>
+          <a:solidFill>
+            <a:srgbClr val="FFFFFF"/>
+          </a:solidFill>
+          <a:ln w="12700">
+            <a:solidFill>
+              <a:srgbClr val="CBD5E1"/>
+            </a:solidFill>
+            <a:prstDash val="solid"/>
+          </a:ln>
+          <a:effectLst>
+            <a:outerShdw blurRad="76200" dist="25400" dir="5400000" algn="bl" rotWithShape="0">
+              <a:srgbClr val="64748B">
+                <a:alpha val="22000"/>
+              </a:srgbClr>
+            </a:outerShdw>
+          </a:effectLst>
+        </p:spPr>
+      </p:sp>
+      <p:sp>
+        <p:nvSpPr>
+          <p:cNvPr id="27" name="Icon FaTriangleExclamation"/>
+          <p:cNvSpPr/>
+          <p:nvPr/>
+        </p:nvSpPr>
+        <p:spPr>
+          <a:xfrm>
+            <a:off x="685800" y="5394960"/>
+            <a:ext cx="475488" cy="475488"/>
+          </a:xfrm>
+          <a:prstGeom prst="ellipse">
+            <a:avLst/>
+          </a:prstGeom>
+          <a:solidFill>
+            <a:srgbClr val="B45309"/>
+          </a:solidFill>
+          <a:ln w="12700">
+            <a:solidFill>
+              <a:srgbClr val="B45309"/>
+            </a:solidFill>
+            <a:prstDash val="solid"/>
+          </a:ln>
+        </p:spPr>
+      </p:sp>
+      <p:pic>
+        <p:nvPicPr>
+          <p:cNvPr id="28" name="Image 5" descr="C:\Users\whale\git\uiao\inbox\SSA-Interview\build\icons\FaTriangleExclamation.png"/>
+          <p:cNvPicPr>
+            <a:picLocks noChangeAspect="1"/>
+          </p:cNvPicPr>
+          <p:nvPr/>
+        </p:nvPicPr>
+        <p:blipFill>
+          <a:blip r:embed="rId10"/>
+          <a:stretch>
+            <a:fillRect/>
+          </a:stretch>
+        </p:blipFill>
+        <p:spPr>
+          <a:xfrm>
+            <a:off x="799917" y="5509077"/>
+            <a:ext cx="247254" cy="247254"/>
+          </a:xfrm>
+          <a:prstGeom prst="rect">
+            <a:avLst/>
+          </a:prstGeom>
+        </p:spPr>
+      </p:pic>
+      <p:sp>
+        <p:nvSpPr>
+          <p:cNvPr id="29" name="Measure 6 text"/>
+          <p:cNvSpPr txBox="1"/>
+          <p:nvPr/>
+        </p:nvSpPr>
+        <p:spPr>
+          <a:xfrm>
+            <a:off x="1325880" y="5330952"/>
+            <a:ext cx="5120640" cy="603504"/>
+          </a:xfrm>
+          <a:prstGeom prst="rect">
+            <a:avLst/>
+          </a:prstGeom>
+          <a:noFill/>
+          <a:ln/>
+        </p:spPr>
+        <p:txBody>
+          <a:bodyPr wrap="square" lIns="0" tIns="0" rIns="0" bIns="0" rtlCol="0" anchor="ctr"/>
+          <a:lstStyle/>
+          <a:p>
+            <a:pPr marL="0" indent="0">
+              <a:buNone/>
+            </a:pPr>
+            <a:r>
+              <a:rPr lang="en-US" sz="1550" b="1" dirty="0">
+                <a:solidFill>
+                  <a:srgbClr val="B45309"/>
+                </a:solidFill>
+              </a:rPr>
+              <a:t>Exceptions</a:t>
+            </a:r>
+            <a:endParaRPr lang="en-US" sz="1400" dirty="0"/>
+          </a:p>
+          <a:p>
+            <a:pPr marL="0" indent="0">
+              <a:buNone/>
+            </a:pPr>
+            <a:r>
+              <a:rPr lang="en-US" sz="1350" dirty="0">
+                <a:solidFill>
+                  <a:schemeClr val="tx2"/>
+                </a:solidFill>
+              </a:rPr>
+              <a:t>Each has an owner and an age</a:t>
+            </a:r>
+            <a:endParaRPr lang="en-US" sz="1400" dirty="0"/>
+          </a:p>
+        </p:txBody>
+      </p:sp>
+      <p:sp>
+        <p:nvSpPr>
+          <p:cNvPr id="30" name="Ask box"/>
+          <p:cNvSpPr/>
+          <p:nvPr/>
+        </p:nvSpPr>
+        <p:spPr>
+          <a:xfrm>
+            <a:off x="6812280" y="1280160"/>
+            <a:ext cx="4846320" cy="4846320"/>
+          </a:xfrm>
+          <a:prstGeom prst="roundRect">
+            <a:avLst>
+              <a:gd name="adj" fmla="val 1509"/>
+            </a:avLst>
+          </a:prstGeom>
+          <a:solidFill>
+            <a:srgbClr val="FBEEDC"/>
+          </a:solidFill>
+          <a:ln w="12700">
+            <a:solidFill>
+              <a:srgbClr val="FBEEDC"/>
+            </a:solidFill>
+            <a:prstDash val="solid"/>
+          </a:ln>
+          <a:effectLst>
+            <a:outerShdw blurRad="76200" dist="25400" dir="5400000" algn="bl" rotWithShape="0">
+              <a:srgbClr val="64748B">
+                <a:alpha val="22000"/>
+              </a:srgbClr>
+            </a:outerShdw>
+          </a:effectLst>
+        </p:spPr>
+      </p:sp>
+      <p:sp>
+        <p:nvSpPr>
+          <p:cNvPr id="31" name="Icon FaLightbulb"/>
+          <p:cNvSpPr/>
+          <p:nvPr/>
+        </p:nvSpPr>
+        <p:spPr>
+          <a:xfrm>
+            <a:off x="7040880" y="1463040"/>
+            <a:ext cx="685800" cy="685800"/>
+          </a:xfrm>
+          <a:prstGeom prst="ellipse">
+            <a:avLst/>
+          </a:prstGeom>
+          <a:solidFill>
+            <a:srgbClr val="B45309"/>
+          </a:solidFill>
+          <a:ln w="12700">
+            <a:solidFill>
+              <a:srgbClr val="B45309"/>
+            </a:solidFill>
+            <a:prstDash val="solid"/>
+          </a:ln>
+        </p:spPr>
+      </p:sp>
+      <p:pic>
+        <p:nvPicPr>
+          <p:cNvPr id="32" name="Image 6" descr="C:\Users\whale\git\uiao\inbox\SSA-Interview\build\icons\FaLightbulb.png"/>
+          <p:cNvPicPr>
+            <a:picLocks noChangeAspect="1"/>
+          </p:cNvPicPr>
+          <p:nvPr/>
+        </p:nvPicPr>
+        <p:blipFill>
+          <a:blip r:embed="rId11"/>
+          <a:stretch>
+            <a:fillRect/>
+          </a:stretch>
+        </p:blipFill>
+        <p:spPr>
+          <a:xfrm>
+            <a:off x="7205472" y="1627632"/>
+            <a:ext cx="356616" cy="356616"/>
+          </a:xfrm>
+          <a:prstGeom prst="rect">
+            <a:avLst/>
+          </a:prstGeom>
+        </p:spPr>
+      </p:pic>
+      <p:sp>
+        <p:nvSpPr>
+          <p:cNvPr id="33" name="Ask head"/>
+          <p:cNvSpPr txBox="1"/>
+          <p:nvPr/>
+        </p:nvSpPr>
+        <p:spPr>
+          <a:xfrm>
+            <a:off x="7863840" y="1463040"/>
+            <a:ext cx="3657600" cy="685800"/>
+          </a:xfrm>
+          <a:prstGeom prst="rect">
+            <a:avLst/>
+          </a:prstGeom>
+          <a:noFill/>
+          <a:ln/>
+        </p:spPr>
+        <p:txBody>
+          <a:bodyPr wrap="square" lIns="0" tIns="0" rIns="0" bIns="0" rtlCol="0" anchor="ctr"/>
+          <a:lstStyle/>
+          <a:p>
+            <a:pPr marL="0" indent="0">
+              <a:buNone/>
+            </a:pPr>
+            <a:r>
+              <a:rPr lang="en-US" sz="1900" b="1" dirty="0">
+                <a:solidFill>
+                  <a:srgbClr val="B45309"/>
+                </a:solidFill>
+                <a:latin typeface="Cambria" pitchFamily="34" charset="0"/>
+                <a:ea typeface="Cambria" pitchFamily="34" charset="-122"/>
+                <a:cs typeface="Cambria" pitchFamily="34" charset="-120"/>
+              </a:rPr>
+              <a:t>What I’d need from leadership</a:t>
+            </a:r>
+            <a:endParaRPr lang="en-US" sz="1900" dirty="0"/>
+          </a:p>
+        </p:txBody>
+      </p:sp>
+      <p:sp>
+        <p:nvSpPr>
+          <p:cNvPr id="34" name="Ask text"/>
+          <p:cNvSpPr txBox="1"/>
+          <p:nvPr/>
+        </p:nvSpPr>
+        <p:spPr>
+          <a:xfrm>
+            <a:off x="7040880" y="2240280"/>
+            <a:ext cx="4434840" cy="3794760"/>
+          </a:xfrm>
+          <a:prstGeom prst="rect">
+            <a:avLst/>
+          </a:prstGeom>
+          <a:noFill/>
+          <a:ln/>
+        </p:spPr>
+        <p:txBody>
+          <a:bodyPr wrap="square" lIns="0" tIns="0" rIns="0" bIns="0" rtlCol="0" anchor="t"/>
+          <a:lstStyle/>
+          <a:p>
+            <a:pPr marL="0" indent="0">
+              <a:spcAft>
+                <a:spcPts val="500"/>
+              </a:spcAft>
+              <a:buNone/>
+            </a:pPr>
+            <a:r>
+              <a:rPr lang="en-US" sz="1450" b="1" dirty="0">
+                <a:solidFill>
+                  <a:srgbClr val="1F2A44"/>
+                </a:solidFill>
+              </a:rPr>
+              <a:t>One decision: </a:t>
+            </a:r>
+            <a:r>
+              <a:rPr lang="en-US" sz="1450" dirty="0">
+                <a:solidFill>
+                  <a:schemeClr val="tx2"/>
+                </a:solidFill>
+              </a:rPr>
+              <a:t>start HR-driven identity now, as a design requirement of the HR 2.0 onboarding and the Entra ID migration.</a:t>
+            </a:r>
+            <a:endParaRPr lang="en-US" sz="1450" dirty="0"/>
+          </a:p>
+          <a:p>
+            <a:pPr marL="342900" indent="-342900">
+              <a:spcAft>
+                <a:spcPts val="500"/>
+              </a:spcAft>
+              <a:buSzPct val="100000"/>
+              <a:buChar char="•"/>
+            </a:pPr>
+            <a:r>
+              <a:rPr lang="en-US" sz="1400" dirty="0">
+                <a:solidFill>
+                  <a:schemeClr val="tx2"/>
+                </a:solidFill>
+              </a:rPr>
+              <a:t>A sponsor across HR, the CIO’s identity team and privacy</a:t>
+            </a:r>
+            <a:endParaRPr lang="en-US" sz="1450" dirty="0"/>
+          </a:p>
+          <a:p>
+            <a:pPr marL="342900" indent="-342900">
+              <a:spcAft>
+                <a:spcPts val="500"/>
+              </a:spcAft>
+              <a:buSzPct val="100000"/>
+              <a:buChar char="•"/>
+            </a:pPr>
+            <a:r>
+              <a:rPr lang="en-US" sz="1400" dirty="0">
+                <a:solidFill>
+                  <a:schemeClr val="tx2"/>
+                </a:solidFill>
+              </a:rPr>
+              <a:t>Identity named as a consumer in the HR 2.0 interconnection plan</a:t>
+            </a:r>
+            <a:endParaRPr lang="en-US" sz="1450" dirty="0"/>
+          </a:p>
+          <a:p>
+            <a:pPr marL="342900" indent="-342900">
+              <a:spcAft>
+                <a:spcPts val="500"/>
+              </a:spcAft>
+              <a:buSzPct val="100000"/>
+              <a:buChar char="•"/>
+            </a:pPr>
+            <a:r>
+              <a:rPr lang="en-US" sz="1400" dirty="0">
+                <a:solidFill>
+                  <a:schemeClr val="tx2"/>
+                </a:solidFill>
+              </a:rPr>
+              <a:t>Data owners designated; the enterprise person key confirmed</a:t>
+            </a:r>
+            <a:endParaRPr lang="en-US" sz="1450" dirty="0"/>
+          </a:p>
+          <a:p>
+            <a:pPr marL="342900" indent="-342900">
+              <a:spcAft>
+                <a:spcPts val="500"/>
+              </a:spcAft>
+              <a:buSzPct val="100000"/>
+              <a:buChar char="•"/>
+            </a:pPr>
+            <a:r>
+              <a:rPr lang="en-US" sz="1400" dirty="0">
+                <a:solidFill>
+                  <a:schemeClr val="tx2"/>
+                </a:solidFill>
+              </a:rPr>
+              <a:t>A small team for the pre-onboarding data work</a:t>
+            </a:r>
+            <a:endParaRPr lang="en-US" sz="1450" dirty="0"/>
+          </a:p>
+          <a:p>
+            <a:pPr marL="342900" indent="-342900">
+              <a:spcAft>
+                <a:spcPts val="500"/>
+              </a:spcAft>
+              <a:buSzPct val="100000"/>
+              <a:buChar char="•"/>
+            </a:pPr>
+            <a:r>
+              <a:rPr lang="en-US" sz="1400" dirty="0">
+                <a:solidFill>
+                  <a:schemeClr val="tx2"/>
+                </a:solidFill>
+              </a:rPr>
+              <a:t>Validate planning assumptions and designate authoritative owners before implementation</a:t>
+            </a:r>
+            <a:endParaRPr lang="en-US" sz="1450" dirty="0"/>
+          </a:p>
+        </p:txBody>
+      </p:sp>
+      <p:sp>
+        <p:nvSpPr>
+          <p:cNvPr id="35" name="Slide Number Placeholder 0"/>
+          <p:cNvSpPr>
+            <a:spLocks noGrp="1"/>
+          </p:cNvSpPr>
+          <p:nvPr>
+            <p:ph type="sldNum" sz="quarter" idx="4294967295"/>
+          </p:nvPr>
+        </p:nvSpPr>
+        <p:spPr>
+          <a:xfrm>
+            <a:off x="11155680" y="6400800"/>
+            <a:ext cx="457200" cy="274320"/>
+          </a:xfrm>
+          <a:prstGeom prst="rect">
+            <a:avLst/>
+          </a:prstGeom>
+          <a:extLst>
+            <a:ext uri="{C572A759-6A51-4108-AA02-DFA0A04FC94B}">
+              <ma14:wrappingTextBoxFlag xmlns:ma14="http://schemas.microsoft.com/office/mac/drawingml/2011/main" xmlns="" val="0"/>
+            </a:ext>
+          </a:extLst>
+        </p:spPr>
+        <p:txBody>
+          <a:bodyPr/>
+          <a:lstStyle>
+            <a:lvl1pPr>
+              <a:defRPr sz="1000">
+                <a:solidFill>
+                  <a:schemeClr val="accent5"/>
+                </a:solidFill>
+              </a:defRPr>
+            </a:lvl1pPr>
+          </a:lstStyle>
+          <a:p>
+            <a:pPr algn="r"/>
+            <a:fld id="{F7021451-1387-4CA6-816F-3879F97B5CBC}" type="slidenum">
+              <a:rPr lang="en-US" b="0"/>
+              <a:t>8</a:t>
+            </a:fld>
+            <a:endParaRPr lang="en-US"/>
+          </a:p>
+        </p:txBody>
+      </p:sp>
+      <p:pic>
+        <p:nvPicPr>
+          <p:cNvPr id="36" name="Narration">
+            <a:hlinkClick r:id="" action="ppaction://media"/>
+            <a:extLst>
+              <a:ext uri="{FF2B5EF4-FFF2-40B4-BE49-F238E27FC236}">
+                <a16:creationId xmlns:a16="http://schemas.microsoft.com/office/drawing/2014/main" id="{EF592F0E-9819-5B98-96B8-6FEA7F0A4CAD}"/>
+              </a:ext>
+            </a:extLst>
+          </p:cNvPr>
+          <p:cNvPicPr>
+            <a:picLocks noChangeAspect="1"/>
+          </p:cNvPicPr>
+          <p:nvPr>
+            <a:audioFile r:link="rId2"/>
+            <p:extLst>
+              <p:ext uri="{DAA4B4D4-6D71-4841-9C94-3DE7FCFB9230}">
+                <p14:media xmlns:p14="http://schemas.microsoft.com/office/powerpoint/2010/main" r:embed="rId1"/>
+              </p:ext>
+            </p:extLst>
+          </p:nvPr>
+        </p:nvPicPr>
+        <p:blipFill>
+          <a:blip r:embed="rId12"/>
+          <a:stretch>
+            <a:fillRect/>
+          </a:stretch>
+        </p:blipFill>
+        <p:spPr>
+          <a:xfrm>
+            <a:off x="127000" y="6350000"/>
+            <a:ext cx="304800" cy="304800"/>
+          </a:xfrm>
+          <a:prstGeom prst="rect">
+            <a:avLst/>
+          </a:prstGeom>
+        </p:spPr>
+      </p:pic>
+    </p:spTree>
+  </p:cSld>
+  <p:clrMapOvr>
+    <a:masterClrMapping/>
+  </p:clrMapOvr>
+  <mc:AlternateContent xmlns:mc="http://schemas.openxmlformats.org/markup-compatibility/2006">
+    <mc:Choice xmlns:p14="http://schemas.microsoft.com/office/powerpoint/2010/main" Requires="p14">
+      <p:transition spd="slow" p14:dur="2000" advTm="85650"/>
+    </mc:Choice>
+    <mc:Fallback>
+      <p:transition spd="slow" advTm="85650"/>
+    </mc:Fallback>
+  </mc:AlternateContent>
+  <p:timing>
+    <p:tnLst>
+      <p:par>
+        <p:cTn id="1" dur="indefinite" restart="never" nodeType="tmRoot">
+          <p:childTnLst>
+            <p:seq concurrent="1" nextAc="seek">
+              <p:cTn id="2" dur="indefinite" nodeType="mainSeq">
+                <p:childTnLst>
+                  <p:par>
+                    <p:cTn id="3" fill="hold">
+                      <p:stCondLst>
+                        <p:cond delay="indefinite"/>
+                        <p:cond evt="onBegin" delay="0">
+                          <p:tn val="2"/>
+                        </p:cond>
+                      </p:stCondLst>
+                      <p:childTnLst>
+                        <p:par>
+                          <p:cTn id="4" fill="hold">
+                            <p:stCondLst>
+                              <p:cond delay="0"/>
+                            </p:stCondLst>
+                            <p:childTnLst>
+                              <p:par>
+                                <p:cTn id="5" presetID="1" presetClass="mediacall" presetSubtype="0" fill="hold" nodeType="withEffect">
+                                  <p:stCondLst>
+                                    <p:cond delay="0"/>
+                                  </p:stCondLst>
+                                  <p:childTnLst>
+                                    <p:cmd type="call" cmd="playFrom(0.0)">
+                                      <p:cBhvr>
+                                        <p:cTn id="6" dur="84648" fill="hold"/>
+                                        <p:tgtEl>
+                                          <p:spTgt spid="36"/>
+                                        </p:tgtEl>
+                                      </p:cBhvr>
+                                    </p:cmd>
+                                  </p:childTnLst>
+                                </p:cTn>
+                              </p:par>
+                            </p:childTnLst>
+                          </p:cTn>
+                        </p:par>
+                      </p:childTnLst>
+                    </p:cTn>
+                  </p:par>
+                </p:childTnLst>
+              </p:cTn>
+              <p:prevCondLst>
+                <p:cond evt="onPrev" delay="0">
+                  <p:tgtEl>
+                    <p:sldTgt/>
+                  </p:tgtEl>
+                </p:cond>
+              </p:prevCondLst>
+              <p:nextCondLst>
+                <p:cond evt="onNext" delay="0">
+                  <p:tgtEl>
+                    <p:sldTgt/>
+                  </p:tgtEl>
+                </p:cond>
+              </p:nextCondLst>
+            </p:seq>
+          </p:childTnLst>
+        </p:cTn>
+      </p:par>
+    </p:tnLst>
+  </p:timing>
+</p:sld>
+</file>
+
+<file path=ppt/slides/slide9.xml><?xml version="1.0" encoding="utf-8"?>
+<p:sld xmlns:a="http://schemas.openxmlformats.org/drawingml/2006/main" xmlns:r="http://schemas.openxmlformats.org/officeDocument/2006/relationships" xmlns:p="http://schemas.openxmlformats.org/presentationml/2006/main">
+  <p:cSld name="Slide 9">
+    <p:spTree>
+      <p:nvGrpSpPr>
+        <p:cNvPr id="1" name=""/>
+        <p:cNvGrpSpPr/>
+        <p:nvPr/>
+      </p:nvGrpSpPr>
+      <p:grpSpPr>
+        <a:xfrm>
+          <a:off x="0" y="0"/>
+          <a:ext cx="0" cy="0"/>
+          <a:chOff x="0" y="0"/>
+          <a:chExt cx="0" cy="0"/>
+        </a:xfrm>
+      </p:grpSpPr>
+      <p:sp>
+        <p:nvSpPr>
+          <p:cNvPr id="2" name="Text 0"/>
+          <p:cNvSpPr>
+            <a:spLocks noGrp="1"/>
+          </p:cNvSpPr>
+          <p:nvPr>
+            <p:ph type="title" idx="100" hasCustomPrompt="1"/>
+          </p:nvPr>
+        </p:nvSpPr>
+        <p:spPr>
+          <a:xfrm>
+            <a:off x="548640" y="320040"/>
+            <a:ext cx="11064240" cy="868680"/>
+          </a:xfrm>
+          <a:prstGeom prst="rect">
+            <a:avLst/>
+          </a:prstGeom>
+          <a:noFill/>
+          <a:ln/>
+        </p:spPr>
+        <p:txBody>
+          <a:bodyPr wrap="square" lIns="0" tIns="0" rIns="0" bIns="0" rtlCol="0" anchor="ctr"/>
+          <a:lstStyle/>
+          <a:p>
+            <a:pPr marL="0" indent="0">
+              <a:buNone/>
+            </a:pPr>
+            <a:r>
+              <a:rPr lang="en-US" sz="3000" b="1" dirty="0">
+                <a:solidFill>
+                  <a:schemeClr val="tx1"/>
+                </a:solidFill>
+                <a:latin typeface="Cambria" pitchFamily="34" charset="0"/>
+                <a:ea typeface="Cambria" pitchFamily="34" charset="-122"/>
+                <a:cs typeface="Cambria" pitchFamily="34" charset="-120"/>
+              </a:rPr>
+              <a:t>More modernizations I’ve designed</a:t>
+            </a:r>
+            <a:endParaRPr lang="en-US" sz="3000" dirty="0"/>
+          </a:p>
+        </p:txBody>
+      </p:sp>
+      <p:sp>
+        <p:nvSpPr>
+          <p:cNvPr id="3" name="Teaser 1"/>
+          <p:cNvSpPr/>
+          <p:nvPr/>
+        </p:nvSpPr>
+        <p:spPr>
+          <a:xfrm>
+            <a:off x="548640" y="1280160"/>
+            <a:ext cx="2670048" cy="1719072"/>
+          </a:xfrm>
+          <a:prstGeom prst="roundRect">
+            <a:avLst>
+              <a:gd name="adj" fmla="val 4255"/>
+            </a:avLst>
+          </a:prstGeom>
+          <a:solidFill>
+            <a:srgbClr val="E4EAF4"/>
+          </a:solidFill>
+          <a:ln w="12700">
+            <a:solidFill>
+              <a:srgbClr val="E4EAF4"/>
+            </a:solidFill>
+            <a:prstDash val="solid"/>
+          </a:ln>
+          <a:effectLst>
+            <a:outerShdw blurRad="76200" dist="25400" dir="5400000" algn="bl" rotWithShape="0">
+              <a:srgbClr val="64748B">
+                <a:alpha val="22000"/>
+              </a:srgbClr>
+            </a:outerShdw>
+          </a:effectLst>
+        </p:spPr>
+      </p:sp>
+      <p:sp>
+        <p:nvSpPr>
+          <p:cNvPr id="4" name="Icon FaCloudArrowUp"/>
+          <p:cNvSpPr/>
+          <p:nvPr/>
+        </p:nvSpPr>
+        <p:spPr>
+          <a:xfrm>
+            <a:off x="731520" y="1417320"/>
+            <a:ext cx="457200" cy="457200"/>
+          </a:xfrm>
+          <a:prstGeom prst="ellipse">
+            <a:avLst/>
+          </a:prstGeom>
+          <a:solidFill>
+            <a:srgbClr val="1F2A44"/>
+          </a:solidFill>
+          <a:ln w="12700">
+            <a:solidFill>
+              <a:srgbClr val="1F2A44"/>
+            </a:solidFill>
+            <a:prstDash val="solid"/>
+          </a:ln>
+        </p:spPr>
+      </p:sp>
+      <p:pic>
+        <p:nvPicPr>
+          <p:cNvPr id="5" name="Image 0" descr="C:\Users\whale\git\uiao\inbox\SSA-Interview\build\icons\FaCloudArrowUp.png"/>
+          <p:cNvPicPr>
+            <a:picLocks noChangeAspect="1"/>
+          </p:cNvPicPr>
+          <p:nvPr/>
+        </p:nvPicPr>
+        <p:blipFill>
+          <a:blip r:embed="rId5"/>
+          <a:stretch>
+            <a:fillRect/>
+          </a:stretch>
+        </p:blipFill>
+        <p:spPr>
+          <a:xfrm>
+            <a:off x="841248" y="1527048"/>
+            <a:ext cx="237744" cy="237744"/>
+          </a:xfrm>
+          <a:prstGeom prst="rect">
+            <a:avLst/>
+          </a:prstGeom>
+        </p:spPr>
+      </p:pic>
+      <p:sp>
+        <p:nvSpPr>
+          <p:cNvPr id="6" name="Teaser 1 text"/>
+          <p:cNvSpPr txBox="1"/>
+          <p:nvPr/>
+        </p:nvSpPr>
+        <p:spPr>
+          <a:xfrm>
+            <a:off x="731520" y="1938528"/>
+            <a:ext cx="2377440" cy="1005840"/>
+          </a:xfrm>
+          <a:prstGeom prst="rect">
+            <a:avLst/>
+          </a:prstGeom>
+          <a:noFill/>
+          <a:ln/>
+        </p:spPr>
+        <p:txBody>
+          <a:bodyPr wrap="square" lIns="0" tIns="0" rIns="0" bIns="0" rtlCol="0" anchor="t"/>
+          <a:lstStyle/>
+          <a:p>
+            <a:pPr marL="0" indent="0">
+              <a:spcAft>
+                <a:spcPts val="300"/>
+              </a:spcAft>
+              <a:buNone/>
+            </a:pPr>
+            <a:r>
+              <a:rPr lang="en-US" sz="1600" b="1" dirty="0">
+                <a:solidFill>
+                  <a:srgbClr val="1F2A44"/>
+                </a:solidFill>
+              </a:rPr>
+              <a:t>Entra ID migration</a:t>
+            </a:r>
+            <a:endParaRPr lang="en-US" sz="1400" dirty="0"/>
+          </a:p>
+          <a:p>
+            <a:pPr marL="0" indent="0">
+              <a:spcAft>
+                <a:spcPts val="300"/>
+              </a:spcAft>
+              <a:buNone/>
+            </a:pPr>
+            <a:r>
+              <a:rPr lang="en-US" sz="1350" dirty="0">
+                <a:solidFill>
+                  <a:schemeClr val="tx2"/>
+                </a:solidFill>
+              </a:rPr>
+              <a:t>Directory move with drift detection and evidence</a:t>
+            </a:r>
+            <a:endParaRPr lang="en-US" sz="1400" dirty="0"/>
+          </a:p>
+        </p:txBody>
+      </p:sp>
+      <p:sp>
+        <p:nvSpPr>
+          <p:cNvPr id="7" name="Teaser 2"/>
+          <p:cNvSpPr/>
+          <p:nvPr/>
+        </p:nvSpPr>
+        <p:spPr>
+          <a:xfrm>
+            <a:off x="3355848" y="1280160"/>
+            <a:ext cx="2670048" cy="1719072"/>
+          </a:xfrm>
+          <a:prstGeom prst="roundRect">
+            <a:avLst>
+              <a:gd name="adj" fmla="val 4255"/>
+            </a:avLst>
+          </a:prstGeom>
+          <a:solidFill>
+            <a:srgbClr val="E4EAF4"/>
+          </a:solidFill>
+          <a:ln w="12700">
+            <a:solidFill>
+              <a:srgbClr val="E4EAF4"/>
+            </a:solidFill>
+            <a:prstDash val="solid"/>
+          </a:ln>
+          <a:effectLst>
+            <a:outerShdw blurRad="76200" dist="25400" dir="5400000" algn="bl" rotWithShape="0">
+              <a:srgbClr val="64748B">
+                <a:alpha val="22000"/>
+              </a:srgbClr>
+            </a:outerShdw>
+          </a:effectLst>
+        </p:spPr>
+      </p:sp>
+      <p:sp>
+        <p:nvSpPr>
+          <p:cNvPr id="8" name="Icon FaGlobe"/>
+          <p:cNvSpPr/>
+          <p:nvPr/>
+        </p:nvSpPr>
+        <p:spPr>
+          <a:xfrm>
+            <a:off x="3538728" y="1417320"/>
+            <a:ext cx="457200" cy="457200"/>
+          </a:xfrm>
+          <a:prstGeom prst="ellipse">
+            <a:avLst/>
+          </a:prstGeom>
+          <a:solidFill>
+            <a:srgbClr val="1F2A44"/>
+          </a:solidFill>
+          <a:ln w="12700">
+            <a:solidFill>
+              <a:srgbClr val="1F2A44"/>
+            </a:solidFill>
+            <a:prstDash val="solid"/>
+          </a:ln>
+        </p:spPr>
+      </p:sp>
+      <p:pic>
+        <p:nvPicPr>
+          <p:cNvPr id="9" name="Image 1" descr="C:\Users\whale\git\uiao\inbox\SSA-Interview\build\icons\FaGlobe.png"/>
+          <p:cNvPicPr>
+            <a:picLocks noChangeAspect="1"/>
+          </p:cNvPicPr>
+          <p:nvPr/>
+        </p:nvPicPr>
+        <p:blipFill>
+          <a:blip r:embed="rId6"/>
+          <a:stretch>
+            <a:fillRect/>
+          </a:stretch>
+        </p:blipFill>
+        <p:spPr>
+          <a:xfrm>
+            <a:off x="3648456" y="1527048"/>
+            <a:ext cx="237744" cy="237744"/>
+          </a:xfrm>
+          <a:prstGeom prst="rect">
+            <a:avLst/>
+          </a:prstGeom>
+        </p:spPr>
+      </p:pic>
+      <p:sp>
+        <p:nvSpPr>
+          <p:cNvPr id="10" name="Teaser 2 text"/>
+          <p:cNvSpPr txBox="1"/>
+          <p:nvPr/>
+        </p:nvSpPr>
+        <p:spPr>
+          <a:xfrm>
+            <a:off x="3538728" y="1938528"/>
+            <a:ext cx="2377440" cy="1005840"/>
+          </a:xfrm>
+          <a:prstGeom prst="rect">
+            <a:avLst/>
+          </a:prstGeom>
+          <a:noFill/>
+          <a:ln/>
+        </p:spPr>
+        <p:txBody>
+          <a:bodyPr wrap="square" lIns="0" tIns="0" rIns="0" bIns="0" rtlCol="0" anchor="t"/>
+          <a:lstStyle/>
+          <a:p>
+            <a:pPr marL="0" indent="0">
+              <a:spcAft>
+                <a:spcPts val="300"/>
+              </a:spcAft>
+              <a:buNone/>
+            </a:pPr>
+            <a:r>
+              <a:rPr lang="en-US" sz="1600" b="1" dirty="0">
+                <a:solidFill>
+                  <a:srgbClr val="1F2A44"/>
+                </a:solidFill>
+              </a:rPr>
+              <a:t>Next-generation DNS and IPAM</a:t>
+            </a:r>
+            <a:endParaRPr lang="en-US" sz="1400" dirty="0"/>
+          </a:p>
+          <a:p>
+            <a:pPr marL="0" indent="0">
+              <a:spcAft>
+                <a:spcPts val="300"/>
+              </a:spcAft>
+              <a:buNone/>
+            </a:pPr>
+            <a:r>
+              <a:rPr lang="en-US" sz="1350" dirty="0">
+                <a:solidFill>
+                  <a:schemeClr val="tx2"/>
+                </a:solidFill>
+              </a:rPr>
+              <a:t>One DDI control plane across on-premises and clouds</a:t>
+            </a:r>
+            <a:endParaRPr lang="en-US" sz="1400" dirty="0"/>
+          </a:p>
+        </p:txBody>
+      </p:sp>
+      <p:sp>
+        <p:nvSpPr>
+          <p:cNvPr id="11" name="Teaser 3"/>
+          <p:cNvSpPr/>
+          <p:nvPr/>
+        </p:nvSpPr>
+        <p:spPr>
+          <a:xfrm>
+            <a:off x="6163056" y="1280160"/>
+            <a:ext cx="2670048" cy="1719072"/>
+          </a:xfrm>
+          <a:prstGeom prst="roundRect">
+            <a:avLst>
+              <a:gd name="adj" fmla="val 4255"/>
+            </a:avLst>
+          </a:prstGeom>
+          <a:solidFill>
+            <a:srgbClr val="E4EAF4"/>
+          </a:solidFill>
+          <a:ln w="12700">
+            <a:solidFill>
+              <a:srgbClr val="E4EAF4"/>
+            </a:solidFill>
+            <a:prstDash val="solid"/>
+          </a:ln>
+          <a:effectLst>
+            <a:outerShdw blurRad="76200" dist="25400" dir="5400000" algn="bl" rotWithShape="0">
+              <a:srgbClr val="64748B">
+                <a:alpha val="22000"/>
+              </a:srgbClr>
+            </a:outerShdw>
+          </a:effectLst>
+        </p:spPr>
+      </p:sp>
+      <p:sp>
+        <p:nvSpPr>
+          <p:cNvPr id="12" name="Icon FaBuilding"/>
+          <p:cNvSpPr/>
+          <p:nvPr/>
+        </p:nvSpPr>
+        <p:spPr>
+          <a:xfrm>
+            <a:off x="6345936" y="1417320"/>
+            <a:ext cx="457200" cy="457200"/>
+          </a:xfrm>
+          <a:prstGeom prst="ellipse">
+            <a:avLst/>
+          </a:prstGeom>
+          <a:solidFill>
+            <a:srgbClr val="1F2A44"/>
+          </a:solidFill>
+          <a:ln w="12700">
+            <a:solidFill>
+              <a:srgbClr val="1F2A44"/>
+            </a:solidFill>
+            <a:prstDash val="solid"/>
+          </a:ln>
+        </p:spPr>
+      </p:sp>
+      <p:pic>
+        <p:nvPicPr>
+          <p:cNvPr id="13" name="Image 2" descr="C:\Users\whale\git\uiao\inbox\SSA-Interview\build\icons\FaBuilding.png"/>
+          <p:cNvPicPr>
+            <a:picLocks noChangeAspect="1"/>
+          </p:cNvPicPr>
+          <p:nvPr/>
+        </p:nvPicPr>
+        <p:blipFill>
+          <a:blip r:embed="rId7"/>
+          <a:stretch>
+            <a:fillRect/>
+          </a:stretch>
+        </p:blipFill>
+        <p:spPr>
+          <a:xfrm>
+            <a:off x="6455664" y="1527048"/>
+            <a:ext cx="237744" cy="237744"/>
+          </a:xfrm>
+          <a:prstGeom prst="rect">
+            <a:avLst/>
+          </a:prstGeom>
+        </p:spPr>
+      </p:pic>
+      <p:sp>
+        <p:nvSpPr>
+          <p:cNvPr id="14" name="Teaser 3 text"/>
+          <p:cNvSpPr txBox="1"/>
+          <p:nvPr/>
+        </p:nvSpPr>
+        <p:spPr>
+          <a:xfrm>
+            <a:off x="6345936" y="1938528"/>
+            <a:ext cx="2377440" cy="1005840"/>
+          </a:xfrm>
+          <a:prstGeom prst="rect">
+            <a:avLst/>
+          </a:prstGeom>
+          <a:noFill/>
+          <a:ln/>
+        </p:spPr>
+        <p:txBody>
+          <a:bodyPr wrap="square" lIns="0" tIns="0" rIns="0" bIns="0" rtlCol="0" anchor="t"/>
+          <a:lstStyle/>
+          <a:p>
+            <a:pPr marL="0" indent="0">
+              <a:spcAft>
+                <a:spcPts val="300"/>
+              </a:spcAft>
+              <a:buNone/>
+            </a:pPr>
+            <a:r>
+              <a:rPr lang="en-US" sz="1600" b="1" dirty="0">
+                <a:solidFill>
+                  <a:srgbClr val="1F2A44"/>
+                </a:solidFill>
+              </a:rPr>
+              <a:t>Field office WAN and data centers</a:t>
+            </a:r>
+            <a:endParaRPr lang="en-US" sz="1400" dirty="0"/>
+          </a:p>
+          <a:p>
+            <a:pPr marL="0" indent="0">
+              <a:spcAft>
+                <a:spcPts val="300"/>
+              </a:spcAft>
+              <a:buNone/>
+            </a:pPr>
+            <a:r>
+              <a:rPr lang="en-US" sz="1350" dirty="0">
+                <a:solidFill>
+                  <a:schemeClr val="tx2"/>
+                </a:solidFill>
+              </a:rPr>
+              <a:t>Office network transformation and consolidation</a:t>
+            </a:r>
+            <a:endParaRPr lang="en-US" sz="1400" dirty="0"/>
+          </a:p>
+        </p:txBody>
+      </p:sp>
+      <p:sp>
+        <p:nvSpPr>
+          <p:cNvPr id="15" name="Teaser 4"/>
+          <p:cNvSpPr/>
+          <p:nvPr/>
+        </p:nvSpPr>
+        <p:spPr>
+          <a:xfrm>
+            <a:off x="8970264" y="1280160"/>
+            <a:ext cx="2670048" cy="1719072"/>
+          </a:xfrm>
+          <a:prstGeom prst="roundRect">
+            <a:avLst>
+              <a:gd name="adj" fmla="val 4255"/>
+            </a:avLst>
+          </a:prstGeom>
+          <a:solidFill>
+            <a:srgbClr val="E4EAF4"/>
+          </a:solidFill>
+          <a:ln w="12700">
+            <a:solidFill>
+              <a:srgbClr val="E4EAF4"/>
+            </a:solidFill>
+            <a:prstDash val="solid"/>
+          </a:ln>
+          <a:effectLst>
+            <a:outerShdw blurRad="76200" dist="25400" dir="5400000" algn="bl" rotWithShape="0">
+              <a:srgbClr val="64748B">
+                <a:alpha val="22000"/>
+              </a:srgbClr>
+            </a:outerShdw>
+          </a:effectLst>
+        </p:spPr>
+      </p:sp>
+      <p:sp>
+        <p:nvSpPr>
+          <p:cNvPr id="16" name="Icon FaRoute"/>
+          <p:cNvSpPr/>
+          <p:nvPr/>
+        </p:nvSpPr>
+        <p:spPr>
+          <a:xfrm>
+            <a:off x="9153144" y="1417320"/>
+            <a:ext cx="457200" cy="457200"/>
+          </a:xfrm>
+          <a:prstGeom prst="ellipse">
+            <a:avLst/>
+          </a:prstGeom>
+          <a:solidFill>
+            <a:srgbClr val="1F2A44"/>
+          </a:solidFill>
+          <a:ln w="12700">
+            <a:solidFill>
+              <a:srgbClr val="1F2A44"/>
+            </a:solidFill>
+            <a:prstDash val="solid"/>
+          </a:ln>
+        </p:spPr>
+      </p:sp>
+      <p:pic>
+        <p:nvPicPr>
+          <p:cNvPr id="17" name="Image 3" descr="C:\Users\whale\git\uiao\inbox\SSA-Interview\build\icons\FaRoute.png"/>
+          <p:cNvPicPr>
+            <a:picLocks noChangeAspect="1"/>
+          </p:cNvPicPr>
+          <p:nvPr/>
+        </p:nvPicPr>
+        <p:blipFill>
+          <a:blip r:embed="rId8"/>
+          <a:stretch>
+            <a:fillRect/>
+          </a:stretch>
+        </p:blipFill>
+        <p:spPr>
+          <a:xfrm>
+            <a:off x="9262872" y="1527048"/>
+            <a:ext cx="237744" cy="237744"/>
+          </a:xfrm>
+          <a:prstGeom prst="rect">
+            <a:avLst/>
+          </a:prstGeom>
+        </p:spPr>
+      </p:pic>
+      <p:sp>
+        <p:nvSpPr>
+          <p:cNvPr id="18" name="Teaser 4 text"/>
+          <p:cNvSpPr txBox="1"/>
+          <p:nvPr/>
+        </p:nvSpPr>
+        <p:spPr>
+          <a:xfrm>
+            <a:off x="9153144" y="1938528"/>
+            <a:ext cx="2377440" cy="1005840"/>
+          </a:xfrm>
+          <a:prstGeom prst="rect">
+            <a:avLst/>
+          </a:prstGeom>
+          <a:noFill/>
+          <a:ln/>
+        </p:spPr>
+        <p:txBody>
+          <a:bodyPr wrap="square" lIns="0" tIns="0" rIns="0" bIns="0" rtlCol="0" anchor="t"/>
+          <a:lstStyle/>
+          <a:p>
+            <a:pPr marL="0" indent="0">
+              <a:spcAft>
+                <a:spcPts val="300"/>
+              </a:spcAft>
+              <a:buNone/>
+            </a:pPr>
+            <a:r>
+              <a:rPr lang="en-US" sz="1600" b="1" dirty="0">
+                <a:solidFill>
+                  <a:srgbClr val="1F2A44"/>
+                </a:solidFill>
+              </a:rPr>
+              <a:t>TIC 3.0 Cloud and Branch Office cases</a:t>
+            </a:r>
+            <a:endParaRPr lang="en-US" sz="1400" dirty="0"/>
+          </a:p>
+          <a:p>
+            <a:pPr marL="0" indent="0">
+              <a:spcAft>
+                <a:spcPts val="300"/>
+              </a:spcAft>
+              <a:buNone/>
+            </a:pPr>
+            <a:r>
+              <a:rPr lang="en-US" sz="1350" dirty="0">
+                <a:solidFill>
+                  <a:schemeClr val="tx2"/>
+                </a:solidFill>
+              </a:rPr>
+              <a:t>Trusted Internet Connections use cases</a:t>
+            </a:r>
+            <a:endParaRPr lang="en-US" sz="1400" dirty="0"/>
+          </a:p>
+        </p:txBody>
+      </p:sp>
+      <p:sp>
+        <p:nvSpPr>
+          <p:cNvPr id="19" name="Teaser 5"/>
+          <p:cNvSpPr/>
+          <p:nvPr/>
+        </p:nvSpPr>
+        <p:spPr>
+          <a:xfrm>
+            <a:off x="548640" y="3108960"/>
+            <a:ext cx="2670048" cy="1719072"/>
+          </a:xfrm>
+          <a:prstGeom prst="roundRect">
+            <a:avLst>
+              <a:gd name="adj" fmla="val 4255"/>
+            </a:avLst>
+          </a:prstGeom>
+          <a:solidFill>
+            <a:srgbClr val="DCEFEC"/>
+          </a:solidFill>
+          <a:ln w="12700">
+            <a:solidFill>
+              <a:srgbClr val="DCEFEC"/>
+            </a:solidFill>
+            <a:prstDash val="solid"/>
+          </a:ln>
+          <a:effectLst>
+            <a:outerShdw blurRad="76200" dist="25400" dir="5400000" algn="bl" rotWithShape="0">
+              <a:srgbClr val="64748B">
+                <a:alpha val="22000"/>
+              </a:srgbClr>
+            </a:outerShdw>
+          </a:effectLst>
+        </p:spPr>
+      </p:sp>
+      <p:sp>
+        <p:nvSpPr>
+          <p:cNvPr id="20" name="Icon FaServer"/>
+          <p:cNvSpPr/>
+          <p:nvPr/>
+        </p:nvSpPr>
+        <p:spPr>
+          <a:xfrm>
+            <a:off x="731520" y="3246120"/>
+            <a:ext cx="457200" cy="457200"/>
+          </a:xfrm>
+          <a:prstGeom prst="ellipse">
+            <a:avLst/>
+          </a:prstGeom>
+          <a:solidFill>
+            <a:srgbClr val="0F766E"/>
+          </a:solidFill>
+          <a:ln w="12700">
+            <a:solidFill>
+              <a:srgbClr val="0F766E"/>
+            </a:solidFill>
+            <a:prstDash val="solid"/>
+          </a:ln>
+        </p:spPr>
+      </p:sp>
+      <p:pic>
+        <p:nvPicPr>
+          <p:cNvPr id="21" name="Image 4" descr="C:\Users\whale\git\uiao\inbox\SSA-Interview\build\icons\FaServer.png"/>
+          <p:cNvPicPr>
+            <a:picLocks noChangeAspect="1"/>
+          </p:cNvPicPr>
+          <p:nvPr/>
+        </p:nvPicPr>
+        <p:blipFill>
+          <a:blip r:embed="rId9"/>
+          <a:stretch>
+            <a:fillRect/>
+          </a:stretch>
+        </p:blipFill>
+        <p:spPr>
+          <a:xfrm>
+            <a:off x="841248" y="3355848"/>
+            <a:ext cx="237744" cy="237744"/>
+          </a:xfrm>
+          <a:prstGeom prst="rect">
+            <a:avLst/>
+          </a:prstGeom>
+        </p:spPr>
+      </p:pic>
+      <p:sp>
+        <p:nvSpPr>
+          <p:cNvPr id="22" name="Teaser 5 text"/>
+          <p:cNvSpPr txBox="1"/>
+          <p:nvPr/>
+        </p:nvSpPr>
+        <p:spPr>
+          <a:xfrm>
+            <a:off x="731520" y="3767328"/>
+            <a:ext cx="2377440" cy="1005840"/>
+          </a:xfrm>
+          <a:prstGeom prst="rect">
+            <a:avLst/>
+          </a:prstGeom>
+          <a:noFill/>
+          <a:ln/>
+        </p:spPr>
+        <p:txBody>
+          <a:bodyPr wrap="square" lIns="0" tIns="0" rIns="0" bIns="0" rtlCol="0" anchor="t"/>
+          <a:lstStyle/>
+          <a:p>
+            <a:pPr marL="0" indent="0">
+              <a:spcAft>
+                <a:spcPts val="300"/>
+              </a:spcAft>
+              <a:buNone/>
+            </a:pPr>
+            <a:r>
+              <a:rPr lang="en-US" sz="1600" b="1" dirty="0">
+                <a:solidFill>
+                  <a:srgbClr val="0F766E"/>
+                </a:solidFill>
+              </a:rPr>
+              <a:t>Client-server to hybrid cloud</a:t>
+            </a:r>
+            <a:endParaRPr lang="en-US" sz="1400" dirty="0"/>
+          </a:p>
+          <a:p>
+            <a:pPr marL="0" indent="0">
+              <a:spcAft>
+                <a:spcPts val="300"/>
+              </a:spcAft>
+              <a:buNone/>
+            </a:pPr>
+            <a:r>
+              <a:rPr lang="en-US" sz="1350" dirty="0">
+                <a:solidFill>
+                  <a:schemeClr val="tx2"/>
+                </a:solidFill>
+              </a:rPr>
+              <a:t>Application path from on-premises to cloud</a:t>
+            </a:r>
+            <a:endParaRPr lang="en-US" sz="1400" dirty="0"/>
+          </a:p>
+        </p:txBody>
+      </p:sp>
+      <p:sp>
+        <p:nvSpPr>
+          <p:cNvPr id="23" name="Teaser 6"/>
+          <p:cNvSpPr/>
+          <p:nvPr/>
+        </p:nvSpPr>
+        <p:spPr>
+          <a:xfrm>
+            <a:off x="3355848" y="3108960"/>
+            <a:ext cx="2670048" cy="1719072"/>
+          </a:xfrm>
+          <a:prstGeom prst="roundRect">
+            <a:avLst>
+              <a:gd name="adj" fmla="val 4255"/>
+            </a:avLst>
+          </a:prstGeom>
+          <a:solidFill>
+            <a:srgbClr val="DCEFEC"/>
+          </a:solidFill>
+          <a:ln w="12700">
+            <a:solidFill>
+              <a:srgbClr val="DCEFEC"/>
+            </a:solidFill>
+            <a:prstDash val="solid"/>
+          </a:ln>
+          <a:effectLst>
+            <a:outerShdw blurRad="76200" dist="25400" dir="5400000" algn="bl" rotWithShape="0">
+              <a:srgbClr val="64748B">
+                <a:alpha val="22000"/>
+              </a:srgbClr>
+            </a:outerShdw>
+          </a:effectLst>
+        </p:spPr>
+      </p:sp>
+      <p:sp>
+        <p:nvSpPr>
+          <p:cNvPr id="24" name="Icon FaDatabase"/>
+          <p:cNvSpPr/>
+          <p:nvPr/>
+        </p:nvSpPr>
+        <p:spPr>
+          <a:xfrm>
+            <a:off x="3538728" y="3246120"/>
+            <a:ext cx="457200" cy="457200"/>
+          </a:xfrm>
+          <a:prstGeom prst="ellipse">
+            <a:avLst/>
+          </a:prstGeom>
+          <a:solidFill>
+            <a:srgbClr val="0F766E"/>
+          </a:solidFill>
+          <a:ln w="12700">
+            <a:solidFill>
+              <a:srgbClr val="0F766E"/>
+            </a:solidFill>
+            <a:prstDash val="solid"/>
+          </a:ln>
+        </p:spPr>
+      </p:sp>
+      <p:pic>
+        <p:nvPicPr>
+          <p:cNvPr id="25" name="Image 5" descr="C:\Users\whale\git\uiao\inbox\SSA-Interview\build\icons\FaDatabase.png"/>
+          <p:cNvPicPr>
+            <a:picLocks noChangeAspect="1"/>
+          </p:cNvPicPr>
+          <p:nvPr/>
+        </p:nvPicPr>
+        <p:blipFill>
+          <a:blip r:embed="rId10"/>
+          <a:stretch>
+            <a:fillRect/>
+          </a:stretch>
+        </p:blipFill>
+        <p:spPr>
+          <a:xfrm>
+            <a:off x="3648456" y="3355848"/>
+            <a:ext cx="237744" cy="237744"/>
+          </a:xfrm>
+          <a:prstGeom prst="rect">
+            <a:avLst/>
+          </a:prstGeom>
+        </p:spPr>
+      </p:pic>
+      <p:sp>
+        <p:nvSpPr>
+          <p:cNvPr id="26" name="Teaser 6 text"/>
+          <p:cNvSpPr txBox="1"/>
+          <p:nvPr/>
+        </p:nvSpPr>
+        <p:spPr>
+          <a:xfrm>
+            <a:off x="3538728" y="3767328"/>
+            <a:ext cx="2377440" cy="1005840"/>
+          </a:xfrm>
+          <a:prstGeom prst="rect">
+            <a:avLst/>
+          </a:prstGeom>
+          <a:noFill/>
+          <a:ln/>
+        </p:spPr>
+        <p:txBody>
+          <a:bodyPr wrap="square" lIns="0" tIns="0" rIns="0" bIns="0" rtlCol="0" anchor="t"/>
+          <a:lstStyle/>
+          <a:p>
+            <a:pPr marL="0" indent="0">
+              <a:spcAft>
+                <a:spcPts val="300"/>
+              </a:spcAft>
+              <a:buNone/>
+            </a:pPr>
+            <a:r>
+              <a:rPr lang="en-US" sz="1600" b="1" dirty="0">
+                <a:solidFill>
+                  <a:srgbClr val="0F766E"/>
+                </a:solidFill>
+              </a:rPr>
+              <a:t>SQL Server identity</a:t>
+            </a:r>
+            <a:endParaRPr lang="en-US" sz="1400" dirty="0"/>
+          </a:p>
+          <a:p>
+            <a:pPr marL="0" indent="0">
+              <a:spcAft>
+                <a:spcPts val="300"/>
+              </a:spcAft>
+              <a:buNone/>
+            </a:pPr>
+            <a:r>
+              <a:rPr lang="en-US" sz="1350" dirty="0">
+                <a:solidFill>
+                  <a:schemeClr val="tx2"/>
+                </a:solidFill>
+              </a:rPr>
+              <a:t>Database logins moved to governed identity</a:t>
+            </a:r>
+            <a:endParaRPr lang="en-US" sz="1400" dirty="0"/>
+          </a:p>
+        </p:txBody>
+      </p:sp>
+      <p:sp>
+        <p:nvSpPr>
+          <p:cNvPr id="27" name="Teaser 7"/>
+          <p:cNvSpPr/>
+          <p:nvPr/>
+        </p:nvSpPr>
+        <p:spPr>
+          <a:xfrm>
+            <a:off x="6163056" y="3108960"/>
+            <a:ext cx="2670048" cy="1719072"/>
+          </a:xfrm>
+          <a:prstGeom prst="roundRect">
+            <a:avLst>
+              <a:gd name="adj" fmla="val 4255"/>
+            </a:avLst>
+          </a:prstGeom>
+          <a:solidFill>
+            <a:srgbClr val="DCEFEC"/>
+          </a:solidFill>
+          <a:ln w="12700">
+            <a:solidFill>
+              <a:srgbClr val="DCEFEC"/>
+            </a:solidFill>
+            <a:prstDash val="solid"/>
+          </a:ln>
+          <a:effectLst>
+            <a:outerShdw blurRad="76200" dist="25400" dir="5400000" algn="bl" rotWithShape="0">
+              <a:srgbClr val="64748B">
+                <a:alpha val="22000"/>
+              </a:srgbClr>
+            </a:outerShdw>
+          </a:effectLst>
+        </p:spPr>
+      </p:sp>
+      <p:sp>
+        <p:nvSpPr>
+          <p:cNvPr id="28" name="Icon FaLaptop"/>
+          <p:cNvSpPr/>
+          <p:nvPr/>
+        </p:nvSpPr>
+        <p:spPr>
+          <a:xfrm>
+            <a:off x="6345936" y="3246120"/>
+            <a:ext cx="457200" cy="457200"/>
+          </a:xfrm>
+          <a:prstGeom prst="ellipse">
+            <a:avLst/>
+          </a:prstGeom>
+          <a:solidFill>
+            <a:srgbClr val="0F766E"/>
+          </a:solidFill>
+          <a:ln w="12700">
+            <a:solidFill>
+              <a:srgbClr val="0F766E"/>
+            </a:solidFill>
+            <a:prstDash val="solid"/>
+          </a:ln>
+        </p:spPr>
+      </p:sp>
+      <p:pic>
+        <p:nvPicPr>
+          <p:cNvPr id="29" name="Image 6" descr="C:\Users\whale\git\uiao\inbox\SSA-Interview\build\icons\FaLaptop.png"/>
+          <p:cNvPicPr>
+            <a:picLocks noChangeAspect="1"/>
+          </p:cNvPicPr>
+          <p:nvPr/>
+        </p:nvPicPr>
+        <p:blipFill>
+          <a:blip r:embed="rId11"/>
+          <a:stretch>
+            <a:fillRect/>
+          </a:stretch>
+        </p:blipFill>
+        <p:spPr>
+          <a:xfrm>
+            <a:off x="6455664" y="3355848"/>
+            <a:ext cx="237744" cy="237744"/>
+          </a:xfrm>
+          <a:prstGeom prst="rect">
+            <a:avLst/>
+          </a:prstGeom>
+        </p:spPr>
+      </p:pic>
+      <p:sp>
+        <p:nvSpPr>
+          <p:cNvPr id="30" name="Teaser 7 text"/>
+          <p:cNvSpPr txBox="1"/>
+          <p:nvPr/>
+        </p:nvSpPr>
+        <p:spPr>
+          <a:xfrm>
+            <a:off x="6345936" y="3767328"/>
+            <a:ext cx="2377440" cy="1005840"/>
+          </a:xfrm>
+          <a:prstGeom prst="rect">
+            <a:avLst/>
+          </a:prstGeom>
+          <a:noFill/>
+          <a:ln/>
+        </p:spPr>
+        <p:txBody>
+          <a:bodyPr wrap="square" lIns="0" tIns="0" rIns="0" bIns="0" rtlCol="0" anchor="t"/>
+          <a:lstStyle/>
+          <a:p>
+            <a:pPr marL="0" indent="0">
+              <a:spcAft>
+                <a:spcPts val="300"/>
+              </a:spcAft>
+              <a:buNone/>
+            </a:pPr>
+            <a:r>
+              <a:rPr lang="en-US" sz="1600" b="1" dirty="0">
+                <a:solidFill>
+                  <a:srgbClr val="0F766E"/>
+                </a:solidFill>
+              </a:rPr>
+              <a:t>GPO sunset to Intune and Arc</a:t>
+            </a:r>
+            <a:endParaRPr lang="en-US" sz="1400" dirty="0"/>
+          </a:p>
+          <a:p>
+            <a:pPr marL="0" indent="0">
+              <a:spcAft>
+                <a:spcPts val="300"/>
+              </a:spcAft>
+              <a:buNone/>
+            </a:pPr>
+            <a:r>
+              <a:rPr lang="en-US" sz="1350" dirty="0">
+                <a:solidFill>
+                  <a:schemeClr val="tx2"/>
+                </a:solidFill>
+              </a:rPr>
+              <a:t>Policy and device management in the cloud</a:t>
+            </a:r>
+            <a:endParaRPr lang="en-US" sz="1400" dirty="0"/>
+          </a:p>
+        </p:txBody>
+      </p:sp>
+      <p:sp>
+        <p:nvSpPr>
+          <p:cNvPr id="31" name="Teaser 8"/>
+          <p:cNvSpPr/>
+          <p:nvPr/>
+        </p:nvSpPr>
+        <p:spPr>
+          <a:xfrm>
+            <a:off x="8970264" y="3108960"/>
+            <a:ext cx="2670048" cy="1719072"/>
+          </a:xfrm>
+          <a:prstGeom prst="roundRect">
+            <a:avLst>
+              <a:gd name="adj" fmla="val 4255"/>
+            </a:avLst>
+          </a:prstGeom>
+          <a:solidFill>
+            <a:srgbClr val="DCEFEC"/>
+          </a:solidFill>
+          <a:ln w="12700">
+            <a:solidFill>
+              <a:srgbClr val="DCEFEC"/>
+            </a:solidFill>
+            <a:prstDash val="solid"/>
+          </a:ln>
+          <a:effectLst>
+            <a:outerShdw blurRad="76200" dist="25400" dir="5400000" algn="bl" rotWithShape="0">
+              <a:srgbClr val="64748B">
+                <a:alpha val="22000"/>
+              </a:srgbClr>
+            </a:outerShdw>
+          </a:effectLst>
+        </p:spPr>
+      </p:sp>
+      <p:sp>
+        <p:nvSpPr>
+          <p:cNvPr id="32" name="Icon FaShieldHalved"/>
+          <p:cNvSpPr/>
+          <p:nvPr/>
+        </p:nvSpPr>
+        <p:spPr>
+          <a:xfrm>
+            <a:off x="9153144" y="3246120"/>
+            <a:ext cx="457200" cy="457200"/>
+          </a:xfrm>
+          <a:prstGeom prst="ellipse">
+            <a:avLst/>
+          </a:prstGeom>
+          <a:solidFill>
+            <a:srgbClr val="0F766E"/>
+          </a:solidFill>
+          <a:ln w="12700">
+            <a:solidFill>
+              <a:srgbClr val="0F766E"/>
+            </a:solidFill>
+            <a:prstDash val="solid"/>
+          </a:ln>
+        </p:spPr>
+      </p:sp>
+      <p:pic>
+        <p:nvPicPr>
+          <p:cNvPr id="33" name="Image 7" descr="C:\Users\whale\git\uiao\inbox\SSA-Interview\build\icons\FaShieldHalved.png"/>
+          <p:cNvPicPr>
+            <a:picLocks noChangeAspect="1"/>
+          </p:cNvPicPr>
+          <p:nvPr/>
+        </p:nvPicPr>
+        <p:blipFill>
+          <a:blip r:embed="rId12"/>
+          <a:stretch>
+            <a:fillRect/>
+          </a:stretch>
+        </p:blipFill>
+        <p:spPr>
+          <a:xfrm>
+            <a:off x="9262872" y="3355848"/>
+            <a:ext cx="237744" cy="237744"/>
+          </a:xfrm>
+          <a:prstGeom prst="rect">
+            <a:avLst/>
+          </a:prstGeom>
+        </p:spPr>
+      </p:pic>
+      <p:sp>
+        <p:nvSpPr>
+          <p:cNvPr id="34" name="Teaser 8 text"/>
+          <p:cNvSpPr txBox="1"/>
+          <p:nvPr/>
+        </p:nvSpPr>
+        <p:spPr>
+          <a:xfrm>
+            <a:off x="9153144" y="3767328"/>
+            <a:ext cx="2377440" cy="1005840"/>
+          </a:xfrm>
+          <a:prstGeom prst="rect">
+            <a:avLst/>
+          </a:prstGeom>
+          <a:noFill/>
+          <a:ln/>
+        </p:spPr>
+        <p:txBody>
+          <a:bodyPr wrap="square" lIns="0" tIns="0" rIns="0" bIns="0" rtlCol="0" anchor="t"/>
+          <a:lstStyle/>
+          <a:p>
+            <a:pPr marL="0" indent="0">
+              <a:spcAft>
+                <a:spcPts val="300"/>
+              </a:spcAft>
+              <a:buNone/>
+            </a:pPr>
+            <a:r>
+              <a:rPr lang="en-US" sz="1600" b="1" dirty="0">
+                <a:solidFill>
+                  <a:srgbClr val="0F766E"/>
+                </a:solidFill>
+              </a:rPr>
+              <a:t>Continuous compliance</a:t>
+            </a:r>
+            <a:endParaRPr lang="en-US" sz="1400" dirty="0"/>
+          </a:p>
+          <a:p>
+            <a:pPr marL="0" indent="0">
+              <a:spcAft>
+                <a:spcPts val="300"/>
+              </a:spcAft>
+              <a:buNone/>
+            </a:pPr>
+            <a:r>
+              <a:rPr lang="en-US" sz="1350" dirty="0">
+                <a:solidFill>
+                  <a:schemeClr val="tx2"/>
+                </a:solidFill>
+              </a:rPr>
+              <a:t>SCuBA baselines, BOD 25-01, FedRAMP 20x</a:t>
+            </a:r>
+            <a:endParaRPr lang="en-US" sz="1400" dirty="0"/>
+          </a:p>
+        </p:txBody>
+      </p:sp>
+      <p:sp>
+        <p:nvSpPr>
+          <p:cNvPr id="35" name="Teaser companions"/>
+          <p:cNvSpPr/>
+          <p:nvPr/>
+        </p:nvSpPr>
+        <p:spPr>
+          <a:xfrm>
+            <a:off x="548640" y="4937760"/>
+            <a:ext cx="11109960" cy="566928"/>
+          </a:xfrm>
+          <a:prstGeom prst="roundRect">
+            <a:avLst>
+              <a:gd name="adj" fmla="val 12903"/>
+            </a:avLst>
+          </a:prstGeom>
+          <a:solidFill>
+            <a:srgbClr val="E4EAF4"/>
+          </a:solidFill>
+          <a:ln w="12700">
+            <a:solidFill>
+              <a:srgbClr val="1F2A44"/>
+            </a:solidFill>
+            <a:prstDash val="solid"/>
+          </a:ln>
+          <a:effectLst>
+            <a:outerShdw blurRad="76200" dist="25400" dir="5400000" algn="bl" rotWithShape="0">
+              <a:srgbClr val="64748B">
+                <a:alpha val="22000"/>
+              </a:srgbClr>
+            </a:outerShdw>
+          </a:effectLst>
+        </p:spPr>
+      </p:sp>
+      <p:sp>
+        <p:nvSpPr>
+          <p:cNvPr id="36" name="Teaser companions text"/>
+          <p:cNvSpPr txBox="1"/>
+          <p:nvPr/>
+        </p:nvSpPr>
+        <p:spPr>
+          <a:xfrm>
+            <a:off x="822960" y="4956048"/>
+            <a:ext cx="10607040" cy="530352"/>
+          </a:xfrm>
+          <a:prstGeom prst="rect">
+            <a:avLst/>
+          </a:prstGeom>
+          <a:noFill/>
+          <a:ln/>
+        </p:spPr>
+        <p:txBody>
+          <a:bodyPr wrap="square" lIns="0" tIns="0" rIns="0" bIns="0" rtlCol="0" anchor="ctr"/>
+          <a:lstStyle/>
+          <a:p>
+            <a:pPr marL="0" indent="0">
+              <a:buNone/>
+            </a:pPr>
+            <a:r>
+              <a:rPr lang="en-US" sz="1450" b="1" dirty="0">
+                <a:solidFill>
+                  <a:srgbClr val="1F2A44"/>
+                </a:solidFill>
+              </a:rPr>
+              <a:t>Companion decks: </a:t>
+            </a:r>
+            <a:r>
+              <a:rPr lang="en-US" sz="1450" b="1" dirty="0">
+                <a:solidFill>
+                  <a:schemeClr val="tx2"/>
+                </a:solidFill>
+              </a:rPr>
+              <a:t>Contractor Identity Source</a:t>
+            </a:r>
+            <a:r>
+              <a:rPr lang="en-US" sz="1450" dirty="0">
+                <a:solidFill>
+                  <a:schemeClr val="tx2"/>
+                </a:solidFill>
+              </a:rPr>
+              <a:t> (who is authoritative for a contractor)  ·  </a:t>
+            </a:r>
+            <a:r>
+              <a:rPr lang="en-US" sz="1450" b="1" dirty="0">
+                <a:solidFill>
+                  <a:schemeClr val="tx2"/>
+                </a:solidFill>
+              </a:rPr>
+              <a:t>Original HR-Driven Identity</a:t>
+            </a:r>
+            <a:r>
+              <a:rPr lang="en-US" sz="1450" dirty="0">
+                <a:solidFill>
+                  <a:schemeClr val="tx2"/>
+                </a:solidFill>
+              </a:rPr>
+              <a:t> (full model, lifecycle, plan)</a:t>
+            </a:r>
+            <a:endParaRPr lang="en-US" sz="1450" dirty="0"/>
+          </a:p>
+        </p:txBody>
+      </p:sp>
+      <p:sp>
+        <p:nvSpPr>
+          <p:cNvPr id="37" name="Teaser footer"/>
+          <p:cNvSpPr/>
+          <p:nvPr/>
+        </p:nvSpPr>
+        <p:spPr>
+          <a:xfrm>
+            <a:off x="548640" y="5596128"/>
+            <a:ext cx="11109960" cy="548640"/>
+          </a:xfrm>
+          <a:prstGeom prst="roundRect">
+            <a:avLst>
+              <a:gd name="adj" fmla="val 13333"/>
+            </a:avLst>
+          </a:prstGeom>
+          <a:solidFill>
+            <a:srgbClr val="FFFFFF"/>
+          </a:solidFill>
+          <a:ln w="12700">
+            <a:solidFill>
+              <a:srgbClr val="B45309"/>
+            </a:solidFill>
+            <a:prstDash val="solid"/>
+          </a:ln>
+          <a:effectLst>
+            <a:outerShdw blurRad="76200" dist="25400" dir="5400000" algn="bl" rotWithShape="0">
+              <a:srgbClr val="64748B">
+                <a:alpha val="22000"/>
+              </a:srgbClr>
+            </a:outerShdw>
+          </a:effectLst>
+        </p:spPr>
+      </p:sp>
+      <p:sp>
+        <p:nvSpPr>
+          <p:cNvPr id="38" name="Teaser footer text"/>
+          <p:cNvSpPr txBox="1"/>
+          <p:nvPr/>
+        </p:nvSpPr>
+        <p:spPr>
+          <a:xfrm>
+            <a:off x="822960" y="5614416"/>
+            <a:ext cx="10607040" cy="512064"/>
+          </a:xfrm>
+          <a:prstGeom prst="rect">
+            <a:avLst/>
+          </a:prstGeom>
+          <a:noFill/>
+          <a:ln/>
+        </p:spPr>
+        <p:txBody>
+          <a:bodyPr wrap="square" lIns="0" tIns="0" rIns="0" bIns="0" rtlCol="0" anchor="ctr"/>
+          <a:lstStyle/>
+          <a:p>
+            <a:pPr marL="0" indent="0">
+              <a:buNone/>
+            </a:pPr>
+            <a:r>
+              <a:rPr lang="en-US" sz="1500" b="1" dirty="0">
+                <a:solidFill>
+                  <a:srgbClr val="B45309"/>
+                </a:solidFill>
+              </a:rPr>
+              <a:t>Also: </a:t>
+            </a:r>
+            <a:r>
+              <a:rPr lang="en-US" sz="1500" dirty="0">
+                <a:solidFill>
+                  <a:schemeClr val="tx2"/>
+                </a:solidFill>
+              </a:rPr>
+              <a:t>Zero Trust whole-agency unification · AI identity governance · help desk Entra operations</a:t>
+            </a:r>
+            <a:endParaRPr lang="en-US" sz="1500" dirty="0"/>
+          </a:p>
+        </p:txBody>
+      </p:sp>
+      <p:sp>
+        <p:nvSpPr>
+          <p:cNvPr id="39" name="Slide Number Placeholder 0"/>
+          <p:cNvSpPr>
+            <a:spLocks noGrp="1"/>
+          </p:cNvSpPr>
+          <p:nvPr>
+            <p:ph type="sldNum" sz="quarter" idx="4294967295"/>
+          </p:nvPr>
+        </p:nvSpPr>
+        <p:spPr>
+          <a:xfrm>
+            <a:off x="11155680" y="6400800"/>
+            <a:ext cx="457200" cy="274320"/>
+          </a:xfrm>
+          <a:prstGeom prst="rect">
+            <a:avLst/>
+          </a:prstGeom>
+          <a:extLst>
+            <a:ext uri="{C572A759-6A51-4108-AA02-DFA0A04FC94B}">
+              <ma14:wrappingTextBoxFlag xmlns:ma14="http://schemas.microsoft.com/office/mac/drawingml/2011/main" xmlns="" val="0"/>
+            </a:ext>
+          </a:extLst>
+        </p:spPr>
+        <p:txBody>
+          <a:bodyPr/>
+          <a:lstStyle>
+            <a:lvl1pPr>
+              <a:defRPr sz="1000">
+                <a:solidFill>
+                  <a:schemeClr val="accent5"/>
+                </a:solidFill>
+              </a:defRPr>
+            </a:lvl1pPr>
+          </a:lstStyle>
+          <a:p>
+            <a:pPr algn="r"/>
+            <a:fld id="{F7021451-1387-4CA6-816F-3879F97B5CBC}" type="slidenum">
+              <a:rPr lang="en-US" b="0"/>
+              <a:t>9</a:t>
+            </a:fld>
+            <a:endParaRPr lang="en-US"/>
+          </a:p>
+        </p:txBody>
+      </p:sp>
+      <p:pic>
+        <p:nvPicPr>
+          <p:cNvPr id="40" name="Narration">
+            <a:hlinkClick r:id="" action="ppaction://media"/>
+            <a:extLst>
+              <a:ext uri="{FF2B5EF4-FFF2-40B4-BE49-F238E27FC236}">
+                <a16:creationId xmlns:a16="http://schemas.microsoft.com/office/drawing/2014/main" id="{AF5E5F6D-723D-44F4-226A-FBBE48B19772}"/>
+              </a:ext>
+            </a:extLst>
+          </p:cNvPr>
+          <p:cNvPicPr>
+            <a:picLocks noChangeAspect="1"/>
+          </p:cNvPicPr>
+          <p:nvPr>
+            <a:audioFile r:link="rId2"/>
+            <p:extLst>
+              <p:ext uri="{DAA4B4D4-6D71-4841-9C94-3DE7FCFB9230}">
+                <p14:media xmlns:p14="http://schemas.microsoft.com/office/powerpoint/2010/main" r:embed="rId1"/>
+              </p:ext>
+            </p:extLst>
+          </p:nvPr>
+        </p:nvPicPr>
+        <p:blipFill>
+          <a:blip r:embed="rId13"/>
+          <a:stretch>
+            <a:fillRect/>
+          </a:stretch>
+        </p:blipFill>
+        <p:spPr>
+          <a:xfrm>
+            <a:off x="127000" y="6350000"/>
+            <a:ext cx="304800" cy="304800"/>
+          </a:xfrm>
+          <a:prstGeom prst="rect">
+            <a:avLst/>
+          </a:prstGeom>
+        </p:spPr>
+      </p:pic>
+    </p:spTree>
+  </p:cSld>
+  <p:clrMapOvr>
+    <a:masterClrMapping/>
+  </p:clrMapOvr>
+  <mc:AlternateContent xmlns:mc="http://schemas.openxmlformats.org/markup-compatibility/2006">
+    <mc:Choice xmlns:p14="http://schemas.microsoft.com/office/powerpoint/2010/main" Requires="p14">
+      <p:transition spd="slow" p14:dur="2000" advTm="56300"/>
+    </mc:Choice>
+    <mc:Fallback>
+      <p:transition spd="slow" advTm="56300"/>
+    </mc:Fallback>
+  </mc:AlternateContent>
+  <p:timing>
+    <p:tnLst>
+      <p:par>
+        <p:cTn id="1" dur="indefinite" restart="never" nodeType="tmRoot">
+          <p:childTnLst>
+            <p:seq concurrent="1" nextAc="seek">
+              <p:cTn id="2" dur="indefinite" nodeType="mainSeq">
+                <p:childTnLst>
+                  <p:par>
+                    <p:cTn id="3" fill="hold">
+                      <p:stCondLst>
+                        <p:cond delay="indefinite"/>
+                        <p:cond evt="onBegin" delay="0">
+                          <p:tn val="2"/>
+                        </p:cond>
+                      </p:stCondLst>
+                      <p:childTnLst>
+                        <p:par>
+                          <p:cTn id="4" fill="hold">
+                            <p:stCondLst>
+                              <p:cond delay="0"/>
+                            </p:stCondLst>
+                            <p:childTnLst>
+                              <p:par>
+                                <p:cTn id="5" presetID="1" presetClass="mediacall" presetSubtype="0" fill="hold" nodeType="withEffect">
+                                  <p:stCondLst>
+                                    <p:cond delay="0"/>
+                                  </p:stCondLst>
+                                  <p:childTnLst>
+                                    <p:cmd type="call" cmd="playFrom(0.0)">
+                                      <p:cBhvr>
+                                        <p:cTn id="6" dur="55296" fill="hold"/>
+                                        <p:tgtEl>
+                                          <p:spTgt spid="40"/>
                                         </p:tgtEl>
                                       </p:cBhvr>
                                     </p:cmd>

--- a/presentations/hr-driven-identity-interview/HR_Driven_Identity_Exec_AnyAgency_Narrated.pptx
+++ b/presentations/hr-driven-identity-interview/HR_Driven_Identity_Exec_AnyAgency_Narrated.pptx
@@ -115,7 +115,7 @@
   <p:extLst>
     <p:ext uri="{521415D9-36F7-43E2-AB2F-B90AF26B5E84}">
       <p14:sectionLst xmlns:p14="http://schemas.microsoft.com/office/powerpoint/2010/main">
-        <p14:section name="The decision" id="{61DADBBE-95B2-A09F-2F4D-65EBD12449A6}">
+        <p14:section name="The decision" id="{29BBA6FF-A62A-C4B0-A92E-D5F7ECDDCACA}">
           <p14:sldIdLst>
             <p14:sldId id="256"/>
             <p14:sldId id="257"/>
@@ -123,7 +123,7 @@
             <p14:sldId id="259"/>
           </p14:sldIdLst>
         </p14:section>
-        <p14:section name="Making it real" id="{F92649BA-1E8D-F9C5-69DF-039C4AF00C85}">
+        <p14:section name="Making it real" id="{AFC7E07D-70EB-9310-C51F-44BCFE26F8EF}">
           <p14:sldIdLst>
             <p14:sldId id="260"/>
             <p14:sldId id="261"/>
@@ -132,7 +132,7 @@
             <p14:sldId id="264"/>
           </p14:sldIdLst>
         </p14:section>
-        <p14:section name="Backup" id="{8D6E474E-3FF0-E0A2-3E44-9A92834CBC0A}">
+        <p14:section name="Backup" id="{C5283A63-1717-E035-2612-DE50C1D3CABA}">
           <p14:sldIdLst/>
         </p14:section>
       </p14:sectionLst>
@@ -169,7 +169,7 @@
     </p:spTree>
     <p:extLst>
       <p:ext uri="{BB962C8B-B14F-4D97-AF65-F5344CB8AC3E}">
-        <p14:creationId xmlns:p14="http://schemas.microsoft.com/office/powerpoint/2010/main" val="3675574896"/>
+        <p14:creationId xmlns:p14="http://schemas.microsoft.com/office/powerpoint/2010/main" val="1972949453"/>
       </p:ext>
     </p:extLst>
   </p:cSld>
@@ -316,7 +316,7 @@
             <a:r>
               <a:rPr lang="en-US" dirty="0"/>
               <a:t>[0:00–0:50]  Good morning, and thank you.
-Digital identity has two faces: the public who sign in to an agency's services, and the workforce who serve them. Both rest on the same data discipline: one person, one key the agency controls, and every fact owned by one authoritative source. I'll show that discipline through the workforce face, because Federal HR 2.0 puts it on every agency's calendar.
+Digital identity has two faces: the public who sign in to an agency's services, and the workforce who serve them. Both rest on the same data discipline: one person, one key the agency controls, and every fact owned by one authoritative source. I'll show that discipline through the workforce face, because Federal HR 2.0 puts it on participating agencies' calendars.
 I have one proposal, and I'll take it through four questions, the way I'd take it to leadership: why it matters, what we should do, who has to be involved, and how we'd carry it out and know it's working.
 Workbook: HR-Driven Identity, Chapter 00 — Overview and Applicability.</a:t>
             </a:r>
@@ -407,7 +407,7 @@
               <a:rPr lang="en-US" dirty="0"/>
               <a:t>[0:50–2:40]  Why. Based on current visibility, many agencies do not operate a comprehensive enterprise HR-driven identity lifecycle. In the processes I have observed, many workforce identity changes remain dependent on tickets or manual coordination, and that costs three ways.
 Access outlives the job: when someone leaves or changes roles, removal can wait for a ticket, and a stale account is a security violation that can enable a breach of the public's records. Federal standards require revoking a separated person's credentials, and a ticket-dependent process struggles to meet that. Records we can't trust: in the processes I have observed, the phone book is wrong until someone files a ticket, and every change of manager means the organization, the manager and tool access are updated by hand. Approvals route through that same data. And cost and delay: many joiners, movers and leavers become help-desk work.
-But the bigger why is where the mission is heading. Take an illustrative shared-service scenario: a cross-agency contact center, one front door for two agencies' customers. It's an example, not an approved program. The hard part of an idea like that isn't the phones: cloud contact centers make the front end easy. It's the back end. Who is this agent? Which agency's records may they see? And does their access end the day they leave, in both agencies? A standardized, HR-driven identity answers those questions by rule, the same way everywhere.
+But the bigger why is where the mission is heading. Take an illustrative shared-service scenario: a cross-agency contact center, one front door for two agencies' customers. It's an example, not an approved program. The hard part of an idea like that isn't the phones: cloud contact centers make the front end easy. It's the back end. Who is this agent? Which agency's records may they see? And does their access end the day they leave, in both agencies? A standardized, HR-driven identity supplies the trusted facts needed to answer those questions consistently.
 And if we do nothing, HR moves to Core HCM, identity moves to Entra ID, and we rebuild the same manual process twice, on new platforms.
 Workbook: HR-Driven Identity, Chapter 01 — Why the agency needs HR-driven ICAM now.</a:t>
             </a:r>
@@ -498,7 +498,7 @@
               <a:rPr lang="en-US" dirty="0"/>
               <a:t>[2:40–4:30]  What should we do? I've weighed four realistic options against what leadership actually has to balance: the mission and the public we serve, security, cost and resilience. Compliance matters, but on its own it isn't a reason to invest.
 A, keep ticket-driven identity: no new investment, but the risk and the manual work stay where they are. That's the cost of doing nothing.
-B, automate inside the directories with scripts and exports: quick and cheap, but it automates a source that isn't authoritative, so it spreads bad data faster, and it's rebuilt when HR changes platforms.
+B, automate inside the directories with scripts and exports: quick and cheap. It can automate selected changes, but without a governed authority model and complete lifecycle events, it risks propagating inconsistent data and being rebuilt when the source changes.
 C, wait for HR 2.0 and integrate afterward: defensible, and less work this year. But program material describes interconnections occurring during the onboarding period, so waiting means retrofitting after go-live.
 D, start now: HR as the source of truth, in OPM's standard personnel data, designed into both the HR onboarding and the Entra ID migration. It costs design effort up front and needs shared governance, which is why it's only partial on cost.
 The judgment call: if HR 2.0 slipped a long way, C becomes reasonable. But D's first step — data standards, ownership and the person key — is no-regret either way, and it can start now from the HR data the agency already has, subject to data profiling, with the source switched to Core HCM when it arrives.
@@ -590,12 +590,12 @@
             <a:r>
               <a:rPr lang="en-US" dirty="0"/>
               <a:t>[4:30–6:40]  I propose option D, phased, starting with the no-regret steps. Four reasons.
-Mission and the public: access to the public's records should end when a person's role ends, automatically, the same day; the people who serve the public should have the right access on day one; and shared services like the illustrative contact center become possible, because every agency describes its people the same way.
+Mission and the public: access to the public's records should end when a person's role ends, automatically, the same day; the people who serve the public should have the right access on day one; and shared services like the illustrative contact center become possible, because participating agencies would describe their people the same way.
 Cost: we build it once, while both platforms are being rebuilt anyway, and retire ticket work for routine joiners, movers and leavers.
 Security: modern access decisions, Zero Trust, increasingly depend on authoritative identity, device and contextual attributes, and the identity attributes, organization, position, status and supervisor, come from HR. So the accuracy of HR data drives the accuracy of access. The federal mandates point the same way, but they're the floor, not the reason. And it gives the inspector general's perennial question — how do you know every account belongs to a current person? — a standing answer.
-Resilience: by building on OPM's standard data rather than one vendor's fields, and on a person key the agency controls, the design survives the next platform change. I propose an existing enterprise ID, such as a Mainframe PIN, as the candidate, subject to validating its uniqueness, persistence, non-reassignment, population coverage, privacy constraints and historical behavior.
+Resilience: by building on OPM's standard data rather than one vendor's fields, and on a person key the agency controls, the design survives the next platform change. I propose an existing enterprise ID, such as a Mainframe PIN, as the candidate, subject to formal identifier validation.
 Two honest limits. HR 2.0 covers federal employees only, so a contractor authority decision is required: I propose evaluating suitability records, PIV sponsorship and Core HCM's contingent-worker records as candidate sources. And we should build only what HR is authoritative for.
-The upside: every agency is moving to the same HR platform on the same standards, so one identity standard can serve them all, and the services they share.
+The upside: participating civilian agencies are moving toward a common Core HCM platform and federal personnel standards, so a reusable identity model could reduce reinvention across agencies and shared services.
 Workbook: HR-Driven Identity, Chapter 01 — Why the agency needs HR-driven ICAM now; Chapter 03 — Attribute Authority; Chapter 05 — Contractors and vendors.</a:t>
             </a:r>
           </a:p>
@@ -686,7 +686,7 @@
               <a:t>[6:40–8:20]  Who has to be involved. This is an organizational change as much as a technical one, so it matters who owns what.
 HR owns the personnel data and its quality, at the source. When the data is wrong, it gets fixed in HR, not patched in the directory. And the OPM HR 2.0 program owns the platform, the standards and the interconnection.
 The CIO's identity team uses that data to run Entra ID, Active Directory and access. Security sets the Zero Trust policy and owns the leaver path. And the help desk moves from routine tickets to handling the exceptions.
-Then the guards and partners. The privacy office is in from the start, because using HR data for identity is a disclosure that needs a routine use and minimization. Contractor sponsors and the PIV office are the source for people HR doesn't cover. And partner agencies need the same standard if we're going to share services.
+Then the guards and partners. The privacy office is in from the start, because using HR data for identity is a disclosure that needs a routine use and minimization. For people HR doesn't cover, contractor sponsors, credentialing, acquisition, suitability and HR systems each may hold part of the record; the authority decision identifies which source owns each required fact. And partner agencies need the same standard if we're going to share services.
 My role, as an enterprise data architect, is to own the data standards, the logical model and the person key: every attribute gets one name, one definition and one accountable owner. I'd chair the data working group for the effort, review the HR 2.0 integrator's design artifacts against those standards, and carry the standard to the interagency committees and working groups where it gets adopted. The person model and its attributes also become a governed piece of the agency's data and metadata inventory, which auditors increasingly ask for.
 Workbook: HR-Driven Identity, Chapter 03 — Attribute Authority; Appendix B — Security and Privacy Assessment.</a:t>
             </a:r>
@@ -866,10 +866,10 @@
             <a:r>
               <a:rPr lang="en-US" dirty="0"/>
               <a:t>[10:00–12:20]  Here is how I propose we carry it out.
-Data. One governed crosswalk maps OPM's standard data elements into that person model, so when HR changes platforms only the crosswalk's source side changes. Personnel actions then drive the identity events — joiner, mover, leaver — by code, using a proposed classification that the data owners validate first. Contractors come into the same model once the contractor authority decision is made.
-Security. The leaver path blocks access first, within hours, and cleans up afterward. The integration runs with least privilege and no stored secrets. And anything that fails goes to a quarantine with an owner; nothing resolves itself silently.
+Data. One governed crosswalk maps OPM's standard data elements into that person model, so when HR changes platforms only the crosswalk's source side changes. Validated personnel-action mappings then initiate the identity events — joiner, mover, leaver — using a proposed classification that the data owners validate first. Contractors come into the same model once the contractor authority decision is made.
+Security. The leaver path blocks access first, within the approved threshold, and then reconciles every downstream action. The integration runs with least privilege, using managed identities and secretless authentication wherever supported. And anything that fails goes to a quarantine with an owner; nothing resolves itself silently.
 Operations. We start now, from the HR data the agency already has, subject to data profiling, and switch the source to Core HCM when it arrives. We run in shadow mode first, comparing what HR says with what the directories hold, and fixing the gaps. We cut over one population at a time. And we close the ticket path for a population only when the data proves HR is the sole source.
-The technology is the example, not the point. Here it's Oracle Core HCM feeding Microsoft's HR-driven provisioning into Entra ID and Active Directory, with access packages, lifecycle workflows and PIV downstream. If the vendors change, the design holds.
+The products on the slide are one realization; the agency-owned model remains stable if they change.
 Workbook: HR-Driven Identity, Chapter 04 — Logical architecture and Microsoft realization; Chapter 05 — The standard-attribute layer; Chapter 07 — The canonical leaver sequence; Chapter 10 — Execution Plan.</a:t>
             </a:r>
           </a:p>
@@ -959,7 +959,7 @@
               <a:rPr lang="en-US" dirty="0"/>
               <a:t>[12:20–14:40]  How we'll know it's working, and what I'd need.
 Six measures, each baselined in the first phase, and each one a business measure leadership can read: time from separation to blocked access, in hours, against an agency-approved threshold; credential and access revocation, reconciled to verified completion, where one credential-specific constraint is the federal requirement to terminate a PIV card that can't be collected within eighteen hours; accounts tied to a person, with orphaned accounts trending to zero; joiner and mover tickets going down, with access ready on day one; the manager and organization in the directory matching HR; and every exception with an owner and an age. As a byproduct, the same data is evidence for the controls auditors ask about.
-What I'd need from leadership is one decision: start HR-driven identity now, as a design requirement of the HR 2.0 onboarding and the Entra ID migration. And to act on it: a sponsor across HR, the CIO's identity team and privacy; identity named as a consumer in the HR 2.0 interconnection plan; data owners designated, and the enterprise person key confirmed; a small team for the pre-onboarding data work; and the planning assumptions validated, with authoritative owners designated, before implementation.
+I'm asking leadership to make three decisions: name identity as an HR 2.0 data consumer, authorize the cross-functional data-governance work, and require assumptions to be validated by accountable owners before implementation. That lets the agency modernize the platforms and the lifecycle together, rather than carrying the ticket process forward.
 Thank you. I look forward to your questions.
 Workbook: HR-Driven Identity, Chapter 09 — Drift, Metrics and Evidence; Chapter 10 — Execution Plan.</a:t>
             </a:r>
@@ -1980,7 +1980,7 @@
             <a:hlinkClick r:id="" action="ppaction://media"/>
             <a:extLst>
               <a:ext uri="{FF2B5EF4-FFF2-40B4-BE49-F238E27FC236}">
-                <a16:creationId xmlns:a16="http://schemas.microsoft.com/office/drawing/2014/main" id="{4C94E369-61A5-7E8D-146F-C6B146D637F7}"/>
+                <a16:creationId xmlns:a16="http://schemas.microsoft.com/office/drawing/2014/main" id="{5B69A13A-457C-04F0-3EDA-F80BAD250DCB}"/>
               </a:ext>
             </a:extLst>
           </p:cNvPr>
@@ -2019,10 +2019,10 @@
   </p:clrMapOvr>
   <mc:AlternateContent xmlns:mc="http://schemas.openxmlformats.org/markup-compatibility/2006">
     <mc:Choice xmlns:p14="http://schemas.microsoft.com/office/powerpoint/2010/main" Requires="p14">
-      <p:transition spd="slow" p14:dur="2000" advTm="37820"/>
+      <p:transition spd="slow" p14:dur="2000" advTm="38080"/>
     </mc:Choice>
     <mc:Fallback>
-      <p:transition spd="slow" advTm="37820"/>
+      <p:transition spd="slow" advTm="38080"/>
     </mc:Fallback>
   </mc:AlternateContent>
   <p:timing>
@@ -2056,7 +2056,7 @@
                                   <p:childTnLst>
                                     <p:cmd type="call" cmd="playFrom(0.0)">
                                       <p:cBhvr>
-                                        <p:cTn id="6" dur="36816" fill="hold"/>
+                                        <p:cTn id="6" dur="37080" fill="hold"/>
                                         <p:tgtEl>
                                           <p:spTgt spid="6"/>
                                         </p:tgtEl>
@@ -2846,7 +2846,7 @@
                   <a:srgbClr val="0F766E"/>
                 </a:solidFill>
               </a:rPr>
-              <a:t>A standardized, HR-driven identity answers all three by rule.</a:t>
+              <a:t>A standardized, HR-driven identity supplies the trusted facts to answer all three consistently.</a:t>
             </a:r>
             <a:endParaRPr lang="en-US" sz="1450" dirty="0"/>
           </a:p>
@@ -3030,7 +3030,7 @@
             <a:hlinkClick r:id="" action="ppaction://media"/>
             <a:extLst>
               <a:ext uri="{FF2B5EF4-FFF2-40B4-BE49-F238E27FC236}">
-                <a16:creationId xmlns:a16="http://schemas.microsoft.com/office/drawing/2014/main" id="{6C94A997-2A15-E779-B8E3-3D0F9C96036B}"/>
+                <a16:creationId xmlns:a16="http://schemas.microsoft.com/office/drawing/2014/main" id="{0734BB8E-9371-374B-899C-A82CA7324F31}"/>
               </a:ext>
             </a:extLst>
           </p:cNvPr>
@@ -3069,10 +3069,10 @@
   </p:clrMapOvr>
   <mc:AlternateContent xmlns:mc="http://schemas.openxmlformats.org/markup-compatibility/2006">
     <mc:Choice xmlns:p14="http://schemas.microsoft.com/office/powerpoint/2010/main" Requires="p14">
-      <p:transition spd="slow" p14:dur="2000" advTm="100650"/>
+      <p:transition spd="slow" p14:dur="2000" advTm="101250"/>
     </mc:Choice>
     <mc:Fallback>
-      <p:transition spd="slow" advTm="100650"/>
+      <p:transition spd="slow" advTm="101250"/>
     </mc:Fallback>
   </mc:AlternateContent>
   <p:timing>
@@ -3106,7 +3106,7 @@
                                   <p:childTnLst>
                                     <p:cmd type="call" cmd="playFrom(0.0)">
                                       <p:cBhvr>
-                                        <p:cTn id="6" dur="99648" fill="hold"/>
+                                        <p:cTn id="6" dur="100248" fill="hold"/>
                                         <p:tgtEl>
                                           <p:spTgt spid="26"/>
                                         </p:tgtEl>
@@ -4225,7 +4225,7 @@
                           <a:ea typeface="Calibri" pitchFamily="34" charset="-122"/>
                           <a:cs typeface="Calibri" pitchFamily="34" charset="-120"/>
                         </a:rPr>
-                        <a:t>Scripts and exports, no HR authority</a:t>
+                        <a:t>Scripts and exports, without a governed authority model</a:t>
                       </a:r>
                       <a:endParaRPr lang="en-US" sz="1400" dirty="0">
                         <a:latin typeface="Calibri" charset="0"/>
@@ -4565,7 +4565,7 @@
                           <a:ea typeface="Calibri" pitchFamily="34" charset="-122"/>
                           <a:cs typeface="Calibri" pitchFamily="34" charset="-120"/>
                         </a:rPr>
-                        <a:t>Automates a source that isn’t authoritative</a:t>
+                        <a:t>Automation without governed authority</a:t>
                       </a:r>
                       <a:endParaRPr lang="en-US" sz="1400" dirty="0">
                         <a:latin typeface="Calibri" charset="0"/>
@@ -5676,7 +5676,7 @@
             <a:hlinkClick r:id="" action="ppaction://media"/>
             <a:extLst>
               <a:ext uri="{FF2B5EF4-FFF2-40B4-BE49-F238E27FC236}">
-                <a16:creationId xmlns:a16="http://schemas.microsoft.com/office/drawing/2014/main" id="{CADC356F-180C-4FCD-B1DD-AFF38AC77706}"/>
+                <a16:creationId xmlns:a16="http://schemas.microsoft.com/office/drawing/2014/main" id="{959FEB47-E753-0E87-EDE8-462394FD9E54}"/>
               </a:ext>
             </a:extLst>
           </p:cNvPr>
@@ -5715,10 +5715,10 @@
   </p:clrMapOvr>
   <mc:AlternateContent xmlns:mc="http://schemas.openxmlformats.org/markup-compatibility/2006">
     <mc:Choice xmlns:p14="http://schemas.microsoft.com/office/powerpoint/2010/main" Requires="p14">
-      <p:transition spd="slow" p14:dur="2000" advTm="88360"/>
+      <p:transition spd="slow" p14:dur="2000" advTm="91530"/>
     </mc:Choice>
     <mc:Fallback>
-      <p:transition spd="slow" advTm="88360"/>
+      <p:transition spd="slow" advTm="91530"/>
     </mc:Fallback>
   </mc:AlternateContent>
   <p:timing>
@@ -5752,7 +5752,7 @@
                                   <p:childTnLst>
                                     <p:cmd type="call" cmd="playFrom(0.0)">
                                       <p:cBhvr>
-                                        <p:cTn id="6" dur="87360" fill="hold"/>
+                                        <p:cTn id="6" dur="90528" fill="hold"/>
                                         <p:tgtEl>
                                           <p:spTgt spid="10"/>
                                         </p:tgtEl>
@@ -6633,7 +6633,7 @@
                   <a:schemeClr val="tx2"/>
                 </a:solidFill>
               </a:rPr>
-              <a:t>every agency is moving to the same HR platform on the same standards — one identity standard can serve them all, and the services they share.</a:t>
+              <a:t>participating civilian agencies are moving toward a common Core HCM platform and federal personnel standards; a reusable identity model could reduce reinvention across agencies and shared services.</a:t>
             </a:r>
             <a:endParaRPr lang="en-US" sz="1400" dirty="0"/>
           </a:p>
@@ -6690,7 +6690,7 @@
             <a:hlinkClick r:id="" action="ppaction://media"/>
             <a:extLst>
               <a:ext uri="{FF2B5EF4-FFF2-40B4-BE49-F238E27FC236}">
-                <a16:creationId xmlns:a16="http://schemas.microsoft.com/office/drawing/2014/main" id="{7E567087-54C3-C842-BB13-76657E54098D}"/>
+                <a16:creationId xmlns:a16="http://schemas.microsoft.com/office/drawing/2014/main" id="{2EA76901-B22A-21AE-381C-0229F389A14A}"/>
               </a:ext>
             </a:extLst>
           </p:cNvPr>
@@ -6729,10 +6729,10 @@
   </p:clrMapOvr>
   <mc:AlternateContent xmlns:mc="http://schemas.openxmlformats.org/markup-compatibility/2006">
     <mc:Choice xmlns:p14="http://schemas.microsoft.com/office/powerpoint/2010/main" Requires="p14">
-      <p:transition spd="slow" p14:dur="2000" advTm="119820"/>
+      <p:transition spd="slow" p14:dur="2000" advTm="118140"/>
     </mc:Choice>
     <mc:Fallback>
-      <p:transition spd="slow" advTm="119820"/>
+      <p:transition spd="slow" advTm="118140"/>
     </mc:Fallback>
   </mc:AlternateContent>
   <p:timing>
@@ -6766,7 +6766,7 @@
                                   <p:childTnLst>
                                     <p:cmd type="call" cmd="playFrom(0.0)">
                                       <p:cBhvr>
-                                        <p:cTn id="6" dur="118824" fill="hold"/>
+                                        <p:cTn id="6" dur="117144" fill="hold"/>
                                         <p:tgtEl>
                                           <p:spTgt spid="26"/>
                                         </p:tgtEl>
@@ -7593,7 +7593,7 @@
                   <a:schemeClr val="tx2"/>
                 </a:solidFill>
               </a:rPr>
-              <a:t>The source for non-employees</a:t>
+              <a:t>Inputs to the non-employee authority decision</a:t>
             </a:r>
             <a:endParaRPr lang="en-US" sz="1450" dirty="0"/>
           </a:p>
@@ -7811,7 +7811,7 @@
             <a:hlinkClick r:id="" action="ppaction://media"/>
             <a:extLst>
               <a:ext uri="{FF2B5EF4-FFF2-40B4-BE49-F238E27FC236}">
-                <a16:creationId xmlns:a16="http://schemas.microsoft.com/office/drawing/2014/main" id="{150AE182-4067-056C-429C-8DD13248CBEF}"/>
+                <a16:creationId xmlns:a16="http://schemas.microsoft.com/office/drawing/2014/main" id="{B41B9E8D-B208-2BB3-CED6-A571BFC2E681}"/>
               </a:ext>
             </a:extLst>
           </p:cNvPr>
@@ -7850,10 +7850,10 @@
   </p:clrMapOvr>
   <mc:AlternateContent xmlns:mc="http://schemas.openxmlformats.org/markup-compatibility/2006">
     <mc:Choice xmlns:p14="http://schemas.microsoft.com/office/powerpoint/2010/main" Requires="p14">
-      <p:transition spd="slow" p14:dur="2000" advTm="91100"/>
+      <p:transition spd="slow" p14:dur="2000" advTm="99330"/>
     </mc:Choice>
     <mc:Fallback>
-      <p:transition spd="slow" advTm="91100"/>
+      <p:transition spd="slow" advTm="99330"/>
     </mc:Fallback>
   </mc:AlternateContent>
   <p:timing>
@@ -7887,7 +7887,7 @@
                                   <p:childTnLst>
                                     <p:cmd type="call" cmd="playFrom(0.0)">
                                       <p:cBhvr>
-                                        <p:cTn id="6" dur="90096" fill="hold"/>
+                                        <p:cTn id="6" dur="98328" fill="hold"/>
                                         <p:tgtEl>
                                           <p:spTgt spid="24"/>
                                         </p:tgtEl>
@@ -9890,7 +9890,7 @@
             <a:hlinkClick r:id="" action="ppaction://media"/>
             <a:extLst>
               <a:ext uri="{FF2B5EF4-FFF2-40B4-BE49-F238E27FC236}">
-                <a16:creationId xmlns:a16="http://schemas.microsoft.com/office/drawing/2014/main" id="{2B21F7E6-2198-61CE-EDDC-E41FC6CBE800}"/>
+                <a16:creationId xmlns:a16="http://schemas.microsoft.com/office/drawing/2014/main" id="{A34A54EA-8A17-4039-1AEB-6F9A88D8B367}"/>
               </a:ext>
             </a:extLst>
           </p:cNvPr>
@@ -10321,7 +10321,7 @@
                   <a:schemeClr val="tx2"/>
                 </a:solidFill>
               </a:rPr>
-              <a:t>Personnel actions drive joiner, mover, leaver by code</a:t>
+              <a:t>Validated personnel-action mappings initiate lifecycle events</a:t>
             </a:r>
             <a:endParaRPr lang="en-US" sz="1400" dirty="0"/>
           </a:p>
@@ -10501,7 +10501,7 @@
                   <a:schemeClr val="tx2"/>
                 </a:solidFill>
               </a:rPr>
-              <a:t>Leavers: block access first, within hours, then clean up</a:t>
+              <a:t>Leavers: block first, within the approved threshold; then reconcile downstream</a:t>
             </a:r>
             <a:endParaRPr lang="en-US" sz="1400" dirty="0"/>
           </a:p>
@@ -10519,7 +10519,7 @@
                   <a:schemeClr val="tx2"/>
                 </a:solidFill>
               </a:rPr>
-              <a:t>Least privilege; no stored secrets</a:t>
+              <a:t>Least privilege; managed identities, secretless where supported</a:t>
             </a:r>
             <a:endParaRPr lang="en-US" sz="1400" dirty="0"/>
           </a:p>
@@ -11198,7 +11198,7 @@
             <a:hlinkClick r:id="" action="ppaction://media"/>
             <a:extLst>
               <a:ext uri="{FF2B5EF4-FFF2-40B4-BE49-F238E27FC236}">
-                <a16:creationId xmlns:a16="http://schemas.microsoft.com/office/drawing/2014/main" id="{147E0256-1466-2CD8-684C-2952E2822917}"/>
+                <a16:creationId xmlns:a16="http://schemas.microsoft.com/office/drawing/2014/main" id="{52CDD031-C1C2-995A-1EB0-3647A6D96B95}"/>
               </a:ext>
             </a:extLst>
           </p:cNvPr>
@@ -11237,10 +11237,10 @@
   </p:clrMapOvr>
   <mc:AlternateContent xmlns:mc="http://schemas.openxmlformats.org/markup-compatibility/2006">
     <mc:Choice xmlns:p14="http://schemas.microsoft.com/office/powerpoint/2010/main" Requires="p14">
-      <p:transition spd="slow" p14:dur="2000" advTm="87470"/>
+      <p:transition spd="slow" p14:dur="2000" advTm="82100"/>
     </mc:Choice>
     <mc:Fallback>
-      <p:transition spd="slow" advTm="87470"/>
+      <p:transition spd="slow" advTm="82100"/>
     </mc:Fallback>
   </mc:AlternateContent>
   <p:timing>
@@ -11274,7 +11274,7 @@
                                   <p:childTnLst>
                                     <p:cmd type="call" cmd="playFrom(0.0)">
                                       <p:cBhvr>
-                                        <p:cTn id="6" dur="86472" fill="hold"/>
+                                        <p:cTn id="6" dur="81096" fill="hold"/>
                                         <p:tgtEl>
                                           <p:spTgt spid="33"/>
                                         </p:tgtEl>
@@ -12426,15 +12426,7 @@
                   <a:srgbClr val="1F2A44"/>
                 </a:solidFill>
               </a:rPr>
-              <a:t>One decision: </a:t>
-            </a:r>
-            <a:r>
-              <a:rPr lang="en-US" sz="1450" dirty="0">
-                <a:solidFill>
-                  <a:schemeClr val="tx2"/>
-                </a:solidFill>
-              </a:rPr>
-              <a:t>start HR-driven identity now, as a design requirement of the HR 2.0 onboarding and the Entra ID migration.</a:t>
+              <a:t>Three decisions:</a:t>
             </a:r>
             <a:endParaRPr lang="en-US" sz="1450" dirty="0"/>
           </a:p>
@@ -12447,12 +12439,12 @@
               <a:buChar char="•"/>
             </a:pPr>
             <a:r>
-              <a:rPr lang="en-US" sz="1400" dirty="0">
+              <a:rPr lang="en-US" sz="1450" dirty="0">
                 <a:solidFill>
                   <a:schemeClr val="tx2"/>
                 </a:solidFill>
               </a:rPr>
-              <a:t>A sponsor across HR, the CIO’s identity team and privacy</a:t>
+              <a:t>Name identity as an HR 2.0 data consumer</a:t>
             </a:r>
             <a:endParaRPr lang="en-US" sz="1450" dirty="0"/>
           </a:p>
@@ -12465,12 +12457,12 @@
               <a:buChar char="•"/>
             </a:pPr>
             <a:r>
-              <a:rPr lang="en-US" sz="1400" dirty="0">
+              <a:rPr lang="en-US" sz="1450" dirty="0">
                 <a:solidFill>
                   <a:schemeClr val="tx2"/>
                 </a:solidFill>
               </a:rPr>
-              <a:t>Identity named as a consumer in the HR 2.0 interconnection plan</a:t>
+              <a:t>Authorize the cross-functional data-governance work: a sponsor across HR, the CIO’s identity team and privacy; data owners; a small pre-onboarding team</a:t>
             </a:r>
             <a:endParaRPr lang="en-US" sz="1450" dirty="0"/>
           </a:p>
@@ -12483,48 +12475,29 @@
               <a:buChar char="•"/>
             </a:pPr>
             <a:r>
-              <a:rPr lang="en-US" sz="1400" dirty="0">
+              <a:rPr lang="en-US" sz="1450" dirty="0">
                 <a:solidFill>
                   <a:schemeClr val="tx2"/>
                 </a:solidFill>
               </a:rPr>
-              <a:t>Data owners designated; the enterprise person key confirmed</a:t>
+              <a:t>Require assumptions, including the enterprise person key, to be validated by accountable owners before implementation</a:t>
             </a:r>
             <a:endParaRPr lang="en-US" sz="1450" dirty="0"/>
           </a:p>
           <a:p>
-            <a:pPr marL="342900" indent="-342900">
+            <a:pPr marL="0" indent="0">
               <a:spcAft>
                 <a:spcPts val="500"/>
               </a:spcAft>
-              <a:buSzPct val="100000"/>
-              <a:buChar char="•"/>
+              <a:buNone/>
             </a:pPr>
             <a:r>
-              <a:rPr lang="en-US" sz="1400" dirty="0">
-                <a:solidFill>
-                  <a:schemeClr val="tx2"/>
-                </a:solidFill>
-              </a:rPr>
-              <a:t>A small team for the pre-onboarding data work</a:t>
-            </a:r>
-            <a:endParaRPr lang="en-US" sz="1450" dirty="0"/>
-          </a:p>
-          <a:p>
-            <a:pPr marL="342900" indent="-342900">
-              <a:spcAft>
-                <a:spcPts val="500"/>
-              </a:spcAft>
-              <a:buSzPct val="100000"/>
-              <a:buChar char="•"/>
-            </a:pPr>
-            <a:r>
-              <a:rPr lang="en-US" sz="1400" dirty="0">
-                <a:solidFill>
-                  <a:schemeClr val="tx2"/>
-                </a:solidFill>
-              </a:rPr>
-              <a:t>Validate planning assumptions and designate authoritative owners before implementation</a:t>
+              <a:rPr lang="en-US" sz="1350" i="1" dirty="0">
+                <a:solidFill>
+                  <a:srgbClr val="64748B"/>
+                </a:solidFill>
+              </a:rPr>
+              <a:t>Modernize the platforms and the lifecycle together, rather than carrying the ticket process forward.</a:t>
             </a:r>
             <a:endParaRPr lang="en-US" sz="1450" dirty="0"/>
           </a:p>
@@ -12581,7 +12554,7 @@
             <a:hlinkClick r:id="" action="ppaction://media"/>
             <a:extLst>
               <a:ext uri="{FF2B5EF4-FFF2-40B4-BE49-F238E27FC236}">
-                <a16:creationId xmlns:a16="http://schemas.microsoft.com/office/drawing/2014/main" id="{EF592F0E-9819-5B98-96B8-6FEA7F0A4CAD}"/>
+                <a16:creationId xmlns:a16="http://schemas.microsoft.com/office/drawing/2014/main" id="{5963AB1E-2948-069A-860F-1C13BD744FFC}"/>
               </a:ext>
             </a:extLst>
           </p:cNvPr>
@@ -12620,10 +12593,10 @@
   </p:clrMapOvr>
   <mc:AlternateContent xmlns:mc="http://schemas.openxmlformats.org/markup-compatibility/2006">
     <mc:Choice xmlns:p14="http://schemas.microsoft.com/office/powerpoint/2010/main" Requires="p14">
-      <p:transition spd="slow" p14:dur="2000" advTm="85650"/>
+      <p:transition spd="slow" p14:dur="2000" advTm="73500"/>
     </mc:Choice>
     <mc:Fallback>
-      <p:transition spd="slow" advTm="85650"/>
+      <p:transition spd="slow" advTm="73500"/>
     </mc:Fallback>
   </mc:AlternateContent>
   <p:timing>
@@ -12657,7 +12630,7 @@
                                   <p:childTnLst>
                                     <p:cmd type="call" cmd="playFrom(0.0)">
                                       <p:cBhvr>
-                                        <p:cTn id="6" dur="84648" fill="hold"/>
+                                        <p:cTn id="6" dur="72504" fill="hold"/>
                                         <p:tgtEl>
                                           <p:spTgt spid="36"/>
                                         </p:tgtEl>
@@ -14100,7 +14073,7 @@
             <a:hlinkClick r:id="" action="ppaction://media"/>
             <a:extLst>
               <a:ext uri="{FF2B5EF4-FFF2-40B4-BE49-F238E27FC236}">
-                <a16:creationId xmlns:a16="http://schemas.microsoft.com/office/drawing/2014/main" id="{AF5E5F6D-723D-44F4-226A-FBBE48B19772}"/>
+                <a16:creationId xmlns:a16="http://schemas.microsoft.com/office/drawing/2014/main" id="{E50C65DA-B6E3-4716-53A5-7CE0D3041FFC}"/>
               </a:ext>
             </a:extLst>
           </p:cNvPr>

--- a/presentations/hr-driven-identity-interview/HR_Driven_Identity_Exec_AnyAgency_Narrated.pptx
+++ b/presentations/hr-driven-identity-interview/HR_Driven_Identity_Exec_AnyAgency_Narrated.pptx
@@ -1954,7 +1954,7 @@
                   <a:srgbClr val="1F2A44"/>
                 </a:solidFill>
               </a:rPr>
-              <a:t>Mike Stratton</a:t>
+              <a:t>Michael F. Stratton</a:t>
             </a:r>
             <a:endParaRPr lang="en-US" sz="1600" dirty="0"/>
           </a:p>
@@ -1976,7 +1976,7 @@
       </p:sp>
       <p:pic>
         <p:nvPicPr>
-          <p:cNvPr id="6" name="Narration">
+          <p:cNvPr id="6" name="Narration" descr="Narration for this slide; captions available" title="Narration">
             <a:hlinkClick r:id="" action="ppaction://media"/>
             <a:extLst>
               <a:ext uri="{FF2B5EF4-FFF2-40B4-BE49-F238E27FC236}">
@@ -1991,7 +1991,17 @@
             <a:audioFile r:link="rId2"/>
             <p:extLst>
               <p:ext uri="{DAA4B4D4-6D71-4841-9C94-3DE7FCFB9230}">
-                <p14:media xmlns:p14="http://schemas.microsoft.com/office/powerpoint/2010/main" r:embed="rId1"/>
+                <p14:media xmlns:p14="http://schemas.microsoft.com/office/powerpoint/2010/main" r:embed="rId1">
+                  <p14:extLst>
+                    <p:ext uri="{3AFAAA56-56D3-431D-BCD4-E75A35582382}">
+                      <p173:tracksInfo xmlns:p173="http://schemas.microsoft.com/office/powerpoint/2017/3/main" displayLoc="slide">
+                        <p173:trackLst>
+                          <p173:track id="{2A52DC5A-187F-47FD-87C4-3FDC683DF6C2}" label="English (captions)" lang="en-US" r:embed="rId6"/>
+                        </p173:trackLst>
+                      </p173:tracksInfo>
+                    </p:ext>
+                  </p14:extLst>
+                </p14:media>
               </p:ext>
             </p:extLst>
           </p:nvPr>
@@ -2158,7 +2168,13 @@
       </p:sp>
       <p:sp>
         <p:nvSpPr>
-          <p:cNvPr id="3" name="Tag Why"/>
+          <p:cNvPr id="3" name="Tag Why" descr="">
+            <a:extLst>
+              <a:ext uri="{C183D7F6-B498-43B3-948B-1728B52AA6E4}">
+                <adec:decorative xmlns:adec="http://schemas.microsoft.com/office/drawing/2017/decorative" val="1"/>
+              </a:ext>
+            </a:extLst>
+          </p:cNvPr>
           <p:cNvSpPr/>
           <p:nvPr/>
         </p:nvSpPr>
@@ -2257,7 +2273,13 @@
       </p:sp>
       <p:sp>
         <p:nvSpPr>
-          <p:cNvPr id="6" name="Icon FaUserXmark"/>
+          <p:cNvPr id="6" name="Icon FaUserXmark" descr="">
+            <a:extLst>
+              <a:ext uri="{C183D7F6-B498-43B3-948B-1728B52AA6E4}">
+                <adec:decorative xmlns:adec="http://schemas.microsoft.com/office/drawing/2017/decorative" val="1"/>
+              </a:ext>
+            </a:extLst>
+          </p:cNvPr>
           <p:cNvSpPr/>
           <p:nvPr/>
         </p:nvSpPr>
@@ -2282,7 +2304,13 @@
       </p:sp>
       <p:pic>
         <p:nvPicPr>
-          <p:cNvPr id="7" name="Image 0" descr="C:\Users\whale\git\uiao\inbox\SSA-Interview\build\icons\FaUserXmark.png"/>
+          <p:cNvPr id="7" name="Image 0" descr="">
+            <a:extLst>
+              <a:ext uri="{C183D7F6-B498-43B3-948B-1728B52AA6E4}">
+                <adec:decorative xmlns:adec="http://schemas.microsoft.com/office/drawing/2017/decorative" val="1"/>
+              </a:ext>
+            </a:extLst>
+          </p:cNvPr>
           <p:cNvPicPr>
             <a:picLocks noChangeAspect="1"/>
           </p:cNvPicPr>
@@ -2362,7 +2390,13 @@
       </p:sp>
       <p:sp>
         <p:nvSpPr>
-          <p:cNvPr id="9" name="Icon FaAddressBook"/>
+          <p:cNvPr id="9" name="Icon FaAddressBook" descr="">
+            <a:extLst>
+              <a:ext uri="{C183D7F6-B498-43B3-948B-1728B52AA6E4}">
+                <adec:decorative xmlns:adec="http://schemas.microsoft.com/office/drawing/2017/decorative" val="1"/>
+              </a:ext>
+            </a:extLst>
+          </p:cNvPr>
           <p:cNvSpPr/>
           <p:nvPr/>
         </p:nvSpPr>
@@ -2387,7 +2421,13 @@
       </p:sp>
       <p:pic>
         <p:nvPicPr>
-          <p:cNvPr id="10" name="Image 1" descr="C:\Users\whale\git\uiao\inbox\SSA-Interview\build\icons\FaAddressBook.png"/>
+          <p:cNvPr id="10" name="Image 1" descr="">
+            <a:extLst>
+              <a:ext uri="{C183D7F6-B498-43B3-948B-1728B52AA6E4}">
+                <adec:decorative xmlns:adec="http://schemas.microsoft.com/office/drawing/2017/decorative" val="1"/>
+              </a:ext>
+            </a:extLst>
+          </p:cNvPr>
           <p:cNvPicPr>
             <a:picLocks noChangeAspect="1"/>
           </p:cNvPicPr>
@@ -2467,7 +2507,13 @@
       </p:sp>
       <p:sp>
         <p:nvSpPr>
-          <p:cNvPr id="12" name="Icon FaUserClock"/>
+          <p:cNvPr id="12" name="Icon FaUserClock" descr="">
+            <a:extLst>
+              <a:ext uri="{C183D7F6-B498-43B3-948B-1728B52AA6E4}">
+                <adec:decorative xmlns:adec="http://schemas.microsoft.com/office/drawing/2017/decorative" val="1"/>
+              </a:ext>
+            </a:extLst>
+          </p:cNvPr>
           <p:cNvSpPr/>
           <p:nvPr/>
         </p:nvSpPr>
@@ -2492,7 +2538,13 @@
       </p:sp>
       <p:pic>
         <p:nvPicPr>
-          <p:cNvPr id="13" name="Image 2" descr="C:\Users\whale\git\uiao\inbox\SSA-Interview\build\icons\FaUserClock.png"/>
+          <p:cNvPr id="13" name="Image 2" descr="">
+            <a:extLst>
+              <a:ext uri="{C183D7F6-B498-43B3-948B-1728B52AA6E4}">
+                <adec:decorative xmlns:adec="http://schemas.microsoft.com/office/drawing/2017/decorative" val="1"/>
+              </a:ext>
+            </a:extLst>
+          </p:cNvPr>
           <p:cNvPicPr>
             <a:picLocks noChangeAspect="1"/>
           </p:cNvPicPr>
@@ -2572,7 +2624,13 @@
       </p:sp>
       <p:sp>
         <p:nvSpPr>
-          <p:cNvPr id="15" name="Mission box"/>
+          <p:cNvPr id="15" name="Mission box" descr="">
+            <a:extLst>
+              <a:ext uri="{C183D7F6-B498-43B3-948B-1728B52AA6E4}">
+                <adec:decorative xmlns:adec="http://schemas.microsoft.com/office/drawing/2017/decorative" val="1"/>
+              </a:ext>
+            </a:extLst>
+          </p:cNvPr>
           <p:cNvSpPr/>
           <p:nvPr/>
         </p:nvSpPr>
@@ -2606,7 +2664,13 @@
       </p:sp>
       <p:sp>
         <p:nvSpPr>
-          <p:cNvPr id="16" name="Icon FaPeopleArrows"/>
+          <p:cNvPr id="16" name="Icon FaPeopleArrows" descr="">
+            <a:extLst>
+              <a:ext uri="{C183D7F6-B498-43B3-948B-1728B52AA6E4}">
+                <adec:decorative xmlns:adec="http://schemas.microsoft.com/office/drawing/2017/decorative" val="1"/>
+              </a:ext>
+            </a:extLst>
+          </p:cNvPr>
           <p:cNvSpPr/>
           <p:nvPr/>
         </p:nvSpPr>
@@ -2631,7 +2695,13 @@
       </p:sp>
       <p:pic>
         <p:nvPicPr>
-          <p:cNvPr id="17" name="Image 3" descr="C:\Users\whale\git\uiao\inbox\SSA-Interview\build\icons\FaPeopleArrows.png"/>
+          <p:cNvPr id="17" name="Image 3" descr="">
+            <a:extLst>
+              <a:ext uri="{C183D7F6-B498-43B3-948B-1728B52AA6E4}">
+                <adec:decorative xmlns:adec="http://schemas.microsoft.com/office/drawing/2017/decorative" val="1"/>
+              </a:ext>
+            </a:extLst>
+          </p:cNvPr>
           <p:cNvPicPr>
             <a:picLocks noChangeAspect="1"/>
           </p:cNvPicPr>
@@ -2854,7 +2924,13 @@
       </p:sp>
       <p:sp>
         <p:nvSpPr>
-          <p:cNvPr id="21" name="Do nothing"/>
+          <p:cNvPr id="21" name="Do nothing" descr="">
+            <a:extLst>
+              <a:ext uri="{C183D7F6-B498-43B3-948B-1728B52AA6E4}">
+                <adec:decorative xmlns:adec="http://schemas.microsoft.com/office/drawing/2017/decorative" val="1"/>
+              </a:ext>
+            </a:extLst>
+          </p:cNvPr>
           <p:cNvSpPr/>
           <p:nvPr/>
         </p:nvSpPr>
@@ -2888,7 +2964,13 @@
       </p:sp>
       <p:sp>
         <p:nvSpPr>
-          <p:cNvPr id="22" name="Icon FaTriangleExclamation"/>
+          <p:cNvPr id="22" name="Icon FaTriangleExclamation" descr="">
+            <a:extLst>
+              <a:ext uri="{C183D7F6-B498-43B3-948B-1728B52AA6E4}">
+                <adec:decorative xmlns:adec="http://schemas.microsoft.com/office/drawing/2017/decorative" val="1"/>
+              </a:ext>
+            </a:extLst>
+          </p:cNvPr>
           <p:cNvSpPr/>
           <p:nvPr/>
         </p:nvSpPr>
@@ -2913,7 +2995,13 @@
       </p:sp>
       <p:pic>
         <p:nvPicPr>
-          <p:cNvPr id="23" name="Image 4" descr="C:\Users\whale\git\uiao\inbox\SSA-Interview\build\icons\FaTriangleExclamation.png"/>
+          <p:cNvPr id="23" name="Image 4" descr="">
+            <a:extLst>
+              <a:ext uri="{C183D7F6-B498-43B3-948B-1728B52AA6E4}">
+                <adec:decorative xmlns:adec="http://schemas.microsoft.com/office/drawing/2017/decorative" val="1"/>
+              </a:ext>
+            </a:extLst>
+          </p:cNvPr>
           <p:cNvPicPr>
             <a:picLocks noChangeAspect="1"/>
           </p:cNvPicPr>
@@ -3026,7 +3114,7 @@
       </p:sp>
       <p:pic>
         <p:nvPicPr>
-          <p:cNvPr id="26" name="Narration">
+          <p:cNvPr id="26" name="Narration" descr="Narration for this slide; captions available" title="Narration">
             <a:hlinkClick r:id="" action="ppaction://media"/>
             <a:extLst>
               <a:ext uri="{FF2B5EF4-FFF2-40B4-BE49-F238E27FC236}">
@@ -3041,7 +3129,17 @@
             <a:audioFile r:link="rId2"/>
             <p:extLst>
               <p:ext uri="{DAA4B4D4-6D71-4841-9C94-3DE7FCFB9230}">
-                <p14:media xmlns:p14="http://schemas.microsoft.com/office/powerpoint/2010/main" r:embed="rId1"/>
+                <p14:media xmlns:p14="http://schemas.microsoft.com/office/powerpoint/2010/main" r:embed="rId1">
+                  <p14:extLst>
+                    <p:ext uri="{3AFAAA56-56D3-431D-BCD4-E75A35582382}">
+                      <p173:tracksInfo xmlns:p173="http://schemas.microsoft.com/office/powerpoint/2017/3/main" displayLoc="slide">
+                        <p173:trackLst>
+                          <p173:track id="{EC45F71B-8F88-420E-A54C-DA9434FE3FD8}" label="English (captions)" lang="en-US" r:embed="rId11"/>
+                        </p173:trackLst>
+                      </p173:tracksInfo>
+                    </p:ext>
+                  </p14:extLst>
+                </p14:media>
               </p:ext>
             </p:extLst>
           </p:nvPr>
@@ -3208,7 +3306,13 @@
       </p:sp>
       <p:sp>
         <p:nvSpPr>
-          <p:cNvPr id="3" name="Tag What"/>
+          <p:cNvPr id="3" name="Tag What" descr="">
+            <a:extLst>
+              <a:ext uri="{C183D7F6-B498-43B3-948B-1728B52AA6E4}">
+                <adec:decorative xmlns:adec="http://schemas.microsoft.com/office/drawing/2017/decorative" val="1"/>
+              </a:ext>
+            </a:extLst>
+          </p:cNvPr>
           <p:cNvSpPr/>
           <p:nvPr/>
         </p:nvSpPr>
@@ -3290,7 +3394,7 @@
         <a:graphic>
           <a:graphicData uri="http://schemas.openxmlformats.org/drawingml/2006/table">
             <a:tbl>
-              <a:tblPr/>
+              <a:tblPr firstRow="1" bandRow="1"/>
               <a:tblGrid>
                 <a:gridCol w="3429000">
                   <a:extLst>
@@ -5500,7 +5604,13 @@
       </p:graphicFrame>
       <p:sp>
         <p:nvSpPr>
-          <p:cNvPr id="6" name="Judgment"/>
+          <p:cNvPr id="6" name="Judgment" descr="">
+            <a:extLst>
+              <a:ext uri="{C183D7F6-B498-43B3-948B-1728B52AA6E4}">
+                <adec:decorative xmlns:adec="http://schemas.microsoft.com/office/drawing/2017/decorative" val="1"/>
+              </a:ext>
+            </a:extLst>
+          </p:cNvPr>
           <p:cNvSpPr/>
           <p:nvPr/>
         </p:nvSpPr>
@@ -5534,7 +5644,13 @@
       </p:sp>
       <p:sp>
         <p:nvSpPr>
-          <p:cNvPr id="7" name="Icon FaScaleBalanced"/>
+          <p:cNvPr id="7" name="Icon FaScaleBalanced" descr="">
+            <a:extLst>
+              <a:ext uri="{C183D7F6-B498-43B3-948B-1728B52AA6E4}">
+                <adec:decorative xmlns:adec="http://schemas.microsoft.com/office/drawing/2017/decorative" val="1"/>
+              </a:ext>
+            </a:extLst>
+          </p:cNvPr>
           <p:cNvSpPr/>
           <p:nvPr/>
         </p:nvSpPr>
@@ -5559,7 +5675,13 @@
       </p:sp>
       <p:pic>
         <p:nvPicPr>
-          <p:cNvPr id="8" name="Image 0" descr="C:\Users\whale\git\uiao\inbox\SSA-Interview\build\icons\FaScaleBalanced.png"/>
+          <p:cNvPr id="8" name="Image 0" descr="">
+            <a:extLst>
+              <a:ext uri="{C183D7F6-B498-43B3-948B-1728B52AA6E4}">
+                <adec:decorative xmlns:adec="http://schemas.microsoft.com/office/drawing/2017/decorative" val="1"/>
+              </a:ext>
+            </a:extLst>
+          </p:cNvPr>
           <p:cNvPicPr>
             <a:picLocks noChangeAspect="1"/>
           </p:cNvPicPr>
@@ -5672,7 +5794,7 @@
       </p:sp>
       <p:pic>
         <p:nvPicPr>
-          <p:cNvPr id="10" name="Narration">
+          <p:cNvPr id="10" name="Narration" descr="Narration for this slide; captions available" title="Narration">
             <a:hlinkClick r:id="" action="ppaction://media"/>
             <a:extLst>
               <a:ext uri="{FF2B5EF4-FFF2-40B4-BE49-F238E27FC236}">
@@ -5687,7 +5809,17 @@
             <a:audioFile r:link="rId2"/>
             <p:extLst>
               <p:ext uri="{DAA4B4D4-6D71-4841-9C94-3DE7FCFB9230}">
-                <p14:media xmlns:p14="http://schemas.microsoft.com/office/powerpoint/2010/main" r:embed="rId1"/>
+                <p14:media xmlns:p14="http://schemas.microsoft.com/office/powerpoint/2010/main" r:embed="rId1">
+                  <p14:extLst>
+                    <p:ext uri="{3AFAAA56-56D3-431D-BCD4-E75A35582382}">
+                      <p173:tracksInfo xmlns:p173="http://schemas.microsoft.com/office/powerpoint/2017/3/main" displayLoc="slide">
+                        <p173:trackLst>
+                          <p173:track id="{1536681F-0774-4353-A3B2-591DDAEE683B}" label="English (captions)" lang="en-US" r:embed="rId7"/>
+                        </p173:trackLst>
+                      </p173:tracksInfo>
+                    </p:ext>
+                  </p14:extLst>
+                </p14:media>
               </p:ext>
             </p:extLst>
           </p:nvPr>
@@ -5854,7 +5986,13 @@
       </p:sp>
       <p:sp>
         <p:nvSpPr>
-          <p:cNvPr id="3" name="Tag What"/>
+          <p:cNvPr id="3" name="Tag What" descr="">
+            <a:extLst>
+              <a:ext uri="{C183D7F6-B498-43B3-948B-1728B52AA6E4}">
+                <adec:decorative xmlns:adec="http://schemas.microsoft.com/office/drawing/2017/decorative" val="1"/>
+              </a:ext>
+            </a:extLst>
+          </p:cNvPr>
           <p:cNvSpPr/>
           <p:nvPr/>
         </p:nvSpPr>
@@ -5917,7 +6055,13 @@
       </p:sp>
       <p:sp>
         <p:nvSpPr>
-          <p:cNvPr id="5" name="Reason 1"/>
+          <p:cNvPr id="5" name="Reason 1" descr="">
+            <a:extLst>
+              <a:ext uri="{C183D7F6-B498-43B3-948B-1728B52AA6E4}">
+                <adec:decorative xmlns:adec="http://schemas.microsoft.com/office/drawing/2017/decorative" val="1"/>
+              </a:ext>
+            </a:extLst>
+          </p:cNvPr>
           <p:cNvSpPr/>
           <p:nvPr/>
         </p:nvSpPr>
@@ -5951,7 +6095,13 @@
       </p:sp>
       <p:sp>
         <p:nvSpPr>
-          <p:cNvPr id="6" name="Icon FaUsersGear"/>
+          <p:cNvPr id="6" name="Icon FaUsersGear" descr="">
+            <a:extLst>
+              <a:ext uri="{C183D7F6-B498-43B3-948B-1728B52AA6E4}">
+                <adec:decorative xmlns:adec="http://schemas.microsoft.com/office/drawing/2017/decorative" val="1"/>
+              </a:ext>
+            </a:extLst>
+          </p:cNvPr>
           <p:cNvSpPr/>
           <p:nvPr/>
         </p:nvSpPr>
@@ -5976,7 +6126,13 @@
       </p:sp>
       <p:pic>
         <p:nvPicPr>
-          <p:cNvPr id="7" name="Image 0" descr="C:\Users\whale\git\uiao\inbox\SSA-Interview\build\icons\FaUsersGear.png"/>
+          <p:cNvPr id="7" name="Image 0" descr="">
+            <a:extLst>
+              <a:ext uri="{C183D7F6-B498-43B3-948B-1728B52AA6E4}">
+                <adec:decorative xmlns:adec="http://schemas.microsoft.com/office/drawing/2017/decorative" val="1"/>
+              </a:ext>
+            </a:extLst>
+          </p:cNvPr>
           <p:cNvPicPr>
             <a:picLocks noChangeAspect="1"/>
           </p:cNvPicPr>
@@ -6059,7 +6215,13 @@
       </p:sp>
       <p:sp>
         <p:nvSpPr>
-          <p:cNvPr id="9" name="Reason 2"/>
+          <p:cNvPr id="9" name="Reason 2" descr="">
+            <a:extLst>
+              <a:ext uri="{C183D7F6-B498-43B3-948B-1728B52AA6E4}">
+                <adec:decorative xmlns:adec="http://schemas.microsoft.com/office/drawing/2017/decorative" val="1"/>
+              </a:ext>
+            </a:extLst>
+          </p:cNvPr>
           <p:cNvSpPr/>
           <p:nvPr/>
         </p:nvSpPr>
@@ -6093,7 +6255,13 @@
       </p:sp>
       <p:sp>
         <p:nvSpPr>
-          <p:cNvPr id="10" name="Icon FaChartLine"/>
+          <p:cNvPr id="10" name="Icon FaChartLine" descr="">
+            <a:extLst>
+              <a:ext uri="{C183D7F6-B498-43B3-948B-1728B52AA6E4}">
+                <adec:decorative xmlns:adec="http://schemas.microsoft.com/office/drawing/2017/decorative" val="1"/>
+              </a:ext>
+            </a:extLst>
+          </p:cNvPr>
           <p:cNvSpPr/>
           <p:nvPr/>
         </p:nvSpPr>
@@ -6118,7 +6286,13 @@
       </p:sp>
       <p:pic>
         <p:nvPicPr>
-          <p:cNvPr id="11" name="Image 1" descr="C:\Users\whale\git\uiao\inbox\SSA-Interview\build\icons\FaChartLine.png"/>
+          <p:cNvPr id="11" name="Image 1" descr="">
+            <a:extLst>
+              <a:ext uri="{C183D7F6-B498-43B3-948B-1728B52AA6E4}">
+                <adec:decorative xmlns:adec="http://schemas.microsoft.com/office/drawing/2017/decorative" val="1"/>
+              </a:ext>
+            </a:extLst>
+          </p:cNvPr>
           <p:cNvPicPr>
             <a:picLocks noChangeAspect="1"/>
           </p:cNvPicPr>
@@ -6201,7 +6375,13 @@
       </p:sp>
       <p:sp>
         <p:nvSpPr>
-          <p:cNvPr id="13" name="Reason 3"/>
+          <p:cNvPr id="13" name="Reason 3" descr="">
+            <a:extLst>
+              <a:ext uri="{C183D7F6-B498-43B3-948B-1728B52AA6E4}">
+                <adec:decorative xmlns:adec="http://schemas.microsoft.com/office/drawing/2017/decorative" val="1"/>
+              </a:ext>
+            </a:extLst>
+          </p:cNvPr>
           <p:cNvSpPr/>
           <p:nvPr/>
         </p:nvSpPr>
@@ -6235,7 +6415,13 @@
       </p:sp>
       <p:sp>
         <p:nvSpPr>
-          <p:cNvPr id="14" name="Icon FaShieldHalved"/>
+          <p:cNvPr id="14" name="Icon FaShieldHalved" descr="">
+            <a:extLst>
+              <a:ext uri="{C183D7F6-B498-43B3-948B-1728B52AA6E4}">
+                <adec:decorative xmlns:adec="http://schemas.microsoft.com/office/drawing/2017/decorative" val="1"/>
+              </a:ext>
+            </a:extLst>
+          </p:cNvPr>
           <p:cNvSpPr/>
           <p:nvPr/>
         </p:nvSpPr>
@@ -6260,7 +6446,13 @@
       </p:sp>
       <p:pic>
         <p:nvPicPr>
-          <p:cNvPr id="15" name="Image 2" descr="C:\Users\whale\git\uiao\inbox\SSA-Interview\build\icons\FaShieldHalved.png"/>
+          <p:cNvPr id="15" name="Image 2" descr="">
+            <a:extLst>
+              <a:ext uri="{C183D7F6-B498-43B3-948B-1728B52AA6E4}">
+                <adec:decorative xmlns:adec="http://schemas.microsoft.com/office/drawing/2017/decorative" val="1"/>
+              </a:ext>
+            </a:extLst>
+          </p:cNvPr>
           <p:cNvPicPr>
             <a:picLocks noChangeAspect="1"/>
           </p:cNvPicPr>
@@ -6343,7 +6535,13 @@
       </p:sp>
       <p:sp>
         <p:nvSpPr>
-          <p:cNvPr id="17" name="Reason 4"/>
+          <p:cNvPr id="17" name="Reason 4" descr="">
+            <a:extLst>
+              <a:ext uri="{C183D7F6-B498-43B3-948B-1728B52AA6E4}">
+                <adec:decorative xmlns:adec="http://schemas.microsoft.com/office/drawing/2017/decorative" val="1"/>
+              </a:ext>
+            </a:extLst>
+          </p:cNvPr>
           <p:cNvSpPr/>
           <p:nvPr/>
         </p:nvSpPr>
@@ -6377,7 +6575,13 @@
       </p:sp>
       <p:sp>
         <p:nvSpPr>
-          <p:cNvPr id="18" name="Icon FaArrowsRotate"/>
+          <p:cNvPr id="18" name="Icon FaArrowsRotate" descr="">
+            <a:extLst>
+              <a:ext uri="{C183D7F6-B498-43B3-948B-1728B52AA6E4}">
+                <adec:decorative xmlns:adec="http://schemas.microsoft.com/office/drawing/2017/decorative" val="1"/>
+              </a:ext>
+            </a:extLst>
+          </p:cNvPr>
           <p:cNvSpPr/>
           <p:nvPr/>
         </p:nvSpPr>
@@ -6402,7 +6606,13 @@
       </p:sp>
       <p:pic>
         <p:nvPicPr>
-          <p:cNvPr id="19" name="Image 3" descr="C:\Users\whale\git\uiao\inbox\SSA-Interview\build\icons\FaArrowsRotate.png"/>
+          <p:cNvPr id="19" name="Image 3" descr="">
+            <a:extLst>
+              <a:ext uri="{C183D7F6-B498-43B3-948B-1728B52AA6E4}">
+                <adec:decorative xmlns:adec="http://schemas.microsoft.com/office/drawing/2017/decorative" val="1"/>
+              </a:ext>
+            </a:extLst>
+          </p:cNvPr>
           <p:cNvPicPr>
             <a:picLocks noChangeAspect="1"/>
           </p:cNvPicPr>
@@ -6485,7 +6695,13 @@
       </p:sp>
       <p:sp>
         <p:nvSpPr>
-          <p:cNvPr id="21" name="Limits"/>
+          <p:cNvPr id="21" name="Limits" descr="">
+            <a:extLst>
+              <a:ext uri="{C183D7F6-B498-43B3-948B-1728B52AA6E4}">
+                <adec:decorative xmlns:adec="http://schemas.microsoft.com/office/drawing/2017/decorative" val="1"/>
+              </a:ext>
+            </a:extLst>
+          </p:cNvPr>
           <p:cNvSpPr/>
           <p:nvPr/>
         </p:nvSpPr>
@@ -6563,7 +6779,13 @@
       </p:sp>
       <p:sp>
         <p:nvSpPr>
-          <p:cNvPr id="23" name="Upside"/>
+          <p:cNvPr id="23" name="Upside" descr="">
+            <a:extLst>
+              <a:ext uri="{C183D7F6-B498-43B3-948B-1728B52AA6E4}">
+                <adec:decorative xmlns:adec="http://schemas.microsoft.com/office/drawing/2017/decorative" val="1"/>
+              </a:ext>
+            </a:extLst>
+          </p:cNvPr>
           <p:cNvSpPr/>
           <p:nvPr/>
         </p:nvSpPr>
@@ -6686,7 +6908,7 @@
       </p:sp>
       <p:pic>
         <p:nvPicPr>
-          <p:cNvPr id="26" name="Narration">
+          <p:cNvPr id="26" name="Narration" descr="Narration for this slide; captions available" title="Narration">
             <a:hlinkClick r:id="" action="ppaction://media"/>
             <a:extLst>
               <a:ext uri="{FF2B5EF4-FFF2-40B4-BE49-F238E27FC236}">
@@ -6701,7 +6923,17 @@
             <a:audioFile r:link="rId2"/>
             <p:extLst>
               <p:ext uri="{DAA4B4D4-6D71-4841-9C94-3DE7FCFB9230}">
-                <p14:media xmlns:p14="http://schemas.microsoft.com/office/powerpoint/2010/main" r:embed="rId1"/>
+                <p14:media xmlns:p14="http://schemas.microsoft.com/office/powerpoint/2010/main" r:embed="rId1">
+                  <p14:extLst>
+                    <p:ext uri="{3AFAAA56-56D3-431D-BCD4-E75A35582382}">
+                      <p173:tracksInfo xmlns:p173="http://schemas.microsoft.com/office/powerpoint/2017/3/main" displayLoc="slide">
+                        <p173:trackLst>
+                          <p173:track id="{183D3B91-08CB-4F28-BBBC-54B8294ADF57}" label="English (captions)" lang="en-US" r:embed="rId10"/>
+                        </p173:trackLst>
+                      </p173:tracksInfo>
+                    </p:ext>
+                  </p14:extLst>
+                </p14:media>
               </p:ext>
             </p:extLst>
           </p:nvPr>
@@ -6868,7 +7100,13 @@
       </p:sp>
       <p:sp>
         <p:nvSpPr>
-          <p:cNvPr id="3" name="Tag Who"/>
+          <p:cNvPr id="3" name="Tag Who" descr="">
+            <a:extLst>
+              <a:ext uri="{C183D7F6-B498-43B3-948B-1728B52AA6E4}">
+                <adec:decorative xmlns:adec="http://schemas.microsoft.com/office/drawing/2017/decorative" val="1"/>
+              </a:ext>
+            </a:extLst>
+          </p:cNvPr>
           <p:cNvSpPr/>
           <p:nvPr/>
         </p:nvSpPr>
@@ -6931,7 +7169,13 @@
       </p:sp>
       <p:sp>
         <p:nvSpPr>
-          <p:cNvPr id="5" name="Who col 1"/>
+          <p:cNvPr id="5" name="Who col 1" descr="">
+            <a:extLst>
+              <a:ext uri="{C183D7F6-B498-43B3-948B-1728B52AA6E4}">
+                <adec:decorative xmlns:adec="http://schemas.microsoft.com/office/drawing/2017/decorative" val="1"/>
+              </a:ext>
+            </a:extLst>
+          </p:cNvPr>
           <p:cNvSpPr/>
           <p:nvPr/>
         </p:nvSpPr>
@@ -6965,7 +7209,13 @@
       </p:sp>
       <p:sp>
         <p:nvSpPr>
-          <p:cNvPr id="6" name="Icon FaBuildingColumns"/>
+          <p:cNvPr id="6" name="Icon FaBuildingColumns" descr="">
+            <a:extLst>
+              <a:ext uri="{C183D7F6-B498-43B3-948B-1728B52AA6E4}">
+                <adec:decorative xmlns:adec="http://schemas.microsoft.com/office/drawing/2017/decorative" val="1"/>
+              </a:ext>
+            </a:extLst>
+          </p:cNvPr>
           <p:cNvSpPr/>
           <p:nvPr/>
         </p:nvSpPr>
@@ -6990,7 +7240,13 @@
       </p:sp>
       <p:pic>
         <p:nvPicPr>
-          <p:cNvPr id="7" name="Image 0" descr="C:\Users\whale\git\uiao\inbox\SSA-Interview\build\icons\FaBuildingColumns.png"/>
+          <p:cNvPr id="7" name="Image 0" descr="">
+            <a:extLst>
+              <a:ext uri="{C183D7F6-B498-43B3-948B-1728B52AA6E4}">
+                <adec:decorative xmlns:adec="http://schemas.microsoft.com/office/drawing/2017/decorative" val="1"/>
+              </a:ext>
+            </a:extLst>
+          </p:cNvPr>
           <p:cNvPicPr>
             <a:picLocks noChangeAspect="1"/>
           </p:cNvPicPr>
@@ -7143,7 +7399,13 @@
       </p:sp>
       <p:sp>
         <p:nvSpPr>
-          <p:cNvPr id="10" name="Who col 2"/>
+          <p:cNvPr id="10" name="Who col 2" descr="">
+            <a:extLst>
+              <a:ext uri="{C183D7F6-B498-43B3-948B-1728B52AA6E4}">
+                <adec:decorative xmlns:adec="http://schemas.microsoft.com/office/drawing/2017/decorative" val="1"/>
+              </a:ext>
+            </a:extLst>
+          </p:cNvPr>
           <p:cNvSpPr/>
           <p:nvPr/>
         </p:nvSpPr>
@@ -7177,7 +7439,13 @@
       </p:sp>
       <p:sp>
         <p:nvSpPr>
-          <p:cNvPr id="11" name="Icon FaUsersGear"/>
+          <p:cNvPr id="11" name="Icon FaUsersGear" descr="">
+            <a:extLst>
+              <a:ext uri="{C183D7F6-B498-43B3-948B-1728B52AA6E4}">
+                <adec:decorative xmlns:adec="http://schemas.microsoft.com/office/drawing/2017/decorative" val="1"/>
+              </a:ext>
+            </a:extLst>
+          </p:cNvPr>
           <p:cNvSpPr/>
           <p:nvPr/>
         </p:nvSpPr>
@@ -7202,7 +7470,13 @@
       </p:sp>
       <p:pic>
         <p:nvPicPr>
-          <p:cNvPr id="12" name="Image 1" descr="C:\Users\whale\git\uiao\inbox\SSA-Interview\build\icons\FaUsersGear.png"/>
+          <p:cNvPr id="12" name="Image 1" descr="">
+            <a:extLst>
+              <a:ext uri="{C183D7F6-B498-43B3-948B-1728B52AA6E4}">
+                <adec:decorative xmlns:adec="http://schemas.microsoft.com/office/drawing/2017/decorative" val="1"/>
+              </a:ext>
+            </a:extLst>
+          </p:cNvPr>
           <p:cNvPicPr>
             <a:picLocks noChangeAspect="1"/>
           </p:cNvPicPr>
@@ -7389,7 +7663,13 @@
       </p:sp>
       <p:sp>
         <p:nvSpPr>
-          <p:cNvPr id="15" name="Who col 3"/>
+          <p:cNvPr id="15" name="Who col 3" descr="">
+            <a:extLst>
+              <a:ext uri="{C183D7F6-B498-43B3-948B-1728B52AA6E4}">
+                <adec:decorative xmlns:adec="http://schemas.microsoft.com/office/drawing/2017/decorative" val="1"/>
+              </a:ext>
+            </a:extLst>
+          </p:cNvPr>
           <p:cNvSpPr/>
           <p:nvPr/>
         </p:nvSpPr>
@@ -7423,7 +7703,13 @@
       </p:sp>
       <p:sp>
         <p:nvSpPr>
-          <p:cNvPr id="16" name="Icon FaShieldHalved"/>
+          <p:cNvPr id="16" name="Icon FaShieldHalved" descr="">
+            <a:extLst>
+              <a:ext uri="{C183D7F6-B498-43B3-948B-1728B52AA6E4}">
+                <adec:decorative xmlns:adec="http://schemas.microsoft.com/office/drawing/2017/decorative" val="1"/>
+              </a:ext>
+            </a:extLst>
+          </p:cNvPr>
           <p:cNvSpPr/>
           <p:nvPr/>
         </p:nvSpPr>
@@ -7448,7 +7734,13 @@
       </p:sp>
       <p:pic>
         <p:nvPicPr>
-          <p:cNvPr id="17" name="Image 2" descr="C:\Users\whale\git\uiao\inbox\SSA-Interview\build\icons\FaShieldHalved.png"/>
+          <p:cNvPr id="17" name="Image 2" descr="">
+            <a:extLst>
+              <a:ext uri="{C183D7F6-B498-43B3-948B-1728B52AA6E4}">
+                <adec:decorative xmlns:adec="http://schemas.microsoft.com/office/drawing/2017/decorative" val="1"/>
+              </a:ext>
+            </a:extLst>
+          </p:cNvPr>
           <p:cNvPicPr>
             <a:picLocks noChangeAspect="1"/>
           </p:cNvPicPr>
@@ -7635,7 +7927,13 @@
       </p:sp>
       <p:sp>
         <p:nvSpPr>
-          <p:cNvPr id="20" name="My role"/>
+          <p:cNvPr id="20" name="My role" descr="">
+            <a:extLst>
+              <a:ext uri="{C183D7F6-B498-43B3-948B-1728B52AA6E4}">
+                <adec:decorative xmlns:adec="http://schemas.microsoft.com/office/drawing/2017/decorative" val="1"/>
+              </a:ext>
+            </a:extLst>
+          </p:cNvPr>
           <p:cNvSpPr/>
           <p:nvPr/>
         </p:nvSpPr>
@@ -7669,7 +7967,13 @@
       </p:sp>
       <p:sp>
         <p:nvSpPr>
-          <p:cNvPr id="21" name="Icon FaSitemap"/>
+          <p:cNvPr id="21" name="Icon FaSitemap" descr="">
+            <a:extLst>
+              <a:ext uri="{C183D7F6-B498-43B3-948B-1728B52AA6E4}">
+                <adec:decorative xmlns:adec="http://schemas.microsoft.com/office/drawing/2017/decorative" val="1"/>
+              </a:ext>
+            </a:extLst>
+          </p:cNvPr>
           <p:cNvSpPr/>
           <p:nvPr/>
         </p:nvSpPr>
@@ -7694,7 +7998,13 @@
       </p:sp>
       <p:pic>
         <p:nvPicPr>
-          <p:cNvPr id="22" name="Image 3" descr="C:\Users\whale\git\uiao\inbox\SSA-Interview\build\icons\FaSitemap.png"/>
+          <p:cNvPr id="22" name="Image 3" descr="">
+            <a:extLst>
+              <a:ext uri="{C183D7F6-B498-43B3-948B-1728B52AA6E4}">
+                <adec:decorative xmlns:adec="http://schemas.microsoft.com/office/drawing/2017/decorative" val="1"/>
+              </a:ext>
+            </a:extLst>
+          </p:cNvPr>
           <p:cNvPicPr>
             <a:picLocks noChangeAspect="1"/>
           </p:cNvPicPr>
@@ -7807,7 +8117,7 @@
       </p:sp>
       <p:pic>
         <p:nvPicPr>
-          <p:cNvPr id="24" name="Narration">
+          <p:cNvPr id="24" name="Narration" descr="Narration for this slide; captions available" title="Narration">
             <a:hlinkClick r:id="" action="ppaction://media"/>
             <a:extLst>
               <a:ext uri="{FF2B5EF4-FFF2-40B4-BE49-F238E27FC236}">
@@ -7822,7 +8132,17 @@
             <a:audioFile r:link="rId2"/>
             <p:extLst>
               <p:ext uri="{DAA4B4D4-6D71-4841-9C94-3DE7FCFB9230}">
-                <p14:media xmlns:p14="http://schemas.microsoft.com/office/powerpoint/2010/main" r:embed="rId1"/>
+                <p14:media xmlns:p14="http://schemas.microsoft.com/office/powerpoint/2010/main" r:embed="rId1">
+                  <p14:extLst>
+                    <p:ext uri="{3AFAAA56-56D3-431D-BCD4-E75A35582382}">
+                      <p173:tracksInfo xmlns:p173="http://schemas.microsoft.com/office/powerpoint/2017/3/main" displayLoc="slide">
+                        <p173:trackLst>
+                          <p173:track id="{B6BE334C-9193-4571-B9B0-DF47DEF944E3}" label="English (captions)" lang="en-US" r:embed="rId10"/>
+                        </p173:trackLst>
+                      </p173:tracksInfo>
+                    </p:ext>
+                  </p14:extLst>
+                </p14:media>
               </p:ext>
             </p:extLst>
           </p:nvPr>
@@ -7989,7 +8309,13 @@
       </p:sp>
       <p:sp>
         <p:nvSpPr>
-          <p:cNvPr id="3" name="Tag How"/>
+          <p:cNvPr id="3" name="Tag How" descr="">
+            <a:extLst>
+              <a:ext uri="{C183D7F6-B498-43B3-948B-1728B52AA6E4}">
+                <adec:decorative xmlns:adec="http://schemas.microsoft.com/office/drawing/2017/decorative" val="1"/>
+              </a:ext>
+            </a:extLst>
+          </p:cNvPr>
           <p:cNvSpPr/>
           <p:nvPr/>
         </p:nvSpPr>
@@ -8088,7 +8414,13 @@
       </p:sp>
       <p:sp>
         <p:nvSpPr>
-          <p:cNvPr id="6" name="Entity Person"/>
+          <p:cNvPr id="6" name="Entity Person" descr="">
+            <a:extLst>
+              <a:ext uri="{C183D7F6-B498-43B3-948B-1728B52AA6E4}">
+                <adec:decorative xmlns:adec="http://schemas.microsoft.com/office/drawing/2017/decorative" val="1"/>
+              </a:ext>
+            </a:extLst>
+          </p:cNvPr>
           <p:cNvSpPr/>
           <p:nvPr/>
         </p:nvSpPr>
@@ -8178,7 +8510,13 @@
       </p:sp>
       <p:sp>
         <p:nvSpPr>
-          <p:cNvPr id="8" name="Entity Identifier"/>
+          <p:cNvPr id="8" name="Entity Identifier" descr="">
+            <a:extLst>
+              <a:ext uri="{C183D7F6-B498-43B3-948B-1728B52AA6E4}">
+                <adec:decorative xmlns:adec="http://schemas.microsoft.com/office/drawing/2017/decorative" val="1"/>
+              </a:ext>
+            </a:extLst>
+          </p:cNvPr>
           <p:cNvSpPr/>
           <p:nvPr/>
         </p:nvSpPr>
@@ -8276,7 +8614,13 @@
       </p:sp>
       <p:sp>
         <p:nvSpPr>
-          <p:cNvPr id="10" name="Entity Affiliation"/>
+          <p:cNvPr id="10" name="Entity Affiliation" descr="">
+            <a:extLst>
+              <a:ext uri="{C183D7F6-B498-43B3-948B-1728B52AA6E4}">
+                <adec:decorative xmlns:adec="http://schemas.microsoft.com/office/drawing/2017/decorative" val="1"/>
+              </a:ext>
+            </a:extLst>
+          </p:cNvPr>
           <p:cNvSpPr/>
           <p:nvPr/>
         </p:nvSpPr>
@@ -8374,7 +8718,13 @@
       </p:sp>
       <p:sp>
         <p:nvSpPr>
-          <p:cNvPr id="12" name="Entity Account"/>
+          <p:cNvPr id="12" name="Entity Account" descr="">
+            <a:extLst>
+              <a:ext uri="{C183D7F6-B498-43B3-948B-1728B52AA6E4}">
+                <adec:decorative xmlns:adec="http://schemas.microsoft.com/office/drawing/2017/decorative" val="1"/>
+              </a:ext>
+            </a:extLst>
+          </p:cNvPr>
           <p:cNvSpPr/>
           <p:nvPr/>
         </p:nvSpPr>
@@ -8472,7 +8822,13 @@
       </p:sp>
       <p:sp>
         <p:nvSpPr>
-          <p:cNvPr id="14" name="Entity Assignment"/>
+          <p:cNvPr id="14" name="Entity Assignment" descr="">
+            <a:extLst>
+              <a:ext uri="{C183D7F6-B498-43B3-948B-1728B52AA6E4}">
+                <adec:decorative xmlns:adec="http://schemas.microsoft.com/office/drawing/2017/decorative" val="1"/>
+              </a:ext>
+            </a:extLst>
+          </p:cNvPr>
           <p:cNvSpPr/>
           <p:nvPr/>
         </p:nvSpPr>
@@ -8570,7 +8926,13 @@
       </p:sp>
       <p:sp>
         <p:nvSpPr>
-          <p:cNvPr id="16" name="Entity Org unit"/>
+          <p:cNvPr id="16" name="Entity Org unit" descr="">
+            <a:extLst>
+              <a:ext uri="{C183D7F6-B498-43B3-948B-1728B52AA6E4}">
+                <adec:decorative xmlns:adec="http://schemas.microsoft.com/office/drawing/2017/decorative" val="1"/>
+              </a:ext>
+            </a:extLst>
+          </p:cNvPr>
           <p:cNvSpPr/>
           <p:nvPr/>
         </p:nvSpPr>
@@ -8668,7 +9030,13 @@
       </p:sp>
       <p:sp>
         <p:nvSpPr>
-          <p:cNvPr id="18" name="Shape 16"/>
+          <p:cNvPr id="18" name="Shape 16" descr="">
+            <a:extLst>
+              <a:ext uri="{C183D7F6-B498-43B3-948B-1728B52AA6E4}">
+                <adec:decorative xmlns:adec="http://schemas.microsoft.com/office/drawing/2017/decorative" val="1"/>
+              </a:ext>
+            </a:extLst>
+          </p:cNvPr>
           <p:cNvSpPr/>
           <p:nvPr/>
         </p:nvSpPr>
@@ -8691,7 +9059,13 @@
       </p:sp>
       <p:sp>
         <p:nvSpPr>
-          <p:cNvPr id="19" name="Shape 17"/>
+          <p:cNvPr id="19" name="Shape 17" descr="">
+            <a:extLst>
+              <a:ext uri="{C183D7F6-B498-43B3-948B-1728B52AA6E4}">
+                <adec:decorative xmlns:adec="http://schemas.microsoft.com/office/drawing/2017/decorative" val="1"/>
+              </a:ext>
+            </a:extLst>
+          </p:cNvPr>
           <p:cNvSpPr/>
           <p:nvPr/>
         </p:nvSpPr>
@@ -8714,7 +9088,13 @@
       </p:sp>
       <p:sp>
         <p:nvSpPr>
-          <p:cNvPr id="20" name="Shape 18"/>
+          <p:cNvPr id="20" name="Shape 18" descr="">
+            <a:extLst>
+              <a:ext uri="{C183D7F6-B498-43B3-948B-1728B52AA6E4}">
+                <adec:decorative xmlns:adec="http://schemas.microsoft.com/office/drawing/2017/decorative" val="1"/>
+              </a:ext>
+            </a:extLst>
+          </p:cNvPr>
           <p:cNvSpPr/>
           <p:nvPr/>
         </p:nvSpPr>
@@ -8737,7 +9117,13 @@
       </p:sp>
       <p:sp>
         <p:nvSpPr>
-          <p:cNvPr id="21" name="Shape 19"/>
+          <p:cNvPr id="21" name="Shape 19" descr="">
+            <a:extLst>
+              <a:ext uri="{C183D7F6-B498-43B3-948B-1728B52AA6E4}">
+                <adec:decorative xmlns:adec="http://schemas.microsoft.com/office/drawing/2017/decorative" val="1"/>
+              </a:ext>
+            </a:extLst>
+          </p:cNvPr>
           <p:cNvSpPr/>
           <p:nvPr/>
         </p:nvSpPr>
@@ -8760,7 +9146,13 @@
       </p:sp>
       <p:sp>
         <p:nvSpPr>
-          <p:cNvPr id="22" name="Shape 20"/>
+          <p:cNvPr id="22" name="Shape 20" descr="">
+            <a:extLst>
+              <a:ext uri="{C183D7F6-B498-43B3-948B-1728B52AA6E4}">
+                <adec:decorative xmlns:adec="http://schemas.microsoft.com/office/drawing/2017/decorative" val="1"/>
+              </a:ext>
+            </a:extLst>
+          </p:cNvPr>
           <p:cNvSpPr/>
           <p:nvPr/>
         </p:nvSpPr>
@@ -8882,7 +9274,7 @@
         <a:graphic>
           <a:graphicData uri="http://schemas.openxmlformats.org/drawingml/2006/table">
             <a:tbl>
-              <a:tblPr/>
+              <a:tblPr firstRow="1" bandRow="1"/>
               <a:tblGrid>
                 <a:gridCol w="1463040">
                   <a:extLst>
@@ -9763,7 +10155,13 @@
       </p:graphicFrame>
       <p:sp>
         <p:nvSpPr>
-          <p:cNvPr id="26" name="Standards"/>
+          <p:cNvPr id="26" name="Standards" descr="">
+            <a:extLst>
+              <a:ext uri="{C183D7F6-B498-43B3-948B-1728B52AA6E4}">
+                <adec:decorative xmlns:adec="http://schemas.microsoft.com/office/drawing/2017/decorative" val="1"/>
+              </a:ext>
+            </a:extLst>
+          </p:cNvPr>
           <p:cNvSpPr/>
           <p:nvPr/>
         </p:nvSpPr>
@@ -9886,7 +10284,7 @@
       </p:sp>
       <p:pic>
         <p:nvPicPr>
-          <p:cNvPr id="29" name="Narration">
+          <p:cNvPr id="29" name="Narration" descr="Narration for this slide; captions available" title="Narration">
             <a:hlinkClick r:id="" action="ppaction://media"/>
             <a:extLst>
               <a:ext uri="{FF2B5EF4-FFF2-40B4-BE49-F238E27FC236}">
@@ -9901,7 +10299,17 @@
             <a:audioFile r:link="rId2"/>
             <p:extLst>
               <p:ext uri="{DAA4B4D4-6D71-4841-9C94-3DE7FCFB9230}">
-                <p14:media xmlns:p14="http://schemas.microsoft.com/office/powerpoint/2010/main" r:embed="rId1"/>
+                <p14:media xmlns:p14="http://schemas.microsoft.com/office/powerpoint/2010/main" r:embed="rId1">
+                  <p14:extLst>
+                    <p:ext uri="{3AFAAA56-56D3-431D-BCD4-E75A35582382}">
+                      <p173:tracksInfo xmlns:p173="http://schemas.microsoft.com/office/powerpoint/2017/3/main" displayLoc="slide">
+                        <p173:trackLst>
+                          <p173:track id="{117FB669-3C59-4A94-B827-DAC38D92387C}" label="English (captions)" lang="en-US" r:embed="rId6"/>
+                        </p173:trackLst>
+                      </p173:tracksInfo>
+                    </p:ext>
+                  </p14:extLst>
+                </p14:media>
               </p:ext>
             </p:extLst>
           </p:nvPr>
@@ -10068,7 +10476,13 @@
       </p:sp>
       <p:sp>
         <p:nvSpPr>
-          <p:cNvPr id="3" name="Tag How"/>
+          <p:cNvPr id="3" name="Tag How" descr="">
+            <a:extLst>
+              <a:ext uri="{C183D7F6-B498-43B3-948B-1728B52AA6E4}">
+                <adec:decorative xmlns:adec="http://schemas.microsoft.com/office/drawing/2017/decorative" val="1"/>
+              </a:ext>
+            </a:extLst>
+          </p:cNvPr>
           <p:cNvSpPr/>
           <p:nvPr/>
         </p:nvSpPr>
@@ -10131,7 +10545,13 @@
       </p:sp>
       <p:sp>
         <p:nvSpPr>
-          <p:cNvPr id="5" name="How col 1"/>
+          <p:cNvPr id="5" name="How col 1" descr="">
+            <a:extLst>
+              <a:ext uri="{C183D7F6-B498-43B3-948B-1728B52AA6E4}">
+                <adec:decorative xmlns:adec="http://schemas.microsoft.com/office/drawing/2017/decorative" val="1"/>
+              </a:ext>
+            </a:extLst>
+          </p:cNvPr>
           <p:cNvSpPr/>
           <p:nvPr/>
         </p:nvSpPr>
@@ -10165,7 +10585,13 @@
       </p:sp>
       <p:sp>
         <p:nvSpPr>
-          <p:cNvPr id="6" name="Icon FaDatabase"/>
+          <p:cNvPr id="6" name="Icon FaDatabase" descr="">
+            <a:extLst>
+              <a:ext uri="{C183D7F6-B498-43B3-948B-1728B52AA6E4}">
+                <adec:decorative xmlns:adec="http://schemas.microsoft.com/office/drawing/2017/decorative" val="1"/>
+              </a:ext>
+            </a:extLst>
+          </p:cNvPr>
           <p:cNvSpPr/>
           <p:nvPr/>
         </p:nvSpPr>
@@ -10190,7 +10616,13 @@
       </p:sp>
       <p:pic>
         <p:nvPicPr>
-          <p:cNvPr id="7" name="Image 0" descr="C:\Users\whale\git\uiao\inbox\SSA-Interview\build\icons\FaDatabase.png"/>
+          <p:cNvPr id="7" name="Image 0" descr="">
+            <a:extLst>
+              <a:ext uri="{C183D7F6-B498-43B3-948B-1728B52AA6E4}">
+                <adec:decorative xmlns:adec="http://schemas.microsoft.com/office/drawing/2017/decorative" val="1"/>
+              </a:ext>
+            </a:extLst>
+          </p:cNvPr>
           <p:cNvPicPr>
             <a:picLocks noChangeAspect="1"/>
           </p:cNvPicPr>
@@ -10347,7 +10779,13 @@
       </p:sp>
       <p:sp>
         <p:nvSpPr>
-          <p:cNvPr id="10" name="How col 2"/>
+          <p:cNvPr id="10" name="How col 2" descr="">
+            <a:extLst>
+              <a:ext uri="{C183D7F6-B498-43B3-948B-1728B52AA6E4}">
+                <adec:decorative xmlns:adec="http://schemas.microsoft.com/office/drawing/2017/decorative" val="1"/>
+              </a:ext>
+            </a:extLst>
+          </p:cNvPr>
           <p:cNvSpPr/>
           <p:nvPr/>
         </p:nvSpPr>
@@ -10381,7 +10819,13 @@
       </p:sp>
       <p:sp>
         <p:nvSpPr>
-          <p:cNvPr id="11" name="Icon FaLock"/>
+          <p:cNvPr id="11" name="Icon FaLock" descr="">
+            <a:extLst>
+              <a:ext uri="{C183D7F6-B498-43B3-948B-1728B52AA6E4}">
+                <adec:decorative xmlns:adec="http://schemas.microsoft.com/office/drawing/2017/decorative" val="1"/>
+              </a:ext>
+            </a:extLst>
+          </p:cNvPr>
           <p:cNvSpPr/>
           <p:nvPr/>
         </p:nvSpPr>
@@ -10406,7 +10850,13 @@
       </p:sp>
       <p:pic>
         <p:nvPicPr>
-          <p:cNvPr id="12" name="Image 1" descr="C:\Users\whale\git\uiao\inbox\SSA-Interview\build\icons\FaLock.png"/>
+          <p:cNvPr id="12" name="Image 1" descr="">
+            <a:extLst>
+              <a:ext uri="{C183D7F6-B498-43B3-948B-1728B52AA6E4}">
+                <adec:decorative xmlns:adec="http://schemas.microsoft.com/office/drawing/2017/decorative" val="1"/>
+              </a:ext>
+            </a:extLst>
+          </p:cNvPr>
           <p:cNvPicPr>
             <a:picLocks noChangeAspect="1"/>
           </p:cNvPicPr>
@@ -10545,7 +10995,13 @@
       </p:sp>
       <p:sp>
         <p:nvSpPr>
-          <p:cNvPr id="15" name="How col 3"/>
+          <p:cNvPr id="15" name="How col 3" descr="">
+            <a:extLst>
+              <a:ext uri="{C183D7F6-B498-43B3-948B-1728B52AA6E4}">
+                <adec:decorative xmlns:adec="http://schemas.microsoft.com/office/drawing/2017/decorative" val="1"/>
+              </a:ext>
+            </a:extLst>
+          </p:cNvPr>
           <p:cNvSpPr/>
           <p:nvPr/>
         </p:nvSpPr>
@@ -10579,7 +11035,13 @@
       </p:sp>
       <p:sp>
         <p:nvSpPr>
-          <p:cNvPr id="16" name="Icon FaRoute"/>
+          <p:cNvPr id="16" name="Icon FaRoute" descr="">
+            <a:extLst>
+              <a:ext uri="{C183D7F6-B498-43B3-948B-1728B52AA6E4}">
+                <adec:decorative xmlns:adec="http://schemas.microsoft.com/office/drawing/2017/decorative" val="1"/>
+              </a:ext>
+            </a:extLst>
+          </p:cNvPr>
           <p:cNvSpPr/>
           <p:nvPr/>
         </p:nvSpPr>
@@ -10604,7 +11066,13 @@
       </p:sp>
       <p:pic>
         <p:nvPicPr>
-          <p:cNvPr id="17" name="Image 2" descr="C:\Users\whale\git\uiao\inbox\SSA-Interview\build\icons\FaRoute.png"/>
+          <p:cNvPr id="17" name="Image 2" descr="">
+            <a:extLst>
+              <a:ext uri="{C183D7F6-B498-43B3-948B-1728B52AA6E4}">
+                <adec:decorative xmlns:adec="http://schemas.microsoft.com/office/drawing/2017/decorative" val="1"/>
+              </a:ext>
+            </a:extLst>
+          </p:cNvPr>
           <p:cNvPicPr>
             <a:picLocks noChangeAspect="1"/>
           </p:cNvPicPr>
@@ -10797,7 +11265,13 @@
       </p:sp>
       <p:sp>
         <p:nvSpPr>
-          <p:cNvPr id="21" name="Stack 1"/>
+          <p:cNvPr id="21" name="Stack 1" descr="">
+            <a:extLst>
+              <a:ext uri="{C183D7F6-B498-43B3-948B-1728B52AA6E4}">
+                <adec:decorative xmlns:adec="http://schemas.microsoft.com/office/drawing/2017/decorative" val="1"/>
+              </a:ext>
+            </a:extLst>
+          </p:cNvPr>
           <p:cNvSpPr/>
           <p:nvPr/>
         </p:nvSpPr>
@@ -10867,7 +11341,13 @@
       </p:sp>
       <p:sp>
         <p:nvSpPr>
-          <p:cNvPr id="23" name="Shape 18"/>
+          <p:cNvPr id="23" name="Shape 18" descr="">
+            <a:extLst>
+              <a:ext uri="{C183D7F6-B498-43B3-948B-1728B52AA6E4}">
+                <adec:decorative xmlns:adec="http://schemas.microsoft.com/office/drawing/2017/decorative" val="1"/>
+              </a:ext>
+            </a:extLst>
+          </p:cNvPr>
           <p:cNvSpPr/>
           <p:nvPr/>
         </p:nvSpPr>
@@ -10891,7 +11371,13 @@
       </p:sp>
       <p:sp>
         <p:nvSpPr>
-          <p:cNvPr id="24" name="Stack 2"/>
+          <p:cNvPr id="24" name="Stack 2" descr="">
+            <a:extLst>
+              <a:ext uri="{C183D7F6-B498-43B3-948B-1728B52AA6E4}">
+                <adec:decorative xmlns:adec="http://schemas.microsoft.com/office/drawing/2017/decorative" val="1"/>
+              </a:ext>
+            </a:extLst>
+          </p:cNvPr>
           <p:cNvSpPr/>
           <p:nvPr/>
         </p:nvSpPr>
@@ -10961,7 +11447,13 @@
       </p:sp>
       <p:sp>
         <p:nvSpPr>
-          <p:cNvPr id="26" name="Shape 21"/>
+          <p:cNvPr id="26" name="Shape 21" descr="">
+            <a:extLst>
+              <a:ext uri="{C183D7F6-B498-43B3-948B-1728B52AA6E4}">
+                <adec:decorative xmlns:adec="http://schemas.microsoft.com/office/drawing/2017/decorative" val="1"/>
+              </a:ext>
+            </a:extLst>
+          </p:cNvPr>
           <p:cNvSpPr/>
           <p:nvPr/>
         </p:nvSpPr>
@@ -10985,7 +11477,13 @@
       </p:sp>
       <p:sp>
         <p:nvSpPr>
-          <p:cNvPr id="27" name="Stack 3"/>
+          <p:cNvPr id="27" name="Stack 3" descr="">
+            <a:extLst>
+              <a:ext uri="{C183D7F6-B498-43B3-948B-1728B52AA6E4}">
+                <adec:decorative xmlns:adec="http://schemas.microsoft.com/office/drawing/2017/decorative" val="1"/>
+              </a:ext>
+            </a:extLst>
+          </p:cNvPr>
           <p:cNvSpPr/>
           <p:nvPr/>
         </p:nvSpPr>
@@ -11055,7 +11553,13 @@
       </p:sp>
       <p:sp>
         <p:nvSpPr>
-          <p:cNvPr id="29" name="Shape 24"/>
+          <p:cNvPr id="29" name="Shape 24" descr="">
+            <a:extLst>
+              <a:ext uri="{C183D7F6-B498-43B3-948B-1728B52AA6E4}">
+                <adec:decorative xmlns:adec="http://schemas.microsoft.com/office/drawing/2017/decorative" val="1"/>
+              </a:ext>
+            </a:extLst>
+          </p:cNvPr>
           <p:cNvSpPr/>
           <p:nvPr/>
         </p:nvSpPr>
@@ -11079,7 +11583,13 @@
       </p:sp>
       <p:sp>
         <p:nvSpPr>
-          <p:cNvPr id="30" name="Stack 4"/>
+          <p:cNvPr id="30" name="Stack 4" descr="">
+            <a:extLst>
+              <a:ext uri="{C183D7F6-B498-43B3-948B-1728B52AA6E4}">
+                <adec:decorative xmlns:adec="http://schemas.microsoft.com/office/drawing/2017/decorative" val="1"/>
+              </a:ext>
+            </a:extLst>
+          </p:cNvPr>
           <p:cNvSpPr/>
           <p:nvPr/>
         </p:nvSpPr>
@@ -11194,7 +11704,7 @@
       </p:sp>
       <p:pic>
         <p:nvPicPr>
-          <p:cNvPr id="33" name="Narration">
+          <p:cNvPr id="33" name="Narration" descr="Narration for this slide; captions available" title="Narration">
             <a:hlinkClick r:id="" action="ppaction://media"/>
             <a:extLst>
               <a:ext uri="{FF2B5EF4-FFF2-40B4-BE49-F238E27FC236}">
@@ -11209,7 +11719,17 @@
             <a:audioFile r:link="rId2"/>
             <p:extLst>
               <p:ext uri="{DAA4B4D4-6D71-4841-9C94-3DE7FCFB9230}">
-                <p14:media xmlns:p14="http://schemas.microsoft.com/office/powerpoint/2010/main" r:embed="rId1"/>
+                <p14:media xmlns:p14="http://schemas.microsoft.com/office/powerpoint/2010/main" r:embed="rId1">
+                  <p14:extLst>
+                    <p:ext uri="{3AFAAA56-56D3-431D-BCD4-E75A35582382}">
+                      <p173:tracksInfo xmlns:p173="http://schemas.microsoft.com/office/powerpoint/2017/3/main" displayLoc="slide">
+                        <p173:trackLst>
+                          <p173:track id="{6A8DAEA4-3696-4380-B2EB-E5F5EB274EE4}" label="English (captions)" lang="en-US" r:embed="rId9"/>
+                        </p173:trackLst>
+                      </p173:tracksInfo>
+                    </p:ext>
+                  </p14:extLst>
+                </p14:media>
               </p:ext>
             </p:extLst>
           </p:nvPr>
@@ -11376,7 +11896,13 @@
       </p:sp>
       <p:sp>
         <p:nvSpPr>
-          <p:cNvPr id="3" name="Tag How"/>
+          <p:cNvPr id="3" name="Tag How" descr="">
+            <a:extLst>
+              <a:ext uri="{C183D7F6-B498-43B3-948B-1728B52AA6E4}">
+                <adec:decorative xmlns:adec="http://schemas.microsoft.com/office/drawing/2017/decorative" val="1"/>
+              </a:ext>
+            </a:extLst>
+          </p:cNvPr>
           <p:cNvSpPr/>
           <p:nvPr/>
         </p:nvSpPr>
@@ -11475,7 +12001,13 @@
       </p:sp>
       <p:sp>
         <p:nvSpPr>
-          <p:cNvPr id="6" name="Measure 1"/>
+          <p:cNvPr id="6" name="Measure 1" descr="">
+            <a:extLst>
+              <a:ext uri="{C183D7F6-B498-43B3-948B-1728B52AA6E4}">
+                <adec:decorative xmlns:adec="http://schemas.microsoft.com/office/drawing/2017/decorative" val="1"/>
+              </a:ext>
+            </a:extLst>
+          </p:cNvPr>
           <p:cNvSpPr/>
           <p:nvPr/>
         </p:nvSpPr>
@@ -11509,7 +12041,13 @@
       </p:sp>
       <p:sp>
         <p:nvSpPr>
-          <p:cNvPr id="7" name="Icon FaUserXmark"/>
+          <p:cNvPr id="7" name="Icon FaUserXmark" descr="">
+            <a:extLst>
+              <a:ext uri="{C183D7F6-B498-43B3-948B-1728B52AA6E4}">
+                <adec:decorative xmlns:adec="http://schemas.microsoft.com/office/drawing/2017/decorative" val="1"/>
+              </a:ext>
+            </a:extLst>
+          </p:cNvPr>
           <p:cNvSpPr/>
           <p:nvPr/>
         </p:nvSpPr>
@@ -11534,7 +12072,13 @@
       </p:sp>
       <p:pic>
         <p:nvPicPr>
-          <p:cNvPr id="8" name="Image 0" descr="C:\Users\whale\git\uiao\inbox\SSA-Interview\build\icons\FaUserXmark.png"/>
+          <p:cNvPr id="8" name="Image 0" descr="">
+            <a:extLst>
+              <a:ext uri="{C183D7F6-B498-43B3-948B-1728B52AA6E4}">
+                <adec:decorative xmlns:adec="http://schemas.microsoft.com/office/drawing/2017/decorative" val="1"/>
+              </a:ext>
+            </a:extLst>
+          </p:cNvPr>
           <p:cNvPicPr>
             <a:picLocks noChangeAspect="1"/>
           </p:cNvPicPr>
@@ -11608,7 +12152,13 @@
       </p:sp>
       <p:sp>
         <p:nvSpPr>
-          <p:cNvPr id="10" name="Measure 2"/>
+          <p:cNvPr id="10" name="Measure 2" descr="">
+            <a:extLst>
+              <a:ext uri="{C183D7F6-B498-43B3-948B-1728B52AA6E4}">
+                <adec:decorative xmlns:adec="http://schemas.microsoft.com/office/drawing/2017/decorative" val="1"/>
+              </a:ext>
+            </a:extLst>
+          </p:cNvPr>
           <p:cNvSpPr/>
           <p:nvPr/>
         </p:nvSpPr>
@@ -11642,7 +12192,13 @@
       </p:sp>
       <p:sp>
         <p:nvSpPr>
-          <p:cNvPr id="11" name="Icon FaIdCard"/>
+          <p:cNvPr id="11" name="Icon FaIdCard" descr="">
+            <a:extLst>
+              <a:ext uri="{C183D7F6-B498-43B3-948B-1728B52AA6E4}">
+                <adec:decorative xmlns:adec="http://schemas.microsoft.com/office/drawing/2017/decorative" val="1"/>
+              </a:ext>
+            </a:extLst>
+          </p:cNvPr>
           <p:cNvSpPr/>
           <p:nvPr/>
         </p:nvSpPr>
@@ -11667,7 +12223,13 @@
       </p:sp>
       <p:pic>
         <p:nvPicPr>
-          <p:cNvPr id="12" name="Image 1" descr="C:\Users\whale\git\uiao\inbox\SSA-Interview\build\icons\FaIdCard.png"/>
+          <p:cNvPr id="12" name="Image 1" descr="">
+            <a:extLst>
+              <a:ext uri="{C183D7F6-B498-43B3-948B-1728B52AA6E4}">
+                <adec:decorative xmlns:adec="http://schemas.microsoft.com/office/drawing/2017/decorative" val="1"/>
+              </a:ext>
+            </a:extLst>
+          </p:cNvPr>
           <p:cNvPicPr>
             <a:picLocks noChangeAspect="1"/>
           </p:cNvPicPr>
@@ -11741,7 +12303,13 @@
       </p:sp>
       <p:sp>
         <p:nvSpPr>
-          <p:cNvPr id="14" name="Measure 3"/>
+          <p:cNvPr id="14" name="Measure 3" descr="">
+            <a:extLst>
+              <a:ext uri="{C183D7F6-B498-43B3-948B-1728B52AA6E4}">
+                <adec:decorative xmlns:adec="http://schemas.microsoft.com/office/drawing/2017/decorative" val="1"/>
+              </a:ext>
+            </a:extLst>
+          </p:cNvPr>
           <p:cNvSpPr/>
           <p:nvPr/>
         </p:nvSpPr>
@@ -11775,7 +12343,13 @@
       </p:sp>
       <p:sp>
         <p:nvSpPr>
-          <p:cNvPr id="15" name="Icon FaFingerprint"/>
+          <p:cNvPr id="15" name="Icon FaFingerprint" descr="">
+            <a:extLst>
+              <a:ext uri="{C183D7F6-B498-43B3-948B-1728B52AA6E4}">
+                <adec:decorative xmlns:adec="http://schemas.microsoft.com/office/drawing/2017/decorative" val="1"/>
+              </a:ext>
+            </a:extLst>
+          </p:cNvPr>
           <p:cNvSpPr/>
           <p:nvPr/>
         </p:nvSpPr>
@@ -11800,7 +12374,13 @@
       </p:sp>
       <p:pic>
         <p:nvPicPr>
-          <p:cNvPr id="16" name="Image 2" descr="C:\Users\whale\git\uiao\inbox\SSA-Interview\build\icons\FaFingerprint.png"/>
+          <p:cNvPr id="16" name="Image 2" descr="">
+            <a:extLst>
+              <a:ext uri="{C183D7F6-B498-43B3-948B-1728B52AA6E4}">
+                <adec:decorative xmlns:adec="http://schemas.microsoft.com/office/drawing/2017/decorative" val="1"/>
+              </a:ext>
+            </a:extLst>
+          </p:cNvPr>
           <p:cNvPicPr>
             <a:picLocks noChangeAspect="1"/>
           </p:cNvPicPr>
@@ -11874,7 +12454,13 @@
       </p:sp>
       <p:sp>
         <p:nvSpPr>
-          <p:cNvPr id="18" name="Measure 4"/>
+          <p:cNvPr id="18" name="Measure 4" descr="">
+            <a:extLst>
+              <a:ext uri="{C183D7F6-B498-43B3-948B-1728B52AA6E4}">
+                <adec:decorative xmlns:adec="http://schemas.microsoft.com/office/drawing/2017/decorative" val="1"/>
+              </a:ext>
+            </a:extLst>
+          </p:cNvPr>
           <p:cNvSpPr/>
           <p:nvPr/>
         </p:nvSpPr>
@@ -11908,7 +12494,13 @@
       </p:sp>
       <p:sp>
         <p:nvSpPr>
-          <p:cNvPr id="19" name="Icon FaUserClock"/>
+          <p:cNvPr id="19" name="Icon FaUserClock" descr="">
+            <a:extLst>
+              <a:ext uri="{C183D7F6-B498-43B3-948B-1728B52AA6E4}">
+                <adec:decorative xmlns:adec="http://schemas.microsoft.com/office/drawing/2017/decorative" val="1"/>
+              </a:ext>
+            </a:extLst>
+          </p:cNvPr>
           <p:cNvSpPr/>
           <p:nvPr/>
         </p:nvSpPr>
@@ -11933,7 +12525,13 @@
       </p:sp>
       <p:pic>
         <p:nvPicPr>
-          <p:cNvPr id="20" name="Image 3" descr="C:\Users\whale\git\uiao\inbox\SSA-Interview\build\icons\FaUserClock.png"/>
+          <p:cNvPr id="20" name="Image 3" descr="">
+            <a:extLst>
+              <a:ext uri="{C183D7F6-B498-43B3-948B-1728B52AA6E4}">
+                <adec:decorative xmlns:adec="http://schemas.microsoft.com/office/drawing/2017/decorative" val="1"/>
+              </a:ext>
+            </a:extLst>
+          </p:cNvPr>
           <p:cNvPicPr>
             <a:picLocks noChangeAspect="1"/>
           </p:cNvPicPr>
@@ -12007,7 +12605,13 @@
       </p:sp>
       <p:sp>
         <p:nvSpPr>
-          <p:cNvPr id="22" name="Measure 5"/>
+          <p:cNvPr id="22" name="Measure 5" descr="">
+            <a:extLst>
+              <a:ext uri="{C183D7F6-B498-43B3-948B-1728B52AA6E4}">
+                <adec:decorative xmlns:adec="http://schemas.microsoft.com/office/drawing/2017/decorative" val="1"/>
+              </a:ext>
+            </a:extLst>
+          </p:cNvPr>
           <p:cNvSpPr/>
           <p:nvPr/>
         </p:nvSpPr>
@@ -12041,7 +12645,13 @@
       </p:sp>
       <p:sp>
         <p:nvSpPr>
-          <p:cNvPr id="23" name="Icon FaAddressBook"/>
+          <p:cNvPr id="23" name="Icon FaAddressBook" descr="">
+            <a:extLst>
+              <a:ext uri="{C183D7F6-B498-43B3-948B-1728B52AA6E4}">
+                <adec:decorative xmlns:adec="http://schemas.microsoft.com/office/drawing/2017/decorative" val="1"/>
+              </a:ext>
+            </a:extLst>
+          </p:cNvPr>
           <p:cNvSpPr/>
           <p:nvPr/>
         </p:nvSpPr>
@@ -12066,7 +12676,13 @@
       </p:sp>
       <p:pic>
         <p:nvPicPr>
-          <p:cNvPr id="24" name="Image 4" descr="C:\Users\whale\git\uiao\inbox\SSA-Interview\build\icons\FaAddressBook.png"/>
+          <p:cNvPr id="24" name="Image 4" descr="">
+            <a:extLst>
+              <a:ext uri="{C183D7F6-B498-43B3-948B-1728B52AA6E4}">
+                <adec:decorative xmlns:adec="http://schemas.microsoft.com/office/drawing/2017/decorative" val="1"/>
+              </a:ext>
+            </a:extLst>
+          </p:cNvPr>
           <p:cNvPicPr>
             <a:picLocks noChangeAspect="1"/>
           </p:cNvPicPr>
@@ -12140,7 +12756,13 @@
       </p:sp>
       <p:sp>
         <p:nvSpPr>
-          <p:cNvPr id="26" name="Measure 6"/>
+          <p:cNvPr id="26" name="Measure 6" descr="">
+            <a:extLst>
+              <a:ext uri="{C183D7F6-B498-43B3-948B-1728B52AA6E4}">
+                <adec:decorative xmlns:adec="http://schemas.microsoft.com/office/drawing/2017/decorative" val="1"/>
+              </a:ext>
+            </a:extLst>
+          </p:cNvPr>
           <p:cNvSpPr/>
           <p:nvPr/>
         </p:nvSpPr>
@@ -12174,7 +12796,13 @@
       </p:sp>
       <p:sp>
         <p:nvSpPr>
-          <p:cNvPr id="27" name="Icon FaTriangleExclamation"/>
+          <p:cNvPr id="27" name="Icon FaTriangleExclamation" descr="">
+            <a:extLst>
+              <a:ext uri="{C183D7F6-B498-43B3-948B-1728B52AA6E4}">
+                <adec:decorative xmlns:adec="http://schemas.microsoft.com/office/drawing/2017/decorative" val="1"/>
+              </a:ext>
+            </a:extLst>
+          </p:cNvPr>
           <p:cNvSpPr/>
           <p:nvPr/>
         </p:nvSpPr>
@@ -12199,7 +12827,13 @@
       </p:sp>
       <p:pic>
         <p:nvPicPr>
-          <p:cNvPr id="28" name="Image 5" descr="C:\Users\whale\git\uiao\inbox\SSA-Interview\build\icons\FaTriangleExclamation.png"/>
+          <p:cNvPr id="28" name="Image 5" descr="">
+            <a:extLst>
+              <a:ext uri="{C183D7F6-B498-43B3-948B-1728B52AA6E4}">
+                <adec:decorative xmlns:adec="http://schemas.microsoft.com/office/drawing/2017/decorative" val="1"/>
+              </a:ext>
+            </a:extLst>
+          </p:cNvPr>
           <p:cNvPicPr>
             <a:picLocks noChangeAspect="1"/>
           </p:cNvPicPr>
@@ -12273,7 +12907,13 @@
       </p:sp>
       <p:sp>
         <p:nvSpPr>
-          <p:cNvPr id="30" name="Ask box"/>
+          <p:cNvPr id="30" name="Ask box" descr="">
+            <a:extLst>
+              <a:ext uri="{C183D7F6-B498-43B3-948B-1728B52AA6E4}">
+                <adec:decorative xmlns:adec="http://schemas.microsoft.com/office/drawing/2017/decorative" val="1"/>
+              </a:ext>
+            </a:extLst>
+          </p:cNvPr>
           <p:cNvSpPr/>
           <p:nvPr/>
         </p:nvSpPr>
@@ -12307,7 +12947,13 @@
       </p:sp>
       <p:sp>
         <p:nvSpPr>
-          <p:cNvPr id="31" name="Icon FaLightbulb"/>
+          <p:cNvPr id="31" name="Icon FaLightbulb" descr="">
+            <a:extLst>
+              <a:ext uri="{C183D7F6-B498-43B3-948B-1728B52AA6E4}">
+                <adec:decorative xmlns:adec="http://schemas.microsoft.com/office/drawing/2017/decorative" val="1"/>
+              </a:ext>
+            </a:extLst>
+          </p:cNvPr>
           <p:cNvSpPr/>
           <p:nvPr/>
         </p:nvSpPr>
@@ -12332,7 +12978,13 @@
       </p:sp>
       <p:pic>
         <p:nvPicPr>
-          <p:cNvPr id="32" name="Image 6" descr="C:\Users\whale\git\uiao\inbox\SSA-Interview\build\icons\FaLightbulb.png"/>
+          <p:cNvPr id="32" name="Image 6" descr="">
+            <a:extLst>
+              <a:ext uri="{C183D7F6-B498-43B3-948B-1728B52AA6E4}">
+                <adec:decorative xmlns:adec="http://schemas.microsoft.com/office/drawing/2017/decorative" val="1"/>
+              </a:ext>
+            </a:extLst>
+          </p:cNvPr>
           <p:cNvPicPr>
             <a:picLocks noChangeAspect="1"/>
           </p:cNvPicPr>
@@ -12550,7 +13202,7 @@
       </p:sp>
       <p:pic>
         <p:nvPicPr>
-          <p:cNvPr id="36" name="Narration">
+          <p:cNvPr id="36" name="Narration" descr="Narration for this slide; captions available" title="Narration">
             <a:hlinkClick r:id="" action="ppaction://media"/>
             <a:extLst>
               <a:ext uri="{FF2B5EF4-FFF2-40B4-BE49-F238E27FC236}">
@@ -12565,7 +13217,17 @@
             <a:audioFile r:link="rId2"/>
             <p:extLst>
               <p:ext uri="{DAA4B4D4-6D71-4841-9C94-3DE7FCFB9230}">
-                <p14:media xmlns:p14="http://schemas.microsoft.com/office/powerpoint/2010/main" r:embed="rId1"/>
+                <p14:media xmlns:p14="http://schemas.microsoft.com/office/powerpoint/2010/main" r:embed="rId1">
+                  <p14:extLst>
+                    <p:ext uri="{3AFAAA56-56D3-431D-BCD4-E75A35582382}">
+                      <p173:tracksInfo xmlns:p173="http://schemas.microsoft.com/office/powerpoint/2017/3/main" displayLoc="slide">
+                        <p173:trackLst>
+                          <p173:track id="{0C42C868-B936-461F-87A5-DE38E3904697}" label="English (captions)" lang="en-US" r:embed="rId13"/>
+                        </p173:trackLst>
+                      </p173:tracksInfo>
+                    </p:ext>
+                  </p14:extLst>
+                </p14:media>
               </p:ext>
             </p:extLst>
           </p:nvPr>
@@ -12732,7 +13394,13 @@
       </p:sp>
       <p:sp>
         <p:nvSpPr>
-          <p:cNvPr id="3" name="Teaser 1"/>
+          <p:cNvPr id="3" name="Teaser 1" descr="">
+            <a:extLst>
+              <a:ext uri="{C183D7F6-B498-43B3-948B-1728B52AA6E4}">
+                <adec:decorative xmlns:adec="http://schemas.microsoft.com/office/drawing/2017/decorative" val="1"/>
+              </a:ext>
+            </a:extLst>
+          </p:cNvPr>
           <p:cNvSpPr/>
           <p:nvPr/>
         </p:nvSpPr>
@@ -12766,7 +13434,13 @@
       </p:sp>
       <p:sp>
         <p:nvSpPr>
-          <p:cNvPr id="4" name="Icon FaCloudArrowUp"/>
+          <p:cNvPr id="4" name="Icon FaCloudArrowUp" descr="">
+            <a:extLst>
+              <a:ext uri="{C183D7F6-B498-43B3-948B-1728B52AA6E4}">
+                <adec:decorative xmlns:adec="http://schemas.microsoft.com/office/drawing/2017/decorative" val="1"/>
+              </a:ext>
+            </a:extLst>
+          </p:cNvPr>
           <p:cNvSpPr/>
           <p:nvPr/>
         </p:nvSpPr>
@@ -12791,7 +13465,13 @@
       </p:sp>
       <p:pic>
         <p:nvPicPr>
-          <p:cNvPr id="5" name="Image 0" descr="C:\Users\whale\git\uiao\inbox\SSA-Interview\build\icons\FaCloudArrowUp.png"/>
+          <p:cNvPr id="5" name="Image 0" descr="">
+            <a:extLst>
+              <a:ext uri="{C183D7F6-B498-43B3-948B-1728B52AA6E4}">
+                <adec:decorative xmlns:adec="http://schemas.microsoft.com/office/drawing/2017/decorative" val="1"/>
+              </a:ext>
+            </a:extLst>
+          </p:cNvPr>
           <p:cNvPicPr>
             <a:picLocks noChangeAspect="1"/>
           </p:cNvPicPr>
@@ -12871,7 +13551,13 @@
       </p:sp>
       <p:sp>
         <p:nvSpPr>
-          <p:cNvPr id="7" name="Teaser 2"/>
+          <p:cNvPr id="7" name="Teaser 2" descr="">
+            <a:extLst>
+              <a:ext uri="{C183D7F6-B498-43B3-948B-1728B52AA6E4}">
+                <adec:decorative xmlns:adec="http://schemas.microsoft.com/office/drawing/2017/decorative" val="1"/>
+              </a:ext>
+            </a:extLst>
+          </p:cNvPr>
           <p:cNvSpPr/>
           <p:nvPr/>
         </p:nvSpPr>
@@ -12905,7 +13591,13 @@
       </p:sp>
       <p:sp>
         <p:nvSpPr>
-          <p:cNvPr id="8" name="Icon FaGlobe"/>
+          <p:cNvPr id="8" name="Icon FaGlobe" descr="">
+            <a:extLst>
+              <a:ext uri="{C183D7F6-B498-43B3-948B-1728B52AA6E4}">
+                <adec:decorative xmlns:adec="http://schemas.microsoft.com/office/drawing/2017/decorative" val="1"/>
+              </a:ext>
+            </a:extLst>
+          </p:cNvPr>
           <p:cNvSpPr/>
           <p:nvPr/>
         </p:nvSpPr>
@@ -12930,7 +13622,13 @@
       </p:sp>
       <p:pic>
         <p:nvPicPr>
-          <p:cNvPr id="9" name="Image 1" descr="C:\Users\whale\git\uiao\inbox\SSA-Interview\build\icons\FaGlobe.png"/>
+          <p:cNvPr id="9" name="Image 1" descr="">
+            <a:extLst>
+              <a:ext uri="{C183D7F6-B498-43B3-948B-1728B52AA6E4}">
+                <adec:decorative xmlns:adec="http://schemas.microsoft.com/office/drawing/2017/decorative" val="1"/>
+              </a:ext>
+            </a:extLst>
+          </p:cNvPr>
           <p:cNvPicPr>
             <a:picLocks noChangeAspect="1"/>
           </p:cNvPicPr>
@@ -13010,7 +13708,13 @@
       </p:sp>
       <p:sp>
         <p:nvSpPr>
-          <p:cNvPr id="11" name="Teaser 3"/>
+          <p:cNvPr id="11" name="Teaser 3" descr="">
+            <a:extLst>
+              <a:ext uri="{C183D7F6-B498-43B3-948B-1728B52AA6E4}">
+                <adec:decorative xmlns:adec="http://schemas.microsoft.com/office/drawing/2017/decorative" val="1"/>
+              </a:ext>
+            </a:extLst>
+          </p:cNvPr>
           <p:cNvSpPr/>
           <p:nvPr/>
         </p:nvSpPr>
@@ -13044,7 +13748,13 @@
       </p:sp>
       <p:sp>
         <p:nvSpPr>
-          <p:cNvPr id="12" name="Icon FaBuilding"/>
+          <p:cNvPr id="12" name="Icon FaBuilding" descr="">
+            <a:extLst>
+              <a:ext uri="{C183D7F6-B498-43B3-948B-1728B52AA6E4}">
+                <adec:decorative xmlns:adec="http://schemas.microsoft.com/office/drawing/2017/decorative" val="1"/>
+              </a:ext>
+            </a:extLst>
+          </p:cNvPr>
           <p:cNvSpPr/>
           <p:nvPr/>
         </p:nvSpPr>
@@ -13069,7 +13779,13 @@
       </p:sp>
       <p:pic>
         <p:nvPicPr>
-          <p:cNvPr id="13" name="Image 2" descr="C:\Users\whale\git\uiao\inbox\SSA-Interview\build\icons\FaBuilding.png"/>
+          <p:cNvPr id="13" name="Image 2" descr="">
+            <a:extLst>
+              <a:ext uri="{C183D7F6-B498-43B3-948B-1728B52AA6E4}">
+                <adec:decorative xmlns:adec="http://schemas.microsoft.com/office/drawing/2017/decorative" val="1"/>
+              </a:ext>
+            </a:extLst>
+          </p:cNvPr>
           <p:cNvPicPr>
             <a:picLocks noChangeAspect="1"/>
           </p:cNvPicPr>
@@ -13149,7 +13865,13 @@
       </p:sp>
       <p:sp>
         <p:nvSpPr>
-          <p:cNvPr id="15" name="Teaser 4"/>
+          <p:cNvPr id="15" name="Teaser 4" descr="">
+            <a:extLst>
+              <a:ext uri="{C183D7F6-B498-43B3-948B-1728B52AA6E4}">
+                <adec:decorative xmlns:adec="http://schemas.microsoft.com/office/drawing/2017/decorative" val="1"/>
+              </a:ext>
+            </a:extLst>
+          </p:cNvPr>
           <p:cNvSpPr/>
           <p:nvPr/>
         </p:nvSpPr>
@@ -13183,7 +13905,13 @@
       </p:sp>
       <p:sp>
         <p:nvSpPr>
-          <p:cNvPr id="16" name="Icon FaRoute"/>
+          <p:cNvPr id="16" name="Icon FaRoute" descr="">
+            <a:extLst>
+              <a:ext uri="{C183D7F6-B498-43B3-948B-1728B52AA6E4}">
+                <adec:decorative xmlns:adec="http://schemas.microsoft.com/office/drawing/2017/decorative" val="1"/>
+              </a:ext>
+            </a:extLst>
+          </p:cNvPr>
           <p:cNvSpPr/>
           <p:nvPr/>
         </p:nvSpPr>
@@ -13208,7 +13936,13 @@
       </p:sp>
       <p:pic>
         <p:nvPicPr>
-          <p:cNvPr id="17" name="Image 3" descr="C:\Users\whale\git\uiao\inbox\SSA-Interview\build\icons\FaRoute.png"/>
+          <p:cNvPr id="17" name="Image 3" descr="">
+            <a:extLst>
+              <a:ext uri="{C183D7F6-B498-43B3-948B-1728B52AA6E4}">
+                <adec:decorative xmlns:adec="http://schemas.microsoft.com/office/drawing/2017/decorative" val="1"/>
+              </a:ext>
+            </a:extLst>
+          </p:cNvPr>
           <p:cNvPicPr>
             <a:picLocks noChangeAspect="1"/>
           </p:cNvPicPr>
@@ -13288,7 +14022,13 @@
       </p:sp>
       <p:sp>
         <p:nvSpPr>
-          <p:cNvPr id="19" name="Teaser 5"/>
+          <p:cNvPr id="19" name="Teaser 5" descr="">
+            <a:extLst>
+              <a:ext uri="{C183D7F6-B498-43B3-948B-1728B52AA6E4}">
+                <adec:decorative xmlns:adec="http://schemas.microsoft.com/office/drawing/2017/decorative" val="1"/>
+              </a:ext>
+            </a:extLst>
+          </p:cNvPr>
           <p:cNvSpPr/>
           <p:nvPr/>
         </p:nvSpPr>
@@ -13322,7 +14062,13 @@
       </p:sp>
       <p:sp>
         <p:nvSpPr>
-          <p:cNvPr id="20" name="Icon FaServer"/>
+          <p:cNvPr id="20" name="Icon FaServer" descr="">
+            <a:extLst>
+              <a:ext uri="{C183D7F6-B498-43B3-948B-1728B52AA6E4}">
+                <adec:decorative xmlns:adec="http://schemas.microsoft.com/office/drawing/2017/decorative" val="1"/>
+              </a:ext>
+            </a:extLst>
+          </p:cNvPr>
           <p:cNvSpPr/>
           <p:nvPr/>
         </p:nvSpPr>
@@ -13347,7 +14093,13 @@
       </p:sp>
       <p:pic>
         <p:nvPicPr>
-          <p:cNvPr id="21" name="Image 4" descr="C:\Users\whale\git\uiao\inbox\SSA-Interview\build\icons\FaServer.png"/>
+          <p:cNvPr id="21" name="Image 4" descr="">
+            <a:extLst>
+              <a:ext uri="{C183D7F6-B498-43B3-948B-1728B52AA6E4}">
+                <adec:decorative xmlns:adec="http://schemas.microsoft.com/office/drawing/2017/decorative" val="1"/>
+              </a:ext>
+            </a:extLst>
+          </p:cNvPr>
           <p:cNvPicPr>
             <a:picLocks noChangeAspect="1"/>
           </p:cNvPicPr>
@@ -13427,7 +14179,13 @@
       </p:sp>
       <p:sp>
         <p:nvSpPr>
-          <p:cNvPr id="23" name="Teaser 6"/>
+          <p:cNvPr id="23" name="Teaser 6" descr="">
+            <a:extLst>
+              <a:ext uri="{C183D7F6-B498-43B3-948B-1728B52AA6E4}">
+                <adec:decorative xmlns:adec="http://schemas.microsoft.com/office/drawing/2017/decorative" val="1"/>
+              </a:ext>
+            </a:extLst>
+          </p:cNvPr>
           <p:cNvSpPr/>
           <p:nvPr/>
         </p:nvSpPr>
@@ -13461,7 +14219,13 @@
       </p:sp>
       <p:sp>
         <p:nvSpPr>
-          <p:cNvPr id="24" name="Icon FaDatabase"/>
+          <p:cNvPr id="24" name="Icon FaDatabase" descr="">
+            <a:extLst>
+              <a:ext uri="{C183D7F6-B498-43B3-948B-1728B52AA6E4}">
+                <adec:decorative xmlns:adec="http://schemas.microsoft.com/office/drawing/2017/decorative" val="1"/>
+              </a:ext>
+            </a:extLst>
+          </p:cNvPr>
           <p:cNvSpPr/>
           <p:nvPr/>
         </p:nvSpPr>
@@ -13486,7 +14250,13 @@
       </p:sp>
       <p:pic>
         <p:nvPicPr>
-          <p:cNvPr id="25" name="Image 5" descr="C:\Users\whale\git\uiao\inbox\SSA-Interview\build\icons\FaDatabase.png"/>
+          <p:cNvPr id="25" name="Image 5" descr="">
+            <a:extLst>
+              <a:ext uri="{C183D7F6-B498-43B3-948B-1728B52AA6E4}">
+                <adec:decorative xmlns:adec="http://schemas.microsoft.com/office/drawing/2017/decorative" val="1"/>
+              </a:ext>
+            </a:extLst>
+          </p:cNvPr>
           <p:cNvPicPr>
             <a:picLocks noChangeAspect="1"/>
           </p:cNvPicPr>
@@ -13566,7 +14336,13 @@
       </p:sp>
       <p:sp>
         <p:nvSpPr>
-          <p:cNvPr id="27" name="Teaser 7"/>
+          <p:cNvPr id="27" name="Teaser 7" descr="">
+            <a:extLst>
+              <a:ext uri="{C183D7F6-B498-43B3-948B-1728B52AA6E4}">
+                <adec:decorative xmlns:adec="http://schemas.microsoft.com/office/drawing/2017/decorative" val="1"/>
+              </a:ext>
+            </a:extLst>
+          </p:cNvPr>
           <p:cNvSpPr/>
           <p:nvPr/>
         </p:nvSpPr>
@@ -13600,7 +14376,13 @@
       </p:sp>
       <p:sp>
         <p:nvSpPr>
-          <p:cNvPr id="28" name="Icon FaLaptop"/>
+          <p:cNvPr id="28" name="Icon FaLaptop" descr="">
+            <a:extLst>
+              <a:ext uri="{C183D7F6-B498-43B3-948B-1728B52AA6E4}">
+                <adec:decorative xmlns:adec="http://schemas.microsoft.com/office/drawing/2017/decorative" val="1"/>
+              </a:ext>
+            </a:extLst>
+          </p:cNvPr>
           <p:cNvSpPr/>
           <p:nvPr/>
         </p:nvSpPr>
@@ -13625,7 +14407,13 @@
       </p:sp>
       <p:pic>
         <p:nvPicPr>
-          <p:cNvPr id="29" name="Image 6" descr="C:\Users\whale\git\uiao\inbox\SSA-Interview\build\icons\FaLaptop.png"/>
+          <p:cNvPr id="29" name="Image 6" descr="">
+            <a:extLst>
+              <a:ext uri="{C183D7F6-B498-43B3-948B-1728B52AA6E4}">
+                <adec:decorative xmlns:adec="http://schemas.microsoft.com/office/drawing/2017/decorative" val="1"/>
+              </a:ext>
+            </a:extLst>
+          </p:cNvPr>
           <p:cNvPicPr>
             <a:picLocks noChangeAspect="1"/>
           </p:cNvPicPr>
@@ -13705,7 +14493,13 @@
       </p:sp>
       <p:sp>
         <p:nvSpPr>
-          <p:cNvPr id="31" name="Teaser 8"/>
+          <p:cNvPr id="31" name="Teaser 8" descr="">
+            <a:extLst>
+              <a:ext uri="{C183D7F6-B498-43B3-948B-1728B52AA6E4}">
+                <adec:decorative xmlns:adec="http://schemas.microsoft.com/office/drawing/2017/decorative" val="1"/>
+              </a:ext>
+            </a:extLst>
+          </p:cNvPr>
           <p:cNvSpPr/>
           <p:nvPr/>
         </p:nvSpPr>
@@ -13739,7 +14533,13 @@
       </p:sp>
       <p:sp>
         <p:nvSpPr>
-          <p:cNvPr id="32" name="Icon FaShieldHalved"/>
+          <p:cNvPr id="32" name="Icon FaShieldHalved" descr="">
+            <a:extLst>
+              <a:ext uri="{C183D7F6-B498-43B3-948B-1728B52AA6E4}">
+                <adec:decorative xmlns:adec="http://schemas.microsoft.com/office/drawing/2017/decorative" val="1"/>
+              </a:ext>
+            </a:extLst>
+          </p:cNvPr>
           <p:cNvSpPr/>
           <p:nvPr/>
         </p:nvSpPr>
@@ -13764,7 +14564,13 @@
       </p:sp>
       <p:pic>
         <p:nvPicPr>
-          <p:cNvPr id="33" name="Image 7" descr="C:\Users\whale\git\uiao\inbox\SSA-Interview\build\icons\FaShieldHalved.png"/>
+          <p:cNvPr id="33" name="Image 7" descr="">
+            <a:extLst>
+              <a:ext uri="{C183D7F6-B498-43B3-948B-1728B52AA6E4}">
+                <adec:decorative xmlns:adec="http://schemas.microsoft.com/office/drawing/2017/decorative" val="1"/>
+              </a:ext>
+            </a:extLst>
+          </p:cNvPr>
           <p:cNvPicPr>
             <a:picLocks noChangeAspect="1"/>
           </p:cNvPicPr>
@@ -13844,7 +14650,13 @@
       </p:sp>
       <p:sp>
         <p:nvSpPr>
-          <p:cNvPr id="35" name="Teaser companions"/>
+          <p:cNvPr id="35" name="Teaser companions" descr="">
+            <a:extLst>
+              <a:ext uri="{C183D7F6-B498-43B3-948B-1728B52AA6E4}">
+                <adec:decorative xmlns:adec="http://schemas.microsoft.com/office/drawing/2017/decorative" val="1"/>
+              </a:ext>
+            </a:extLst>
+          </p:cNvPr>
           <p:cNvSpPr/>
           <p:nvPr/>
         </p:nvSpPr>
@@ -13946,7 +14758,13 @@
       </p:sp>
       <p:sp>
         <p:nvSpPr>
-          <p:cNvPr id="37" name="Teaser footer"/>
+          <p:cNvPr id="37" name="Teaser footer" descr="">
+            <a:extLst>
+              <a:ext uri="{C183D7F6-B498-43B3-948B-1728B52AA6E4}">
+                <adec:decorative xmlns:adec="http://schemas.microsoft.com/office/drawing/2017/decorative" val="1"/>
+              </a:ext>
+            </a:extLst>
+          </p:cNvPr>
           <p:cNvSpPr/>
           <p:nvPr/>
         </p:nvSpPr>
@@ -14069,7 +14887,7 @@
       </p:sp>
       <p:pic>
         <p:nvPicPr>
-          <p:cNvPr id="40" name="Narration">
+          <p:cNvPr id="40" name="Narration" descr="Narration for this slide; captions available" title="Narration">
             <a:hlinkClick r:id="" action="ppaction://media"/>
             <a:extLst>
               <a:ext uri="{FF2B5EF4-FFF2-40B4-BE49-F238E27FC236}">
@@ -14084,7 +14902,17 @@
             <a:audioFile r:link="rId2"/>
             <p:extLst>
               <p:ext uri="{DAA4B4D4-6D71-4841-9C94-3DE7FCFB9230}">
-                <p14:media xmlns:p14="http://schemas.microsoft.com/office/powerpoint/2010/main" r:embed="rId1"/>
+                <p14:media xmlns:p14="http://schemas.microsoft.com/office/powerpoint/2010/main" r:embed="rId1">
+                  <p14:extLst>
+                    <p:ext uri="{3AFAAA56-56D3-431D-BCD4-E75A35582382}">
+                      <p173:tracksInfo xmlns:p173="http://schemas.microsoft.com/office/powerpoint/2017/3/main" displayLoc="slide">
+                        <p173:trackLst>
+                          <p173:track id="{80806F4D-8200-4EFD-9097-FC0D52D387DD}" label="English (captions)" lang="en-US" r:embed="rId14"/>
+                        </p173:trackLst>
+                      </p173:tracksInfo>
+                    </p:ext>
+                  </p14:extLst>
+                </p14:media>
               </p:ext>
             </p:extLst>
           </p:nvPr>

--- a/presentations/hr-driven-identity-interview/HR_Driven_Identity_Exec_AnyAgency_Narrated.pptx
+++ b/presentations/hr-driven-identity-interview/HR_Driven_Identity_Exec_AnyAgency_Narrated.pptx
@@ -115,7 +115,7 @@
   <p:extLst>
     <p:ext uri="{521415D9-36F7-43E2-AB2F-B90AF26B5E84}">
       <p14:sectionLst xmlns:p14="http://schemas.microsoft.com/office/powerpoint/2010/main">
-        <p14:section name="The decision" id="{29BBA6FF-A62A-C4B0-A92E-D5F7ECDDCACA}">
+        <p14:section name="The decision" id="{2B648C62-65B3-63F8-56BE-0027093BAE9D}">
           <p14:sldIdLst>
             <p14:sldId id="256"/>
             <p14:sldId id="257"/>
@@ -123,7 +123,7 @@
             <p14:sldId id="259"/>
           </p14:sldIdLst>
         </p14:section>
-        <p14:section name="Making it real" id="{AFC7E07D-70EB-9310-C51F-44BCFE26F8EF}">
+        <p14:section name="Making it real" id="{581579AF-6F35-DACE-52CF-4265C9A0E2F5}">
           <p14:sldIdLst>
             <p14:sldId id="260"/>
             <p14:sldId id="261"/>
@@ -132,7 +132,7 @@
             <p14:sldId id="264"/>
           </p14:sldIdLst>
         </p14:section>
-        <p14:section name="Backup" id="{C5283A63-1717-E035-2612-DE50C1D3CABA}">
+        <p14:section name="Backup" id="{4C68DAE4-5DF4-5F26-9EC5-E200248D9FB9}">
           <p14:sldIdLst/>
         </p14:section>
       </p14:sectionLst>
@@ -169,7 +169,7 @@
     </p:spTree>
     <p:extLst>
       <p:ext uri="{BB962C8B-B14F-4D97-AF65-F5344CB8AC3E}">
-        <p14:creationId xmlns:p14="http://schemas.microsoft.com/office/powerpoint/2010/main" val="1972949453"/>
+        <p14:creationId xmlns:p14="http://schemas.microsoft.com/office/powerpoint/2010/main" val="3249123400"/>
       </p:ext>
     </p:extLst>
   </p:cSld>
@@ -1976,11 +1976,11 @@
       </p:sp>
       <p:pic>
         <p:nvPicPr>
-          <p:cNvPr id="6" name="Narration" descr="Narration for this slide; captions available" title="Narration">
+          <p:cNvPr id="6" name="Narration" descr="Narration for this slide; captions available">
             <a:hlinkClick r:id="" action="ppaction://media"/>
             <a:extLst>
               <a:ext uri="{FF2B5EF4-FFF2-40B4-BE49-F238E27FC236}">
-                <a16:creationId xmlns:a16="http://schemas.microsoft.com/office/drawing/2014/main" id="{5B69A13A-457C-04F0-3EDA-F80BAD250DCB}"/>
+                <a16:creationId xmlns:a16="http://schemas.microsoft.com/office/drawing/2014/main" id="{A1FDED00-05D4-C634-8D4C-9A990A4DE972}"/>
               </a:ext>
             </a:extLst>
           </p:cNvPr>
@@ -1996,7 +1996,7 @@
                     <p:ext uri="{3AFAAA56-56D3-431D-BCD4-E75A35582382}">
                       <p173:tracksInfo xmlns:p173="http://schemas.microsoft.com/office/powerpoint/2017/3/main" displayLoc="slide">
                         <p173:trackLst>
-                          <p173:track id="{2A52DC5A-187F-47FD-87C4-3FDC683DF6C2}" label="English (captions)" lang="en-US" r:embed="rId6"/>
+                          <p173:track id="{7CBD87F0-7467-419F-946A-FE593A82FD25}" label="English (captions)" lang="en-US" r:embed="rId6"/>
                         </p173:trackLst>
                       </p173:tracksInfo>
                     </p:ext>
@@ -2014,7 +2014,7 @@
         </p:blipFill>
         <p:spPr>
           <a:xfrm>
-            <a:off x="127000" y="6350000"/>
+            <a:off x="12446000" y="127000"/>
             <a:ext cx="304800" cy="304800"/>
           </a:xfrm>
           <a:prstGeom prst="rect">
@@ -2029,10 +2029,10 @@
   </p:clrMapOvr>
   <mc:AlternateContent xmlns:mc="http://schemas.openxmlformats.org/markup-compatibility/2006">
     <mc:Choice xmlns:p14="http://schemas.microsoft.com/office/powerpoint/2010/main" Requires="p14">
-      <p:transition spd="slow" p14:dur="2000" advTm="38080"/>
+      <p:transition spd="slow" p14:dur="2000" advTm="41080"/>
     </mc:Choice>
     <mc:Fallback>
-      <p:transition spd="slow" advTm="38080"/>
+      <p:transition spd="slow" advTm="41080"/>
     </mc:Fallback>
   </mc:AlternateContent>
   <p:timing>
@@ -2168,7 +2168,7 @@
       </p:sp>
       <p:sp>
         <p:nvSpPr>
-          <p:cNvPr id="3" name="Tag Why" descr="">
+          <p:cNvPr id="3" name="Tag Why">
             <a:extLst>
               <a:ext uri="{C183D7F6-B498-43B3-948B-1728B52AA6E4}">
                 <adec:decorative xmlns:adec="http://schemas.microsoft.com/office/drawing/2017/decorative" val="1"/>
@@ -2273,7 +2273,7 @@
       </p:sp>
       <p:sp>
         <p:nvSpPr>
-          <p:cNvPr id="6" name="Icon FaUserXmark" descr="">
+          <p:cNvPr id="6" name="Icon FaUserXmark">
             <a:extLst>
               <a:ext uri="{C183D7F6-B498-43B3-948B-1728B52AA6E4}">
                 <adec:decorative xmlns:adec="http://schemas.microsoft.com/office/drawing/2017/decorative" val="1"/>
@@ -2304,7 +2304,7 @@
       </p:sp>
       <p:pic>
         <p:nvPicPr>
-          <p:cNvPr id="7" name="Image 0" descr="">
+          <p:cNvPr id="7" name="Image 0">
             <a:extLst>
               <a:ext uri="{C183D7F6-B498-43B3-948B-1728B52AA6E4}">
                 <adec:decorative xmlns:adec="http://schemas.microsoft.com/office/drawing/2017/decorative" val="1"/>
@@ -2390,7 +2390,7 @@
       </p:sp>
       <p:sp>
         <p:nvSpPr>
-          <p:cNvPr id="9" name="Icon FaAddressBook" descr="">
+          <p:cNvPr id="9" name="Icon FaAddressBook">
             <a:extLst>
               <a:ext uri="{C183D7F6-B498-43B3-948B-1728B52AA6E4}">
                 <adec:decorative xmlns:adec="http://schemas.microsoft.com/office/drawing/2017/decorative" val="1"/>
@@ -2421,7 +2421,7 @@
       </p:sp>
       <p:pic>
         <p:nvPicPr>
-          <p:cNvPr id="10" name="Image 1" descr="">
+          <p:cNvPr id="10" name="Image 1">
             <a:extLst>
               <a:ext uri="{C183D7F6-B498-43B3-948B-1728B52AA6E4}">
                 <adec:decorative xmlns:adec="http://schemas.microsoft.com/office/drawing/2017/decorative" val="1"/>
@@ -2507,7 +2507,7 @@
       </p:sp>
       <p:sp>
         <p:nvSpPr>
-          <p:cNvPr id="12" name="Icon FaUserClock" descr="">
+          <p:cNvPr id="12" name="Icon FaUserClock">
             <a:extLst>
               <a:ext uri="{C183D7F6-B498-43B3-948B-1728B52AA6E4}">
                 <adec:decorative xmlns:adec="http://schemas.microsoft.com/office/drawing/2017/decorative" val="1"/>
@@ -2538,7 +2538,7 @@
       </p:sp>
       <p:pic>
         <p:nvPicPr>
-          <p:cNvPr id="13" name="Image 2" descr="">
+          <p:cNvPr id="13" name="Image 2">
             <a:extLst>
               <a:ext uri="{C183D7F6-B498-43B3-948B-1728B52AA6E4}">
                 <adec:decorative xmlns:adec="http://schemas.microsoft.com/office/drawing/2017/decorative" val="1"/>
@@ -2624,7 +2624,7 @@
       </p:sp>
       <p:sp>
         <p:nvSpPr>
-          <p:cNvPr id="15" name="Mission box" descr="">
+          <p:cNvPr id="15" name="Mission box">
             <a:extLst>
               <a:ext uri="{C183D7F6-B498-43B3-948B-1728B52AA6E4}">
                 <adec:decorative xmlns:adec="http://schemas.microsoft.com/office/drawing/2017/decorative" val="1"/>
@@ -2664,7 +2664,7 @@
       </p:sp>
       <p:sp>
         <p:nvSpPr>
-          <p:cNvPr id="16" name="Icon FaPeopleArrows" descr="">
+          <p:cNvPr id="16" name="Icon FaPeopleArrows">
             <a:extLst>
               <a:ext uri="{C183D7F6-B498-43B3-948B-1728B52AA6E4}">
                 <adec:decorative xmlns:adec="http://schemas.microsoft.com/office/drawing/2017/decorative" val="1"/>
@@ -2695,7 +2695,7 @@
       </p:sp>
       <p:pic>
         <p:nvPicPr>
-          <p:cNvPr id="17" name="Image 3" descr="">
+          <p:cNvPr id="17" name="Image 3">
             <a:extLst>
               <a:ext uri="{C183D7F6-B498-43B3-948B-1728B52AA6E4}">
                 <adec:decorative xmlns:adec="http://schemas.microsoft.com/office/drawing/2017/decorative" val="1"/>
@@ -2924,7 +2924,7 @@
       </p:sp>
       <p:sp>
         <p:nvSpPr>
-          <p:cNvPr id="21" name="Do nothing" descr="">
+          <p:cNvPr id="21" name="Do nothing">
             <a:extLst>
               <a:ext uri="{C183D7F6-B498-43B3-948B-1728B52AA6E4}">
                 <adec:decorative xmlns:adec="http://schemas.microsoft.com/office/drawing/2017/decorative" val="1"/>
@@ -2964,7 +2964,7 @@
       </p:sp>
       <p:sp>
         <p:nvSpPr>
-          <p:cNvPr id="22" name="Icon FaTriangleExclamation" descr="">
+          <p:cNvPr id="22" name="Icon FaTriangleExclamation">
             <a:extLst>
               <a:ext uri="{C183D7F6-B498-43B3-948B-1728B52AA6E4}">
                 <adec:decorative xmlns:adec="http://schemas.microsoft.com/office/drawing/2017/decorative" val="1"/>
@@ -2995,7 +2995,7 @@
       </p:sp>
       <p:pic>
         <p:nvPicPr>
-          <p:cNvPr id="23" name="Image 4" descr="">
+          <p:cNvPr id="23" name="Image 4">
             <a:extLst>
               <a:ext uri="{C183D7F6-B498-43B3-948B-1728B52AA6E4}">
                 <adec:decorative xmlns:adec="http://schemas.microsoft.com/office/drawing/2017/decorative" val="1"/>
@@ -3114,11 +3114,11 @@
       </p:sp>
       <p:pic>
         <p:nvPicPr>
-          <p:cNvPr id="26" name="Narration" descr="Narration for this slide; captions available" title="Narration">
+          <p:cNvPr id="26" name="Narration" descr="Narration for this slide; captions available">
             <a:hlinkClick r:id="" action="ppaction://media"/>
             <a:extLst>
               <a:ext uri="{FF2B5EF4-FFF2-40B4-BE49-F238E27FC236}">
-                <a16:creationId xmlns:a16="http://schemas.microsoft.com/office/drawing/2014/main" id="{0734BB8E-9371-374B-899C-A82CA7324F31}"/>
+                <a16:creationId xmlns:a16="http://schemas.microsoft.com/office/drawing/2014/main" id="{8BFB110C-E8C8-4DE9-7C0A-47F9B24871F8}"/>
               </a:ext>
             </a:extLst>
           </p:cNvPr>
@@ -3134,7 +3134,7 @@
                     <p:ext uri="{3AFAAA56-56D3-431D-BCD4-E75A35582382}">
                       <p173:tracksInfo xmlns:p173="http://schemas.microsoft.com/office/powerpoint/2017/3/main" displayLoc="slide">
                         <p173:trackLst>
-                          <p173:track id="{EC45F71B-8F88-420E-A54C-DA9434FE3FD8}" label="English (captions)" lang="en-US" r:embed="rId11"/>
+                          <p173:track id="{FA0808AE-3030-4A04-A1A6-B683BBD9C1B0}" label="English (captions)" lang="en-US" r:embed="rId11"/>
                         </p173:trackLst>
                       </p173:tracksInfo>
                     </p:ext>
@@ -3152,7 +3152,7 @@
         </p:blipFill>
         <p:spPr>
           <a:xfrm>
-            <a:off x="127000" y="6350000"/>
+            <a:off x="12446000" y="127000"/>
             <a:ext cx="304800" cy="304800"/>
           </a:xfrm>
           <a:prstGeom prst="rect">
@@ -3167,10 +3167,10 @@
   </p:clrMapOvr>
   <mc:AlternateContent xmlns:mc="http://schemas.openxmlformats.org/markup-compatibility/2006">
     <mc:Choice xmlns:p14="http://schemas.microsoft.com/office/powerpoint/2010/main" Requires="p14">
-      <p:transition spd="slow" p14:dur="2000" advTm="101250"/>
+      <p:transition spd="slow" p14:dur="2000" advTm="104250"/>
     </mc:Choice>
     <mc:Fallback>
-      <p:transition spd="slow" advTm="101250"/>
+      <p:transition spd="slow" advTm="104250"/>
     </mc:Fallback>
   </mc:AlternateContent>
   <p:timing>
@@ -3306,7 +3306,7 @@
       </p:sp>
       <p:sp>
         <p:nvSpPr>
-          <p:cNvPr id="3" name="Tag What" descr="">
+          <p:cNvPr id="3" name="Tag What">
             <a:extLst>
               <a:ext uri="{C183D7F6-B498-43B3-948B-1728B52AA6E4}">
                 <adec:decorative xmlns:adec="http://schemas.microsoft.com/office/drawing/2017/decorative" val="1"/>
@@ -5604,7 +5604,7 @@
       </p:graphicFrame>
       <p:sp>
         <p:nvSpPr>
-          <p:cNvPr id="6" name="Judgment" descr="">
+          <p:cNvPr id="6" name="Judgment">
             <a:extLst>
               <a:ext uri="{C183D7F6-B498-43B3-948B-1728B52AA6E4}">
                 <adec:decorative xmlns:adec="http://schemas.microsoft.com/office/drawing/2017/decorative" val="1"/>
@@ -5644,7 +5644,7 @@
       </p:sp>
       <p:sp>
         <p:nvSpPr>
-          <p:cNvPr id="7" name="Icon FaScaleBalanced" descr="">
+          <p:cNvPr id="7" name="Icon FaScaleBalanced">
             <a:extLst>
               <a:ext uri="{C183D7F6-B498-43B3-948B-1728B52AA6E4}">
                 <adec:decorative xmlns:adec="http://schemas.microsoft.com/office/drawing/2017/decorative" val="1"/>
@@ -5675,7 +5675,7 @@
       </p:sp>
       <p:pic>
         <p:nvPicPr>
-          <p:cNvPr id="8" name="Image 0" descr="">
+          <p:cNvPr id="8" name="Image 0">
             <a:extLst>
               <a:ext uri="{C183D7F6-B498-43B3-948B-1728B52AA6E4}">
                 <adec:decorative xmlns:adec="http://schemas.microsoft.com/office/drawing/2017/decorative" val="1"/>
@@ -5794,11 +5794,11 @@
       </p:sp>
       <p:pic>
         <p:nvPicPr>
-          <p:cNvPr id="10" name="Narration" descr="Narration for this slide; captions available" title="Narration">
+          <p:cNvPr id="10" name="Narration" descr="Narration for this slide; captions available">
             <a:hlinkClick r:id="" action="ppaction://media"/>
             <a:extLst>
               <a:ext uri="{FF2B5EF4-FFF2-40B4-BE49-F238E27FC236}">
-                <a16:creationId xmlns:a16="http://schemas.microsoft.com/office/drawing/2014/main" id="{959FEB47-E753-0E87-EDE8-462394FD9E54}"/>
+                <a16:creationId xmlns:a16="http://schemas.microsoft.com/office/drawing/2014/main" id="{F2F57CB2-3F9D-E5FE-0B2A-F52037D630DE}"/>
               </a:ext>
             </a:extLst>
           </p:cNvPr>
@@ -5814,7 +5814,7 @@
                     <p:ext uri="{3AFAAA56-56D3-431D-BCD4-E75A35582382}">
                       <p173:tracksInfo xmlns:p173="http://schemas.microsoft.com/office/powerpoint/2017/3/main" displayLoc="slide">
                         <p173:trackLst>
-                          <p173:track id="{1536681F-0774-4353-A3B2-591DDAEE683B}" label="English (captions)" lang="en-US" r:embed="rId7"/>
+                          <p173:track id="{4B9873FE-946D-4ADF-8987-1049FC7E8C3D}" label="English (captions)" lang="en-US" r:embed="rId7"/>
                         </p173:trackLst>
                       </p173:tracksInfo>
                     </p:ext>
@@ -5832,7 +5832,7 @@
         </p:blipFill>
         <p:spPr>
           <a:xfrm>
-            <a:off x="127000" y="6350000"/>
+            <a:off x="12446000" y="127000"/>
             <a:ext cx="304800" cy="304800"/>
           </a:xfrm>
           <a:prstGeom prst="rect">
@@ -5847,10 +5847,10 @@
   </p:clrMapOvr>
   <mc:AlternateContent xmlns:mc="http://schemas.openxmlformats.org/markup-compatibility/2006">
     <mc:Choice xmlns:p14="http://schemas.microsoft.com/office/powerpoint/2010/main" Requires="p14">
-      <p:transition spd="slow" p14:dur="2000" advTm="91530"/>
+      <p:transition spd="slow" p14:dur="2000" advTm="94530"/>
     </mc:Choice>
     <mc:Fallback>
-      <p:transition spd="slow" advTm="91530"/>
+      <p:transition spd="slow" advTm="94530"/>
     </mc:Fallback>
   </mc:AlternateContent>
   <p:timing>
@@ -5986,7 +5986,7 @@
       </p:sp>
       <p:sp>
         <p:nvSpPr>
-          <p:cNvPr id="3" name="Tag What" descr="">
+          <p:cNvPr id="3" name="Tag What">
             <a:extLst>
               <a:ext uri="{C183D7F6-B498-43B3-948B-1728B52AA6E4}">
                 <adec:decorative xmlns:adec="http://schemas.microsoft.com/office/drawing/2017/decorative" val="1"/>
@@ -6055,7 +6055,7 @@
       </p:sp>
       <p:sp>
         <p:nvSpPr>
-          <p:cNvPr id="5" name="Reason 1" descr="">
+          <p:cNvPr id="5" name="Reason 1">
             <a:extLst>
               <a:ext uri="{C183D7F6-B498-43B3-948B-1728B52AA6E4}">
                 <adec:decorative xmlns:adec="http://schemas.microsoft.com/office/drawing/2017/decorative" val="1"/>
@@ -6095,7 +6095,7 @@
       </p:sp>
       <p:sp>
         <p:nvSpPr>
-          <p:cNvPr id="6" name="Icon FaUsersGear" descr="">
+          <p:cNvPr id="6" name="Icon FaUsersGear">
             <a:extLst>
               <a:ext uri="{C183D7F6-B498-43B3-948B-1728B52AA6E4}">
                 <adec:decorative xmlns:adec="http://schemas.microsoft.com/office/drawing/2017/decorative" val="1"/>
@@ -6126,7 +6126,7 @@
       </p:sp>
       <p:pic>
         <p:nvPicPr>
-          <p:cNvPr id="7" name="Image 0" descr="">
+          <p:cNvPr id="7" name="Image 0">
             <a:extLst>
               <a:ext uri="{C183D7F6-B498-43B3-948B-1728B52AA6E4}">
                 <adec:decorative xmlns:adec="http://schemas.microsoft.com/office/drawing/2017/decorative" val="1"/>
@@ -6215,7 +6215,7 @@
       </p:sp>
       <p:sp>
         <p:nvSpPr>
-          <p:cNvPr id="9" name="Reason 2" descr="">
+          <p:cNvPr id="9" name="Reason 2">
             <a:extLst>
               <a:ext uri="{C183D7F6-B498-43B3-948B-1728B52AA6E4}">
                 <adec:decorative xmlns:adec="http://schemas.microsoft.com/office/drawing/2017/decorative" val="1"/>
@@ -6255,7 +6255,7 @@
       </p:sp>
       <p:sp>
         <p:nvSpPr>
-          <p:cNvPr id="10" name="Icon FaChartLine" descr="">
+          <p:cNvPr id="10" name="Icon FaChartLine">
             <a:extLst>
               <a:ext uri="{C183D7F6-B498-43B3-948B-1728B52AA6E4}">
                 <adec:decorative xmlns:adec="http://schemas.microsoft.com/office/drawing/2017/decorative" val="1"/>
@@ -6286,7 +6286,7 @@
       </p:sp>
       <p:pic>
         <p:nvPicPr>
-          <p:cNvPr id="11" name="Image 1" descr="">
+          <p:cNvPr id="11" name="Image 1">
             <a:extLst>
               <a:ext uri="{C183D7F6-B498-43B3-948B-1728B52AA6E4}">
                 <adec:decorative xmlns:adec="http://schemas.microsoft.com/office/drawing/2017/decorative" val="1"/>
@@ -6375,7 +6375,7 @@
       </p:sp>
       <p:sp>
         <p:nvSpPr>
-          <p:cNvPr id="13" name="Reason 3" descr="">
+          <p:cNvPr id="13" name="Reason 3">
             <a:extLst>
               <a:ext uri="{C183D7F6-B498-43B3-948B-1728B52AA6E4}">
                 <adec:decorative xmlns:adec="http://schemas.microsoft.com/office/drawing/2017/decorative" val="1"/>
@@ -6415,7 +6415,7 @@
       </p:sp>
       <p:sp>
         <p:nvSpPr>
-          <p:cNvPr id="14" name="Icon FaShieldHalved" descr="">
+          <p:cNvPr id="14" name="Icon FaShieldHalved">
             <a:extLst>
               <a:ext uri="{C183D7F6-B498-43B3-948B-1728B52AA6E4}">
                 <adec:decorative xmlns:adec="http://schemas.microsoft.com/office/drawing/2017/decorative" val="1"/>
@@ -6446,7 +6446,7 @@
       </p:sp>
       <p:pic>
         <p:nvPicPr>
-          <p:cNvPr id="15" name="Image 2" descr="">
+          <p:cNvPr id="15" name="Image 2">
             <a:extLst>
               <a:ext uri="{C183D7F6-B498-43B3-948B-1728B52AA6E4}">
                 <adec:decorative xmlns:adec="http://schemas.microsoft.com/office/drawing/2017/decorative" val="1"/>
@@ -6535,7 +6535,7 @@
       </p:sp>
       <p:sp>
         <p:nvSpPr>
-          <p:cNvPr id="17" name="Reason 4" descr="">
+          <p:cNvPr id="17" name="Reason 4">
             <a:extLst>
               <a:ext uri="{C183D7F6-B498-43B3-948B-1728B52AA6E4}">
                 <adec:decorative xmlns:adec="http://schemas.microsoft.com/office/drawing/2017/decorative" val="1"/>
@@ -6575,7 +6575,7 @@
       </p:sp>
       <p:sp>
         <p:nvSpPr>
-          <p:cNvPr id="18" name="Icon FaArrowsRotate" descr="">
+          <p:cNvPr id="18" name="Icon FaArrowsRotate">
             <a:extLst>
               <a:ext uri="{C183D7F6-B498-43B3-948B-1728B52AA6E4}">
                 <adec:decorative xmlns:adec="http://schemas.microsoft.com/office/drawing/2017/decorative" val="1"/>
@@ -6606,7 +6606,7 @@
       </p:sp>
       <p:pic>
         <p:nvPicPr>
-          <p:cNvPr id="19" name="Image 3" descr="">
+          <p:cNvPr id="19" name="Image 3">
             <a:extLst>
               <a:ext uri="{C183D7F6-B498-43B3-948B-1728B52AA6E4}">
                 <adec:decorative xmlns:adec="http://schemas.microsoft.com/office/drawing/2017/decorative" val="1"/>
@@ -6695,7 +6695,7 @@
       </p:sp>
       <p:sp>
         <p:nvSpPr>
-          <p:cNvPr id="21" name="Limits" descr="">
+          <p:cNvPr id="21" name="Limits">
             <a:extLst>
               <a:ext uri="{C183D7F6-B498-43B3-948B-1728B52AA6E4}">
                 <adec:decorative xmlns:adec="http://schemas.microsoft.com/office/drawing/2017/decorative" val="1"/>
@@ -6779,7 +6779,7 @@
       </p:sp>
       <p:sp>
         <p:nvSpPr>
-          <p:cNvPr id="23" name="Upside" descr="">
+          <p:cNvPr id="23" name="Upside">
             <a:extLst>
               <a:ext uri="{C183D7F6-B498-43B3-948B-1728B52AA6E4}">
                 <adec:decorative xmlns:adec="http://schemas.microsoft.com/office/drawing/2017/decorative" val="1"/>
@@ -6908,11 +6908,11 @@
       </p:sp>
       <p:pic>
         <p:nvPicPr>
-          <p:cNvPr id="26" name="Narration" descr="Narration for this slide; captions available" title="Narration">
+          <p:cNvPr id="26" name="Narration" descr="Narration for this slide; captions available">
             <a:hlinkClick r:id="" action="ppaction://media"/>
             <a:extLst>
               <a:ext uri="{FF2B5EF4-FFF2-40B4-BE49-F238E27FC236}">
-                <a16:creationId xmlns:a16="http://schemas.microsoft.com/office/drawing/2014/main" id="{2EA76901-B22A-21AE-381C-0229F389A14A}"/>
+                <a16:creationId xmlns:a16="http://schemas.microsoft.com/office/drawing/2014/main" id="{B4857834-B44E-C022-D143-84A66264FAF9}"/>
               </a:ext>
             </a:extLst>
           </p:cNvPr>
@@ -6928,7 +6928,7 @@
                     <p:ext uri="{3AFAAA56-56D3-431D-BCD4-E75A35582382}">
                       <p173:tracksInfo xmlns:p173="http://schemas.microsoft.com/office/powerpoint/2017/3/main" displayLoc="slide">
                         <p173:trackLst>
-                          <p173:track id="{183D3B91-08CB-4F28-BBBC-54B8294ADF57}" label="English (captions)" lang="en-US" r:embed="rId10"/>
+                          <p173:track id="{57C7F4A2-F778-49FD-87C1-02EAA9D6B9D0}" label="English (captions)" lang="en-US" r:embed="rId10"/>
                         </p173:trackLst>
                       </p173:tracksInfo>
                     </p:ext>
@@ -6946,7 +6946,7 @@
         </p:blipFill>
         <p:spPr>
           <a:xfrm>
-            <a:off x="127000" y="6350000"/>
+            <a:off x="12446000" y="127000"/>
             <a:ext cx="304800" cy="304800"/>
           </a:xfrm>
           <a:prstGeom prst="rect">
@@ -6961,10 +6961,10 @@
   </p:clrMapOvr>
   <mc:AlternateContent xmlns:mc="http://schemas.openxmlformats.org/markup-compatibility/2006">
     <mc:Choice xmlns:p14="http://schemas.microsoft.com/office/powerpoint/2010/main" Requires="p14">
-      <p:transition spd="slow" p14:dur="2000" advTm="118140"/>
+      <p:transition spd="slow" p14:dur="2000" advTm="121140"/>
     </mc:Choice>
     <mc:Fallback>
-      <p:transition spd="slow" advTm="118140"/>
+      <p:transition spd="slow" advTm="121140"/>
     </mc:Fallback>
   </mc:AlternateContent>
   <p:timing>
@@ -7100,7 +7100,7 @@
       </p:sp>
       <p:sp>
         <p:nvSpPr>
-          <p:cNvPr id="3" name="Tag Who" descr="">
+          <p:cNvPr id="3" name="Tag Who">
             <a:extLst>
               <a:ext uri="{C183D7F6-B498-43B3-948B-1728B52AA6E4}">
                 <adec:decorative xmlns:adec="http://schemas.microsoft.com/office/drawing/2017/decorative" val="1"/>
@@ -7169,7 +7169,7 @@
       </p:sp>
       <p:sp>
         <p:nvSpPr>
-          <p:cNvPr id="5" name="Who col 1" descr="">
+          <p:cNvPr id="5" name="Who col 1">
             <a:extLst>
               <a:ext uri="{C183D7F6-B498-43B3-948B-1728B52AA6E4}">
                 <adec:decorative xmlns:adec="http://schemas.microsoft.com/office/drawing/2017/decorative" val="1"/>
@@ -7209,7 +7209,7 @@
       </p:sp>
       <p:sp>
         <p:nvSpPr>
-          <p:cNvPr id="6" name="Icon FaBuildingColumns" descr="">
+          <p:cNvPr id="6" name="Icon FaBuildingColumns">
             <a:extLst>
               <a:ext uri="{C183D7F6-B498-43B3-948B-1728B52AA6E4}">
                 <adec:decorative xmlns:adec="http://schemas.microsoft.com/office/drawing/2017/decorative" val="1"/>
@@ -7240,7 +7240,7 @@
       </p:sp>
       <p:pic>
         <p:nvPicPr>
-          <p:cNvPr id="7" name="Image 0" descr="">
+          <p:cNvPr id="7" name="Image 0">
             <a:extLst>
               <a:ext uri="{C183D7F6-B498-43B3-948B-1728B52AA6E4}">
                 <adec:decorative xmlns:adec="http://schemas.microsoft.com/office/drawing/2017/decorative" val="1"/>
@@ -7399,7 +7399,7 @@
       </p:sp>
       <p:sp>
         <p:nvSpPr>
-          <p:cNvPr id="10" name="Who col 2" descr="">
+          <p:cNvPr id="10" name="Who col 2">
             <a:extLst>
               <a:ext uri="{C183D7F6-B498-43B3-948B-1728B52AA6E4}">
                 <adec:decorative xmlns:adec="http://schemas.microsoft.com/office/drawing/2017/decorative" val="1"/>
@@ -7439,7 +7439,7 @@
       </p:sp>
       <p:sp>
         <p:nvSpPr>
-          <p:cNvPr id="11" name="Icon FaUsersGear" descr="">
+          <p:cNvPr id="11" name="Icon FaUsersGear">
             <a:extLst>
               <a:ext uri="{C183D7F6-B498-43B3-948B-1728B52AA6E4}">
                 <adec:decorative xmlns:adec="http://schemas.microsoft.com/office/drawing/2017/decorative" val="1"/>
@@ -7470,7 +7470,7 @@
       </p:sp>
       <p:pic>
         <p:nvPicPr>
-          <p:cNvPr id="12" name="Image 1" descr="">
+          <p:cNvPr id="12" name="Image 1">
             <a:extLst>
               <a:ext uri="{C183D7F6-B498-43B3-948B-1728B52AA6E4}">
                 <adec:decorative xmlns:adec="http://schemas.microsoft.com/office/drawing/2017/decorative" val="1"/>
@@ -7663,7 +7663,7 @@
       </p:sp>
       <p:sp>
         <p:nvSpPr>
-          <p:cNvPr id="15" name="Who col 3" descr="">
+          <p:cNvPr id="15" name="Who col 3">
             <a:extLst>
               <a:ext uri="{C183D7F6-B498-43B3-948B-1728B52AA6E4}">
                 <adec:decorative xmlns:adec="http://schemas.microsoft.com/office/drawing/2017/decorative" val="1"/>
@@ -7703,7 +7703,7 @@
       </p:sp>
       <p:sp>
         <p:nvSpPr>
-          <p:cNvPr id="16" name="Icon FaShieldHalved" descr="">
+          <p:cNvPr id="16" name="Icon FaShieldHalved">
             <a:extLst>
               <a:ext uri="{C183D7F6-B498-43B3-948B-1728B52AA6E4}">
                 <adec:decorative xmlns:adec="http://schemas.microsoft.com/office/drawing/2017/decorative" val="1"/>
@@ -7734,7 +7734,7 @@
       </p:sp>
       <p:pic>
         <p:nvPicPr>
-          <p:cNvPr id="17" name="Image 2" descr="">
+          <p:cNvPr id="17" name="Image 2">
             <a:extLst>
               <a:ext uri="{C183D7F6-B498-43B3-948B-1728B52AA6E4}">
                 <adec:decorative xmlns:adec="http://schemas.microsoft.com/office/drawing/2017/decorative" val="1"/>
@@ -7927,7 +7927,7 @@
       </p:sp>
       <p:sp>
         <p:nvSpPr>
-          <p:cNvPr id="20" name="My role" descr="">
+          <p:cNvPr id="20" name="My role">
             <a:extLst>
               <a:ext uri="{C183D7F6-B498-43B3-948B-1728B52AA6E4}">
                 <adec:decorative xmlns:adec="http://schemas.microsoft.com/office/drawing/2017/decorative" val="1"/>
@@ -7967,7 +7967,7 @@
       </p:sp>
       <p:sp>
         <p:nvSpPr>
-          <p:cNvPr id="21" name="Icon FaSitemap" descr="">
+          <p:cNvPr id="21" name="Icon FaSitemap">
             <a:extLst>
               <a:ext uri="{C183D7F6-B498-43B3-948B-1728B52AA6E4}">
                 <adec:decorative xmlns:adec="http://schemas.microsoft.com/office/drawing/2017/decorative" val="1"/>
@@ -7998,7 +7998,7 @@
       </p:sp>
       <p:pic>
         <p:nvPicPr>
-          <p:cNvPr id="22" name="Image 3" descr="">
+          <p:cNvPr id="22" name="Image 3">
             <a:extLst>
               <a:ext uri="{C183D7F6-B498-43B3-948B-1728B52AA6E4}">
                 <adec:decorative xmlns:adec="http://schemas.microsoft.com/office/drawing/2017/decorative" val="1"/>
@@ -8117,11 +8117,11 @@
       </p:sp>
       <p:pic>
         <p:nvPicPr>
-          <p:cNvPr id="24" name="Narration" descr="Narration for this slide; captions available" title="Narration">
+          <p:cNvPr id="24" name="Narration" descr="Narration for this slide; captions available">
             <a:hlinkClick r:id="" action="ppaction://media"/>
             <a:extLst>
               <a:ext uri="{FF2B5EF4-FFF2-40B4-BE49-F238E27FC236}">
-                <a16:creationId xmlns:a16="http://schemas.microsoft.com/office/drawing/2014/main" id="{B41B9E8D-B208-2BB3-CED6-A571BFC2E681}"/>
+                <a16:creationId xmlns:a16="http://schemas.microsoft.com/office/drawing/2014/main" id="{C5688826-92B7-9626-3082-B17BBF81AFA5}"/>
               </a:ext>
             </a:extLst>
           </p:cNvPr>
@@ -8137,7 +8137,7 @@
                     <p:ext uri="{3AFAAA56-56D3-431D-BCD4-E75A35582382}">
                       <p173:tracksInfo xmlns:p173="http://schemas.microsoft.com/office/powerpoint/2017/3/main" displayLoc="slide">
                         <p173:trackLst>
-                          <p173:track id="{B6BE334C-9193-4571-B9B0-DF47DEF944E3}" label="English (captions)" lang="en-US" r:embed="rId10"/>
+                          <p173:track id="{3CC9EA29-4E81-4709-A6C2-F155CA960B8C}" label="English (captions)" lang="en-US" r:embed="rId10"/>
                         </p173:trackLst>
                       </p173:tracksInfo>
                     </p:ext>
@@ -8155,7 +8155,7 @@
         </p:blipFill>
         <p:spPr>
           <a:xfrm>
-            <a:off x="127000" y="6350000"/>
+            <a:off x="12446000" y="127000"/>
             <a:ext cx="304800" cy="304800"/>
           </a:xfrm>
           <a:prstGeom prst="rect">
@@ -8170,10 +8170,10 @@
   </p:clrMapOvr>
   <mc:AlternateContent xmlns:mc="http://schemas.openxmlformats.org/markup-compatibility/2006">
     <mc:Choice xmlns:p14="http://schemas.microsoft.com/office/powerpoint/2010/main" Requires="p14">
-      <p:transition spd="slow" p14:dur="2000" advTm="99330"/>
+      <p:transition spd="slow" p14:dur="2000" advTm="102330"/>
     </mc:Choice>
     <mc:Fallback>
-      <p:transition spd="slow" advTm="99330"/>
+      <p:transition spd="slow" advTm="102330"/>
     </mc:Fallback>
   </mc:AlternateContent>
   <p:timing>
@@ -8309,7 +8309,7 @@
       </p:sp>
       <p:sp>
         <p:nvSpPr>
-          <p:cNvPr id="3" name="Tag How" descr="">
+          <p:cNvPr id="3" name="Tag How">
             <a:extLst>
               <a:ext uri="{C183D7F6-B498-43B3-948B-1728B52AA6E4}">
                 <adec:decorative xmlns:adec="http://schemas.microsoft.com/office/drawing/2017/decorative" val="1"/>
@@ -8414,7 +8414,7 @@
       </p:sp>
       <p:sp>
         <p:nvSpPr>
-          <p:cNvPr id="6" name="Entity Person" descr="">
+          <p:cNvPr id="6" name="Entity Person">
             <a:extLst>
               <a:ext uri="{C183D7F6-B498-43B3-948B-1728B52AA6E4}">
                 <adec:decorative xmlns:adec="http://schemas.microsoft.com/office/drawing/2017/decorative" val="1"/>
@@ -8510,7 +8510,7 @@
       </p:sp>
       <p:sp>
         <p:nvSpPr>
-          <p:cNvPr id="8" name="Entity Identifier" descr="">
+          <p:cNvPr id="8" name="Entity Identifier">
             <a:extLst>
               <a:ext uri="{C183D7F6-B498-43B3-948B-1728B52AA6E4}">
                 <adec:decorative xmlns:adec="http://schemas.microsoft.com/office/drawing/2017/decorative" val="1"/>
@@ -8614,7 +8614,7 @@
       </p:sp>
       <p:sp>
         <p:nvSpPr>
-          <p:cNvPr id="10" name="Entity Affiliation" descr="">
+          <p:cNvPr id="10" name="Entity Affiliation">
             <a:extLst>
               <a:ext uri="{C183D7F6-B498-43B3-948B-1728B52AA6E4}">
                 <adec:decorative xmlns:adec="http://schemas.microsoft.com/office/drawing/2017/decorative" val="1"/>
@@ -8718,7 +8718,7 @@
       </p:sp>
       <p:sp>
         <p:nvSpPr>
-          <p:cNvPr id="12" name="Entity Account" descr="">
+          <p:cNvPr id="12" name="Entity Account">
             <a:extLst>
               <a:ext uri="{C183D7F6-B498-43B3-948B-1728B52AA6E4}">
                 <adec:decorative xmlns:adec="http://schemas.microsoft.com/office/drawing/2017/decorative" val="1"/>
@@ -8822,7 +8822,7 @@
       </p:sp>
       <p:sp>
         <p:nvSpPr>
-          <p:cNvPr id="14" name="Entity Assignment" descr="">
+          <p:cNvPr id="14" name="Entity Assignment">
             <a:extLst>
               <a:ext uri="{C183D7F6-B498-43B3-948B-1728B52AA6E4}">
                 <adec:decorative xmlns:adec="http://schemas.microsoft.com/office/drawing/2017/decorative" val="1"/>
@@ -8926,7 +8926,7 @@
       </p:sp>
       <p:sp>
         <p:nvSpPr>
-          <p:cNvPr id="16" name="Entity Org unit" descr="">
+          <p:cNvPr id="16" name="Entity Org unit">
             <a:extLst>
               <a:ext uri="{C183D7F6-B498-43B3-948B-1728B52AA6E4}">
                 <adec:decorative xmlns:adec="http://schemas.microsoft.com/office/drawing/2017/decorative" val="1"/>
@@ -9030,7 +9030,7 @@
       </p:sp>
       <p:sp>
         <p:nvSpPr>
-          <p:cNvPr id="18" name="Shape 16" descr="">
+          <p:cNvPr id="18" name="Shape 16">
             <a:extLst>
               <a:ext uri="{C183D7F6-B498-43B3-948B-1728B52AA6E4}">
                 <adec:decorative xmlns:adec="http://schemas.microsoft.com/office/drawing/2017/decorative" val="1"/>
@@ -9059,7 +9059,7 @@
       </p:sp>
       <p:sp>
         <p:nvSpPr>
-          <p:cNvPr id="19" name="Shape 17" descr="">
+          <p:cNvPr id="19" name="Shape 17">
             <a:extLst>
               <a:ext uri="{C183D7F6-B498-43B3-948B-1728B52AA6E4}">
                 <adec:decorative xmlns:adec="http://schemas.microsoft.com/office/drawing/2017/decorative" val="1"/>
@@ -9088,7 +9088,7 @@
       </p:sp>
       <p:sp>
         <p:nvSpPr>
-          <p:cNvPr id="20" name="Shape 18" descr="">
+          <p:cNvPr id="20" name="Shape 18">
             <a:extLst>
               <a:ext uri="{C183D7F6-B498-43B3-948B-1728B52AA6E4}">
                 <adec:decorative xmlns:adec="http://schemas.microsoft.com/office/drawing/2017/decorative" val="1"/>
@@ -9117,7 +9117,7 @@
       </p:sp>
       <p:sp>
         <p:nvSpPr>
-          <p:cNvPr id="21" name="Shape 19" descr="">
+          <p:cNvPr id="21" name="Shape 19">
             <a:extLst>
               <a:ext uri="{C183D7F6-B498-43B3-948B-1728B52AA6E4}">
                 <adec:decorative xmlns:adec="http://schemas.microsoft.com/office/drawing/2017/decorative" val="1"/>
@@ -9146,7 +9146,7 @@
       </p:sp>
       <p:sp>
         <p:nvSpPr>
-          <p:cNvPr id="22" name="Shape 20" descr="">
+          <p:cNvPr id="22" name="Shape 20">
             <a:extLst>
               <a:ext uri="{C183D7F6-B498-43B3-948B-1728B52AA6E4}">
                 <adec:decorative xmlns:adec="http://schemas.microsoft.com/office/drawing/2017/decorative" val="1"/>
@@ -10155,7 +10155,7 @@
       </p:graphicFrame>
       <p:sp>
         <p:nvSpPr>
-          <p:cNvPr id="26" name="Standards" descr="">
+          <p:cNvPr id="26" name="Standards">
             <a:extLst>
               <a:ext uri="{C183D7F6-B498-43B3-948B-1728B52AA6E4}">
                 <adec:decorative xmlns:adec="http://schemas.microsoft.com/office/drawing/2017/decorative" val="1"/>
@@ -10284,11 +10284,11 @@
       </p:sp>
       <p:pic>
         <p:nvPicPr>
-          <p:cNvPr id="29" name="Narration" descr="Narration for this slide; captions available" title="Narration">
+          <p:cNvPr id="29" name="Narration" descr="Narration for this slide; captions available">
             <a:hlinkClick r:id="" action="ppaction://media"/>
             <a:extLst>
               <a:ext uri="{FF2B5EF4-FFF2-40B4-BE49-F238E27FC236}">
-                <a16:creationId xmlns:a16="http://schemas.microsoft.com/office/drawing/2014/main" id="{A34A54EA-8A17-4039-1AEB-6F9A88D8B367}"/>
+                <a16:creationId xmlns:a16="http://schemas.microsoft.com/office/drawing/2014/main" id="{1F89F6D6-0EA9-A89F-11F4-D8651B427825}"/>
               </a:ext>
             </a:extLst>
           </p:cNvPr>
@@ -10304,7 +10304,7 @@
                     <p:ext uri="{3AFAAA56-56D3-431D-BCD4-E75A35582382}">
                       <p173:tracksInfo xmlns:p173="http://schemas.microsoft.com/office/powerpoint/2017/3/main" displayLoc="slide">
                         <p173:trackLst>
-                          <p173:track id="{117FB669-3C59-4A94-B827-DAC38D92387C}" label="English (captions)" lang="en-US" r:embed="rId6"/>
+                          <p173:track id="{ABE49BB6-EEF0-46B7-BDAA-A2906A8A0DF1}" label="English (captions)" lang="en-US" r:embed="rId6"/>
                         </p173:trackLst>
                       </p173:tracksInfo>
                     </p:ext>
@@ -10322,7 +10322,7 @@
         </p:blipFill>
         <p:spPr>
           <a:xfrm>
-            <a:off x="127000" y="6350000"/>
+            <a:off x="12446000" y="127000"/>
             <a:ext cx="304800" cy="304800"/>
           </a:xfrm>
           <a:prstGeom prst="rect">
@@ -10337,10 +10337,10 @@
   </p:clrMapOvr>
   <mc:AlternateContent xmlns:mc="http://schemas.openxmlformats.org/markup-compatibility/2006">
     <mc:Choice xmlns:p14="http://schemas.microsoft.com/office/powerpoint/2010/main" Requires="p14">
-      <p:transition spd="slow" p14:dur="2000" advTm="42330"/>
+      <p:transition spd="slow" p14:dur="2000" advTm="45330"/>
     </mc:Choice>
     <mc:Fallback>
-      <p:transition spd="slow" advTm="42330"/>
+      <p:transition spd="slow" advTm="45330"/>
     </mc:Fallback>
   </mc:AlternateContent>
   <p:timing>
@@ -10476,7 +10476,7 @@
       </p:sp>
       <p:sp>
         <p:nvSpPr>
-          <p:cNvPr id="3" name="Tag How" descr="">
+          <p:cNvPr id="3" name="Tag How">
             <a:extLst>
               <a:ext uri="{C183D7F6-B498-43B3-948B-1728B52AA6E4}">
                 <adec:decorative xmlns:adec="http://schemas.microsoft.com/office/drawing/2017/decorative" val="1"/>
@@ -10545,7 +10545,7 @@
       </p:sp>
       <p:sp>
         <p:nvSpPr>
-          <p:cNvPr id="5" name="How col 1" descr="">
+          <p:cNvPr id="5" name="How col 1">
             <a:extLst>
               <a:ext uri="{C183D7F6-B498-43B3-948B-1728B52AA6E4}">
                 <adec:decorative xmlns:adec="http://schemas.microsoft.com/office/drawing/2017/decorative" val="1"/>
@@ -10585,7 +10585,7 @@
       </p:sp>
       <p:sp>
         <p:nvSpPr>
-          <p:cNvPr id="6" name="Icon FaDatabase" descr="">
+          <p:cNvPr id="6" name="Icon FaDatabase">
             <a:extLst>
               <a:ext uri="{C183D7F6-B498-43B3-948B-1728B52AA6E4}">
                 <adec:decorative xmlns:adec="http://schemas.microsoft.com/office/drawing/2017/decorative" val="1"/>
@@ -10616,7 +10616,7 @@
       </p:sp>
       <p:pic>
         <p:nvPicPr>
-          <p:cNvPr id="7" name="Image 0" descr="">
+          <p:cNvPr id="7" name="Image 0">
             <a:extLst>
               <a:ext uri="{C183D7F6-B498-43B3-948B-1728B52AA6E4}">
                 <adec:decorative xmlns:adec="http://schemas.microsoft.com/office/drawing/2017/decorative" val="1"/>
@@ -10779,7 +10779,7 @@
       </p:sp>
       <p:sp>
         <p:nvSpPr>
-          <p:cNvPr id="10" name="How col 2" descr="">
+          <p:cNvPr id="10" name="How col 2">
             <a:extLst>
               <a:ext uri="{C183D7F6-B498-43B3-948B-1728B52AA6E4}">
                 <adec:decorative xmlns:adec="http://schemas.microsoft.com/office/drawing/2017/decorative" val="1"/>
@@ -10819,7 +10819,7 @@
       </p:sp>
       <p:sp>
         <p:nvSpPr>
-          <p:cNvPr id="11" name="Icon FaLock" descr="">
+          <p:cNvPr id="11" name="Icon FaLock">
             <a:extLst>
               <a:ext uri="{C183D7F6-B498-43B3-948B-1728B52AA6E4}">
                 <adec:decorative xmlns:adec="http://schemas.microsoft.com/office/drawing/2017/decorative" val="1"/>
@@ -10850,7 +10850,7 @@
       </p:sp>
       <p:pic>
         <p:nvPicPr>
-          <p:cNvPr id="12" name="Image 1" descr="">
+          <p:cNvPr id="12" name="Image 1">
             <a:extLst>
               <a:ext uri="{C183D7F6-B498-43B3-948B-1728B52AA6E4}">
                 <adec:decorative xmlns:adec="http://schemas.microsoft.com/office/drawing/2017/decorative" val="1"/>
@@ -10995,7 +10995,7 @@
       </p:sp>
       <p:sp>
         <p:nvSpPr>
-          <p:cNvPr id="15" name="How col 3" descr="">
+          <p:cNvPr id="15" name="How col 3">
             <a:extLst>
               <a:ext uri="{C183D7F6-B498-43B3-948B-1728B52AA6E4}">
                 <adec:decorative xmlns:adec="http://schemas.microsoft.com/office/drawing/2017/decorative" val="1"/>
@@ -11035,7 +11035,7 @@
       </p:sp>
       <p:sp>
         <p:nvSpPr>
-          <p:cNvPr id="16" name="Icon FaRoute" descr="">
+          <p:cNvPr id="16" name="Icon FaRoute">
             <a:extLst>
               <a:ext uri="{C183D7F6-B498-43B3-948B-1728B52AA6E4}">
                 <adec:decorative xmlns:adec="http://schemas.microsoft.com/office/drawing/2017/decorative" val="1"/>
@@ -11066,7 +11066,7 @@
       </p:sp>
       <p:pic>
         <p:nvPicPr>
-          <p:cNvPr id="17" name="Image 2" descr="">
+          <p:cNvPr id="17" name="Image 2">
             <a:extLst>
               <a:ext uri="{C183D7F6-B498-43B3-948B-1728B52AA6E4}">
                 <adec:decorative xmlns:adec="http://schemas.microsoft.com/office/drawing/2017/decorative" val="1"/>
@@ -11265,7 +11265,7 @@
       </p:sp>
       <p:sp>
         <p:nvSpPr>
-          <p:cNvPr id="21" name="Stack 1" descr="">
+          <p:cNvPr id="21" name="Stack 1">
             <a:extLst>
               <a:ext uri="{C183D7F6-B498-43B3-948B-1728B52AA6E4}">
                 <adec:decorative xmlns:adec="http://schemas.microsoft.com/office/drawing/2017/decorative" val="1"/>
@@ -11341,7 +11341,7 @@
       </p:sp>
       <p:sp>
         <p:nvSpPr>
-          <p:cNvPr id="23" name="Shape 18" descr="">
+          <p:cNvPr id="23" name="Shape 18">
             <a:extLst>
               <a:ext uri="{C183D7F6-B498-43B3-948B-1728B52AA6E4}">
                 <adec:decorative xmlns:adec="http://schemas.microsoft.com/office/drawing/2017/decorative" val="1"/>
@@ -11371,7 +11371,7 @@
       </p:sp>
       <p:sp>
         <p:nvSpPr>
-          <p:cNvPr id="24" name="Stack 2" descr="">
+          <p:cNvPr id="24" name="Stack 2">
             <a:extLst>
               <a:ext uri="{C183D7F6-B498-43B3-948B-1728B52AA6E4}">
                 <adec:decorative xmlns:adec="http://schemas.microsoft.com/office/drawing/2017/decorative" val="1"/>
@@ -11447,7 +11447,7 @@
       </p:sp>
       <p:sp>
         <p:nvSpPr>
-          <p:cNvPr id="26" name="Shape 21" descr="">
+          <p:cNvPr id="26" name="Shape 21">
             <a:extLst>
               <a:ext uri="{C183D7F6-B498-43B3-948B-1728B52AA6E4}">
                 <adec:decorative xmlns:adec="http://schemas.microsoft.com/office/drawing/2017/decorative" val="1"/>
@@ -11477,7 +11477,7 @@
       </p:sp>
       <p:sp>
         <p:nvSpPr>
-          <p:cNvPr id="27" name="Stack 3" descr="">
+          <p:cNvPr id="27" name="Stack 3">
             <a:extLst>
               <a:ext uri="{C183D7F6-B498-43B3-948B-1728B52AA6E4}">
                 <adec:decorative xmlns:adec="http://schemas.microsoft.com/office/drawing/2017/decorative" val="1"/>
@@ -11553,7 +11553,7 @@
       </p:sp>
       <p:sp>
         <p:nvSpPr>
-          <p:cNvPr id="29" name="Shape 24" descr="">
+          <p:cNvPr id="29" name="Shape 24">
             <a:extLst>
               <a:ext uri="{C183D7F6-B498-43B3-948B-1728B52AA6E4}">
                 <adec:decorative xmlns:adec="http://schemas.microsoft.com/office/drawing/2017/decorative" val="1"/>
@@ -11583,7 +11583,7 @@
       </p:sp>
       <p:sp>
         <p:nvSpPr>
-          <p:cNvPr id="30" name="Stack 4" descr="">
+          <p:cNvPr id="30" name="Stack 4">
             <a:extLst>
               <a:ext uri="{C183D7F6-B498-43B3-948B-1728B52AA6E4}">
                 <adec:decorative xmlns:adec="http://schemas.microsoft.com/office/drawing/2017/decorative" val="1"/>
@@ -11704,11 +11704,11 @@
       </p:sp>
       <p:pic>
         <p:nvPicPr>
-          <p:cNvPr id="33" name="Narration" descr="Narration for this slide; captions available" title="Narration">
+          <p:cNvPr id="33" name="Narration" descr="Narration for this slide; captions available">
             <a:hlinkClick r:id="" action="ppaction://media"/>
             <a:extLst>
               <a:ext uri="{FF2B5EF4-FFF2-40B4-BE49-F238E27FC236}">
-                <a16:creationId xmlns:a16="http://schemas.microsoft.com/office/drawing/2014/main" id="{52CDD031-C1C2-995A-1EB0-3647A6D96B95}"/>
+                <a16:creationId xmlns:a16="http://schemas.microsoft.com/office/drawing/2014/main" id="{0D16759D-FC84-7C43-EFBD-0F53681D9B49}"/>
               </a:ext>
             </a:extLst>
           </p:cNvPr>
@@ -11724,7 +11724,7 @@
                     <p:ext uri="{3AFAAA56-56D3-431D-BCD4-E75A35582382}">
                       <p173:tracksInfo xmlns:p173="http://schemas.microsoft.com/office/powerpoint/2017/3/main" displayLoc="slide">
                         <p173:trackLst>
-                          <p173:track id="{6A8DAEA4-3696-4380-B2EB-E5F5EB274EE4}" label="English (captions)" lang="en-US" r:embed="rId9"/>
+                          <p173:track id="{D2DC1D8F-8535-433F-9BE0-BB0640D6E109}" label="English (captions)" lang="en-US" r:embed="rId9"/>
                         </p173:trackLst>
                       </p173:tracksInfo>
                     </p:ext>
@@ -11742,7 +11742,7 @@
         </p:blipFill>
         <p:spPr>
           <a:xfrm>
-            <a:off x="127000" y="6350000"/>
+            <a:off x="12446000" y="127000"/>
             <a:ext cx="304800" cy="304800"/>
           </a:xfrm>
           <a:prstGeom prst="rect">
@@ -11757,10 +11757,10 @@
   </p:clrMapOvr>
   <mc:AlternateContent xmlns:mc="http://schemas.openxmlformats.org/markup-compatibility/2006">
     <mc:Choice xmlns:p14="http://schemas.microsoft.com/office/powerpoint/2010/main" Requires="p14">
-      <p:transition spd="slow" p14:dur="2000" advTm="82100"/>
+      <p:transition spd="slow" p14:dur="2000" advTm="85100"/>
     </mc:Choice>
     <mc:Fallback>
-      <p:transition spd="slow" advTm="82100"/>
+      <p:transition spd="slow" advTm="85100"/>
     </mc:Fallback>
   </mc:AlternateContent>
   <p:timing>
@@ -11896,7 +11896,7 @@
       </p:sp>
       <p:sp>
         <p:nvSpPr>
-          <p:cNvPr id="3" name="Tag How" descr="">
+          <p:cNvPr id="3" name="Tag How">
             <a:extLst>
               <a:ext uri="{C183D7F6-B498-43B3-948B-1728B52AA6E4}">
                 <adec:decorative xmlns:adec="http://schemas.microsoft.com/office/drawing/2017/decorative" val="1"/>
@@ -12001,7 +12001,7 @@
       </p:sp>
       <p:sp>
         <p:nvSpPr>
-          <p:cNvPr id="6" name="Measure 1" descr="">
+          <p:cNvPr id="6" name="Measure 1">
             <a:extLst>
               <a:ext uri="{C183D7F6-B498-43B3-948B-1728B52AA6E4}">
                 <adec:decorative xmlns:adec="http://schemas.microsoft.com/office/drawing/2017/decorative" val="1"/>
@@ -12041,7 +12041,7 @@
       </p:sp>
       <p:sp>
         <p:nvSpPr>
-          <p:cNvPr id="7" name="Icon FaUserXmark" descr="">
+          <p:cNvPr id="7" name="Icon FaUserXmark">
             <a:extLst>
               <a:ext uri="{C183D7F6-B498-43B3-948B-1728B52AA6E4}">
                 <adec:decorative xmlns:adec="http://schemas.microsoft.com/office/drawing/2017/decorative" val="1"/>
@@ -12072,7 +12072,7 @@
       </p:sp>
       <p:pic>
         <p:nvPicPr>
-          <p:cNvPr id="8" name="Image 0" descr="">
+          <p:cNvPr id="8" name="Image 0">
             <a:extLst>
               <a:ext uri="{C183D7F6-B498-43B3-948B-1728B52AA6E4}">
                 <adec:decorative xmlns:adec="http://schemas.microsoft.com/office/drawing/2017/decorative" val="1"/>
@@ -12152,7 +12152,7 @@
       </p:sp>
       <p:sp>
         <p:nvSpPr>
-          <p:cNvPr id="10" name="Measure 2" descr="">
+          <p:cNvPr id="10" name="Measure 2">
             <a:extLst>
               <a:ext uri="{C183D7F6-B498-43B3-948B-1728B52AA6E4}">
                 <adec:decorative xmlns:adec="http://schemas.microsoft.com/office/drawing/2017/decorative" val="1"/>
@@ -12192,7 +12192,7 @@
       </p:sp>
       <p:sp>
         <p:nvSpPr>
-          <p:cNvPr id="11" name="Icon FaIdCard" descr="">
+          <p:cNvPr id="11" name="Icon FaIdCard">
             <a:extLst>
               <a:ext uri="{C183D7F6-B498-43B3-948B-1728B52AA6E4}">
                 <adec:decorative xmlns:adec="http://schemas.microsoft.com/office/drawing/2017/decorative" val="1"/>
@@ -12223,7 +12223,7 @@
       </p:sp>
       <p:pic>
         <p:nvPicPr>
-          <p:cNvPr id="12" name="Image 1" descr="">
+          <p:cNvPr id="12" name="Image 1">
             <a:extLst>
               <a:ext uri="{C183D7F6-B498-43B3-948B-1728B52AA6E4}">
                 <adec:decorative xmlns:adec="http://schemas.microsoft.com/office/drawing/2017/decorative" val="1"/>
@@ -12303,7 +12303,7 @@
       </p:sp>
       <p:sp>
         <p:nvSpPr>
-          <p:cNvPr id="14" name="Measure 3" descr="">
+          <p:cNvPr id="14" name="Measure 3">
             <a:extLst>
               <a:ext uri="{C183D7F6-B498-43B3-948B-1728B52AA6E4}">
                 <adec:decorative xmlns:adec="http://schemas.microsoft.com/office/drawing/2017/decorative" val="1"/>
@@ -12343,7 +12343,7 @@
       </p:sp>
       <p:sp>
         <p:nvSpPr>
-          <p:cNvPr id="15" name="Icon FaFingerprint" descr="">
+          <p:cNvPr id="15" name="Icon FaFingerprint">
             <a:extLst>
               <a:ext uri="{C183D7F6-B498-43B3-948B-1728B52AA6E4}">
                 <adec:decorative xmlns:adec="http://schemas.microsoft.com/office/drawing/2017/decorative" val="1"/>
@@ -12374,7 +12374,7 @@
       </p:sp>
       <p:pic>
         <p:nvPicPr>
-          <p:cNvPr id="16" name="Image 2" descr="">
+          <p:cNvPr id="16" name="Image 2">
             <a:extLst>
               <a:ext uri="{C183D7F6-B498-43B3-948B-1728B52AA6E4}">
                 <adec:decorative xmlns:adec="http://schemas.microsoft.com/office/drawing/2017/decorative" val="1"/>
@@ -12454,7 +12454,7 @@
       </p:sp>
       <p:sp>
         <p:nvSpPr>
-          <p:cNvPr id="18" name="Measure 4" descr="">
+          <p:cNvPr id="18" name="Measure 4">
             <a:extLst>
               <a:ext uri="{C183D7F6-B498-43B3-948B-1728B52AA6E4}">
                 <adec:decorative xmlns:adec="http://schemas.microsoft.com/office/drawing/2017/decorative" val="1"/>
@@ -12494,7 +12494,7 @@
       </p:sp>
       <p:sp>
         <p:nvSpPr>
-          <p:cNvPr id="19" name="Icon FaUserClock" descr="">
+          <p:cNvPr id="19" name="Icon FaUserClock">
             <a:extLst>
               <a:ext uri="{C183D7F6-B498-43B3-948B-1728B52AA6E4}">
                 <adec:decorative xmlns:adec="http://schemas.microsoft.com/office/drawing/2017/decorative" val="1"/>
@@ -12525,7 +12525,7 @@
       </p:sp>
       <p:pic>
         <p:nvPicPr>
-          <p:cNvPr id="20" name="Image 3" descr="">
+          <p:cNvPr id="20" name="Image 3">
             <a:extLst>
               <a:ext uri="{C183D7F6-B498-43B3-948B-1728B52AA6E4}">
                 <adec:decorative xmlns:adec="http://schemas.microsoft.com/office/drawing/2017/decorative" val="1"/>
@@ -12605,7 +12605,7 @@
       </p:sp>
       <p:sp>
         <p:nvSpPr>
-          <p:cNvPr id="22" name="Measure 5" descr="">
+          <p:cNvPr id="22" name="Measure 5">
             <a:extLst>
               <a:ext uri="{C183D7F6-B498-43B3-948B-1728B52AA6E4}">
                 <adec:decorative xmlns:adec="http://schemas.microsoft.com/office/drawing/2017/decorative" val="1"/>
@@ -12645,7 +12645,7 @@
       </p:sp>
       <p:sp>
         <p:nvSpPr>
-          <p:cNvPr id="23" name="Icon FaAddressBook" descr="">
+          <p:cNvPr id="23" name="Icon FaAddressBook">
             <a:extLst>
               <a:ext uri="{C183D7F6-B498-43B3-948B-1728B52AA6E4}">
                 <adec:decorative xmlns:adec="http://schemas.microsoft.com/office/drawing/2017/decorative" val="1"/>
@@ -12676,7 +12676,7 @@
       </p:sp>
       <p:pic>
         <p:nvPicPr>
-          <p:cNvPr id="24" name="Image 4" descr="">
+          <p:cNvPr id="24" name="Image 4">
             <a:extLst>
               <a:ext uri="{C183D7F6-B498-43B3-948B-1728B52AA6E4}">
                 <adec:decorative xmlns:adec="http://schemas.microsoft.com/office/drawing/2017/decorative" val="1"/>
@@ -12756,7 +12756,7 @@
       </p:sp>
       <p:sp>
         <p:nvSpPr>
-          <p:cNvPr id="26" name="Measure 6" descr="">
+          <p:cNvPr id="26" name="Measure 6">
             <a:extLst>
               <a:ext uri="{C183D7F6-B498-43B3-948B-1728B52AA6E4}">
                 <adec:decorative xmlns:adec="http://schemas.microsoft.com/office/drawing/2017/decorative" val="1"/>
@@ -12796,7 +12796,7 @@
       </p:sp>
       <p:sp>
         <p:nvSpPr>
-          <p:cNvPr id="27" name="Icon FaTriangleExclamation" descr="">
+          <p:cNvPr id="27" name="Icon FaTriangleExclamation">
             <a:extLst>
               <a:ext uri="{C183D7F6-B498-43B3-948B-1728B52AA6E4}">
                 <adec:decorative xmlns:adec="http://schemas.microsoft.com/office/drawing/2017/decorative" val="1"/>
@@ -12827,7 +12827,7 @@
       </p:sp>
       <p:pic>
         <p:nvPicPr>
-          <p:cNvPr id="28" name="Image 5" descr="">
+          <p:cNvPr id="28" name="Image 5">
             <a:extLst>
               <a:ext uri="{C183D7F6-B498-43B3-948B-1728B52AA6E4}">
                 <adec:decorative xmlns:adec="http://schemas.microsoft.com/office/drawing/2017/decorative" val="1"/>
@@ -12907,7 +12907,7 @@
       </p:sp>
       <p:sp>
         <p:nvSpPr>
-          <p:cNvPr id="30" name="Ask box" descr="">
+          <p:cNvPr id="30" name="Ask box">
             <a:extLst>
               <a:ext uri="{C183D7F6-B498-43B3-948B-1728B52AA6E4}">
                 <adec:decorative xmlns:adec="http://schemas.microsoft.com/office/drawing/2017/decorative" val="1"/>
@@ -12947,7 +12947,7 @@
       </p:sp>
       <p:sp>
         <p:nvSpPr>
-          <p:cNvPr id="31" name="Icon FaLightbulb" descr="">
+          <p:cNvPr id="31" name="Icon FaLightbulb">
             <a:extLst>
               <a:ext uri="{C183D7F6-B498-43B3-948B-1728B52AA6E4}">
                 <adec:decorative xmlns:adec="http://schemas.microsoft.com/office/drawing/2017/decorative" val="1"/>
@@ -12978,7 +12978,7 @@
       </p:sp>
       <p:pic>
         <p:nvPicPr>
-          <p:cNvPr id="32" name="Image 6" descr="">
+          <p:cNvPr id="32" name="Image 6">
             <a:extLst>
               <a:ext uri="{C183D7F6-B498-43B3-948B-1728B52AA6E4}">
                 <adec:decorative xmlns:adec="http://schemas.microsoft.com/office/drawing/2017/decorative" val="1"/>
@@ -13202,11 +13202,11 @@
       </p:sp>
       <p:pic>
         <p:nvPicPr>
-          <p:cNvPr id="36" name="Narration" descr="Narration for this slide; captions available" title="Narration">
+          <p:cNvPr id="36" name="Narration" descr="Narration for this slide; captions available">
             <a:hlinkClick r:id="" action="ppaction://media"/>
             <a:extLst>
               <a:ext uri="{FF2B5EF4-FFF2-40B4-BE49-F238E27FC236}">
-                <a16:creationId xmlns:a16="http://schemas.microsoft.com/office/drawing/2014/main" id="{5963AB1E-2948-069A-860F-1C13BD744FFC}"/>
+                <a16:creationId xmlns:a16="http://schemas.microsoft.com/office/drawing/2014/main" id="{A515171B-4B80-B932-E551-3BD0719A5B15}"/>
               </a:ext>
             </a:extLst>
           </p:cNvPr>
@@ -13222,7 +13222,7 @@
                     <p:ext uri="{3AFAAA56-56D3-431D-BCD4-E75A35582382}">
                       <p173:tracksInfo xmlns:p173="http://schemas.microsoft.com/office/powerpoint/2017/3/main" displayLoc="slide">
                         <p173:trackLst>
-                          <p173:track id="{0C42C868-B936-461F-87A5-DE38E3904697}" label="English (captions)" lang="en-US" r:embed="rId13"/>
+                          <p173:track id="{4EEF05FC-6B13-4405-BB87-3093F171C771}" label="English (captions)" lang="en-US" r:embed="rId13"/>
                         </p173:trackLst>
                       </p173:tracksInfo>
                     </p:ext>
@@ -13240,7 +13240,7 @@
         </p:blipFill>
         <p:spPr>
           <a:xfrm>
-            <a:off x="127000" y="6350000"/>
+            <a:off x="12446000" y="127000"/>
             <a:ext cx="304800" cy="304800"/>
           </a:xfrm>
           <a:prstGeom prst="rect">
@@ -13255,10 +13255,10 @@
   </p:clrMapOvr>
   <mc:AlternateContent xmlns:mc="http://schemas.openxmlformats.org/markup-compatibility/2006">
     <mc:Choice xmlns:p14="http://schemas.microsoft.com/office/powerpoint/2010/main" Requires="p14">
-      <p:transition spd="slow" p14:dur="2000" advTm="73500"/>
+      <p:transition spd="slow" p14:dur="2000" advTm="76500"/>
     </mc:Choice>
     <mc:Fallback>
-      <p:transition spd="slow" advTm="73500"/>
+      <p:transition spd="slow" advTm="76500"/>
     </mc:Fallback>
   </mc:AlternateContent>
   <p:timing>
@@ -13394,7 +13394,7 @@
       </p:sp>
       <p:sp>
         <p:nvSpPr>
-          <p:cNvPr id="3" name="Teaser 1" descr="">
+          <p:cNvPr id="3" name="Teaser 1">
             <a:extLst>
               <a:ext uri="{C183D7F6-B498-43B3-948B-1728B52AA6E4}">
                 <adec:decorative xmlns:adec="http://schemas.microsoft.com/office/drawing/2017/decorative" val="1"/>
@@ -13434,7 +13434,7 @@
       </p:sp>
       <p:sp>
         <p:nvSpPr>
-          <p:cNvPr id="4" name="Icon FaCloudArrowUp" descr="">
+          <p:cNvPr id="4" name="Icon FaCloudArrowUp">
             <a:extLst>
               <a:ext uri="{C183D7F6-B498-43B3-948B-1728B52AA6E4}">
                 <adec:decorative xmlns:adec="http://schemas.microsoft.com/office/drawing/2017/decorative" val="1"/>
@@ -13465,7 +13465,7 @@
       </p:sp>
       <p:pic>
         <p:nvPicPr>
-          <p:cNvPr id="5" name="Image 0" descr="">
+          <p:cNvPr id="5" name="Image 0">
             <a:extLst>
               <a:ext uri="{C183D7F6-B498-43B3-948B-1728B52AA6E4}">
                 <adec:decorative xmlns:adec="http://schemas.microsoft.com/office/drawing/2017/decorative" val="1"/>
@@ -13551,7 +13551,7 @@
       </p:sp>
       <p:sp>
         <p:nvSpPr>
-          <p:cNvPr id="7" name="Teaser 2" descr="">
+          <p:cNvPr id="7" name="Teaser 2">
             <a:extLst>
               <a:ext uri="{C183D7F6-B498-43B3-948B-1728B52AA6E4}">
                 <adec:decorative xmlns:adec="http://schemas.microsoft.com/office/drawing/2017/decorative" val="1"/>
@@ -13591,7 +13591,7 @@
       </p:sp>
       <p:sp>
         <p:nvSpPr>
-          <p:cNvPr id="8" name="Icon FaGlobe" descr="">
+          <p:cNvPr id="8" name="Icon FaGlobe">
             <a:extLst>
               <a:ext uri="{C183D7F6-B498-43B3-948B-1728B52AA6E4}">
                 <adec:decorative xmlns:adec="http://schemas.microsoft.com/office/drawing/2017/decorative" val="1"/>
@@ -13622,7 +13622,7 @@
       </p:sp>
       <p:pic>
         <p:nvPicPr>
-          <p:cNvPr id="9" name="Image 1" descr="">
+          <p:cNvPr id="9" name="Image 1">
             <a:extLst>
               <a:ext uri="{C183D7F6-B498-43B3-948B-1728B52AA6E4}">
                 <adec:decorative xmlns:adec="http://schemas.microsoft.com/office/drawing/2017/decorative" val="1"/>
@@ -13708,7 +13708,7 @@
       </p:sp>
       <p:sp>
         <p:nvSpPr>
-          <p:cNvPr id="11" name="Teaser 3" descr="">
+          <p:cNvPr id="11" name="Teaser 3">
             <a:extLst>
               <a:ext uri="{C183D7F6-B498-43B3-948B-1728B52AA6E4}">
                 <adec:decorative xmlns:adec="http://schemas.microsoft.com/office/drawing/2017/decorative" val="1"/>
@@ -13748,7 +13748,7 @@
       </p:sp>
       <p:sp>
         <p:nvSpPr>
-          <p:cNvPr id="12" name="Icon FaBuilding" descr="">
+          <p:cNvPr id="12" name="Icon FaBuilding">
             <a:extLst>
               <a:ext uri="{C183D7F6-B498-43B3-948B-1728B52AA6E4}">
                 <adec:decorative xmlns:adec="http://schemas.microsoft.com/office/drawing/2017/decorative" val="1"/>
@@ -13779,7 +13779,7 @@
       </p:sp>
       <p:pic>
         <p:nvPicPr>
-          <p:cNvPr id="13" name="Image 2" descr="">
+          <p:cNvPr id="13" name="Image 2">
             <a:extLst>
               <a:ext uri="{C183D7F6-B498-43B3-948B-1728B52AA6E4}">
                 <adec:decorative xmlns:adec="http://schemas.microsoft.com/office/drawing/2017/decorative" val="1"/>
@@ -13865,7 +13865,7 @@
       </p:sp>
       <p:sp>
         <p:nvSpPr>
-          <p:cNvPr id="15" name="Teaser 4" descr="">
+          <p:cNvPr id="15" name="Teaser 4">
             <a:extLst>
               <a:ext uri="{C183D7F6-B498-43B3-948B-1728B52AA6E4}">
                 <adec:decorative xmlns:adec="http://schemas.microsoft.com/office/drawing/2017/decorative" val="1"/>
@@ -13905,7 +13905,7 @@
       </p:sp>
       <p:sp>
         <p:nvSpPr>
-          <p:cNvPr id="16" name="Icon FaRoute" descr="">
+          <p:cNvPr id="16" name="Icon FaRoute">
             <a:extLst>
               <a:ext uri="{C183D7F6-B498-43B3-948B-1728B52AA6E4}">
                 <adec:decorative xmlns:adec="http://schemas.microsoft.com/office/drawing/2017/decorative" val="1"/>
@@ -13936,7 +13936,7 @@
       </p:sp>
       <p:pic>
         <p:nvPicPr>
-          <p:cNvPr id="17" name="Image 3" descr="">
+          <p:cNvPr id="17" name="Image 3">
             <a:extLst>
               <a:ext uri="{C183D7F6-B498-43B3-948B-1728B52AA6E4}">
                 <adec:decorative xmlns:adec="http://schemas.microsoft.com/office/drawing/2017/decorative" val="1"/>
@@ -14022,7 +14022,7 @@
       </p:sp>
       <p:sp>
         <p:nvSpPr>
-          <p:cNvPr id="19" name="Teaser 5" descr="">
+          <p:cNvPr id="19" name="Teaser 5">
             <a:extLst>
               <a:ext uri="{C183D7F6-B498-43B3-948B-1728B52AA6E4}">
                 <adec:decorative xmlns:adec="http://schemas.microsoft.com/office/drawing/2017/decorative" val="1"/>
@@ -14062,7 +14062,7 @@
       </p:sp>
       <p:sp>
         <p:nvSpPr>
-          <p:cNvPr id="20" name="Icon FaServer" descr="">
+          <p:cNvPr id="20" name="Icon FaServer">
             <a:extLst>
               <a:ext uri="{C183D7F6-B498-43B3-948B-1728B52AA6E4}">
                 <adec:decorative xmlns:adec="http://schemas.microsoft.com/office/drawing/2017/decorative" val="1"/>
@@ -14093,7 +14093,7 @@
       </p:sp>
       <p:pic>
         <p:nvPicPr>
-          <p:cNvPr id="21" name="Image 4" descr="">
+          <p:cNvPr id="21" name="Image 4">
             <a:extLst>
               <a:ext uri="{C183D7F6-B498-43B3-948B-1728B52AA6E4}">
                 <adec:decorative xmlns:adec="http://schemas.microsoft.com/office/drawing/2017/decorative" val="1"/>
@@ -14179,7 +14179,7 @@
       </p:sp>
       <p:sp>
         <p:nvSpPr>
-          <p:cNvPr id="23" name="Teaser 6" descr="">
+          <p:cNvPr id="23" name="Teaser 6">
             <a:extLst>
               <a:ext uri="{C183D7F6-B498-43B3-948B-1728B52AA6E4}">
                 <adec:decorative xmlns:adec="http://schemas.microsoft.com/office/drawing/2017/decorative" val="1"/>
@@ -14219,7 +14219,7 @@
       </p:sp>
       <p:sp>
         <p:nvSpPr>
-          <p:cNvPr id="24" name="Icon FaDatabase" descr="">
+          <p:cNvPr id="24" name="Icon FaDatabase">
             <a:extLst>
               <a:ext uri="{C183D7F6-B498-43B3-948B-1728B52AA6E4}">
                 <adec:decorative xmlns:adec="http://schemas.microsoft.com/office/drawing/2017/decorative" val="1"/>
@@ -14250,7 +14250,7 @@
       </p:sp>
       <p:pic>
         <p:nvPicPr>
-          <p:cNvPr id="25" name="Image 5" descr="">
+          <p:cNvPr id="25" name="Image 5">
             <a:extLst>
               <a:ext uri="{C183D7F6-B498-43B3-948B-1728B52AA6E4}">
                 <adec:decorative xmlns:adec="http://schemas.microsoft.com/office/drawing/2017/decorative" val="1"/>
@@ -14336,7 +14336,7 @@
       </p:sp>
       <p:sp>
         <p:nvSpPr>
-          <p:cNvPr id="27" name="Teaser 7" descr="">
+          <p:cNvPr id="27" name="Teaser 7">
             <a:extLst>
               <a:ext uri="{C183D7F6-B498-43B3-948B-1728B52AA6E4}">
                 <adec:decorative xmlns:adec="http://schemas.microsoft.com/office/drawing/2017/decorative" val="1"/>
@@ -14376,7 +14376,7 @@
       </p:sp>
       <p:sp>
         <p:nvSpPr>
-          <p:cNvPr id="28" name="Icon FaLaptop" descr="">
+          <p:cNvPr id="28" name="Icon FaLaptop">
             <a:extLst>
               <a:ext uri="{C183D7F6-B498-43B3-948B-1728B52AA6E4}">
                 <adec:decorative xmlns:adec="http://schemas.microsoft.com/office/drawing/2017/decorative" val="1"/>
@@ -14407,7 +14407,7 @@
       </p:sp>
       <p:pic>
         <p:nvPicPr>
-          <p:cNvPr id="29" name="Image 6" descr="">
+          <p:cNvPr id="29" name="Image 6">
             <a:extLst>
               <a:ext uri="{C183D7F6-B498-43B3-948B-1728B52AA6E4}">
                 <adec:decorative xmlns:adec="http://schemas.microsoft.com/office/drawing/2017/decorative" val="1"/>
@@ -14493,7 +14493,7 @@
       </p:sp>
       <p:sp>
         <p:nvSpPr>
-          <p:cNvPr id="31" name="Teaser 8" descr="">
+          <p:cNvPr id="31" name="Teaser 8">
             <a:extLst>
               <a:ext uri="{C183D7F6-B498-43B3-948B-1728B52AA6E4}">
                 <adec:decorative xmlns:adec="http://schemas.microsoft.com/office/drawing/2017/decorative" val="1"/>
@@ -14533,7 +14533,7 @@
       </p:sp>
       <p:sp>
         <p:nvSpPr>
-          <p:cNvPr id="32" name="Icon FaShieldHalved" descr="">
+          <p:cNvPr id="32" name="Icon FaShieldHalved">
             <a:extLst>
               <a:ext uri="{C183D7F6-B498-43B3-948B-1728B52AA6E4}">
                 <adec:decorative xmlns:adec="http://schemas.microsoft.com/office/drawing/2017/decorative" val="1"/>
@@ -14564,7 +14564,7 @@
       </p:sp>
       <p:pic>
         <p:nvPicPr>
-          <p:cNvPr id="33" name="Image 7" descr="">
+          <p:cNvPr id="33" name="Image 7">
             <a:extLst>
               <a:ext uri="{C183D7F6-B498-43B3-948B-1728B52AA6E4}">
                 <adec:decorative xmlns:adec="http://schemas.microsoft.com/office/drawing/2017/decorative" val="1"/>
@@ -14650,7 +14650,7 @@
       </p:sp>
       <p:sp>
         <p:nvSpPr>
-          <p:cNvPr id="35" name="Teaser companions" descr="">
+          <p:cNvPr id="35" name="Teaser companions">
             <a:extLst>
               <a:ext uri="{C183D7F6-B498-43B3-948B-1728B52AA6E4}">
                 <adec:decorative xmlns:adec="http://schemas.microsoft.com/office/drawing/2017/decorative" val="1"/>
@@ -14758,7 +14758,7 @@
       </p:sp>
       <p:sp>
         <p:nvSpPr>
-          <p:cNvPr id="37" name="Teaser footer" descr="">
+          <p:cNvPr id="37" name="Teaser footer">
             <a:extLst>
               <a:ext uri="{C183D7F6-B498-43B3-948B-1728B52AA6E4}">
                 <adec:decorative xmlns:adec="http://schemas.microsoft.com/office/drawing/2017/decorative" val="1"/>
@@ -14887,11 +14887,11 @@
       </p:sp>
       <p:pic>
         <p:nvPicPr>
-          <p:cNvPr id="40" name="Narration" descr="Narration for this slide; captions available" title="Narration">
+          <p:cNvPr id="40" name="Narration" descr="Narration for this slide; captions available">
             <a:hlinkClick r:id="" action="ppaction://media"/>
             <a:extLst>
               <a:ext uri="{FF2B5EF4-FFF2-40B4-BE49-F238E27FC236}">
-                <a16:creationId xmlns:a16="http://schemas.microsoft.com/office/drawing/2014/main" id="{E50C65DA-B6E3-4716-53A5-7CE0D3041FFC}"/>
+                <a16:creationId xmlns:a16="http://schemas.microsoft.com/office/drawing/2014/main" id="{EFD95F4D-0498-EE89-692D-FEB4BCB629C5}"/>
               </a:ext>
             </a:extLst>
           </p:cNvPr>
@@ -14907,7 +14907,7 @@
                     <p:ext uri="{3AFAAA56-56D3-431D-BCD4-E75A35582382}">
                       <p173:tracksInfo xmlns:p173="http://schemas.microsoft.com/office/powerpoint/2017/3/main" displayLoc="slide">
                         <p173:trackLst>
-                          <p173:track id="{80806F4D-8200-4EFD-9097-FC0D52D387DD}" label="English (captions)" lang="en-US" r:embed="rId14"/>
+                          <p173:track id="{71C21051-1573-4AC1-B3F8-1CB9FC03D38A}" label="English (captions)" lang="en-US" r:embed="rId14"/>
                         </p173:trackLst>
                       </p173:tracksInfo>
                     </p:ext>
@@ -14925,7 +14925,7 @@
         </p:blipFill>
         <p:spPr>
           <a:xfrm>
-            <a:off x="127000" y="6350000"/>
+            <a:off x="12446000" y="127000"/>
             <a:ext cx="304800" cy="304800"/>
           </a:xfrm>
           <a:prstGeom prst="rect">
@@ -14940,10 +14940,10 @@
   </p:clrMapOvr>
   <mc:AlternateContent xmlns:mc="http://schemas.openxmlformats.org/markup-compatibility/2006">
     <mc:Choice xmlns:p14="http://schemas.microsoft.com/office/powerpoint/2010/main" Requires="p14">
-      <p:transition spd="slow" p14:dur="2000" advTm="56300"/>
+      <p:transition spd="slow" p14:dur="2000" advTm="59300"/>
     </mc:Choice>
     <mc:Fallback>
-      <p:transition spd="slow" advTm="56300"/>
+      <p:transition spd="slow" advTm="59300"/>
     </mc:Fallback>
   </mc:AlternateContent>
   <p:timing>
